--- a/docs/slides/technical_summary.pptx
+++ b/docs/slides/technical_summary.pptx
@@ -33,6 +33,8 @@
     <p:sldId id="281" r:id="rId32"/>
     <p:sldId id="282" r:id="rId33"/>
     <p:sldId id="283" r:id="rId34"/>
+    <p:sldId id="284" r:id="rId35"/>
+    <p:sldId id="285" r:id="rId36"/>
   </p:sldIdLst>
   <p:sldSz cx="12191695" cy="6858000" type="screen4x3"/>
   <p:notesSz cx="6858000" cy="9144000"/>
@@ -3166,7 +3168,7 @@
         </p:nvSpPr>
         <p:spPr>
           <a:xfrm>
-            <a:off x="731520" y="2011680"/>
+            <a:off x="731520" y="1828800"/>
             <a:ext cx="10698480" cy="1463040"/>
           </a:xfrm>
           <a:prstGeom prst="rect">
@@ -3182,7 +3184,7 @@
           <a:p>
             <a:pPr>
               <a:spcAft>
-                <a:spcPts val="600"/>
+                <a:spcPts val="800"/>
               </a:spcAft>
             </a:pPr>
             <a:r>
@@ -3204,7 +3206,7 @@
         </p:nvSpPr>
         <p:spPr>
           <a:xfrm>
-            <a:off x="731520" y="3429000"/>
+            <a:off x="731520" y="3383280"/>
             <a:ext cx="10698480" cy="1097280"/>
           </a:xfrm>
           <a:prstGeom prst="rect">
@@ -3220,11 +3222,11 @@
           <a:p>
             <a:pPr>
               <a:spcAft>
-                <a:spcPts val="600"/>
+                <a:spcPts val="800"/>
               </a:spcAft>
             </a:pPr>
             <a:r>
-              <a:rPr sz="2200" b="0">
+              <a:rPr sz="2400" b="0">
                 <a:solidFill>
                   <a:srgbClr val="52514E"/>
                 </a:solidFill>
@@ -3242,7 +3244,7 @@
         </p:nvSpPr>
         <p:spPr>
           <a:xfrm>
-            <a:off x="731520" y="5120640"/>
+            <a:off x="731520" y="5029200"/>
             <a:ext cx="10698480" cy="731520"/>
           </a:xfrm>
           <a:prstGeom prst="rect">
@@ -3258,16 +3260,16 @@
           <a:p>
             <a:pPr>
               <a:spcAft>
-                <a:spcPts val="600"/>
+                <a:spcPts val="800"/>
               </a:spcAft>
             </a:pPr>
             <a:r>
-              <a:rPr sz="1600" b="0">
+              <a:rPr sz="2000" b="0">
                 <a:solidFill>
                   <a:srgbClr val="52514E"/>
                 </a:solidFill>
               </a:rPr>
-              <a:t>J. Xavier Prochaska and Claude  ·  technical summary of phases 1–3  ·  30 September 2026</a:t>
+              <a:t>J. Xavier Prochaska and Claude  ·  phases 1–3  ·  30 September 2026</a:t>
             </a:r>
           </a:p>
         </p:txBody>
@@ -3341,8 +3343,8 @@
         </p:nvSpPr>
         <p:spPr>
           <a:xfrm>
-            <a:off x="502920" y="256032"/>
-            <a:ext cx="11155680" cy="822960"/>
+            <a:off x="502920" y="228600"/>
+            <a:ext cx="10607040" cy="822960"/>
           </a:xfrm>
           <a:prstGeom prst="rect">
             <a:avLst/>
@@ -3357,16 +3359,16 @@
           <a:p>
             <a:pPr>
               <a:spcAft>
-                <a:spcPts val="600"/>
+                <a:spcPts val="800"/>
               </a:spcAft>
             </a:pPr>
             <a:r>
-              <a:rPr sz="2800" b="1">
+              <a:rPr sz="3000" b="1">
                 <a:solidFill>
                   <a:srgbClr val="0B0B0B"/>
                 </a:solidFill>
               </a:rPr>
-              <a:t>The atlas: positions transfer, depths need α ≈ 2.6</a:t>
+              <a:t>PypeIt’s velocity correction (refframe_audit.py)</a:t>
             </a:r>
           </a:p>
         </p:txBody>
@@ -3379,8 +3381,8 @@
         </p:nvSpPr>
         <p:spPr>
           <a:xfrm>
-            <a:off x="502920" y="6419088"/>
-            <a:ext cx="9601200" cy="320040"/>
+            <a:off x="10972800" y="274320"/>
+            <a:ext cx="822960" cy="457200"/>
           </a:xfrm>
           <a:prstGeom prst="rect">
             <a:avLst/>
@@ -3393,18 +3395,18 @@
           </a:bodyPr>
           <a:lstStyle/>
           <a:p>
-            <a:pPr>
+            <a:pPr algn="r">
               <a:spcAft>
-                <a:spcPts val="600"/>
+                <a:spcPts val="800"/>
               </a:spcAft>
             </a:pPr>
             <a:r>
-              <a:rPr sz="1000" b="0">
+              <a:rPr sz="2000" b="0">
                 <a:solidFill>
                   <a:srgbClr val="52514E"/>
                 </a:solidFill>
               </a:rPr>
-              <a:t>Phase 2   ·   HD 187123 b from the 1998 HIRES frames — technical summary</a:t>
+              <a:t>10</a:t>
             </a:r>
           </a:p>
         </p:txBody>
@@ -3417,8 +3419,8 @@
         </p:nvSpPr>
         <p:spPr>
           <a:xfrm>
-            <a:off x="10972800" y="6419088"/>
-            <a:ext cx="731520" cy="320040"/>
+            <a:off x="640080" y="1188720"/>
+            <a:ext cx="10972800" cy="4526280"/>
           </a:xfrm>
           <a:prstGeom prst="rect">
             <a:avLst/>
@@ -3431,56 +3433,92 @@
           </a:bodyPr>
           <a:lstStyle/>
           <a:p>
-            <a:pPr algn="r">
+            <a:pPr>
               <a:spcAft>
-                <a:spcPts val="600"/>
+                <a:spcPts val="800"/>
               </a:spcAft>
             </a:pPr>
             <a:r>
-              <a:rPr sz="1000" b="0">
-                <a:solidFill>
-                  <a:srgbClr val="52514E"/>
-                </a:solidFill>
-              </a:rPr>
-              <a:t>10</a:t>
-            </a:r>
-          </a:p>
-        </p:txBody>
-      </p:sp>
-      <p:pic>
-        <p:nvPicPr>
-          <p:cNvPr id="6" name="Picture 5" descr="fig_p2_atlas.png"/>
-          <p:cNvPicPr>
-            <a:picLocks noChangeAspect="1"/>
-          </p:cNvPicPr>
-          <p:nvPr/>
-        </p:nvPicPr>
-        <p:blipFill>
-          <a:blip r:embed="rId2"/>
-          <a:stretch>
-            <a:fillRect/>
-          </a:stretch>
-        </p:blipFill>
-        <p:spPr>
-          <a:xfrm>
-            <a:off x="1902523" y="1143000"/>
-            <a:ext cx="8383905" cy="4526280"/>
-          </a:xfrm>
-          <a:prstGeom prst="rect">
-            <a:avLst/>
-          </a:prstGeom>
-        </p:spPr>
-      </p:pic>
-      <p:sp>
-        <p:nvSpPr>
-          <p:cNvPr id="7" name="Rectangle 6"/>
+              <a:rPr sz="2200" b="0">
+                <a:solidFill>
+                  <a:srgbClr val="0B0B0B"/>
+                </a:solidFill>
+              </a:rPr>
+              <a:t>• Solar-term sign error in geomotion_velocity (wave.py:128)</a:t>
+            </a:r>
+          </a:p>
+          <a:p>
+            <a:pPr lvl="1">
+              <a:spcAft>
+                <a:spcPts val="800"/>
+              </a:spcAft>
+            </a:pPr>
+            <a:r>
+              <a:rPr sz="2200" b="0">
+                <a:solidFill>
+                  <a:srgbClr val="0B0B0B"/>
+                </a:solidFill>
+              </a:rPr>
+              <a:t>– +9 to +14 m/s off astropy; drifts 5.2 m/s over nine months</a:t>
+            </a:r>
+          </a:p>
+          <a:p>
+            <a:pPr lvl="1">
+              <a:spcAft>
+                <a:spcPts val="800"/>
+              </a:spcAft>
+            </a:pPr>
+            <a:r>
+              <a:rPr sz="2200" b="0">
+                <a:solidFill>
+                  <a:srgbClr val="0B0B0B"/>
+                </a:solidFill>
+              </a:rPr>
+              <a:t>– heliocentric is the default: every user is affected</a:t>
+            </a:r>
+          </a:p>
+          <a:p>
+            <a:pPr>
+              <a:spcAft>
+                <a:spcPts val="800"/>
+              </a:spcAft>
+            </a:pPr>
+            <a:r>
+              <a:rPr sz="2200" b="0">
+                <a:solidFill>
+                  <a:srgbClr val="0B0B0B"/>
+                </a:solidFill>
+              </a:rPr>
+              <a:t>• Relativistic terms omitted in geomotion_correct</a:t>
+            </a:r>
+          </a:p>
+          <a:p>
+            <a:pPr lvl="1">
+              <a:spcAft>
+                <a:spcPts val="800"/>
+              </a:spcAft>
+            </a:pPr>
+            <a:r>
+              <a:rPr sz="2200" b="0">
+                <a:solidFill>
+                  <a:srgbClr val="0B0B0B"/>
+                </a:solidFill>
+              </a:rPr>
+              <a:t>– −4.6 m/s, nearly constant</a:t>
+            </a:r>
+          </a:p>
+        </p:txBody>
+      </p:sp>
+      <p:sp>
+        <p:nvSpPr>
+          <p:cNvPr id="6" name="Rectangle 5"/>
           <p:cNvSpPr/>
           <p:nvPr/>
         </p:nvSpPr>
         <p:spPr>
           <a:xfrm>
-            <a:off x="457200" y="5760720"/>
-            <a:ext cx="11274552" cy="566928"/>
+            <a:off x="365760" y="5806440"/>
+            <a:ext cx="11457432" cy="914400"/>
           </a:xfrm>
           <a:prstGeom prst="rect">
             <a:avLst/>
@@ -3512,12 +3550,12 @@
           <a:p>
             <a:pPr algn="ctr"/>
             <a:r>
-              <a:rPr sz="1600" b="1">
+              <a:rPr sz="2000" b="1">
                 <a:solidFill>
                   <a:srgbClr val="0B0B0B"/>
                 </a:solidFill>
               </a:rPr>
-              <a:t>Beer–Lambert, not pyodine’s linear scaling (which goes negative at α = 2.6).</a:t>
+              <a:t>Both still in develop; reported upstream.</a:t>
             </a:r>
           </a:p>
         </p:txBody>
@@ -3591,8 +3629,8 @@
         </p:nvSpPr>
         <p:spPr>
           <a:xfrm>
-            <a:off x="502920" y="256032"/>
-            <a:ext cx="11155680" cy="822960"/>
+            <a:off x="502920" y="228600"/>
+            <a:ext cx="10607040" cy="822960"/>
           </a:xfrm>
           <a:prstGeom prst="rect">
             <a:avLst/>
@@ -3607,16 +3645,16 @@
           <a:p>
             <a:pPr>
               <a:spcAft>
-                <a:spcPts val="600"/>
+                <a:spcPts val="800"/>
               </a:spcAft>
             </a:pPr>
             <a:r>
-              <a:rPr sz="2800" b="1">
+              <a:rPr sz="3000" b="1">
                 <a:solidFill>
                   <a:srgbClr val="0B0B0B"/>
                 </a:solidFill>
               </a:rPr>
-              <a:t>Cross-correlation velocities: the planet is not there</a:t>
+              <a:t>The atlas: positions transfer, depths need α ≈ 2.6</a:t>
             </a:r>
           </a:p>
         </p:txBody>
@@ -3629,8 +3667,8 @@
         </p:nvSpPr>
         <p:spPr>
           <a:xfrm>
-            <a:off x="502920" y="6419088"/>
-            <a:ext cx="9601200" cy="320040"/>
+            <a:off x="10972800" y="274320"/>
+            <a:ext cx="822960" cy="457200"/>
           </a:xfrm>
           <a:prstGeom prst="rect">
             <a:avLst/>
@@ -3643,51 +3681,13 @@
           </a:bodyPr>
           <a:lstStyle/>
           <a:p>
-            <a:pPr>
+            <a:pPr algn="r">
               <a:spcAft>
-                <a:spcPts val="600"/>
+                <a:spcPts val="800"/>
               </a:spcAft>
             </a:pPr>
             <a:r>
-              <a:rPr sz="1000" b="0">
-                <a:solidFill>
-                  <a:srgbClr val="52514E"/>
-                </a:solidFill>
-              </a:rPr>
-              <a:t>Phase 2   ·   HD 187123 b from the 1998 HIRES frames — technical summary</a:t>
-            </a:r>
-          </a:p>
-        </p:txBody>
-      </p:sp>
-      <p:sp>
-        <p:nvSpPr>
-          <p:cNvPr id="5" name="TextBox 4"/>
-          <p:cNvSpPr txBox="1"/>
-          <p:nvPr/>
-        </p:nvSpPr>
-        <p:spPr>
-          <a:xfrm>
-            <a:off x="10972800" y="6419088"/>
-            <a:ext cx="731520" cy="320040"/>
-          </a:xfrm>
-          <a:prstGeom prst="rect">
-            <a:avLst/>
-          </a:prstGeom>
-          <a:noFill/>
-        </p:spPr>
-        <p:txBody>
-          <a:bodyPr wrap="square">
-            <a:spAutoFit/>
-          </a:bodyPr>
-          <a:lstStyle/>
-          <a:p>
-            <a:pPr algn="r">
-              <a:spcAft>
-                <a:spcPts val="600"/>
-              </a:spcAft>
-            </a:pPr>
-            <a:r>
-              <a:rPr sz="1000" b="0">
+              <a:rPr sz="2000" b="0">
                 <a:solidFill>
                   <a:srgbClr val="52514E"/>
                 </a:solidFill>
@@ -3699,7 +3699,7 @@
       </p:sp>
       <p:pic>
         <p:nvPicPr>
-          <p:cNvPr id="6" name="Picture 5" descr="fig_p2_phasefold.png"/>
+          <p:cNvPr id="5" name="Picture 4" descr="fig_p2_atlas.png"/>
           <p:cNvPicPr>
             <a:picLocks noChangeAspect="1"/>
           </p:cNvPicPr>
@@ -3713,8 +3713,8 @@
         </p:blipFill>
         <p:spPr>
           <a:xfrm>
-            <a:off x="457200" y="1180991"/>
-            <a:ext cx="11274552" cy="4450298"/>
+            <a:off x="1817838" y="1097280"/>
+            <a:ext cx="8553276" cy="4617720"/>
           </a:xfrm>
           <a:prstGeom prst="rect">
             <a:avLst/>
@@ -3723,14 +3723,14 @@
       </p:pic>
       <p:sp>
         <p:nvSpPr>
-          <p:cNvPr id="7" name="Rectangle 6"/>
+          <p:cNvPr id="6" name="Rectangle 5"/>
           <p:cNvSpPr/>
           <p:nvPr/>
         </p:nvSpPr>
         <p:spPr>
           <a:xfrm>
-            <a:off x="457200" y="5760720"/>
-            <a:ext cx="11274552" cy="566928"/>
+            <a:off x="365760" y="5806440"/>
+            <a:ext cx="11457432" cy="914400"/>
           </a:xfrm>
           <a:prstGeom prst="rect">
             <a:avLst/>
@@ -3762,12 +3762,12 @@
           <a:p>
             <a:pPr algn="ctr"/>
             <a:r>
-              <a:rPr sz="1600" b="1">
+              <a:rPr sz="2000" b="1">
                 <a:solidFill>
                   <a:srgbClr val="0B0B0B"/>
                 </a:solidFill>
               </a:rPr>
-              <a:t>36 epochs, rms 702 m/s; K = 408 ± 188 m/s — not a detection.</a:t>
+              <a:t>Beer–Lambert, not pyodine’s linear scaling (negative at α = 2.6).</a:t>
             </a:r>
           </a:p>
         </p:txBody>
@@ -3841,8 +3841,8 @@
         </p:nvSpPr>
         <p:spPr>
           <a:xfrm>
-            <a:off x="502920" y="256032"/>
-            <a:ext cx="11155680" cy="822960"/>
+            <a:off x="502920" y="228600"/>
+            <a:ext cx="10607040" cy="822960"/>
           </a:xfrm>
           <a:prstGeom prst="rect">
             <a:avLst/>
@@ -3857,16 +3857,16 @@
           <a:p>
             <a:pPr>
               <a:spcAft>
-                <a:spcPts val="600"/>
+                <a:spcPts val="800"/>
               </a:spcAft>
             </a:pPr>
             <a:r>
-              <a:rPr sz="2800" b="1">
+              <a:rPr sz="3000" b="1">
                 <a:solidFill>
                   <a:srgbClr val="0B0B0B"/>
                 </a:solidFill>
               </a:rPr>
-              <a:t>Why the lamp fails: the diagnosis phase 3 was built on</a:t>
+              <a:t>Cross-correlation: the planet is not there</a:t>
             </a:r>
           </a:p>
         </p:txBody>
@@ -3879,8 +3879,8 @@
         </p:nvSpPr>
         <p:spPr>
           <a:xfrm>
-            <a:off x="502920" y="6419088"/>
-            <a:ext cx="9601200" cy="320040"/>
+            <a:off x="10972800" y="274320"/>
+            <a:ext cx="822960" cy="457200"/>
           </a:xfrm>
           <a:prstGeom prst="rect">
             <a:avLst/>
@@ -3893,153 +3893,56 @@
           </a:bodyPr>
           <a:lstStyle/>
           <a:p>
-            <a:pPr>
+            <a:pPr algn="r">
               <a:spcAft>
-                <a:spcPts val="600"/>
+                <a:spcPts val="800"/>
               </a:spcAft>
             </a:pPr>
             <a:r>
-              <a:rPr sz="1000" b="0">
+              <a:rPr sz="2000" b="0">
                 <a:solidFill>
                   <a:srgbClr val="52514E"/>
                 </a:solidFill>
               </a:rPr>
-              <a:t>Phase 2   ·   HD 187123 b from the 1998 HIRES frames — technical summary</a:t>
-            </a:r>
-          </a:p>
-        </p:txBody>
-      </p:sp>
-      <p:sp>
-        <p:nvSpPr>
-          <p:cNvPr id="5" name="TextBox 4"/>
-          <p:cNvSpPr txBox="1"/>
-          <p:nvPr/>
-        </p:nvSpPr>
-        <p:spPr>
-          <a:xfrm>
-            <a:off x="10972800" y="6419088"/>
-            <a:ext cx="731520" cy="320040"/>
-          </a:xfrm>
-          <a:prstGeom prst="rect">
-            <a:avLst/>
-          </a:prstGeom>
-          <a:noFill/>
-        </p:spPr>
-        <p:txBody>
-          <a:bodyPr wrap="square">
-            <a:spAutoFit/>
-          </a:bodyPr>
-          <a:lstStyle/>
-          <a:p>
-            <a:pPr algn="r">
-              <a:spcAft>
-                <a:spcPts val="600"/>
-              </a:spcAft>
-            </a:pPr>
-            <a:r>
-              <a:rPr sz="1000" b="0">
-                <a:solidFill>
-                  <a:srgbClr val="52514E"/>
-                </a:solidFill>
-              </a:rPr>
               <a:t>12</a:t>
             </a:r>
           </a:p>
         </p:txBody>
       </p:sp>
-      <p:sp>
-        <p:nvSpPr>
-          <p:cNvPr id="6" name="TextBox 5"/>
-          <p:cNvSpPr txBox="1"/>
-          <p:nvPr/>
-        </p:nvSpPr>
-        <p:spPr>
-          <a:xfrm>
-            <a:off x="640080" y="1234440"/>
-            <a:ext cx="10972800" cy="4572000"/>
-          </a:xfrm>
-          <a:prstGeom prst="rect">
-            <a:avLst/>
-          </a:prstGeom>
-          <a:noFill/>
-        </p:spPr>
-        <p:txBody>
-          <a:bodyPr wrap="square">
-            <a:spAutoFit/>
-          </a:bodyPr>
-          <a:lstStyle/>
-          <a:p>
-            <a:pPr>
-              <a:spcAft>
-                <a:spcPts val="600"/>
-              </a:spcAft>
-            </a:pPr>
-            <a:r>
-              <a:rPr sz="2000" b="0">
-                <a:solidFill>
-                  <a:srgbClr val="0B0B0B"/>
-                </a:solidFill>
-              </a:rPr>
-              <a:t>• Orders within one exposure agree to 47 m/s; exposures disagree by ~700 m/s</a:t>
-            </a:r>
-          </a:p>
-          <a:p>
-            <a:pPr>
-              <a:spcAft>
-                <a:spcPts val="600"/>
-              </a:spcAft>
-            </a:pPr>
-            <a:r>
-              <a:rPr sz="2000" b="0">
-                <a:solidFill>
-                  <a:srgbClr val="0B0B0B"/>
-                </a:solidFill>
-              </a:rPr>
-              <a:t>• → the limit is the wavelength zero point, common to every order of an exposure</a:t>
-            </a:r>
-          </a:p>
-          <a:p>
-            <a:pPr>
-              <a:spcAft>
-                <a:spcPts val="600"/>
-              </a:spcAft>
-            </a:pPr>
-            <a:r>
-              <a:rPr sz="2000" b="0">
-                <a:solidFill>
-                  <a:srgbClr val="0B0B0B"/>
-                </a:solidFill>
-              </a:rPr>
-              <a:t>• 1998-07-19 (borrowed arc) sits +1.5 to +2.4 km/s off; 08-25 drifts 1.6 km/s in 6.7 h</a:t>
-            </a:r>
-          </a:p>
-          <a:p>
-            <a:pPr>
-              <a:spcAft>
-                <a:spcPts val="600"/>
-              </a:spcAft>
-            </a:pPr>
-            <a:r>
-              <a:rPr sz="2000" b="0">
-                <a:solidFill>
-                  <a:srgbClr val="0B0B0B"/>
-                </a:solidFill>
-              </a:rPr>
-              <a:t>• Exactly what an iodine cell fixes: the ruler rides on the same photons, same optics, same instant</a:t>
-            </a:r>
-          </a:p>
-        </p:txBody>
-      </p:sp>
-      <p:sp>
-        <p:nvSpPr>
-          <p:cNvPr id="7" name="Rectangle 6"/>
+      <p:pic>
+        <p:nvPicPr>
+          <p:cNvPr id="5" name="Picture 4" descr="fig_p2_phasefold.png"/>
+          <p:cNvPicPr>
+            <a:picLocks noChangeAspect="1"/>
+          </p:cNvPicPr>
+          <p:nvPr/>
+        </p:nvPicPr>
+        <p:blipFill>
+          <a:blip r:embed="rId2"/>
+          <a:stretch>
+            <a:fillRect/>
+          </a:stretch>
+        </p:blipFill>
+        <p:spPr>
+          <a:xfrm>
+            <a:off x="365760" y="1144897"/>
+            <a:ext cx="11457432" cy="4522485"/>
+          </a:xfrm>
+          <a:prstGeom prst="rect">
+            <a:avLst/>
+          </a:prstGeom>
+        </p:spPr>
+      </p:pic>
+      <p:sp>
+        <p:nvSpPr>
+          <p:cNvPr id="6" name="Rectangle 5"/>
           <p:cNvSpPr/>
           <p:nvPr/>
         </p:nvSpPr>
         <p:spPr>
           <a:xfrm>
-            <a:off x="457200" y="5760720"/>
-            <a:ext cx="11274552" cy="566928"/>
+            <a:off x="365760" y="5806440"/>
+            <a:ext cx="11457432" cy="914400"/>
           </a:xfrm>
           <a:prstGeom prst="rect">
             <a:avLst/>
@@ -4071,12 +3974,12 @@
           <a:p>
             <a:pPr algn="ctr"/>
             <a:r>
-              <a:rPr sz="1600" b="1">
+              <a:rPr sz="2000" b="1">
                 <a:solidFill>
                   <a:srgbClr val="0B0B0B"/>
                 </a:solidFill>
               </a:rPr>
-              <a:t>47 vs 702 m/s: the case for phase 3, measured rather than asserted.</a:t>
+              <a:t>36 epochs, rms 702 m/s; K = 408 ± 188 m/s — not a detection.</a:t>
             </a:r>
           </a:p>
         </p:txBody>
@@ -4101,14 +4004,57 @@
       <p:grpSpPr/>
       <p:sp>
         <p:nvSpPr>
-          <p:cNvPr id="2" name="TextBox 1"/>
+          <p:cNvPr id="2" name="Rectangle 1"/>
+          <p:cNvSpPr/>
+          <p:nvPr/>
+        </p:nvSpPr>
+        <p:spPr>
+          <a:xfrm>
+            <a:off x="0" y="0"/>
+            <a:ext cx="12191695" cy="82296"/>
+          </a:xfrm>
+          <a:prstGeom prst="rect">
+            <a:avLst/>
+          </a:prstGeom>
+          <a:solidFill>
+            <a:srgbClr val="2A78D6"/>
+          </a:solidFill>
+          <a:ln>
+            <a:noFill/>
+          </a:ln>
+        </p:spPr>
+        <p:style>
+          <a:lnRef idx="1">
+            <a:schemeClr val="accent1"/>
+          </a:lnRef>
+          <a:fillRef idx="3">
+            <a:schemeClr val="accent1"/>
+          </a:fillRef>
+          <a:effectRef idx="2">
+            <a:schemeClr val="accent1"/>
+          </a:effectRef>
+          <a:fontRef idx="minor">
+            <a:schemeClr val="lt1"/>
+          </a:fontRef>
+        </p:style>
+        <p:txBody>
+          <a:bodyPr rtlCol="0" anchor="ctr"/>
+          <a:lstStyle/>
+          <a:p>
+            <a:pPr algn="ctr"/>
+          </a:p>
+        </p:txBody>
+      </p:sp>
+      <p:sp>
+        <p:nvSpPr>
+          <p:cNvPr id="3" name="TextBox 2"/>
           <p:cNvSpPr txBox="1"/>
           <p:nvPr/>
         </p:nvSpPr>
         <p:spPr>
           <a:xfrm>
-            <a:off x="731520" y="2194560"/>
-            <a:ext cx="10698480" cy="548640"/>
+            <a:off x="502920" y="228600"/>
+            <a:ext cx="10607040" cy="822960"/>
           </a:xfrm>
           <a:prstGeom prst="rect">
             <a:avLst/>
@@ -4123,30 +4069,30 @@
           <a:p>
             <a:pPr>
               <a:spcAft>
-                <a:spcPts val="600"/>
+                <a:spcPts val="800"/>
               </a:spcAft>
             </a:pPr>
             <a:r>
-              <a:rPr sz="1800" b="1">
-                <a:solidFill>
-                  <a:srgbClr val="2A78D6"/>
-                </a:solidFill>
-              </a:rPr>
-              <a:t>Phase 3</a:t>
-            </a:r>
-          </a:p>
-        </p:txBody>
-      </p:sp>
-      <p:sp>
-        <p:nvSpPr>
-          <p:cNvPr id="3" name="TextBox 2"/>
+              <a:rPr sz="3000" b="1">
+                <a:solidFill>
+                  <a:srgbClr val="0B0B0B"/>
+                </a:solidFill>
+              </a:rPr>
+              <a:t>Why the lamp fails</a:t>
+            </a:r>
+          </a:p>
+        </p:txBody>
+      </p:sp>
+      <p:sp>
+        <p:nvSpPr>
+          <p:cNvPr id="4" name="TextBox 3"/>
           <p:cNvSpPr txBox="1"/>
           <p:nvPr/>
         </p:nvSpPr>
         <p:spPr>
           <a:xfrm>
-            <a:off x="731520" y="2743200"/>
-            <a:ext cx="10698480" cy="1097280"/>
+            <a:off x="10972800" y="274320"/>
+            <a:ext cx="822960" cy="457200"/>
           </a:xfrm>
           <a:prstGeom prst="rect">
             <a:avLst/>
@@ -4159,32 +4105,32 @@
           </a:bodyPr>
           <a:lstStyle/>
           <a:p>
-            <a:pPr>
+            <a:pPr algn="r">
               <a:spcAft>
-                <a:spcPts val="600"/>
+                <a:spcPts val="800"/>
               </a:spcAft>
             </a:pPr>
             <a:r>
-              <a:rPr sz="3600" b="1">
-                <a:solidFill>
-                  <a:srgbClr val="0B0B0B"/>
-                </a:solidFill>
-              </a:rPr>
-              <a:t>The iodine forward model</a:t>
-            </a:r>
-          </a:p>
-        </p:txBody>
-      </p:sp>
-      <p:sp>
-        <p:nvSpPr>
-          <p:cNvPr id="4" name="TextBox 3"/>
+              <a:rPr sz="2000" b="0">
+                <a:solidFill>
+                  <a:srgbClr val="52514E"/>
+                </a:solidFill>
+              </a:rPr>
+              <a:t>13</a:t>
+            </a:r>
+          </a:p>
+        </p:txBody>
+      </p:sp>
+      <p:sp>
+        <p:nvSpPr>
+          <p:cNvPr id="5" name="TextBox 4"/>
           <p:cNvSpPr txBox="1"/>
           <p:nvPr/>
         </p:nvSpPr>
         <p:spPr>
           <a:xfrm>
-            <a:off x="731520" y="3840480"/>
-            <a:ext cx="10515600" cy="1463040"/>
+            <a:off x="640080" y="1188720"/>
+            <a:ext cx="10972800" cy="4526280"/>
           </a:xfrm>
           <a:prstGeom prst="rect">
             <a:avLst/>
@@ -4199,16 +4145,127 @@
           <a:p>
             <a:pPr>
               <a:spcAft>
-                <a:spcPts val="600"/>
+                <a:spcPts val="800"/>
               </a:spcAft>
             </a:pPr>
             <a:r>
-              <a:rPr sz="2000" b="0">
-                <a:solidFill>
-                  <a:srgbClr val="52514E"/>
-                </a:solidFill>
-              </a:rPr>
-              <a:t>Fork pyodine, adapt it to HIRES, fit every cell-in epoch, and assess against the published Keplerian exactly as phase 2 did.</a:t>
+              <a:rPr sz="2200" b="0">
+                <a:solidFill>
+                  <a:srgbClr val="0B0B0B"/>
+                </a:solidFill>
+              </a:rPr>
+              <a:t>• Orders within one exposure agree to 47 m/s</a:t>
+            </a:r>
+          </a:p>
+          <a:p>
+            <a:pPr>
+              <a:spcAft>
+                <a:spcPts val="800"/>
+              </a:spcAft>
+            </a:pPr>
+            <a:r>
+              <a:rPr sz="2200" b="0">
+                <a:solidFill>
+                  <a:srgbClr val="0B0B0B"/>
+                </a:solidFill>
+              </a:rPr>
+              <a:t>• Exposures disagree by ~700 m/s</a:t>
+            </a:r>
+          </a:p>
+          <a:p>
+            <a:pPr>
+              <a:spcAft>
+                <a:spcPts val="800"/>
+              </a:spcAft>
+            </a:pPr>
+            <a:r>
+              <a:rPr sz="2200" b="0">
+                <a:solidFill>
+                  <a:srgbClr val="0B0B0B"/>
+                </a:solidFill>
+              </a:rPr>
+              <a:t>• So the limit is the wavelength zero point</a:t>
+            </a:r>
+          </a:p>
+          <a:p>
+            <a:pPr>
+              <a:spcAft>
+                <a:spcPts val="800"/>
+              </a:spcAft>
+            </a:pPr>
+            <a:r>
+              <a:rPr sz="2200" b="0">
+                <a:solidFill>
+                  <a:srgbClr val="0B0B0B"/>
+                </a:solidFill>
+              </a:rPr>
+              <a:t>• Borrowed-arc night: +1.5 to +2.4 km/s off</a:t>
+            </a:r>
+          </a:p>
+          <a:p>
+            <a:pPr>
+              <a:spcAft>
+                <a:spcPts val="800"/>
+              </a:spcAft>
+            </a:pPr>
+            <a:r>
+              <a:rPr sz="2200" b="0">
+                <a:solidFill>
+                  <a:srgbClr val="0B0B0B"/>
+                </a:solidFill>
+              </a:rPr>
+              <a:t>• 08-25: drifts 1.6 km/s in 6.7 hours</a:t>
+            </a:r>
+          </a:p>
+        </p:txBody>
+      </p:sp>
+      <p:sp>
+        <p:nvSpPr>
+          <p:cNvPr id="6" name="Rectangle 5"/>
+          <p:cNvSpPr/>
+          <p:nvPr/>
+        </p:nvSpPr>
+        <p:spPr>
+          <a:xfrm>
+            <a:off x="365760" y="5806440"/>
+            <a:ext cx="11457432" cy="914400"/>
+          </a:xfrm>
+          <a:prstGeom prst="rect">
+            <a:avLst/>
+          </a:prstGeom>
+          <a:solidFill>
+            <a:srgbClr val="EEF4FC"/>
+          </a:solidFill>
+          <a:ln>
+            <a:noFill/>
+          </a:ln>
+        </p:spPr>
+        <p:style>
+          <a:lnRef idx="1">
+            <a:schemeClr val="accent1"/>
+          </a:lnRef>
+          <a:fillRef idx="3">
+            <a:schemeClr val="accent1"/>
+          </a:fillRef>
+          <a:effectRef idx="2">
+            <a:schemeClr val="accent1"/>
+          </a:effectRef>
+          <a:fontRef idx="minor">
+            <a:schemeClr val="lt1"/>
+          </a:fontRef>
+        </p:style>
+        <p:txBody>
+          <a:bodyPr rtlCol="0" anchor="ctr" wrap="square"/>
+          <a:lstStyle/>
+          <a:p>
+            <a:pPr algn="ctr"/>
+            <a:r>
+              <a:rPr sz="2000" b="1">
+                <a:solidFill>
+                  <a:srgbClr val="0B0B0B"/>
+                </a:solidFill>
+              </a:rPr>
+              <a:t>The iodine cell fixes exactly this: its ruler rides on the same photons.</a:t>
             </a:r>
           </a:p>
         </p:txBody>
@@ -4233,57 +4290,14 @@
       <p:grpSpPr/>
       <p:sp>
         <p:nvSpPr>
-          <p:cNvPr id="2" name="Rectangle 1"/>
-          <p:cNvSpPr/>
-          <p:nvPr/>
-        </p:nvSpPr>
-        <p:spPr>
-          <a:xfrm>
-            <a:off x="0" y="0"/>
-            <a:ext cx="12191695" cy="82296"/>
-          </a:xfrm>
-          <a:prstGeom prst="rect">
-            <a:avLst/>
-          </a:prstGeom>
-          <a:solidFill>
-            <a:srgbClr val="2A78D6"/>
-          </a:solidFill>
-          <a:ln>
-            <a:noFill/>
-          </a:ln>
-        </p:spPr>
-        <p:style>
-          <a:lnRef idx="1">
-            <a:schemeClr val="accent1"/>
-          </a:lnRef>
-          <a:fillRef idx="3">
-            <a:schemeClr val="accent1"/>
-          </a:fillRef>
-          <a:effectRef idx="2">
-            <a:schemeClr val="accent1"/>
-          </a:effectRef>
-          <a:fontRef idx="minor">
-            <a:schemeClr val="lt1"/>
-          </a:fontRef>
-        </p:style>
-        <p:txBody>
-          <a:bodyPr rtlCol="0" anchor="ctr"/>
-          <a:lstStyle/>
-          <a:p>
-            <a:pPr algn="ctr"/>
-          </a:p>
-        </p:txBody>
-      </p:sp>
-      <p:sp>
-        <p:nvSpPr>
-          <p:cNvPr id="3" name="TextBox 2"/>
+          <p:cNvPr id="2" name="TextBox 1"/>
           <p:cNvSpPr txBox="1"/>
           <p:nvPr/>
         </p:nvSpPr>
         <p:spPr>
           <a:xfrm>
-            <a:off x="502920" y="256032"/>
-            <a:ext cx="11155680" cy="822960"/>
+            <a:off x="731520" y="2103120"/>
+            <a:ext cx="10698480" cy="548640"/>
           </a:xfrm>
           <a:prstGeom prst="rect">
             <a:avLst/>
@@ -4298,30 +4312,30 @@
           <a:p>
             <a:pPr>
               <a:spcAft>
-                <a:spcPts val="600"/>
+                <a:spcPts val="800"/>
               </a:spcAft>
             </a:pPr>
             <a:r>
-              <a:rPr sz="2800" b="1">
-                <a:solidFill>
-                  <a:srgbClr val="0B0B0B"/>
-                </a:solidFill>
-              </a:rPr>
-              <a:t>The pyodine fork: six changes, each with a test that fails without it</a:t>
-            </a:r>
-          </a:p>
-        </p:txBody>
-      </p:sp>
-      <p:sp>
-        <p:nvSpPr>
-          <p:cNvPr id="4" name="TextBox 3"/>
+              <a:rPr sz="2200" b="1">
+                <a:solidFill>
+                  <a:srgbClr val="2A78D6"/>
+                </a:solidFill>
+              </a:rPr>
+              <a:t>Phase 3</a:t>
+            </a:r>
+          </a:p>
+        </p:txBody>
+      </p:sp>
+      <p:sp>
+        <p:nvSpPr>
+          <p:cNvPr id="3" name="TextBox 2"/>
           <p:cNvSpPr txBox="1"/>
           <p:nvPr/>
         </p:nvSpPr>
         <p:spPr>
           <a:xfrm>
-            <a:off x="502920" y="6419088"/>
-            <a:ext cx="9601200" cy="320040"/>
+            <a:off x="731520" y="2651760"/>
+            <a:ext cx="10698480" cy="1097280"/>
           </a:xfrm>
           <a:prstGeom prst="rect">
             <a:avLst/>
@@ -4336,30 +4350,30 @@
           <a:p>
             <a:pPr>
               <a:spcAft>
-                <a:spcPts val="600"/>
+                <a:spcPts val="800"/>
               </a:spcAft>
             </a:pPr>
             <a:r>
-              <a:rPr sz="1000" b="0">
-                <a:solidFill>
-                  <a:srgbClr val="52514E"/>
-                </a:solidFill>
-              </a:rPr>
-              <a:t>Phase 3   ·   HD 187123 b from the 1998 HIRES frames — technical summary</a:t>
-            </a:r>
-          </a:p>
-        </p:txBody>
-      </p:sp>
-      <p:sp>
-        <p:nvSpPr>
-          <p:cNvPr id="5" name="TextBox 4"/>
+              <a:rPr sz="3800" b="1">
+                <a:solidFill>
+                  <a:srgbClr val="0B0B0B"/>
+                </a:solidFill>
+              </a:rPr>
+              <a:t>The iodine forward model</a:t>
+            </a:r>
+          </a:p>
+        </p:txBody>
+      </p:sp>
+      <p:sp>
+        <p:nvSpPr>
+          <p:cNvPr id="4" name="TextBox 3"/>
           <p:cNvSpPr txBox="1"/>
           <p:nvPr/>
         </p:nvSpPr>
         <p:spPr>
           <a:xfrm>
-            <a:off x="10972800" y="6419088"/>
-            <a:ext cx="731520" cy="320040"/>
+            <a:off x="731520" y="3840480"/>
+            <a:ext cx="10515600" cy="1828800"/>
           </a:xfrm>
           <a:prstGeom prst="rect">
             <a:avLst/>
@@ -4372,551 +4386,18 @@
           </a:bodyPr>
           <a:lstStyle/>
           <a:p>
-            <a:pPr algn="r">
+            <a:pPr>
               <a:spcAft>
-                <a:spcPts val="600"/>
+                <a:spcPts val="800"/>
               </a:spcAft>
             </a:pPr>
             <a:r>
-              <a:rPr sz="1000" b="0">
+              <a:rPr sz="2200" b="0">
                 <a:solidFill>
                   <a:srgbClr val="52514E"/>
                 </a:solidFill>
               </a:rPr>
-              <a:t>14</a:t>
-            </a:r>
-          </a:p>
-        </p:txBody>
-      </p:sp>
-      <p:graphicFrame>
-        <p:nvGraphicFramePr>
-          <p:cNvPr id="6" name="Table 5"/>
-          <p:cNvGraphicFramePr>
-            <a:graphicFrameLocks noGrp="1"/>
-          </p:cNvGraphicFramePr>
-          <p:nvPr/>
-        </p:nvGraphicFramePr>
-        <p:xfrm>
-          <a:off x="548640" y="1280160"/>
-          <a:ext cx="11064240" cy="2944368"/>
-        </p:xfrm>
-        <a:graphic>
-          <a:graphicData uri="http://schemas.openxmlformats.org/drawingml/2006/table">
-            <a:tbl>
-              <a:tblPr firstRow="1" bandRow="1">
-                <a:tableStyleId>{5C22544A-7EE6-4342-B048-85BDC9FD1C3A}</a:tableStyleId>
-              </a:tblPr>
-              <a:tblGrid>
-                <a:gridCol w="548640"/>
-                <a:gridCol w="4206240"/>
-                <a:gridCol w="6309360"/>
-              </a:tblGrid>
-              <a:tr h="420624">
-                <a:tc>
-                  <a:txBody>
-                    <a:bodyPr/>
-                    <a:lstStyle/>
-                    <a:p>
-                      <a:r>
-                        <a:rPr sz="1500" b="1">
-                          <a:solidFill>
-                            <a:srgbClr val="FFFFFF"/>
-                          </a:solidFill>
-                        </a:rPr>
-                        <a:t>#</a:t>
-                      </a:r>
-                    </a:p>
-                  </a:txBody>
-                  <a:tcPr>
-                    <a:solidFill>
-                      <a:srgbClr val="2A78D6"/>
-                    </a:solidFill>
-                  </a:tcPr>
-                </a:tc>
-                <a:tc>
-                  <a:txBody>
-                    <a:bodyPr/>
-                    <a:lstStyle/>
-                    <a:p>
-                      <a:r>
-                        <a:rPr sz="1500" b="1">
-                          <a:solidFill>
-                            <a:srgbClr val="FFFFFF"/>
-                          </a:solidFill>
-                        </a:rPr>
-                        <a:t>change</a:t>
-                      </a:r>
-                    </a:p>
-                  </a:txBody>
-                  <a:tcPr>
-                    <a:solidFill>
-                      <a:srgbClr val="2A78D6"/>
-                    </a:solidFill>
-                  </a:tcPr>
-                </a:tc>
-                <a:tc>
-                  <a:txBody>
-                    <a:bodyPr/>
-                    <a:lstStyle/>
-                    <a:p>
-                      <a:r>
-                        <a:rPr sz="1500" b="1">
-                          <a:solidFill>
-                            <a:srgbClr val="FFFFFF"/>
-                          </a:solidFill>
-                        </a:rPr>
-                        <a:t>why</a:t>
-                      </a:r>
-                    </a:p>
-                  </a:txBody>
-                  <a:tcPr>
-                    <a:solidFill>
-                      <a:srgbClr val="2A78D6"/>
-                    </a:solidFill>
-                  </a:tcPr>
-                </a:tc>
-              </a:tr>
-              <a:tr h="420624">
-                <a:tc>
-                  <a:txBody>
-                    <a:bodyPr/>
-                    <a:lstStyle/>
-                    <a:p>
-                      <a:r>
-                        <a:rPr sz="1500">
-                          <a:solidFill>
-                            <a:srgbClr val="0B0B0B"/>
-                          </a:solidFill>
-                        </a:rPr>
-                        <a:t>0</a:t>
-                      </a:r>
-                    </a:p>
-                  </a:txBody>
-                  <a:tcPr>
-                    <a:solidFill>
-                      <a:srgbClr val="F3F3F1"/>
-                    </a:solidFill>
-                  </a:tcPr>
-                </a:tc>
-                <a:tc>
-                  <a:txBody>
-                    <a:bodyPr/>
-                    <a:lstStyle/>
-                    <a:p>
-                      <a:r>
-                        <a:rPr sz="1500">
-                          <a:solidFill>
-                            <a:srgbClr val="0B0B0B"/>
-                          </a:solidFill>
-                        </a:rPr>
-                        <a:t>NumPy 2: np.float, np.NaN</a:t>
-                      </a:r>
-                    </a:p>
-                  </a:txBody>
-                  <a:tcPr>
-                    <a:solidFill>
-                      <a:srgbClr val="F3F3F1"/>
-                    </a:solidFill>
-                  </a:tcPr>
-                </a:tc>
-                <a:tc>
-                  <a:txBody>
-                    <a:bodyPr/>
-                    <a:lstStyle/>
-                    <a:p>
-                      <a:r>
-                        <a:rPr sz="1500">
-                          <a:solidFill>
-                            <a:srgbClr val="0B0B0B"/>
-                          </a:solidFill>
-                        </a:rPr>
-                        <a:t>upstream does not run on a modern NumPy</a:t>
-                      </a:r>
-                    </a:p>
-                  </a:txBody>
-                  <a:tcPr>
-                    <a:solidFill>
-                      <a:srgbClr val="F3F3F1"/>
-                    </a:solidFill>
-                  </a:tcPr>
-                </a:tc>
-              </a:tr>
-              <a:tr h="420624">
-                <a:tc>
-                  <a:txBody>
-                    <a:bodyPr/>
-                    <a:lstStyle/>
-                    <a:p>
-                      <a:r>
-                        <a:rPr sz="1500">
-                          <a:solidFill>
-                            <a:srgbClr val="0B0B0B"/>
-                          </a:solidFill>
-                        </a:rPr>
-                        <a:t>1</a:t>
-                      </a:r>
-                    </a:p>
-                  </a:txBody>
-                  <a:tcPr>
-                    <a:solidFill>
-                      <a:srgbClr val="FFFFFF"/>
-                    </a:solidFill>
-                  </a:tcPr>
-                </a:tc>
-                <a:tc>
-                  <a:txBody>
-                    <a:bodyPr/>
-                    <a:lstStyle/>
-                    <a:p>
-                      <a:r>
-                        <a:rPr sz="1500">
-                          <a:solidFill>
-                            <a:srgbClr val="0B0B0B"/>
-                          </a:solidFill>
-                        </a:rPr>
-                        <a:t>Beer–Lambert iodine depth</a:t>
-                      </a:r>
-                    </a:p>
-                  </a:txBody>
-                  <a:tcPr>
-                    <a:solidFill>
-                      <a:srgbClr val="FFFFFF"/>
-                    </a:solidFill>
-                  </a:tcPr>
-                </a:tc>
-                <a:tc>
-                  <a:txBody>
-                    <a:bodyPr/>
-                    <a:lstStyle/>
-                    <a:p>
-                      <a:r>
-                        <a:rPr sz="1500">
-                          <a:solidFill>
-                            <a:srgbClr val="0B0B0B"/>
-                          </a:solidFill>
-                        </a:rPr>
-                        <a:t>linear scaling: 5.8% negative transmission at α = 2.6</a:t>
-                      </a:r>
-                    </a:p>
-                  </a:txBody>
-                  <a:tcPr>
-                    <a:solidFill>
-                      <a:srgbClr val="FFFFFF"/>
-                    </a:solidFill>
-                  </a:tcPr>
-                </a:tc>
-              </a:tr>
-              <a:tr h="420624">
-                <a:tc>
-                  <a:txBody>
-                    <a:bodyPr/>
-                    <a:lstStyle/>
-                    <a:p>
-                      <a:r>
-                        <a:rPr sz="1500">
-                          <a:solidFill>
-                            <a:srgbClr val="0B0B0B"/>
-                          </a:solidFill>
-                        </a:rPr>
-                        <a:t>2</a:t>
-                      </a:r>
-                    </a:p>
-                  </a:txBody>
-                  <a:tcPr>
-                    <a:solidFill>
-                      <a:srgbClr val="F3F3F1"/>
-                    </a:solidFill>
-                  </a:tcPr>
-                </a:tc>
-                <a:tc>
-                  <a:txBody>
-                    <a:bodyPr/>
-                    <a:lstStyle/>
-                    <a:p>
-                      <a:r>
-                        <a:rPr sz="1500">
-                          <a:solidFill>
-                            <a:srgbClr val="0B0B0B"/>
-                          </a:solidFill>
-                        </a:rPr>
-                        <a:t>atlases record their wavelength frame</a:t>
-                      </a:r>
-                    </a:p>
-                  </a:txBody>
-                  <a:tcPr>
-                    <a:solidFill>
-                      <a:srgbClr val="F3F3F1"/>
-                    </a:solidFill>
-                  </a:tcPr>
-                </a:tc>
-                <a:tc>
-                  <a:txBody>
-                    <a:bodyPr/>
-                    <a:lstStyle/>
-                    <a:p>
-                      <a:r>
-                        <a:rPr sz="1500">
-                          <a:solidFill>
-                            <a:srgbClr val="0B0B0B"/>
-                          </a:solidFill>
-                        </a:rPr>
-                        <a:t>air grid vs PypeIt vacuum = 83 km/s</a:t>
-                      </a:r>
-                    </a:p>
-                  </a:txBody>
-                  <a:tcPr>
-                    <a:solidFill>
-                      <a:srgbClr val="F3F3F1"/>
-                    </a:solidFill>
-                  </a:tcPr>
-                </a:tc>
-              </a:tr>
-              <a:tr h="420624">
-                <a:tc>
-                  <a:txBody>
-                    <a:bodyPr/>
-                    <a:lstStyle/>
-                    <a:p>
-                      <a:r>
-                        <a:rPr sz="1500">
-                          <a:solidFill>
-                            <a:srgbClr val="0B0B0B"/>
-                          </a:solidFill>
-                        </a:rPr>
-                        <a:t>3</a:t>
-                      </a:r>
-                    </a:p>
-                  </a:txBody>
-                  <a:tcPr>
-                    <a:solidFill>
-                      <a:srgbClr val="FFFFFF"/>
-                    </a:solidFill>
-                  </a:tcPr>
-                </a:tc>
-                <a:tc>
-                  <a:txBody>
-                    <a:bodyPr/>
-                    <a:lstStyle/>
-                    <a:p>
-                      <a:r>
-                        <a:rPr sz="1500">
-                          <a:solidFill>
-                            <a:srgbClr val="0B0B0B"/>
-                          </a:solidFill>
-                        </a:rPr>
-                        <a:t>bary_date / bary_vel_corr units</a:t>
-                      </a:r>
-                    </a:p>
-                  </a:txBody>
-                  <a:tcPr>
-                    <a:solidFill>
-                      <a:srgbClr val="FFFFFF"/>
-                    </a:solidFill>
-                  </a:tcPr>
-                </a:tc>
-                <a:tc>
-                  <a:txBody>
-                    <a:bodyPr/>
-                    <a:lstStyle/>
-                    <a:p>
-                      <a:r>
-                        <a:rPr sz="1500">
-                          <a:solidFill>
-                            <a:srgbClr val="0B0B0B"/>
-                          </a:solidFill>
-                        </a:rPr>
-                        <a:t>full JD(UTC) and m/s, not reduced BJD and km/s</a:t>
-                      </a:r>
-                    </a:p>
-                  </a:txBody>
-                  <a:tcPr>
-                    <a:solidFill>
-                      <a:srgbClr val="FFFFFF"/>
-                    </a:solidFill>
-                  </a:tcPr>
-                </a:tc>
-              </a:tr>
-              <a:tr h="420624">
-                <a:tc>
-                  <a:txBody>
-                    <a:bodyPr/>
-                    <a:lstStyle/>
-                    <a:p>
-                      <a:r>
-                        <a:rPr sz="1500">
-                          <a:solidFill>
-                            <a:srgbClr val="0B0B0B"/>
-                          </a:solidFill>
-                        </a:rPr>
-                        <a:t>4</a:t>
-                      </a:r>
-                    </a:p>
-                  </a:txBody>
-                  <a:tcPr>
-                    <a:solidFill>
-                      <a:srgbClr val="F3F3F1"/>
-                    </a:solidFill>
-                  </a:tcPr>
-                </a:tc>
-                <a:tc>
-                  <a:txBody>
-                    <a:bodyPr/>
-                    <a:lstStyle/>
-                    <a:p>
-                      <a:r>
-                        <a:rPr sz="1500">
-                          <a:solidFill>
-                            <a:srgbClr val="0B0B0B"/>
-                          </a:solidFill>
-                        </a:rPr>
-                        <a:t>compute_weight('ivar')</a:t>
-                      </a:r>
-                    </a:p>
-                  </a:txBody>
-                  <a:tcPr>
-                    <a:solidFill>
-                      <a:srgbClr val="F3F3F1"/>
-                    </a:solidFill>
-                  </a:tcPr>
-                </a:tc>
-                <a:tc>
-                  <a:txBody>
-                    <a:bodyPr/>
-                    <a:lstStyle/>
-                    <a:p>
-                      <a:r>
-                        <a:rPr sz="1500">
-                          <a:solidFill>
-                            <a:srgbClr val="0B0B0B"/>
-                          </a:solidFill>
-                        </a:rPr>
-                        <a:t>weight by PypeIt’s propagated inverse variance</a:t>
-                      </a:r>
-                    </a:p>
-                  </a:txBody>
-                  <a:tcPr>
-                    <a:solidFill>
-                      <a:srgbClr val="F3F3F1"/>
-                    </a:solidFill>
-                  </a:tcPr>
-                </a:tc>
-              </a:tr>
-              <a:tr h="420624">
-                <a:tc>
-                  <a:txBody>
-                    <a:bodyPr/>
-                    <a:lstStyle/>
-                    <a:p>
-                      <a:r>
-                        <a:rPr sz="1500">
-                          <a:solidFill>
-                            <a:srgbClr val="0B0B0B"/>
-                          </a:solidFill>
-                        </a:rPr>
-                        <a:t>5</a:t>
-                      </a:r>
-                    </a:p>
-                  </a:txBody>
-                  <a:tcPr>
-                    <a:solidFill>
-                      <a:srgbClr val="FFFFFF"/>
-                    </a:solidFill>
-                  </a:tcPr>
-                </a:tc>
-                <a:tc>
-                  <a:txBody>
-                    <a:bodyPr/>
-                    <a:lstStyle/>
-                    <a:p>
-                      <a:r>
-                        <a:rPr sz="1500">
-                          <a:solidFill>
-                            <a:srgbClr val="0B0B0B"/>
-                          </a:solidFill>
-                        </a:rPr>
-                        <a:t>chunks record their template index</a:t>
-                      </a:r>
-                    </a:p>
-                  </a:txBody>
-                  <a:tcPr>
-                    <a:solidFill>
-                      <a:srgbClr val="FFFFFF"/>
-                    </a:solidFill>
-                  </a:tcPr>
-                </a:tc>
-                <a:tc>
-                  <a:txBody>
-                    <a:bodyPr/>
-                    <a:lstStyle/>
-                    <a:p>
-                      <a:r>
-                        <a:rPr sz="1500">
-                          <a:solidFill>
-                            <a:srgbClr val="0B0B0B"/>
-                          </a:solidFill>
-                        </a:rPr>
-                        <a:t>order subsets silently fitted the wrong template</a:t>
-                      </a:r>
-                    </a:p>
-                  </a:txBody>
-                  <a:tcPr>
-                    <a:solidFill>
-                      <a:srgbClr val="FFFFFF"/>
-                    </a:solidFill>
-                  </a:tcPr>
-                </a:tc>
-              </a:tr>
-            </a:tbl>
-          </a:graphicData>
-        </a:graphic>
-      </p:graphicFrame>
-      <p:sp>
-        <p:nvSpPr>
-          <p:cNvPr id="7" name="Rectangle 6"/>
-          <p:cNvSpPr/>
-          <p:nvPr/>
-        </p:nvSpPr>
-        <p:spPr>
-          <a:xfrm>
-            <a:off x="457200" y="5760720"/>
-            <a:ext cx="11274552" cy="566928"/>
-          </a:xfrm>
-          <a:prstGeom prst="rect">
-            <a:avLst/>
-          </a:prstGeom>
-          <a:solidFill>
-            <a:srgbClr val="EEF4FC"/>
-          </a:solidFill>
-          <a:ln>
-            <a:noFill/>
-          </a:ln>
-        </p:spPr>
-        <p:style>
-          <a:lnRef idx="1">
-            <a:schemeClr val="accent1"/>
-          </a:lnRef>
-          <a:fillRef idx="3">
-            <a:schemeClr val="accent1"/>
-          </a:fillRef>
-          <a:effectRef idx="2">
-            <a:schemeClr val="accent1"/>
-          </a:effectRef>
-          <a:fontRef idx="minor">
-            <a:schemeClr val="lt1"/>
-          </a:fontRef>
-        </p:style>
-        <p:txBody>
-          <a:bodyPr rtlCol="0" anchor="ctr" wrap="square"/>
-          <a:lstStyle/>
-          <a:p>
-            <a:pPr algn="ctr"/>
-            <a:r>
-              <a:rPr sz="1600" b="1">
-                <a:solidFill>
-                  <a:srgbClr val="0B0B0B"/>
-                </a:solidFill>
-              </a:rPr>
-              <a:t>pyodine 4488b09 + changes 0–5; vendor/README.md; 59 tests pass.</a:t>
+              <a:t>Fork pyodine, adapt it to HIRES, fit every cell-in epoch, and assess exactly as phase 2 did.</a:t>
             </a:r>
           </a:p>
         </p:txBody>
@@ -4990,8 +4471,8 @@
         </p:nvSpPr>
         <p:spPr>
           <a:xfrm>
-            <a:off x="502920" y="256032"/>
-            <a:ext cx="11155680" cy="822960"/>
+            <a:off x="502920" y="228600"/>
+            <a:ext cx="10607040" cy="822960"/>
           </a:xfrm>
           <a:prstGeom prst="rect">
             <a:avLst/>
@@ -5006,16 +4487,16 @@
           <a:p>
             <a:pPr>
               <a:spcAft>
-                <a:spcPts val="600"/>
+                <a:spcPts val="800"/>
               </a:spcAft>
             </a:pPr>
             <a:r>
-              <a:rPr sz="2800" b="1">
+              <a:rPr sz="3000" b="1">
                 <a:solidFill>
                   <a:srgbClr val="0B0B0B"/>
                 </a:solidFill>
               </a:rPr>
-              <a:t>Template deconvolution: pyodine’s spline breaks it at HIRES sampling</a:t>
+              <a:t>The pyodine fork: six tested changes</a:t>
             </a:r>
           </a:p>
         </p:txBody>
@@ -5028,8 +4509,8 @@
         </p:nvSpPr>
         <p:spPr>
           <a:xfrm>
-            <a:off x="502920" y="6419088"/>
-            <a:ext cx="9601200" cy="320040"/>
+            <a:off x="10972800" y="274320"/>
+            <a:ext cx="822960" cy="457200"/>
           </a:xfrm>
           <a:prstGeom prst="rect">
             <a:avLst/>
@@ -5042,94 +4523,514 @@
           </a:bodyPr>
           <a:lstStyle/>
           <a:p>
-            <a:pPr>
+            <a:pPr algn="r">
               <a:spcAft>
-                <a:spcPts val="600"/>
+                <a:spcPts val="800"/>
               </a:spcAft>
             </a:pPr>
             <a:r>
-              <a:rPr sz="1000" b="0">
+              <a:rPr sz="2000" b="0">
                 <a:solidFill>
                   <a:srgbClr val="52514E"/>
                 </a:solidFill>
               </a:rPr>
-              <a:t>Phase 3   ·   HD 187123 b from the 1998 HIRES frames — technical summary</a:t>
-            </a:r>
-          </a:p>
-        </p:txBody>
-      </p:sp>
-      <p:sp>
-        <p:nvSpPr>
-          <p:cNvPr id="5" name="TextBox 4"/>
-          <p:cNvSpPr txBox="1"/>
-          <p:nvPr/>
-        </p:nvSpPr>
-        <p:spPr>
-          <a:xfrm>
-            <a:off x="10972800" y="6419088"/>
-            <a:ext cx="731520" cy="320040"/>
-          </a:xfrm>
-          <a:prstGeom prst="rect">
-            <a:avLst/>
-          </a:prstGeom>
-          <a:noFill/>
-        </p:spPr>
-        <p:txBody>
-          <a:bodyPr wrap="square">
-            <a:spAutoFit/>
-          </a:bodyPr>
-          <a:lstStyle/>
-          <a:p>
-            <a:pPr algn="r">
-              <a:spcAft>
-                <a:spcPts val="600"/>
-              </a:spcAft>
-            </a:pPr>
-            <a:r>
-              <a:rPr sz="1000" b="0">
-                <a:solidFill>
-                  <a:srgbClr val="52514E"/>
-                </a:solidFill>
-              </a:rPr>
               <a:t>15</a:t>
             </a:r>
           </a:p>
         </p:txBody>
       </p:sp>
-      <p:pic>
-        <p:nvPicPr>
-          <p:cNvPr id="6" name="Picture 5" descr="fig_p3_deconv.png"/>
-          <p:cNvPicPr>
-            <a:picLocks noChangeAspect="1"/>
-          </p:cNvPicPr>
-          <p:nvPr/>
-        </p:nvPicPr>
-        <p:blipFill>
-          <a:blip r:embed="rId2"/>
-          <a:stretch>
-            <a:fillRect/>
-          </a:stretch>
-        </p:blipFill>
-        <p:spPr>
-          <a:xfrm>
-            <a:off x="2071116" y="1143000"/>
-            <a:ext cx="8046720" cy="4526280"/>
-          </a:xfrm>
-          <a:prstGeom prst="rect">
-            <a:avLst/>
-          </a:prstGeom>
-        </p:spPr>
-      </p:pic>
-      <p:sp>
-        <p:nvSpPr>
-          <p:cNvPr id="7" name="Rectangle 6"/>
+      <p:graphicFrame>
+        <p:nvGraphicFramePr>
+          <p:cNvPr id="5" name="Table 4"/>
+          <p:cNvGraphicFramePr>
+            <a:graphicFrameLocks noGrp="1"/>
+          </p:cNvGraphicFramePr>
+          <p:nvPr/>
+        </p:nvGraphicFramePr>
+        <p:xfrm>
+          <a:off x="457200" y="1234440"/>
+          <a:ext cx="11274552" cy="3840480"/>
+        </p:xfrm>
+        <a:graphic>
+          <a:graphicData uri="http://schemas.openxmlformats.org/drawingml/2006/table">
+            <a:tbl>
+              <a:tblPr firstRow="1" bandRow="1">
+                <a:tableStyleId>{5C22544A-7EE6-4342-B048-85BDC9FD1C3A}</a:tableStyleId>
+              </a:tblPr>
+              <a:tblGrid>
+                <a:gridCol w="731520"/>
+                <a:gridCol w="4937760"/>
+                <a:gridCol w="5605272"/>
+              </a:tblGrid>
+              <a:tr h="548640">
+                <a:tc>
+                  <a:txBody>
+                    <a:bodyPr/>
+                    <a:lstStyle/>
+                    <a:p>
+                      <a:r>
+                        <a:rPr sz="2000" b="1">
+                          <a:solidFill>
+                            <a:srgbClr val="FFFFFF"/>
+                          </a:solidFill>
+                        </a:rPr>
+                        <a:t>#</a:t>
+                      </a:r>
+                    </a:p>
+                  </a:txBody>
+                  <a:tcPr marT="36576" marB="36576">
+                    <a:solidFill>
+                      <a:srgbClr val="2A78D6"/>
+                    </a:solidFill>
+                  </a:tcPr>
+                </a:tc>
+                <a:tc>
+                  <a:txBody>
+                    <a:bodyPr/>
+                    <a:lstStyle/>
+                    <a:p>
+                      <a:r>
+                        <a:rPr sz="2000" b="1">
+                          <a:solidFill>
+                            <a:srgbClr val="FFFFFF"/>
+                          </a:solidFill>
+                        </a:rPr>
+                        <a:t>change</a:t>
+                      </a:r>
+                    </a:p>
+                  </a:txBody>
+                  <a:tcPr marT="36576" marB="36576">
+                    <a:solidFill>
+                      <a:srgbClr val="2A78D6"/>
+                    </a:solidFill>
+                  </a:tcPr>
+                </a:tc>
+                <a:tc>
+                  <a:txBody>
+                    <a:bodyPr/>
+                    <a:lstStyle/>
+                    <a:p>
+                      <a:r>
+                        <a:rPr sz="2000" b="1">
+                          <a:solidFill>
+                            <a:srgbClr val="FFFFFF"/>
+                          </a:solidFill>
+                        </a:rPr>
+                        <a:t>why</a:t>
+                      </a:r>
+                    </a:p>
+                  </a:txBody>
+                  <a:tcPr marT="36576" marB="36576">
+                    <a:solidFill>
+                      <a:srgbClr val="2A78D6"/>
+                    </a:solidFill>
+                  </a:tcPr>
+                </a:tc>
+              </a:tr>
+              <a:tr h="548640">
+                <a:tc>
+                  <a:txBody>
+                    <a:bodyPr/>
+                    <a:lstStyle/>
+                    <a:p>
+                      <a:r>
+                        <a:rPr sz="2000" b="0">
+                          <a:solidFill>
+                            <a:srgbClr val="0B0B0B"/>
+                          </a:solidFill>
+                        </a:rPr>
+                        <a:t>0</a:t>
+                      </a:r>
+                    </a:p>
+                  </a:txBody>
+                  <a:tcPr marT="36576" marB="36576">
+                    <a:solidFill>
+                      <a:srgbClr val="F3F3F1"/>
+                    </a:solidFill>
+                  </a:tcPr>
+                </a:tc>
+                <a:tc>
+                  <a:txBody>
+                    <a:bodyPr/>
+                    <a:lstStyle/>
+                    <a:p>
+                      <a:r>
+                        <a:rPr sz="2000" b="0">
+                          <a:solidFill>
+                            <a:srgbClr val="0B0B0B"/>
+                          </a:solidFill>
+                        </a:rPr>
+                        <a:t>NumPy 2</a:t>
+                      </a:r>
+                    </a:p>
+                  </a:txBody>
+                  <a:tcPr marT="36576" marB="36576">
+                    <a:solidFill>
+                      <a:srgbClr val="F3F3F1"/>
+                    </a:solidFill>
+                  </a:tcPr>
+                </a:tc>
+                <a:tc>
+                  <a:txBody>
+                    <a:bodyPr/>
+                    <a:lstStyle/>
+                    <a:p>
+                      <a:r>
+                        <a:rPr sz="2000" b="0">
+                          <a:solidFill>
+                            <a:srgbClr val="0B0B0B"/>
+                          </a:solidFill>
+                        </a:rPr>
+                        <a:t>does not run as shipped</a:t>
+                      </a:r>
+                    </a:p>
+                  </a:txBody>
+                  <a:tcPr marT="36576" marB="36576">
+                    <a:solidFill>
+                      <a:srgbClr val="F3F3F1"/>
+                    </a:solidFill>
+                  </a:tcPr>
+                </a:tc>
+              </a:tr>
+              <a:tr h="548640">
+                <a:tc>
+                  <a:txBody>
+                    <a:bodyPr/>
+                    <a:lstStyle/>
+                    <a:p>
+                      <a:r>
+                        <a:rPr sz="2000" b="0">
+                          <a:solidFill>
+                            <a:srgbClr val="0B0B0B"/>
+                          </a:solidFill>
+                        </a:rPr>
+                        <a:t>1</a:t>
+                      </a:r>
+                    </a:p>
+                  </a:txBody>
+                  <a:tcPr marT="36576" marB="36576">
+                    <a:solidFill>
+                      <a:srgbClr val="FFFFFF"/>
+                    </a:solidFill>
+                  </a:tcPr>
+                </a:tc>
+                <a:tc>
+                  <a:txBody>
+                    <a:bodyPr/>
+                    <a:lstStyle/>
+                    <a:p>
+                      <a:r>
+                        <a:rPr sz="2000" b="0">
+                          <a:solidFill>
+                            <a:srgbClr val="0B0B0B"/>
+                          </a:solidFill>
+                        </a:rPr>
+                        <a:t>Beer–Lambert depth</a:t>
+                      </a:r>
+                    </a:p>
+                  </a:txBody>
+                  <a:tcPr marT="36576" marB="36576">
+                    <a:solidFill>
+                      <a:srgbClr val="FFFFFF"/>
+                    </a:solidFill>
+                  </a:tcPr>
+                </a:tc>
+                <a:tc>
+                  <a:txBody>
+                    <a:bodyPr/>
+                    <a:lstStyle/>
+                    <a:p>
+                      <a:r>
+                        <a:rPr sz="2000" b="0">
+                          <a:solidFill>
+                            <a:srgbClr val="0B0B0B"/>
+                          </a:solidFill>
+                        </a:rPr>
+                        <a:t>linear goes negative</a:t>
+                      </a:r>
+                    </a:p>
+                  </a:txBody>
+                  <a:tcPr marT="36576" marB="36576">
+                    <a:solidFill>
+                      <a:srgbClr val="FFFFFF"/>
+                    </a:solidFill>
+                  </a:tcPr>
+                </a:tc>
+              </a:tr>
+              <a:tr h="548640">
+                <a:tc>
+                  <a:txBody>
+                    <a:bodyPr/>
+                    <a:lstStyle/>
+                    <a:p>
+                      <a:r>
+                        <a:rPr sz="2000" b="0">
+                          <a:solidFill>
+                            <a:srgbClr val="0B0B0B"/>
+                          </a:solidFill>
+                        </a:rPr>
+                        <a:t>2</a:t>
+                      </a:r>
+                    </a:p>
+                  </a:txBody>
+                  <a:tcPr marT="36576" marB="36576">
+                    <a:solidFill>
+                      <a:srgbClr val="F3F3F1"/>
+                    </a:solidFill>
+                  </a:tcPr>
+                </a:tc>
+                <a:tc>
+                  <a:txBody>
+                    <a:bodyPr/>
+                    <a:lstStyle/>
+                    <a:p>
+                      <a:r>
+                        <a:rPr sz="2000" b="0">
+                          <a:solidFill>
+                            <a:srgbClr val="0B0B0B"/>
+                          </a:solidFill>
+                        </a:rPr>
+                        <a:t>atlas wavelength frame</a:t>
+                      </a:r>
+                    </a:p>
+                  </a:txBody>
+                  <a:tcPr marT="36576" marB="36576">
+                    <a:solidFill>
+                      <a:srgbClr val="F3F3F1"/>
+                    </a:solidFill>
+                  </a:tcPr>
+                </a:tc>
+                <a:tc>
+                  <a:txBody>
+                    <a:bodyPr/>
+                    <a:lstStyle/>
+                    <a:p>
+                      <a:r>
+                        <a:rPr sz="2000" b="0">
+                          <a:solidFill>
+                            <a:srgbClr val="0B0B0B"/>
+                          </a:solidFill>
+                        </a:rPr>
+                        <a:t>air vs vacuum: 83 km/s</a:t>
+                      </a:r>
+                    </a:p>
+                  </a:txBody>
+                  <a:tcPr marT="36576" marB="36576">
+                    <a:solidFill>
+                      <a:srgbClr val="F3F3F1"/>
+                    </a:solidFill>
+                  </a:tcPr>
+                </a:tc>
+              </a:tr>
+              <a:tr h="548640">
+                <a:tc>
+                  <a:txBody>
+                    <a:bodyPr/>
+                    <a:lstStyle/>
+                    <a:p>
+                      <a:r>
+                        <a:rPr sz="2000" b="0">
+                          <a:solidFill>
+                            <a:srgbClr val="0B0B0B"/>
+                          </a:solidFill>
+                        </a:rPr>
+                        <a:t>3</a:t>
+                      </a:r>
+                    </a:p>
+                  </a:txBody>
+                  <a:tcPr marT="36576" marB="36576">
+                    <a:solidFill>
+                      <a:srgbClr val="FFFFFF"/>
+                    </a:solidFill>
+                  </a:tcPr>
+                </a:tc>
+                <a:tc>
+                  <a:txBody>
+                    <a:bodyPr/>
+                    <a:lstStyle/>
+                    <a:p>
+                      <a:r>
+                        <a:rPr sz="2000" b="0">
+                          <a:solidFill>
+                            <a:srgbClr val="0B0B0B"/>
+                          </a:solidFill>
+                        </a:rPr>
+                        <a:t>bary units</a:t>
+                      </a:r>
+                    </a:p>
+                  </a:txBody>
+                  <a:tcPr marT="36576" marB="36576">
+                    <a:solidFill>
+                      <a:srgbClr val="FFFFFF"/>
+                    </a:solidFill>
+                  </a:tcPr>
+                </a:tc>
+                <a:tc>
+                  <a:txBody>
+                    <a:bodyPr/>
+                    <a:lstStyle/>
+                    <a:p>
+                      <a:r>
+                        <a:rPr sz="2000" b="0">
+                          <a:solidFill>
+                            <a:srgbClr val="0B0B0B"/>
+                          </a:solidFill>
+                        </a:rPr>
+                        <a:t>JD(UTC) and m/s</a:t>
+                      </a:r>
+                    </a:p>
+                  </a:txBody>
+                  <a:tcPr marT="36576" marB="36576">
+                    <a:solidFill>
+                      <a:srgbClr val="FFFFFF"/>
+                    </a:solidFill>
+                  </a:tcPr>
+                </a:tc>
+              </a:tr>
+              <a:tr h="548640">
+                <a:tc>
+                  <a:txBody>
+                    <a:bodyPr/>
+                    <a:lstStyle/>
+                    <a:p>
+                      <a:r>
+                        <a:rPr sz="2000" b="0">
+                          <a:solidFill>
+                            <a:srgbClr val="0B0B0B"/>
+                          </a:solidFill>
+                        </a:rPr>
+                        <a:t>4</a:t>
+                      </a:r>
+                    </a:p>
+                  </a:txBody>
+                  <a:tcPr marT="36576" marB="36576">
+                    <a:solidFill>
+                      <a:srgbClr val="F3F3F1"/>
+                    </a:solidFill>
+                  </a:tcPr>
+                </a:tc>
+                <a:tc>
+                  <a:txBody>
+                    <a:bodyPr/>
+                    <a:lstStyle/>
+                    <a:p>
+                      <a:r>
+                        <a:rPr sz="2000" b="0">
+                          <a:solidFill>
+                            <a:srgbClr val="0B0B0B"/>
+                          </a:solidFill>
+                        </a:rPr>
+                        <a:t>weight by 'ivar'</a:t>
+                      </a:r>
+                    </a:p>
+                  </a:txBody>
+                  <a:tcPr marT="36576" marB="36576">
+                    <a:solidFill>
+                      <a:srgbClr val="F3F3F1"/>
+                    </a:solidFill>
+                  </a:tcPr>
+                </a:tc>
+                <a:tc>
+                  <a:txBody>
+                    <a:bodyPr/>
+                    <a:lstStyle/>
+                    <a:p>
+                      <a:r>
+                        <a:rPr sz="2000" b="0">
+                          <a:solidFill>
+                            <a:srgbClr val="0B0B0B"/>
+                          </a:solidFill>
+                        </a:rPr>
+                        <a:t>use PypeIt’s noise</a:t>
+                      </a:r>
+                    </a:p>
+                  </a:txBody>
+                  <a:tcPr marT="36576" marB="36576">
+                    <a:solidFill>
+                      <a:srgbClr val="F3F3F1"/>
+                    </a:solidFill>
+                  </a:tcPr>
+                </a:tc>
+              </a:tr>
+              <a:tr h="548640">
+                <a:tc>
+                  <a:txBody>
+                    <a:bodyPr/>
+                    <a:lstStyle/>
+                    <a:p>
+                      <a:r>
+                        <a:rPr sz="2000" b="0">
+                          <a:solidFill>
+                            <a:srgbClr val="0B0B0B"/>
+                          </a:solidFill>
+                        </a:rPr>
+                        <a:t>5</a:t>
+                      </a:r>
+                    </a:p>
+                  </a:txBody>
+                  <a:tcPr marT="36576" marB="36576">
+                    <a:solidFill>
+                      <a:srgbClr val="FFFFFF"/>
+                    </a:solidFill>
+                  </a:tcPr>
+                </a:tc>
+                <a:tc>
+                  <a:txBody>
+                    <a:bodyPr/>
+                    <a:lstStyle/>
+                    <a:p>
+                      <a:r>
+                        <a:rPr sz="2000" b="0">
+                          <a:solidFill>
+                            <a:srgbClr val="0B0B0B"/>
+                          </a:solidFill>
+                        </a:rPr>
+                        <a:t>chunk template index</a:t>
+                      </a:r>
+                    </a:p>
+                  </a:txBody>
+                  <a:tcPr marT="36576" marB="36576">
+                    <a:solidFill>
+                      <a:srgbClr val="FFFFFF"/>
+                    </a:solidFill>
+                  </a:tcPr>
+                </a:tc>
+                <a:tc>
+                  <a:txBody>
+                    <a:bodyPr/>
+                    <a:lstStyle/>
+                    <a:p>
+                      <a:r>
+                        <a:rPr sz="2000" b="0">
+                          <a:solidFill>
+                            <a:srgbClr val="0B0B0B"/>
+                          </a:solidFill>
+                        </a:rPr>
+                        <a:t>order subsets misfit</a:t>
+                      </a:r>
+                    </a:p>
+                  </a:txBody>
+                  <a:tcPr marT="36576" marB="36576">
+                    <a:solidFill>
+                      <a:srgbClr val="FFFFFF"/>
+                    </a:solidFill>
+                  </a:tcPr>
+                </a:tc>
+              </a:tr>
+            </a:tbl>
+          </a:graphicData>
+        </a:graphic>
+      </p:graphicFrame>
+      <p:sp>
+        <p:nvSpPr>
+          <p:cNvPr id="6" name="Rectangle 5"/>
           <p:cNvSpPr/>
           <p:nvPr/>
         </p:nvSpPr>
         <p:spPr>
           <a:xfrm>
-            <a:off x="457200" y="5760720"/>
-            <a:ext cx="11274552" cy="566928"/>
+            <a:off x="365760" y="5806440"/>
+            <a:ext cx="11457432" cy="914400"/>
           </a:xfrm>
           <a:prstGeom prst="rect">
             <a:avLst/>
@@ -5161,12 +5062,12 @@
           <a:p>
             <a:pPr algn="ctr"/>
             <a:r>
-              <a:rPr sz="1600" b="1">
+              <a:rPr sz="2000" b="1">
                 <a:solidFill>
                   <a:srgbClr val="0B0B0B"/>
                 </a:solidFill>
               </a:rPr>
-              <a:t>misc.rebin overshoots 2.2-px lines by 6–18σ; oversampling 1 re-convolves at χ² 1.1.</a:t>
+              <a:t>pyodine 4488b09 + changes 0–5; each has a test that fails without it.</a:t>
             </a:r>
           </a:p>
         </p:txBody>
@@ -5240,8 +5141,8 @@
         </p:nvSpPr>
         <p:spPr>
           <a:xfrm>
-            <a:off x="502920" y="256032"/>
-            <a:ext cx="11155680" cy="822960"/>
+            <a:off x="502920" y="228600"/>
+            <a:ext cx="10607040" cy="822960"/>
           </a:xfrm>
           <a:prstGeom prst="rect">
             <a:avLst/>
@@ -5256,16 +5157,16 @@
           <a:p>
             <a:pPr>
               <a:spcAft>
-                <a:spcPts val="600"/>
+                <a:spcPts val="800"/>
               </a:spcAft>
             </a:pPr>
             <a:r>
-              <a:rPr sz="2800" b="1">
+              <a:rPr sz="3000" b="1">
                 <a:solidFill>
                   <a:srgbClr val="0B0B0B"/>
                 </a:solidFill>
               </a:rPr>
-              <a:t>One epoch end to end: right velocity, wrong iodine</a:t>
+              <a:t>Deconvolution: pyodine’s spline fails at HIRES sampling</a:t>
             </a:r>
           </a:p>
         </p:txBody>
@@ -5278,8 +5179,8 @@
         </p:nvSpPr>
         <p:spPr>
           <a:xfrm>
-            <a:off x="502920" y="6419088"/>
-            <a:ext cx="9601200" cy="320040"/>
+            <a:off x="10972800" y="274320"/>
+            <a:ext cx="822960" cy="457200"/>
           </a:xfrm>
           <a:prstGeom prst="rect">
             <a:avLst/>
@@ -5292,51 +5193,13 @@
           </a:bodyPr>
           <a:lstStyle/>
           <a:p>
-            <a:pPr>
+            <a:pPr algn="r">
               <a:spcAft>
-                <a:spcPts val="600"/>
+                <a:spcPts val="800"/>
               </a:spcAft>
             </a:pPr>
             <a:r>
-              <a:rPr sz="1000" b="0">
-                <a:solidFill>
-                  <a:srgbClr val="52514E"/>
-                </a:solidFill>
-              </a:rPr>
-              <a:t>Phase 3   ·   HD 187123 b from the 1998 HIRES frames — technical summary</a:t>
-            </a:r>
-          </a:p>
-        </p:txBody>
-      </p:sp>
-      <p:sp>
-        <p:nvSpPr>
-          <p:cNvPr id="5" name="TextBox 4"/>
-          <p:cNvSpPr txBox="1"/>
-          <p:nvPr/>
-        </p:nvSpPr>
-        <p:spPr>
-          <a:xfrm>
-            <a:off x="10972800" y="6419088"/>
-            <a:ext cx="731520" cy="320040"/>
-          </a:xfrm>
-          <a:prstGeom prst="rect">
-            <a:avLst/>
-          </a:prstGeom>
-          <a:noFill/>
-        </p:spPr>
-        <p:txBody>
-          <a:bodyPr wrap="square">
-            <a:spAutoFit/>
-          </a:bodyPr>
-          <a:lstStyle/>
-          <a:p>
-            <a:pPr algn="r">
-              <a:spcAft>
-                <a:spcPts val="600"/>
-              </a:spcAft>
-            </a:pPr>
-            <a:r>
-              <a:rPr sz="1000" b="0">
+              <a:rPr sz="2000" b="0">
                 <a:solidFill>
                   <a:srgbClr val="52514E"/>
                 </a:solidFill>
@@ -5348,7 +5211,7 @@
       </p:sp>
       <p:pic>
         <p:nvPicPr>
-          <p:cNvPr id="6" name="Picture 5" descr="fig_p5_one_epoch.png"/>
+          <p:cNvPr id="5" name="Picture 4" descr="fig_p3_deconv.png"/>
           <p:cNvPicPr>
             <a:picLocks noChangeAspect="1"/>
           </p:cNvPicPr>
@@ -5362,8 +5225,8 @@
         </p:blipFill>
         <p:spPr>
           <a:xfrm>
-            <a:off x="2044647" y="1143000"/>
-            <a:ext cx="8099658" cy="4526280"/>
+            <a:off x="1989836" y="1097280"/>
+            <a:ext cx="8209280" cy="4617720"/>
           </a:xfrm>
           <a:prstGeom prst="rect">
             <a:avLst/>
@@ -5372,14 +5235,14 @@
       </p:pic>
       <p:sp>
         <p:nvSpPr>
-          <p:cNvPr id="7" name="Rectangle 6"/>
+          <p:cNvPr id="6" name="Rectangle 5"/>
           <p:cNvSpPr/>
           <p:nvPr/>
         </p:nvSpPr>
         <p:spPr>
           <a:xfrm>
-            <a:off x="457200" y="5760720"/>
-            <a:ext cx="11274552" cy="566928"/>
+            <a:off x="365760" y="5806440"/>
+            <a:ext cx="11457432" cy="914400"/>
           </a:xfrm>
           <a:prstGeom prst="rect">
             <a:avLst/>
@@ -5411,12 +5274,12 @@
           <a:p>
             <a:pPr algn="ctr"/>
             <a:r>
-              <a:rPr sz="1600" b="1">
+              <a:rPr sz="2000" b="1">
                 <a:solidFill>
                   <a:srgbClr val="0B0B0B"/>
                 </a:solidFill>
               </a:rPr>
-              <a:t>Epoch within 12–18 m/s of prediction; χ²ν ≈ 23 and the misfit tracks iodine contrast (ρ ≈ +0.7).</a:t>
+              <a:t>misc.rebin overshoots 2.2-px lines; oversampling 1 re-convolves at χ² 1.1.</a:t>
             </a:r>
           </a:p>
         </p:txBody>
@@ -5490,8 +5353,8 @@
         </p:nvSpPr>
         <p:spPr>
           <a:xfrm>
-            <a:off x="502920" y="256032"/>
-            <a:ext cx="11155680" cy="822960"/>
+            <a:off x="502920" y="228600"/>
+            <a:ext cx="10607040" cy="822960"/>
           </a:xfrm>
           <a:prstGeom prst="rect">
             <a:avLst/>
@@ -5506,16 +5369,16 @@
           <a:p>
             <a:pPr>
               <a:spcAft>
-                <a:spcPts val="600"/>
+                <a:spcPts val="800"/>
               </a:spcAft>
             </a:pPr>
             <a:r>
-              <a:rPr sz="2800" b="1">
+              <a:rPr sz="3000" b="1">
                 <a:solidFill>
                   <a:srgbClr val="0B0B0B"/>
                 </a:solidFill>
               </a:rPr>
-              <a:t>The instrumental profile is not the lever</a:t>
+              <a:t>One epoch: right velocity, wrong iodine</a:t>
             </a:r>
           </a:p>
         </p:txBody>
@@ -5528,8 +5391,8 @@
         </p:nvSpPr>
         <p:spPr>
           <a:xfrm>
-            <a:off x="502920" y="6419088"/>
-            <a:ext cx="9601200" cy="320040"/>
+            <a:off x="10972800" y="274320"/>
+            <a:ext cx="822960" cy="457200"/>
           </a:xfrm>
           <a:prstGeom prst="rect">
             <a:avLst/>
@@ -5542,51 +5405,13 @@
           </a:bodyPr>
           <a:lstStyle/>
           <a:p>
-            <a:pPr>
+            <a:pPr algn="r">
               <a:spcAft>
-                <a:spcPts val="600"/>
+                <a:spcPts val="800"/>
               </a:spcAft>
             </a:pPr>
             <a:r>
-              <a:rPr sz="1000" b="0">
-                <a:solidFill>
-                  <a:srgbClr val="52514E"/>
-                </a:solidFill>
-              </a:rPr>
-              <a:t>Phase 3   ·   HD 187123 b from the 1998 HIRES frames — technical summary</a:t>
-            </a:r>
-          </a:p>
-        </p:txBody>
-      </p:sp>
-      <p:sp>
-        <p:nvSpPr>
-          <p:cNvPr id="5" name="TextBox 4"/>
-          <p:cNvSpPr txBox="1"/>
-          <p:nvPr/>
-        </p:nvSpPr>
-        <p:spPr>
-          <a:xfrm>
-            <a:off x="10972800" y="6419088"/>
-            <a:ext cx="731520" cy="320040"/>
-          </a:xfrm>
-          <a:prstGeom prst="rect">
-            <a:avLst/>
-          </a:prstGeom>
-          <a:noFill/>
-        </p:spPr>
-        <p:txBody>
-          <a:bodyPr wrap="square">
-            <a:spAutoFit/>
-          </a:bodyPr>
-          <a:lstStyle/>
-          <a:p>
-            <a:pPr algn="r">
-              <a:spcAft>
-                <a:spcPts val="600"/>
-              </a:spcAft>
-            </a:pPr>
-            <a:r>
-              <a:rPr sz="1000" b="0">
+              <a:rPr sz="2000" b="0">
                 <a:solidFill>
                   <a:srgbClr val="52514E"/>
                 </a:solidFill>
@@ -5598,7 +5423,7 @@
       </p:sp>
       <p:pic>
         <p:nvPicPr>
-          <p:cNvPr id="6" name="Picture 5" descr="fig_p6_lsf_models.png"/>
+          <p:cNvPr id="5" name="Picture 4" descr="fig_p5_one_epoch.png"/>
           <p:cNvPicPr>
             <a:picLocks noChangeAspect="1"/>
           </p:cNvPicPr>
@@ -5612,8 +5437,8 @@
         </p:blipFill>
         <p:spPr>
           <a:xfrm>
-            <a:off x="457200" y="1748118"/>
-            <a:ext cx="11274552" cy="3316044"/>
+            <a:off x="1962832" y="1097280"/>
+            <a:ext cx="8263288" cy="4617720"/>
           </a:xfrm>
           <a:prstGeom prst="rect">
             <a:avLst/>
@@ -5622,14 +5447,14 @@
       </p:pic>
       <p:sp>
         <p:nvSpPr>
-          <p:cNvPr id="7" name="Rectangle 6"/>
+          <p:cNvPr id="6" name="Rectangle 5"/>
           <p:cNvSpPr/>
           <p:nvPr/>
         </p:nvSpPr>
         <p:spPr>
           <a:xfrm>
-            <a:off x="457200" y="5760720"/>
-            <a:ext cx="11274552" cy="566928"/>
+            <a:off x="365760" y="5806440"/>
+            <a:ext cx="11457432" cy="914400"/>
           </a:xfrm>
           <a:prstGeom prst="rect">
             <a:avLst/>
@@ -5661,12 +5486,12 @@
           <a:p>
             <a:pPr algn="ctr"/>
             <a:r>
-              <a:rPr sz="1600" b="1">
+              <a:rPr sz="2000" b="1">
                 <a:solidFill>
                   <a:srgbClr val="0B0B0B"/>
                 </a:solidFill>
               </a:rPr>
-              <a:t>Four LSF models tie to ±5%; super-Gaussian chosen. The document had predicted the opposite.</a:t>
+              <a:t>Within 12–18 m/s of prediction; the misfit tracks iodine contrast (ρ ≈ +0.7).</a:t>
             </a:r>
           </a:p>
         </p:txBody>
@@ -5740,8 +5565,8 @@
         </p:nvSpPr>
         <p:spPr>
           <a:xfrm>
-            <a:off x="502920" y="256032"/>
-            <a:ext cx="11155680" cy="822960"/>
+            <a:off x="502920" y="228600"/>
+            <a:ext cx="10607040" cy="822960"/>
           </a:xfrm>
           <a:prstGeom prst="rect">
             <a:avLst/>
@@ -5756,16 +5581,16 @@
           <a:p>
             <a:pPr>
               <a:spcAft>
-                <a:spcPts val="600"/>
+                <a:spcPts val="800"/>
               </a:spcAft>
             </a:pPr>
             <a:r>
-              <a:rPr sz="2800" b="1">
+              <a:rPr sz="3000" b="1">
                 <a:solidFill>
                   <a:srgbClr val="0B0B0B"/>
                 </a:solidFill>
               </a:rPr>
-              <a:t>B stars through the cell: the atlas’s line pattern is the limit</a:t>
+              <a:t>The instrumental profile is not the lever</a:t>
             </a:r>
           </a:p>
         </p:txBody>
@@ -5778,8 +5603,8 @@
         </p:nvSpPr>
         <p:spPr>
           <a:xfrm>
-            <a:off x="502920" y="6419088"/>
-            <a:ext cx="9601200" cy="320040"/>
+            <a:off x="10972800" y="274320"/>
+            <a:ext cx="822960" cy="457200"/>
           </a:xfrm>
           <a:prstGeom prst="rect">
             <a:avLst/>
@@ -5792,51 +5617,13 @@
           </a:bodyPr>
           <a:lstStyle/>
           <a:p>
-            <a:pPr>
+            <a:pPr algn="r">
               <a:spcAft>
-                <a:spcPts val="600"/>
+                <a:spcPts val="800"/>
               </a:spcAft>
             </a:pPr>
             <a:r>
-              <a:rPr sz="1000" b="0">
-                <a:solidFill>
-                  <a:srgbClr val="52514E"/>
-                </a:solidFill>
-              </a:rPr>
-              <a:t>Phase 3   ·   HD 187123 b from the 1998 HIRES frames — technical summary</a:t>
-            </a:r>
-          </a:p>
-        </p:txBody>
-      </p:sp>
-      <p:sp>
-        <p:nvSpPr>
-          <p:cNvPr id="5" name="TextBox 4"/>
-          <p:cNvSpPr txBox="1"/>
-          <p:nvPr/>
-        </p:nvSpPr>
-        <p:spPr>
-          <a:xfrm>
-            <a:off x="10972800" y="6419088"/>
-            <a:ext cx="731520" cy="320040"/>
-          </a:xfrm>
-          <a:prstGeom prst="rect">
-            <a:avLst/>
-          </a:prstGeom>
-          <a:noFill/>
-        </p:spPr>
-        <p:txBody>
-          <a:bodyPr wrap="square">
-            <a:spAutoFit/>
-          </a:bodyPr>
-          <a:lstStyle/>
-          <a:p>
-            <a:pPr algn="r">
-              <a:spcAft>
-                <a:spcPts val="600"/>
-              </a:spcAft>
-            </a:pPr>
-            <a:r>
-              <a:rPr sz="1000" b="0">
+              <a:rPr sz="2000" b="0">
                 <a:solidFill>
                   <a:srgbClr val="52514E"/>
                 </a:solidFill>
@@ -5848,7 +5635,7 @@
       </p:sp>
       <p:pic>
         <p:nvPicPr>
-          <p:cNvPr id="6" name="Picture 5" descr="fig_p6b_bstars.png"/>
+          <p:cNvPr id="5" name="Picture 4" descr="fig_p6_lsf_models.png"/>
           <p:cNvPicPr>
             <a:picLocks noChangeAspect="1"/>
           </p:cNvPicPr>
@@ -5862,8 +5649,8 @@
         </p:blipFill>
         <p:spPr>
           <a:xfrm>
-            <a:off x="2044647" y="1143000"/>
-            <a:ext cx="8099658" cy="4526280"/>
+            <a:off x="365760" y="1721224"/>
+            <a:ext cx="11457432" cy="3369832"/>
           </a:xfrm>
           <a:prstGeom prst="rect">
             <a:avLst/>
@@ -5872,14 +5659,14 @@
       </p:pic>
       <p:sp>
         <p:nvSpPr>
-          <p:cNvPr id="7" name="Rectangle 6"/>
+          <p:cNvPr id="6" name="Rectangle 5"/>
           <p:cNvSpPr/>
           <p:nvPr/>
         </p:nvSpPr>
         <p:spPr>
           <a:xfrm>
-            <a:off x="457200" y="5760720"/>
-            <a:ext cx="11274552" cy="566928"/>
+            <a:off x="365760" y="5806440"/>
+            <a:ext cx="11457432" cy="914400"/>
           </a:xfrm>
           <a:prstGeom prst="rect">
             <a:avLst/>
@@ -5911,12 +5698,12 @@
           <a:p>
             <a:pPr algn="ctr"/>
             <a:r>
-              <a:rPr sz="1600" b="1">
+              <a:rPr sz="2000" b="1">
                 <a:solidFill>
                   <a:srgbClr val="0B0B0B"/>
                 </a:solidFill>
               </a:rPr>
-              <a:t>HIRES cell α ≈ 3.33; fixing per-chunk α buys nothing (−7 [−26, +7] m/s).</a:t>
+              <a:t>Four LSF models tie to ±5%; super-Gaussian chosen.</a:t>
             </a:r>
           </a:p>
         </p:txBody>
@@ -5990,8 +5777,8 @@
         </p:nvSpPr>
         <p:spPr>
           <a:xfrm>
-            <a:off x="502920" y="256032"/>
-            <a:ext cx="11155680" cy="822960"/>
+            <a:off x="502920" y="228600"/>
+            <a:ext cx="10607040" cy="822960"/>
           </a:xfrm>
           <a:prstGeom prst="rect">
             <a:avLst/>
@@ -6006,16 +5793,16 @@
           <a:p>
             <a:pPr>
               <a:spcAft>
-                <a:spcPts val="600"/>
+                <a:spcPts val="800"/>
               </a:spcAft>
             </a:pPr>
             <a:r>
-              <a:rPr sz="2800" b="1">
+              <a:rPr sz="3000" b="1">
                 <a:solidFill>
                   <a:srgbClr val="0B0B0B"/>
                 </a:solidFill>
               </a:rPr>
-              <a:t>All 31 epochs: the misfit is common to every epoch, and cancels</a:t>
+              <a:t>B stars: the atlas’s line pattern is the limit</a:t>
             </a:r>
           </a:p>
         </p:txBody>
@@ -6028,8 +5815,8 @@
         </p:nvSpPr>
         <p:spPr>
           <a:xfrm>
-            <a:off x="502920" y="6419088"/>
-            <a:ext cx="9601200" cy="320040"/>
+            <a:off x="10972800" y="274320"/>
+            <a:ext cx="822960" cy="457200"/>
           </a:xfrm>
           <a:prstGeom prst="rect">
             <a:avLst/>
@@ -6042,51 +5829,13 @@
           </a:bodyPr>
           <a:lstStyle/>
           <a:p>
-            <a:pPr>
+            <a:pPr algn="r">
               <a:spcAft>
-                <a:spcPts val="600"/>
+                <a:spcPts val="800"/>
               </a:spcAft>
             </a:pPr>
             <a:r>
-              <a:rPr sz="1000" b="0">
-                <a:solidFill>
-                  <a:srgbClr val="52514E"/>
-                </a:solidFill>
-              </a:rPr>
-              <a:t>Phase 3   ·   HD 187123 b from the 1998 HIRES frames — technical summary</a:t>
-            </a:r>
-          </a:p>
-        </p:txBody>
-      </p:sp>
-      <p:sp>
-        <p:nvSpPr>
-          <p:cNvPr id="5" name="TextBox 4"/>
-          <p:cNvSpPr txBox="1"/>
-          <p:nvPr/>
-        </p:nvSpPr>
-        <p:spPr>
-          <a:xfrm>
-            <a:off x="10972800" y="6419088"/>
-            <a:ext cx="731520" cy="320040"/>
-          </a:xfrm>
-          <a:prstGeom prst="rect">
-            <a:avLst/>
-          </a:prstGeom>
-          <a:noFill/>
-        </p:spPr>
-        <p:txBody>
-          <a:bodyPr wrap="square">
-            <a:spAutoFit/>
-          </a:bodyPr>
-          <a:lstStyle/>
-          <a:p>
-            <a:pPr algn="r">
-              <a:spcAft>
-                <a:spcPts val="600"/>
-              </a:spcAft>
-            </a:pPr>
-            <a:r>
-              <a:rPr sz="1000" b="0">
+              <a:rPr sz="2000" b="0">
                 <a:solidFill>
                   <a:srgbClr val="52514E"/>
                 </a:solidFill>
@@ -6098,7 +5847,7 @@
       </p:sp>
       <p:pic>
         <p:nvPicPr>
-          <p:cNvPr id="6" name="Picture 5" descr="fig_p7_epochs.png"/>
+          <p:cNvPr id="5" name="Picture 4" descr="fig_p6b_bstars.png"/>
           <p:cNvPicPr>
             <a:picLocks noChangeAspect="1"/>
           </p:cNvPicPr>
@@ -6112,8 +5861,8 @@
         </p:blipFill>
         <p:spPr>
           <a:xfrm>
-            <a:off x="2759322" y="1143000"/>
-            <a:ext cx="6670307" cy="4526280"/>
+            <a:off x="1962832" y="1097280"/>
+            <a:ext cx="8263288" cy="4617720"/>
           </a:xfrm>
           <a:prstGeom prst="rect">
             <a:avLst/>
@@ -6122,14 +5871,14 @@
       </p:pic>
       <p:sp>
         <p:nvSpPr>
-          <p:cNvPr id="7" name="Rectangle 6"/>
+          <p:cNvPr id="6" name="Rectangle 5"/>
           <p:cNvSpPr/>
           <p:nvPr/>
         </p:nvSpPr>
         <p:spPr>
           <a:xfrm>
-            <a:off x="457200" y="5760720"/>
-            <a:ext cx="11274552" cy="566928"/>
+            <a:off x="365760" y="5806440"/>
+            <a:ext cx="11457432" cy="914400"/>
           </a:xfrm>
           <a:prstGeom prst="rect">
             <a:avLst/>
@@ -6161,12 +5910,12 @@
           <a:p>
             <a:pPr algn="ctr"/>
             <a:r>
-              <a:rPr sz="1600" b="1">
+              <a:rPr sz="2000" b="1">
                 <a:solidFill>
                   <a:srgbClr val="0B0B0B"/>
                 </a:solidFill>
               </a:rPr>
-              <a:t>Chunk offsets (201 m/s spread) removed by pyodine’s combination: 290 → 230 m/s per chunk; ~19 m/s per epoch.</a:t>
+              <a:t>HIRES cell α ≈ 3.33; fixing α per chunk buys nothing.</a:t>
             </a:r>
           </a:p>
         </p:txBody>
@@ -6240,8 +5989,8 @@
         </p:nvSpPr>
         <p:spPr>
           <a:xfrm>
-            <a:off x="502920" y="256032"/>
-            <a:ext cx="11155680" cy="822960"/>
+            <a:off x="502920" y="228600"/>
+            <a:ext cx="10607040" cy="822960"/>
           </a:xfrm>
           <a:prstGeom prst="rect">
             <a:avLst/>
@@ -6256,11 +6005,11 @@
           <a:p>
             <a:pPr>
               <a:spcAft>
-                <a:spcPts val="600"/>
+                <a:spcPts val="800"/>
               </a:spcAft>
             </a:pPr>
             <a:r>
-              <a:rPr sz="2800" b="1">
+              <a:rPr sz="3000" b="1">
                 <a:solidFill>
                   <a:srgbClr val="0B0B0B"/>
                 </a:solidFill>
@@ -6278,8 +6027,8 @@
         </p:nvSpPr>
         <p:spPr>
           <a:xfrm>
-            <a:off x="502920" y="6419088"/>
-            <a:ext cx="9601200" cy="320040"/>
+            <a:off x="10972800" y="274320"/>
+            <a:ext cx="822960" cy="457200"/>
           </a:xfrm>
           <a:prstGeom prst="rect">
             <a:avLst/>
@@ -6292,18 +6041,18 @@
           </a:bodyPr>
           <a:lstStyle/>
           <a:p>
-            <a:pPr>
+            <a:pPr algn="r">
               <a:spcAft>
-                <a:spcPts val="600"/>
+                <a:spcPts val="800"/>
               </a:spcAft>
             </a:pPr>
             <a:r>
-              <a:rPr sz="1000" b="0">
+              <a:rPr sz="2000" b="0">
                 <a:solidFill>
                   <a:srgbClr val="52514E"/>
                 </a:solidFill>
               </a:rPr>
-              <a:t>HD 187123 b from the 1998 HIRES frames — technical summary</a:t>
+              <a:t>2</a:t>
             </a:r>
           </a:p>
         </p:txBody>
@@ -6316,8 +6065,8 @@
         </p:nvSpPr>
         <p:spPr>
           <a:xfrm>
-            <a:off x="10972800" y="6419088"/>
-            <a:ext cx="731520" cy="320040"/>
+            <a:off x="640080" y="1188720"/>
+            <a:ext cx="10972800" cy="4526280"/>
           </a:xfrm>
           <a:prstGeom prst="rect">
             <a:avLst/>
@@ -6330,130 +6079,92 @@
           </a:bodyPr>
           <a:lstStyle/>
           <a:p>
-            <a:pPr algn="r">
+            <a:pPr>
               <a:spcAft>
-                <a:spcPts val="600"/>
+                <a:spcPts val="800"/>
               </a:spcAft>
             </a:pPr>
             <a:r>
-              <a:rPr sz="1000" b="0">
-                <a:solidFill>
-                  <a:srgbClr val="52514E"/>
-                </a:solidFill>
-              </a:rPr>
-              <a:t>2</a:t>
-            </a:r>
-          </a:p>
-        </p:txBody>
-      </p:sp>
-      <p:sp>
-        <p:nvSpPr>
-          <p:cNvPr id="6" name="TextBox 5"/>
-          <p:cNvSpPr txBox="1"/>
-          <p:nvPr/>
-        </p:nvSpPr>
-        <p:spPr>
-          <a:xfrm>
-            <a:off x="640080" y="1234440"/>
-            <a:ext cx="10972800" cy="4572000"/>
-          </a:xfrm>
-          <a:prstGeom prst="rect">
-            <a:avLst/>
-          </a:prstGeom>
-          <a:noFill/>
-        </p:spPr>
-        <p:txBody>
-          <a:bodyPr wrap="square">
-            <a:spAutoFit/>
-          </a:bodyPr>
-          <a:lstStyle/>
+              <a:rPr sz="2200" b="0">
+                <a:solidFill>
+                  <a:srgbClr val="0B0B0B"/>
+                </a:solidFill>
+              </a:rPr>
+              <a:t>• Planet recovered: K = 72.4 ± 7.1 m/s (10.2σ); published 72, modern catalogue 69.2</a:t>
+            </a:r>
+          </a:p>
           <a:p>
             <a:pPr>
               <a:spcAft>
-                <a:spcPts val="600"/>
+                <a:spcPts val="800"/>
               </a:spcAft>
             </a:pPr>
             <a:r>
-              <a:rPr sz="2000" b="0">
+              <a:rPr sz="2200" b="0">
                 <a:solidFill>
                   <a:srgbClr val="0B0B0B"/>
                 </a:solidFill>
               </a:rPr>
-              <a:t>• Planet recovered: K = 72.4 ± 7.1 m/s, 10.2σ, against 72 m/s published (Butler et al. 1998) and 69.2 m/s in the modern catalogue</a:t>
+              <a:t>• Period found blind: 3.0954 d (true 3.0966 d), false-alarm probability 2 × 10⁻¹¹</a:t>
             </a:r>
           </a:p>
           <a:p>
             <a:pPr>
               <a:spcAft>
-                <a:spcPts val="600"/>
+                <a:spcPts val="800"/>
               </a:spcAft>
             </a:pPr>
             <a:r>
-              <a:rPr sz="2000" b="0">
+              <a:rPr sz="2200" b="0">
                 <a:solidFill>
                   <a:srgbClr val="0B0B0B"/>
                 </a:solidFill>
               </a:rPr>
-              <a:t>• Period found blind: 3.0954 d (true 3.0966 d); false-alarm probability 2 × 10⁻¹¹</a:t>
+              <a:t>• 25.8 m/s per epoch about the orbit; 31 cell-in epochs, 19 nights</a:t>
             </a:r>
           </a:p>
           <a:p>
             <a:pPr>
               <a:spcAft>
-                <a:spcPts val="600"/>
+                <a:spcPts val="800"/>
               </a:spcAft>
             </a:pPr>
             <a:r>
-              <a:rPr sz="2000" b="0">
+              <a:rPr sz="2200" b="0">
                 <a:solidFill>
                   <a:srgbClr val="0B0B0B"/>
                 </a:solidFill>
               </a:rPr>
-              <a:t>• Per-epoch precision 25.8 m/s about the orbit, over 31 cell-in epochs on 19 nights</a:t>
+              <a:t>• 28× better than lamp-calibrated velocities; ~9× short of Butler’s 3 m/s; ~12× short of the modern pipeline (2.2 m/s)</a:t>
             </a:r>
           </a:p>
           <a:p>
             <a:pPr>
               <a:spcAft>
-                <a:spcPts val="600"/>
+                <a:spcPts val="800"/>
               </a:spcAft>
             </a:pPr>
             <a:r>
-              <a:rPr sz="2000" b="0">
+              <a:rPr sz="2200" b="0">
                 <a:solidFill>
                   <a:srgbClr val="0B0B0B"/>
                 </a:solidFill>
               </a:rPr>
-              <a:t>• 28× better than lamp-calibrated velocities (phase 2); ~9× short of Butler’s 3 m/s; ~12× short of the modern pipeline on the same photons (2.2 m/s)</a:t>
-            </a:r>
-          </a:p>
-          <a:p>
-            <a:pPr>
-              <a:spcAft>
-                <a:spcPts val="600"/>
-              </a:spcAft>
-            </a:pPr>
-            <a:r>
-              <a:rPr sz="2000" b="0">
-                <a:solidFill>
-                  <a:srgbClr val="0B0B0B"/>
-                </a:solidFill>
-              </a:rPr>
-              <a:t>• All open: PypeIt (keck_hires_orig, fixed) + a tested fork of pyodine; no code, velocities or calibration from the discovery pipeline</a:t>
-            </a:r>
-          </a:p>
-        </p:txBody>
-      </p:sp>
-      <p:sp>
-        <p:nvSpPr>
-          <p:cNvPr id="7" name="Rectangle 6"/>
+              <a:t>• All open: PypeIt + a tested pyodine fork; nothing from the discovery pipeline</a:t>
+            </a:r>
+          </a:p>
+        </p:txBody>
+      </p:sp>
+      <p:sp>
+        <p:nvSpPr>
+          <p:cNvPr id="6" name="Rectangle 5"/>
           <p:cNvSpPr/>
           <p:nvPr/>
         </p:nvSpPr>
         <p:spPr>
           <a:xfrm>
-            <a:off x="457200" y="5760720"/>
-            <a:ext cx="11274552" cy="566928"/>
+            <a:off x="365760" y="5806440"/>
+            <a:ext cx="11457432" cy="914400"/>
           </a:xfrm>
           <a:prstGeom prst="rect">
             <a:avLst/>
@@ -6485,12 +6196,12 @@
           <a:p>
             <a:pPr algn="ctr"/>
             <a:r>
-              <a:rPr sz="1600" b="1">
+              <a:rPr sz="2000" b="1">
                 <a:solidFill>
                   <a:srgbClr val="0B0B0B"/>
                 </a:solidFill>
               </a:rPr>
-              <a:t>Success criterion (50 m/s per epoch, a convincing independent detection): met.</a:t>
+              <a:t>Success criterion (50 m/s per epoch, an independent detection): met.</a:t>
             </a:r>
           </a:p>
         </p:txBody>
@@ -6564,8 +6275,8 @@
         </p:nvSpPr>
         <p:spPr>
           <a:xfrm>
-            <a:off x="502920" y="256032"/>
-            <a:ext cx="11155680" cy="822960"/>
+            <a:off x="502920" y="228600"/>
+            <a:ext cx="10607040" cy="822960"/>
           </a:xfrm>
           <a:prstGeom prst="rect">
             <a:avLst/>
@@ -6580,16 +6291,16 @@
           <a:p>
             <a:pPr>
               <a:spcAft>
-                <a:spcPts val="600"/>
+                <a:spcPts val="800"/>
               </a:spcAft>
             </a:pPr>
             <a:r>
-              <a:rPr sz="2800" b="1">
+              <a:rPr sz="3000" b="1">
                 <a:solidFill>
                   <a:srgbClr val="0B0B0B"/>
                 </a:solidFill>
               </a:rPr>
-              <a:t>The detection</a:t>
+              <a:t>All 31 epochs: the misfit is common, and cancels</a:t>
             </a:r>
           </a:p>
         </p:txBody>
@@ -6602,8 +6313,8 @@
         </p:nvSpPr>
         <p:spPr>
           <a:xfrm>
-            <a:off x="502920" y="6419088"/>
-            <a:ext cx="9601200" cy="320040"/>
+            <a:off x="10972800" y="274320"/>
+            <a:ext cx="822960" cy="457200"/>
           </a:xfrm>
           <a:prstGeom prst="rect">
             <a:avLst/>
@@ -6616,51 +6327,13 @@
           </a:bodyPr>
           <a:lstStyle/>
           <a:p>
-            <a:pPr>
+            <a:pPr algn="r">
               <a:spcAft>
-                <a:spcPts val="600"/>
+                <a:spcPts val="800"/>
               </a:spcAft>
             </a:pPr>
             <a:r>
-              <a:rPr sz="1000" b="0">
-                <a:solidFill>
-                  <a:srgbClr val="52514E"/>
-                </a:solidFill>
-              </a:rPr>
-              <a:t>Phase 3   ·   HD 187123 b from the 1998 HIRES frames — technical summary</a:t>
-            </a:r>
-          </a:p>
-        </p:txBody>
-      </p:sp>
-      <p:sp>
-        <p:nvSpPr>
-          <p:cNvPr id="5" name="TextBox 4"/>
-          <p:cNvSpPr txBox="1"/>
-          <p:nvPr/>
-        </p:nvSpPr>
-        <p:spPr>
-          <a:xfrm>
-            <a:off x="10972800" y="6419088"/>
-            <a:ext cx="731520" cy="320040"/>
-          </a:xfrm>
-          <a:prstGeom prst="rect">
-            <a:avLst/>
-          </a:prstGeom>
-          <a:noFill/>
-        </p:spPr>
-        <p:txBody>
-          <a:bodyPr wrap="square">
-            <a:spAutoFit/>
-          </a:bodyPr>
-          <a:lstStyle/>
-          <a:p>
-            <a:pPr algn="r">
-              <a:spcAft>
-                <a:spcPts val="600"/>
-              </a:spcAft>
-            </a:pPr>
-            <a:r>
-              <a:rPr sz="1000" b="0">
+              <a:rPr sz="2000" b="0">
                 <a:solidFill>
                   <a:srgbClr val="52514E"/>
                 </a:solidFill>
@@ -6672,7 +6345,7 @@
       </p:sp>
       <p:pic>
         <p:nvPicPr>
-          <p:cNvPr id="6" name="Picture 5" descr="fig_ph3_phasefold.png"/>
+          <p:cNvPr id="5" name="Picture 4" descr="fig_p7_epochs.png"/>
           <p:cNvPicPr>
             <a:picLocks noChangeAspect="1"/>
           </p:cNvPicPr>
@@ -6686,8 +6359,8 @@
         </p:blipFill>
         <p:spPr>
           <a:xfrm>
-            <a:off x="2108903" y="1143000"/>
-            <a:ext cx="7971146" cy="4526280"/>
+            <a:off x="2691945" y="1097280"/>
+            <a:ext cx="6805061" cy="4617720"/>
           </a:xfrm>
           <a:prstGeom prst="rect">
             <a:avLst/>
@@ -6696,14 +6369,14 @@
       </p:pic>
       <p:sp>
         <p:nvSpPr>
-          <p:cNvPr id="7" name="Rectangle 6"/>
+          <p:cNvPr id="6" name="Rectangle 5"/>
           <p:cNvSpPr/>
           <p:nvPr/>
         </p:nvSpPr>
         <p:spPr>
           <a:xfrm>
-            <a:off x="457200" y="5760720"/>
-            <a:ext cx="11274552" cy="566928"/>
+            <a:off x="365760" y="5806440"/>
+            <a:ext cx="11457432" cy="914400"/>
           </a:xfrm>
           <a:prstGeom prst="rect">
             <a:avLst/>
@@ -6735,12 +6408,12 @@
           <a:p>
             <a:pPr algn="ctr"/>
             <a:r>
-              <a:rPr sz="1600" b="1">
+              <a:rPr sz="2000" b="1">
                 <a:solidFill>
                   <a:srgbClr val="0B0B0B"/>
                 </a:solidFill>
               </a:rPr>
-              <a:t>K = 72.4 ± 7.1 m/s (10.2σ), phase-2 method; residual 25.8 m/s, χ²/dof 1.05.</a:t>
+              <a:t>pyodine’s chunk offsets remove it: 290 → 230 m/s per chunk; ~19 m/s per epoch.</a:t>
             </a:r>
           </a:p>
         </p:txBody>
@@ -6814,8 +6487,8 @@
         </p:nvSpPr>
         <p:spPr>
           <a:xfrm>
-            <a:off x="502920" y="256032"/>
-            <a:ext cx="11155680" cy="822960"/>
+            <a:off x="502920" y="228600"/>
+            <a:ext cx="10607040" cy="822960"/>
           </a:xfrm>
           <a:prstGeom prst="rect">
             <a:avLst/>
@@ -6830,16 +6503,16 @@
           <a:p>
             <a:pPr>
               <a:spcAft>
-                <a:spcPts val="600"/>
+                <a:spcPts val="800"/>
               </a:spcAft>
             </a:pPr>
             <a:r>
-              <a:rPr sz="2800" b="1">
+              <a:rPr sz="3000" b="1">
                 <a:solidFill>
                   <a:srgbClr val="0B0B0B"/>
                 </a:solidFill>
               </a:rPr>
-              <a:t>Epoch by epoch against the modern catalogue</a:t>
+              <a:t>The detection</a:t>
             </a:r>
           </a:p>
         </p:txBody>
@@ -6852,8 +6525,8 @@
         </p:nvSpPr>
         <p:spPr>
           <a:xfrm>
-            <a:off x="502920" y="6419088"/>
-            <a:ext cx="9601200" cy="320040"/>
+            <a:off x="10972800" y="274320"/>
+            <a:ext cx="822960" cy="457200"/>
           </a:xfrm>
           <a:prstGeom prst="rect">
             <a:avLst/>
@@ -6866,51 +6539,13 @@
           </a:bodyPr>
           <a:lstStyle/>
           <a:p>
-            <a:pPr>
+            <a:pPr algn="r">
               <a:spcAft>
-                <a:spcPts val="600"/>
+                <a:spcPts val="800"/>
               </a:spcAft>
             </a:pPr>
             <a:r>
-              <a:rPr sz="1000" b="0">
-                <a:solidFill>
-                  <a:srgbClr val="52514E"/>
-                </a:solidFill>
-              </a:rPr>
-              <a:t>Phase 3   ·   HD 187123 b from the 1998 HIRES frames — technical summary</a:t>
-            </a:r>
-          </a:p>
-        </p:txBody>
-      </p:sp>
-      <p:sp>
-        <p:nvSpPr>
-          <p:cNvPr id="5" name="TextBox 4"/>
-          <p:cNvSpPr txBox="1"/>
-          <p:nvPr/>
-        </p:nvSpPr>
-        <p:spPr>
-          <a:xfrm>
-            <a:off x="10972800" y="6419088"/>
-            <a:ext cx="731520" cy="320040"/>
-          </a:xfrm>
-          <a:prstGeom prst="rect">
-            <a:avLst/>
-          </a:prstGeom>
-          <a:noFill/>
-        </p:spPr>
-        <p:txBody>
-          <a:bodyPr wrap="square">
-            <a:spAutoFit/>
-          </a:bodyPr>
-          <a:lstStyle/>
-          <a:p>
-            <a:pPr algn="r">
-              <a:spcAft>
-                <a:spcPts val="600"/>
-              </a:spcAft>
-            </a:pPr>
-            <a:r>
-              <a:rPr sz="1000" b="0">
+              <a:rPr sz="2000" b="0">
                 <a:solidFill>
                   <a:srgbClr val="52514E"/>
                 </a:solidFill>
@@ -6922,7 +6557,7 @@
       </p:sp>
       <p:pic>
         <p:nvPicPr>
-          <p:cNvPr id="6" name="Picture 5" descr="fig_ph3_compare.png"/>
+          <p:cNvPr id="5" name="Picture 4" descr="fig_ph3_phasefold.png"/>
           <p:cNvPicPr>
             <a:picLocks noChangeAspect="1"/>
           </p:cNvPicPr>
@@ -6936,8 +6571,8 @@
         </p:blipFill>
         <p:spPr>
           <a:xfrm>
-            <a:off x="3803047" y="1143000"/>
-            <a:ext cx="4582858" cy="4526280"/>
+            <a:off x="2028386" y="1097280"/>
+            <a:ext cx="8132179" cy="4617720"/>
           </a:xfrm>
           <a:prstGeom prst="rect">
             <a:avLst/>
@@ -6946,14 +6581,14 @@
       </p:pic>
       <p:sp>
         <p:nvSpPr>
-          <p:cNvPr id="7" name="Rectangle 6"/>
+          <p:cNvPr id="6" name="Rectangle 5"/>
           <p:cNvSpPr/>
           <p:nvPr/>
         </p:nvSpPr>
         <p:spPr>
           <a:xfrm>
-            <a:off x="457200" y="5760720"/>
-            <a:ext cx="11274552" cy="566928"/>
+            <a:off x="365760" y="5806440"/>
+            <a:ext cx="11457432" cy="914400"/>
           </a:xfrm>
           <a:prstGeom prst="rect">
             <a:avLst/>
@@ -6985,12 +6620,12 @@
           <a:p>
             <a:pPr algn="ctr"/>
             <a:r>
-              <a:rPr sz="1600" b="1">
+              <a:rPr sz="2000" b="1">
                 <a:solidFill>
                   <a:srgbClr val="0B0B0B"/>
                 </a:solidFill>
               </a:rPr>
-              <a:t>r = +0.89 (phase 2: +0.38); difference 25.5 m/s rms at χ²/dof 1.03 — the errors are honest.</a:t>
+              <a:t>K = 72.4 ± 7.1 m/s (10.2σ); residual 25.8 m/s, χ²/dof 1.05.</a:t>
             </a:r>
           </a:p>
         </p:txBody>
@@ -7064,8 +6699,8 @@
         </p:nvSpPr>
         <p:spPr>
           <a:xfrm>
-            <a:off x="502920" y="256032"/>
-            <a:ext cx="11155680" cy="822960"/>
+            <a:off x="502920" y="228600"/>
+            <a:ext cx="10607040" cy="822960"/>
           </a:xfrm>
           <a:prstGeom prst="rect">
             <a:avLst/>
@@ -7080,16 +6715,16 @@
           <a:p>
             <a:pPr>
               <a:spcAft>
-                <a:spcPts val="600"/>
+                <a:spcPts val="800"/>
               </a:spcAft>
             </a:pPr>
             <a:r>
-              <a:rPr sz="2800" b="1">
+              <a:rPr sz="3000" b="1">
                 <a:solidFill>
                   <a:srgbClr val="0B0B0B"/>
                 </a:solidFill>
               </a:rPr>
-              <a:t>What the residuals contain, and the blind period search</a:t>
+              <a:t>Epoch by epoch against the modern catalogue</a:t>
             </a:r>
           </a:p>
         </p:txBody>
@@ -7102,8 +6737,8 @@
         </p:nvSpPr>
         <p:spPr>
           <a:xfrm>
-            <a:off x="502920" y="6419088"/>
-            <a:ext cx="9601200" cy="320040"/>
+            <a:off x="10972800" y="274320"/>
+            <a:ext cx="822960" cy="457200"/>
           </a:xfrm>
           <a:prstGeom prst="rect">
             <a:avLst/>
@@ -7116,51 +6751,13 @@
           </a:bodyPr>
           <a:lstStyle/>
           <a:p>
-            <a:pPr>
+            <a:pPr algn="r">
               <a:spcAft>
-                <a:spcPts val="600"/>
+                <a:spcPts val="800"/>
               </a:spcAft>
             </a:pPr>
             <a:r>
-              <a:rPr sz="1000" b="0">
-                <a:solidFill>
-                  <a:srgbClr val="52514E"/>
-                </a:solidFill>
-              </a:rPr>
-              <a:t>Phase 3   ·   HD 187123 b from the 1998 HIRES frames — technical summary</a:t>
-            </a:r>
-          </a:p>
-        </p:txBody>
-      </p:sp>
-      <p:sp>
-        <p:nvSpPr>
-          <p:cNvPr id="5" name="TextBox 4"/>
-          <p:cNvSpPr txBox="1"/>
-          <p:nvPr/>
-        </p:nvSpPr>
-        <p:spPr>
-          <a:xfrm>
-            <a:off x="10972800" y="6419088"/>
-            <a:ext cx="731520" cy="320040"/>
-          </a:xfrm>
-          <a:prstGeom prst="rect">
-            <a:avLst/>
-          </a:prstGeom>
-          <a:noFill/>
-        </p:spPr>
-        <p:txBody>
-          <a:bodyPr wrap="square">
-            <a:spAutoFit/>
-          </a:bodyPr>
-          <a:lstStyle/>
-          <a:p>
-            <a:pPr algn="r">
-              <a:spcAft>
-                <a:spcPts val="600"/>
-              </a:spcAft>
-            </a:pPr>
-            <a:r>
-              <a:rPr sz="1000" b="0">
+              <a:rPr sz="2000" b="0">
                 <a:solidFill>
                   <a:srgbClr val="52514E"/>
                 </a:solidFill>
@@ -7172,7 +6769,7 @@
       </p:sp>
       <p:pic>
         <p:nvPicPr>
-          <p:cNvPr id="6" name="Picture 5" descr="fig_ph3_residuals.png"/>
+          <p:cNvPr id="5" name="Picture 4" descr="fig_ph3_compare.png"/>
           <p:cNvPicPr>
             <a:picLocks noChangeAspect="1"/>
           </p:cNvPicPr>
@@ -7186,8 +6783,8 @@
         </p:blipFill>
         <p:spPr>
           <a:xfrm>
-            <a:off x="2776451" y="1143000"/>
-            <a:ext cx="6636050" cy="4526280"/>
+            <a:off x="3756755" y="1097280"/>
+            <a:ext cx="4675441" cy="4617720"/>
           </a:xfrm>
           <a:prstGeom prst="rect">
             <a:avLst/>
@@ -7196,14 +6793,14 @@
       </p:pic>
       <p:sp>
         <p:nvSpPr>
-          <p:cNvPr id="7" name="Rectangle 6"/>
+          <p:cNvPr id="6" name="Rectangle 5"/>
           <p:cNvSpPr/>
           <p:nvPr/>
         </p:nvSpPr>
         <p:spPr>
           <a:xfrm>
-            <a:off x="457200" y="5760720"/>
-            <a:ext cx="11274552" cy="566928"/>
+            <a:off x="365760" y="5806440"/>
+            <a:ext cx="11457432" cy="914400"/>
           </a:xfrm>
           <a:prstGeom prst="rect">
             <a:avLst/>
@@ -7235,12 +6832,12 @@
           <a:p>
             <a:pPr algn="ctr"/>
             <a:r>
-              <a:rPr sz="1600" b="1">
+              <a:rPr sz="2000" b="1">
                 <a:solidFill>
                   <a:srgbClr val="0B0B0B"/>
                 </a:solidFill>
               </a:rPr>
-              <a:t>No ThAr zero-point, misfit or order-count dependence; residual periodogram flat (FAP 0.62).</a:t>
+              <a:t>r = +0.89 (phase 2: +0.38); the errors are honest (χ²/dof 1.03).</a:t>
             </a:r>
           </a:p>
         </p:txBody>
@@ -7314,8 +6911,8 @@
         </p:nvSpPr>
         <p:spPr>
           <a:xfrm>
-            <a:off x="502920" y="256032"/>
-            <a:ext cx="11155680" cy="822960"/>
+            <a:off x="502920" y="228600"/>
+            <a:ext cx="10607040" cy="822960"/>
           </a:xfrm>
           <a:prstGeom prst="rect">
             <a:avLst/>
@@ -7330,16 +6927,16 @@
           <a:p>
             <a:pPr>
               <a:spcAft>
-                <a:spcPts val="600"/>
+                <a:spcPts val="800"/>
               </a:spcAft>
             </a:pPr>
             <a:r>
-              <a:rPr sz="2800" b="1">
+              <a:rPr sz="3000" b="1">
                 <a:solidFill>
                   <a:srgbClr val="0B0B0B"/>
                 </a:solidFill>
               </a:rPr>
-              <a:t>Every named calibration defect is fixed</a:t>
+              <a:t>Residuals and the blind period search</a:t>
             </a:r>
           </a:p>
         </p:txBody>
@@ -7352,8 +6949,8 @@
         </p:nvSpPr>
         <p:spPr>
           <a:xfrm>
-            <a:off x="502920" y="6419088"/>
-            <a:ext cx="9601200" cy="320040"/>
+            <a:off x="10972800" y="274320"/>
+            <a:ext cx="822960" cy="457200"/>
           </a:xfrm>
           <a:prstGeom prst="rect">
             <a:avLst/>
@@ -7366,51 +6963,13 @@
           </a:bodyPr>
           <a:lstStyle/>
           <a:p>
-            <a:pPr>
+            <a:pPr algn="r">
               <a:spcAft>
-                <a:spcPts val="600"/>
+                <a:spcPts val="800"/>
               </a:spcAft>
             </a:pPr>
             <a:r>
-              <a:rPr sz="1000" b="0">
-                <a:solidFill>
-                  <a:srgbClr val="52514E"/>
-                </a:solidFill>
-              </a:rPr>
-              <a:t>Phase 3   ·   HD 187123 b from the 1998 HIRES frames — technical summary</a:t>
-            </a:r>
-          </a:p>
-        </p:txBody>
-      </p:sp>
-      <p:sp>
-        <p:nvSpPr>
-          <p:cNvPr id="5" name="TextBox 4"/>
-          <p:cNvSpPr txBox="1"/>
-          <p:nvPr/>
-        </p:nvSpPr>
-        <p:spPr>
-          <a:xfrm>
-            <a:off x="10972800" y="6419088"/>
-            <a:ext cx="731520" cy="320040"/>
-          </a:xfrm>
-          <a:prstGeom prst="rect">
-            <a:avLst/>
-          </a:prstGeom>
-          <a:noFill/>
-        </p:spPr>
-        <p:txBody>
-          <a:bodyPr wrap="square">
-            <a:spAutoFit/>
-          </a:bodyPr>
-          <a:lstStyle/>
-          <a:p>
-            <a:pPr algn="r">
-              <a:spcAft>
-                <a:spcPts val="600"/>
-              </a:spcAft>
-            </a:pPr>
-            <a:r>
-              <a:rPr sz="1000" b="0">
+              <a:rPr sz="2000" b="0">
                 <a:solidFill>
                   <a:srgbClr val="52514E"/>
                 </a:solidFill>
@@ -7422,7 +6981,7 @@
       </p:sp>
       <p:pic>
         <p:nvPicPr>
-          <p:cNvPr id="6" name="Picture 5" descr="fig_p9_diagnosis.png"/>
+          <p:cNvPr id="5" name="Picture 4" descr="fig_ph3_residuals.png"/>
           <p:cNvPicPr>
             <a:picLocks noChangeAspect="1"/>
           </p:cNvPicPr>
@@ -7436,8 +6995,8 @@
         </p:blipFill>
         <p:spPr>
           <a:xfrm>
-            <a:off x="2964602" y="1143000"/>
-            <a:ext cx="6259748" cy="4526280"/>
+            <a:off x="2709420" y="1097280"/>
+            <a:ext cx="6770111" cy="4617720"/>
           </a:xfrm>
           <a:prstGeom prst="rect">
             <a:avLst/>
@@ -7446,14 +7005,14 @@
       </p:pic>
       <p:sp>
         <p:nvSpPr>
-          <p:cNvPr id="7" name="Rectangle 6"/>
+          <p:cNvPr id="6" name="Rectangle 5"/>
           <p:cNvSpPr/>
           <p:nvPr/>
         </p:nvSpPr>
         <p:spPr>
           <a:xfrm>
-            <a:off x="457200" y="5760720"/>
-            <a:ext cx="11274552" cy="566928"/>
+            <a:off x="365760" y="5806440"/>
+            <a:ext cx="11457432" cy="914400"/>
           </a:xfrm>
           <a:prstGeom prst="rect">
             <a:avLst/>
@@ -7485,12 +7044,12 @@
           <a:p>
             <a:pPr algn="ctr"/>
             <a:r>
-              <a:rPr sz="1600" b="1">
+              <a:rPr sz="2000" b="1">
                 <a:solidFill>
                   <a:srgbClr val="0B0B0B"/>
                 </a:solidFill>
               </a:rPr>
-              <a:t>Borrowed arcs, intra-night drift (−240 → +1 ± 3 m/s/h), no-pixel-flat night, 09-13’s bad arc.</a:t>
+              <a:t>No ThAr, misfit or order-count dependence; residual periodogram flat.</a:t>
             </a:r>
           </a:p>
         </p:txBody>
@@ -7564,8 +7123,8 @@
         </p:nvSpPr>
         <p:spPr>
           <a:xfrm>
-            <a:off x="502920" y="256032"/>
-            <a:ext cx="11155680" cy="822960"/>
+            <a:off x="502920" y="228600"/>
+            <a:ext cx="10607040" cy="822960"/>
           </a:xfrm>
           <a:prstGeom prst="rect">
             <a:avLst/>
@@ -7580,16 +7139,16 @@
           <a:p>
             <a:pPr>
               <a:spcAft>
-                <a:spcPts val="600"/>
+                <a:spcPts val="800"/>
               </a:spcAft>
             </a:pPr>
             <a:r>
-              <a:rPr sz="2800" b="1">
+              <a:rPr sz="3000" b="1">
                 <a:solidFill>
                   <a:srgbClr val="0B0B0B"/>
                 </a:solidFill>
               </a:rPr>
-              <a:t>What is left: re-combining without the weakest data (prompt 9)</a:t>
+              <a:t>Every named calibration defect is fixed</a:t>
             </a:r>
           </a:p>
         </p:txBody>
@@ -7602,8 +7161,8 @@
         </p:nvSpPr>
         <p:spPr>
           <a:xfrm>
-            <a:off x="502920" y="6419088"/>
-            <a:ext cx="9601200" cy="320040"/>
+            <a:off x="10972800" y="274320"/>
+            <a:ext cx="822960" cy="457200"/>
           </a:xfrm>
           <a:prstGeom prst="rect">
             <a:avLst/>
@@ -7616,614 +7175,56 @@
           </a:bodyPr>
           <a:lstStyle/>
           <a:p>
-            <a:pPr>
+            <a:pPr algn="r">
               <a:spcAft>
-                <a:spcPts val="600"/>
+                <a:spcPts val="800"/>
               </a:spcAft>
             </a:pPr>
             <a:r>
-              <a:rPr sz="1000" b="0">
+              <a:rPr sz="2000" b="0">
                 <a:solidFill>
                   <a:srgbClr val="52514E"/>
                 </a:solidFill>
               </a:rPr>
-              <a:t>Phase 3   ·   HD 187123 b from the 1998 HIRES frames — technical summary</a:t>
-            </a:r>
-          </a:p>
-        </p:txBody>
-      </p:sp>
-      <p:sp>
-        <p:nvSpPr>
-          <p:cNvPr id="5" name="TextBox 4"/>
-          <p:cNvSpPr txBox="1"/>
-          <p:nvPr/>
-        </p:nvSpPr>
-        <p:spPr>
-          <a:xfrm>
-            <a:off x="10972800" y="6419088"/>
-            <a:ext cx="731520" cy="320040"/>
-          </a:xfrm>
-          <a:prstGeom prst="rect">
-            <a:avLst/>
-          </a:prstGeom>
-          <a:noFill/>
-        </p:spPr>
-        <p:txBody>
-          <a:bodyPr wrap="square">
-            <a:spAutoFit/>
-          </a:bodyPr>
-          <a:lstStyle/>
-          <a:p>
-            <a:pPr algn="r">
-              <a:spcAft>
-                <a:spcPts val="600"/>
-              </a:spcAft>
-            </a:pPr>
-            <a:r>
-              <a:rPr sz="1000" b="0">
-                <a:solidFill>
-                  <a:srgbClr val="52514E"/>
-                </a:solidFill>
-              </a:rPr>
               <a:t>24</a:t>
             </a:r>
           </a:p>
         </p:txBody>
       </p:sp>
-      <p:graphicFrame>
-        <p:nvGraphicFramePr>
-          <p:cNvPr id="6" name="Table 5"/>
-          <p:cNvGraphicFramePr>
-            <a:graphicFrameLocks noGrp="1"/>
-          </p:cNvGraphicFramePr>
-          <p:nvPr/>
-        </p:nvGraphicFramePr>
-        <p:xfrm>
-          <a:off x="548640" y="1280160"/>
-          <a:ext cx="11064240" cy="2523744"/>
-        </p:xfrm>
-        <a:graphic>
-          <a:graphicData uri="http://schemas.openxmlformats.org/drawingml/2006/table">
-            <a:tbl>
-              <a:tblPr firstRow="1" bandRow="1">
-                <a:tableStyleId>{5C22544A-7EE6-4342-B048-85BDC9FD1C3A}</a:tableStyleId>
-              </a:tblPr>
-              <a:tblGrid>
-                <a:gridCol w="5669280"/>
-                <a:gridCol w="1280160"/>
-                <a:gridCol w="2011680"/>
-                <a:gridCol w="2103120"/>
-              </a:tblGrid>
-              <a:tr h="420624">
-                <a:tc>
-                  <a:txBody>
-                    <a:bodyPr/>
-                    <a:lstStyle/>
-                    <a:p>
-                      <a:r>
-                        <a:rPr sz="1500" b="1">
-                          <a:solidFill>
-                            <a:srgbClr val="FFFFFF"/>
-                          </a:solidFill>
-                        </a:rPr>
-                        <a:t>variant</a:t>
-                      </a:r>
-                    </a:p>
-                  </a:txBody>
-                  <a:tcPr>
-                    <a:solidFill>
-                      <a:srgbClr val="2A78D6"/>
-                    </a:solidFill>
-                  </a:tcPr>
-                </a:tc>
-                <a:tc>
-                  <a:txBody>
-                    <a:bodyPr/>
-                    <a:lstStyle/>
-                    <a:p>
-                      <a:r>
-                        <a:rPr sz="1500" b="1">
-                          <a:solidFill>
-                            <a:srgbClr val="FFFFFF"/>
-                          </a:solidFill>
-                        </a:rPr>
-                        <a:t>epochs</a:t>
-                      </a:r>
-                    </a:p>
-                  </a:txBody>
-                  <a:tcPr>
-                    <a:solidFill>
-                      <a:srgbClr val="2A78D6"/>
-                    </a:solidFill>
-                  </a:tcPr>
-                </a:tc>
-                <a:tc>
-                  <a:txBody>
-                    <a:bodyPr/>
-                    <a:lstStyle/>
-                    <a:p>
-                      <a:r>
-                        <a:rPr sz="1500" b="1">
-                          <a:solidFill>
-                            <a:srgbClr val="FFFFFF"/>
-                          </a:solidFill>
-                        </a:rPr>
-                        <a:t>residual rms</a:t>
-                      </a:r>
-                    </a:p>
-                  </a:txBody>
-                  <a:tcPr>
-                    <a:solidFill>
-                      <a:srgbClr val="2A78D6"/>
-                    </a:solidFill>
-                  </a:tcPr>
-                </a:tc>
-                <a:tc>
-                  <a:txBody>
-                    <a:bodyPr/>
-                    <a:lstStyle/>
-                    <a:p>
-                      <a:r>
-                        <a:rPr sz="1500" b="1">
-                          <a:solidFill>
-                            <a:srgbClr val="FFFFFF"/>
-                          </a:solidFill>
-                        </a:rPr>
-                        <a:t>K (m/s)</a:t>
-                      </a:r>
-                    </a:p>
-                  </a:txBody>
-                  <a:tcPr>
-                    <a:solidFill>
-                      <a:srgbClr val="2A78D6"/>
-                    </a:solidFill>
-                  </a:tcPr>
-                </a:tc>
-              </a:tr>
-              <a:tr h="420624">
-                <a:tc>
-                  <a:txBody>
-                    <a:bodyPr/>
-                    <a:lstStyle/>
-                    <a:p>
-                      <a:r>
-                        <a:rPr sz="1500">
-                          <a:solidFill>
-                            <a:srgbClr val="0B0B0B"/>
-                          </a:solidFill>
-                        </a:rPr>
-                        <a:t>prompt 7, everything (the result)</a:t>
-                      </a:r>
-                    </a:p>
-                  </a:txBody>
-                  <a:tcPr>
-                    <a:solidFill>
-                      <a:srgbClr val="F3F3F1"/>
-                    </a:solidFill>
-                  </a:tcPr>
-                </a:tc>
-                <a:tc>
-                  <a:txBody>
-                    <a:bodyPr/>
-                    <a:lstStyle/>
-                    <a:p>
-                      <a:r>
-                        <a:rPr sz="1500">
-                          <a:solidFill>
-                            <a:srgbClr val="0B0B0B"/>
-                          </a:solidFill>
-                        </a:rPr>
-                        <a:t>31</a:t>
-                      </a:r>
-                    </a:p>
-                  </a:txBody>
-                  <a:tcPr>
-                    <a:solidFill>
-                      <a:srgbClr val="F3F3F1"/>
-                    </a:solidFill>
-                  </a:tcPr>
-                </a:tc>
-                <a:tc>
-                  <a:txBody>
-                    <a:bodyPr/>
-                    <a:lstStyle/>
-                    <a:p>
-                      <a:r>
-                        <a:rPr sz="1500">
-                          <a:solidFill>
-                            <a:srgbClr val="0B0B0B"/>
-                          </a:solidFill>
-                        </a:rPr>
-                        <a:t>25.8 m/s</a:t>
-                      </a:r>
-                    </a:p>
-                  </a:txBody>
-                  <a:tcPr>
-                    <a:solidFill>
-                      <a:srgbClr val="F3F3F1"/>
-                    </a:solidFill>
-                  </a:tcPr>
-                </a:tc>
-                <a:tc>
-                  <a:txBody>
-                    <a:bodyPr/>
-                    <a:lstStyle/>
-                    <a:p>
-                      <a:r>
-                        <a:rPr sz="1500">
-                          <a:solidFill>
-                            <a:srgbClr val="0B0B0B"/>
-                          </a:solidFill>
-                        </a:rPr>
-                        <a:t>72.4 ± 7.1</a:t>
-                      </a:r>
-                    </a:p>
-                  </a:txBody>
-                  <a:tcPr>
-                    <a:solidFill>
-                      <a:srgbClr val="F3F3F1"/>
-                    </a:solidFill>
-                  </a:tcPr>
-                </a:tc>
-              </a:tr>
-              <a:tr h="420624">
-                <a:tc>
-                  <a:txBody>
-                    <a:bodyPr/>
-                    <a:lstStyle/>
-                    <a:p>
-                      <a:r>
-                        <a:rPr sz="1500">
-                          <a:solidFill>
-                            <a:srgbClr val="0B0B0B"/>
-                          </a:solidFill>
-                        </a:rPr>
-                        <a:t>telluric-crossed chunks masked</a:t>
-                      </a:r>
-                    </a:p>
-                  </a:txBody>
-                  <a:tcPr>
-                    <a:solidFill>
-                      <a:srgbClr val="FFFFFF"/>
-                    </a:solidFill>
-                  </a:tcPr>
-                </a:tc>
-                <a:tc>
-                  <a:txBody>
-                    <a:bodyPr/>
-                    <a:lstStyle/>
-                    <a:p>
-                      <a:r>
-                        <a:rPr sz="1500">
-                          <a:solidFill>
-                            <a:srgbClr val="0B0B0B"/>
-                          </a:solidFill>
-                        </a:rPr>
-                        <a:t>31</a:t>
-                      </a:r>
-                    </a:p>
-                  </a:txBody>
-                  <a:tcPr>
-                    <a:solidFill>
-                      <a:srgbClr val="FFFFFF"/>
-                    </a:solidFill>
-                  </a:tcPr>
-                </a:tc>
-                <a:tc>
-                  <a:txBody>
-                    <a:bodyPr/>
-                    <a:lstStyle/>
-                    <a:p>
-                      <a:r>
-                        <a:rPr sz="1500">
-                          <a:solidFill>
-                            <a:srgbClr val="0B0B0B"/>
-                          </a:solidFill>
-                        </a:rPr>
-                        <a:t>24.2 m/s</a:t>
-                      </a:r>
-                    </a:p>
-                  </a:txBody>
-                  <a:tcPr>
-                    <a:solidFill>
-                      <a:srgbClr val="FFFFFF"/>
-                    </a:solidFill>
-                  </a:tcPr>
-                </a:tc>
-                <a:tc>
-                  <a:txBody>
-                    <a:bodyPr/>
-                    <a:lstStyle/>
-                    <a:p>
-                      <a:r>
-                        <a:rPr sz="1500">
-                          <a:solidFill>
-                            <a:srgbClr val="0B0B0B"/>
-                          </a:solidFill>
-                        </a:rPr>
-                        <a:t>73.0 ± 6.7</a:t>
-                      </a:r>
-                    </a:p>
-                  </a:txBody>
-                  <a:tcPr>
-                    <a:solidFill>
-                      <a:srgbClr val="FFFFFF"/>
-                    </a:solidFill>
-                  </a:tcPr>
-                </a:tc>
-              </a:tr>
-              <a:tr h="420624">
-                <a:tc>
-                  <a:txBody>
-                    <a:bodyPr/>
-                    <a:lstStyle/>
-                    <a:p>
-                      <a:r>
-                        <a:rPr sz="1500">
-                          <a:solidFill>
-                            <a:srgbClr val="0B0B0B"/>
-                          </a:solidFill>
-                        </a:rPr>
-                        <a:t>without the 6 epochs with ≤ 8 orders</a:t>
-                      </a:r>
-                    </a:p>
-                  </a:txBody>
-                  <a:tcPr>
-                    <a:solidFill>
-                      <a:srgbClr val="F3F3F1"/>
-                    </a:solidFill>
-                  </a:tcPr>
-                </a:tc>
-                <a:tc>
-                  <a:txBody>
-                    <a:bodyPr/>
-                    <a:lstStyle/>
-                    <a:p>
-                      <a:r>
-                        <a:rPr sz="1500">
-                          <a:solidFill>
-                            <a:srgbClr val="0B0B0B"/>
-                          </a:solidFill>
-                        </a:rPr>
-                        <a:t>25</a:t>
-                      </a:r>
-                    </a:p>
-                  </a:txBody>
-                  <a:tcPr>
-                    <a:solidFill>
-                      <a:srgbClr val="F3F3F1"/>
-                    </a:solidFill>
-                  </a:tcPr>
-                </a:tc>
-                <a:tc>
-                  <a:txBody>
-                    <a:bodyPr/>
-                    <a:lstStyle/>
-                    <a:p>
-                      <a:r>
-                        <a:rPr sz="1500">
-                          <a:solidFill>
-                            <a:srgbClr val="0B0B0B"/>
-                          </a:solidFill>
-                        </a:rPr>
-                        <a:t>18.2 m/s</a:t>
-                      </a:r>
-                    </a:p>
-                  </a:txBody>
-                  <a:tcPr>
-                    <a:solidFill>
-                      <a:srgbClr val="F3F3F1"/>
-                    </a:solidFill>
-                  </a:tcPr>
-                </a:tc>
-                <a:tc>
-                  <a:txBody>
-                    <a:bodyPr/>
-                    <a:lstStyle/>
-                    <a:p>
-                      <a:r>
-                        <a:rPr sz="1500">
-                          <a:solidFill>
-                            <a:srgbClr val="0B0B0B"/>
-                          </a:solidFill>
-                        </a:rPr>
-                        <a:t>70.8 ± 5.6</a:t>
-                      </a:r>
-                    </a:p>
-                  </a:txBody>
-                  <a:tcPr>
-                    <a:solidFill>
-                      <a:srgbClr val="F3F3F1"/>
-                    </a:solidFill>
-                  </a:tcPr>
-                </a:tc>
-              </a:tr>
-              <a:tr h="420624">
-                <a:tc>
-                  <a:txBody>
-                    <a:bodyPr/>
-                    <a:lstStyle/>
-                    <a:p>
-                      <a:r>
-                        <a:rPr sz="1500">
-                          <a:solidFill>
-                            <a:srgbClr val="0B0B0B"/>
-                          </a:solidFill>
-                        </a:rPr>
-                        <a:t>without the weak-iodine orders 58–61</a:t>
-                      </a:r>
-                    </a:p>
-                  </a:txBody>
-                  <a:tcPr>
-                    <a:solidFill>
-                      <a:srgbClr val="FFFFFF"/>
-                    </a:solidFill>
-                  </a:tcPr>
-                </a:tc>
-                <a:tc>
-                  <a:txBody>
-                    <a:bodyPr/>
-                    <a:lstStyle/>
-                    <a:p>
-                      <a:r>
-                        <a:rPr sz="1500">
-                          <a:solidFill>
-                            <a:srgbClr val="0B0B0B"/>
-                          </a:solidFill>
-                        </a:rPr>
-                        <a:t>31</a:t>
-                      </a:r>
-                    </a:p>
-                  </a:txBody>
-                  <a:tcPr>
-                    <a:solidFill>
-                      <a:srgbClr val="FFFFFF"/>
-                    </a:solidFill>
-                  </a:tcPr>
-                </a:tc>
-                <a:tc>
-                  <a:txBody>
-                    <a:bodyPr/>
-                    <a:lstStyle/>
-                    <a:p>
-                      <a:r>
-                        <a:rPr sz="1500">
-                          <a:solidFill>
-                            <a:srgbClr val="0B0B0B"/>
-                          </a:solidFill>
-                        </a:rPr>
-                        <a:t>17.2 m/s</a:t>
-                      </a:r>
-                    </a:p>
-                  </a:txBody>
-                  <a:tcPr>
-                    <a:solidFill>
-                      <a:srgbClr val="FFFFFF"/>
-                    </a:solidFill>
-                  </a:tcPr>
-                </a:tc>
-                <a:tc>
-                  <a:txBody>
-                    <a:bodyPr/>
-                    <a:lstStyle/>
-                    <a:p>
-                      <a:r>
-                        <a:rPr sz="1500">
-                          <a:solidFill>
-                            <a:srgbClr val="0B0B0B"/>
-                          </a:solidFill>
-                        </a:rPr>
-                        <a:t>72.4 ± 4.7</a:t>
-                      </a:r>
-                    </a:p>
-                  </a:txBody>
-                  <a:tcPr>
-                    <a:solidFill>
-                      <a:srgbClr val="FFFFFF"/>
-                    </a:solidFill>
-                  </a:tcPr>
-                </a:tc>
-              </a:tr>
-              <a:tr h="420624">
-                <a:tc>
-                  <a:txBody>
-                    <a:bodyPr/>
-                    <a:lstStyle/>
-                    <a:p>
-                      <a:r>
-                        <a:rPr sz="1500">
-                          <a:solidFill>
-                            <a:srgbClr val="0B0B0B"/>
-                          </a:solidFill>
-                        </a:rPr>
-                        <a:t>both</a:t>
-                      </a:r>
-                    </a:p>
-                  </a:txBody>
-                  <a:tcPr>
-                    <a:solidFill>
-                      <a:srgbClr val="F3F3F1"/>
-                    </a:solidFill>
-                  </a:tcPr>
-                </a:tc>
-                <a:tc>
-                  <a:txBody>
-                    <a:bodyPr/>
-                    <a:lstStyle/>
-                    <a:p>
-                      <a:r>
-                        <a:rPr sz="1500">
-                          <a:solidFill>
-                            <a:srgbClr val="0B0B0B"/>
-                          </a:solidFill>
-                        </a:rPr>
-                        <a:t>25</a:t>
-                      </a:r>
-                    </a:p>
-                  </a:txBody>
-                  <a:tcPr>
-                    <a:solidFill>
-                      <a:srgbClr val="F3F3F1"/>
-                    </a:solidFill>
-                  </a:tcPr>
-                </a:tc>
-                <a:tc>
-                  <a:txBody>
-                    <a:bodyPr/>
-                    <a:lstStyle/>
-                    <a:p>
-                      <a:r>
-                        <a:rPr sz="1500">
-                          <a:solidFill>
-                            <a:srgbClr val="0B0B0B"/>
-                          </a:solidFill>
-                        </a:rPr>
-                        <a:t>11.5 m/s</a:t>
-                      </a:r>
-                    </a:p>
-                  </a:txBody>
-                  <a:tcPr>
-                    <a:solidFill>
-                      <a:srgbClr val="F3F3F1"/>
-                    </a:solidFill>
-                  </a:tcPr>
-                </a:tc>
-                <a:tc>
-                  <a:txBody>
-                    <a:bodyPr/>
-                    <a:lstStyle/>
-                    <a:p>
-                      <a:r>
-                        <a:rPr sz="1500">
-                          <a:solidFill>
-                            <a:srgbClr val="0B0B0B"/>
-                          </a:solidFill>
-                        </a:rPr>
-                        <a:t>71.8 ± 3.5</a:t>
-                      </a:r>
-                    </a:p>
-                  </a:txBody>
-                  <a:tcPr>
-                    <a:solidFill>
-                      <a:srgbClr val="F3F3F1"/>
-                    </a:solidFill>
-                  </a:tcPr>
-                </a:tc>
-              </a:tr>
-            </a:tbl>
-          </a:graphicData>
-        </a:graphic>
-      </p:graphicFrame>
-      <p:sp>
-        <p:nvSpPr>
-          <p:cNvPr id="7" name="Rectangle 6"/>
+      <p:pic>
+        <p:nvPicPr>
+          <p:cNvPr id="5" name="Picture 4" descr="fig_p9_diagnosis.png"/>
+          <p:cNvPicPr>
+            <a:picLocks noChangeAspect="1"/>
+          </p:cNvPicPr>
+          <p:nvPr/>
+        </p:nvPicPr>
+        <p:blipFill>
+          <a:blip r:embed="rId2"/>
+          <a:stretch>
+            <a:fillRect/>
+          </a:stretch>
+        </p:blipFill>
+        <p:spPr>
+          <a:xfrm>
+            <a:off x="2901372" y="1097280"/>
+            <a:ext cx="6386208" cy="4617720"/>
+          </a:xfrm>
+          <a:prstGeom prst="rect">
+            <a:avLst/>
+          </a:prstGeom>
+        </p:spPr>
+      </p:pic>
+      <p:sp>
+        <p:nvSpPr>
+          <p:cNvPr id="6" name="Rectangle 5"/>
           <p:cNvSpPr/>
           <p:nvPr/>
         </p:nvSpPr>
         <p:spPr>
           <a:xfrm>
-            <a:off x="457200" y="5760720"/>
-            <a:ext cx="11274552" cy="566928"/>
+            <a:off x="365760" y="5806440"/>
+            <a:ext cx="11457432" cy="914400"/>
           </a:xfrm>
           <a:prstGeom prst="rect">
             <a:avLst/>
@@ -8255,12 +7256,12 @@
           <a:p>
             <a:pPr algn="ctr"/>
             <a:r>
-              <a:rPr sz="1600" b="1">
+              <a:rPr sz="2000" b="1">
                 <a:solidFill>
                   <a:srgbClr val="0B0B0B"/>
                 </a:solidFill>
               </a:rPr>
-              <a:t>K is stable (69.5–73.8) under every variant. The 11.5 m/s variant was chosen after seeing residuals: reported, not claimed.</a:t>
+              <a:t>Borrowed arcs, intra-night drift, the no-flat night, 09-13’s bad arc.</a:t>
             </a:r>
           </a:p>
         </p:txBody>
@@ -8334,8 +7335,8 @@
         </p:nvSpPr>
         <p:spPr>
           <a:xfrm>
-            <a:off x="502920" y="256032"/>
-            <a:ext cx="11155680" cy="822960"/>
+            <a:off x="502920" y="228600"/>
+            <a:ext cx="10607040" cy="822960"/>
           </a:xfrm>
           <a:prstGeom prst="rect">
             <a:avLst/>
@@ -8350,16 +7351,16 @@
           <a:p>
             <a:pPr>
               <a:spcAft>
-                <a:spcPts val="600"/>
+                <a:spcPts val="800"/>
               </a:spcAft>
             </a:pPr>
             <a:r>
-              <a:rPr sz="2800" b="1">
+              <a:rPr sz="3000" b="1">
                 <a:solidFill>
                   <a:srgbClr val="0B0B0B"/>
                 </a:solidFill>
               </a:rPr>
-              <a:t>Where we stand</a:t>
+              <a:t>What is left: re-combining without the weakest data</a:t>
             </a:r>
           </a:p>
         </p:txBody>
@@ -8372,8 +7373,8 @@
         </p:nvSpPr>
         <p:spPr>
           <a:xfrm>
-            <a:off x="502920" y="6419088"/>
-            <a:ext cx="9601200" cy="320040"/>
+            <a:off x="10972800" y="274320"/>
+            <a:ext cx="822960" cy="457200"/>
           </a:xfrm>
           <a:prstGeom prst="rect">
             <a:avLst/>
@@ -8386,94 +7387,576 @@
           </a:bodyPr>
           <a:lstStyle/>
           <a:p>
-            <a:pPr>
+            <a:pPr algn="r">
               <a:spcAft>
-                <a:spcPts val="600"/>
+                <a:spcPts val="800"/>
               </a:spcAft>
             </a:pPr>
             <a:r>
-              <a:rPr sz="1000" b="0">
+              <a:rPr sz="2000" b="0">
                 <a:solidFill>
                   <a:srgbClr val="52514E"/>
                 </a:solidFill>
               </a:rPr>
-              <a:t>Phase 3   ·   HD 187123 b from the 1998 HIRES frames — technical summary</a:t>
-            </a:r>
-          </a:p>
-        </p:txBody>
-      </p:sp>
-      <p:sp>
-        <p:nvSpPr>
-          <p:cNvPr id="5" name="TextBox 4"/>
-          <p:cNvSpPr txBox="1"/>
-          <p:nvPr/>
-        </p:nvSpPr>
-        <p:spPr>
-          <a:xfrm>
-            <a:off x="10972800" y="6419088"/>
-            <a:ext cx="731520" cy="320040"/>
-          </a:xfrm>
-          <a:prstGeom prst="rect">
-            <a:avLst/>
-          </a:prstGeom>
-          <a:noFill/>
-        </p:spPr>
-        <p:txBody>
-          <a:bodyPr wrap="square">
-            <a:spAutoFit/>
-          </a:bodyPr>
-          <a:lstStyle/>
-          <a:p>
-            <a:pPr algn="r">
-              <a:spcAft>
-                <a:spcPts val="600"/>
-              </a:spcAft>
-            </a:pPr>
-            <a:r>
-              <a:rPr sz="1000" b="0">
-                <a:solidFill>
-                  <a:srgbClr val="52514E"/>
-                </a:solidFill>
-              </a:rPr>
               <a:t>25</a:t>
             </a:r>
           </a:p>
         </p:txBody>
       </p:sp>
-      <p:pic>
-        <p:nvPicPr>
-          <p:cNvPr id="6" name="Picture 5" descr="fig8_precision.png"/>
-          <p:cNvPicPr>
-            <a:picLocks noChangeAspect="1"/>
-          </p:cNvPicPr>
-          <p:nvPr/>
-        </p:nvPicPr>
-        <p:blipFill>
-          <a:blip r:embed="rId2"/>
-          <a:stretch>
-            <a:fillRect/>
-          </a:stretch>
-        </p:blipFill>
-        <p:spPr>
-          <a:xfrm>
-            <a:off x="457200" y="1203946"/>
-            <a:ext cx="11274552" cy="4404387"/>
-          </a:xfrm>
-          <a:prstGeom prst="rect">
-            <a:avLst/>
-          </a:prstGeom>
-        </p:spPr>
-      </p:pic>
-      <p:sp>
-        <p:nvSpPr>
-          <p:cNvPr id="7" name="Rectangle 6"/>
+      <p:graphicFrame>
+        <p:nvGraphicFramePr>
+          <p:cNvPr id="5" name="Table 4"/>
+          <p:cNvGraphicFramePr>
+            <a:graphicFrameLocks noGrp="1"/>
+          </p:cNvGraphicFramePr>
+          <p:nvPr/>
+        </p:nvGraphicFramePr>
+        <p:xfrm>
+          <a:off x="457200" y="1234440"/>
+          <a:ext cx="11274552" cy="3291840"/>
+        </p:xfrm>
+        <a:graphic>
+          <a:graphicData uri="http://schemas.openxmlformats.org/drawingml/2006/table">
+            <a:tbl>
+              <a:tblPr firstRow="1" bandRow="1">
+                <a:tableStyleId>{5C22544A-7EE6-4342-B048-85BDC9FD1C3A}</a:tableStyleId>
+              </a:tblPr>
+              <a:tblGrid>
+                <a:gridCol w="5394960"/>
+                <a:gridCol w="1554480"/>
+                <a:gridCol w="1554480"/>
+                <a:gridCol w="2770632"/>
+              </a:tblGrid>
+              <a:tr h="548640">
+                <a:tc>
+                  <a:txBody>
+                    <a:bodyPr/>
+                    <a:lstStyle/>
+                    <a:p>
+                      <a:r>
+                        <a:rPr sz="2000" b="1">
+                          <a:solidFill>
+                            <a:srgbClr val="FFFFFF"/>
+                          </a:solidFill>
+                        </a:rPr>
+                        <a:t>variant</a:t>
+                      </a:r>
+                    </a:p>
+                  </a:txBody>
+                  <a:tcPr marT="36576" marB="36576">
+                    <a:solidFill>
+                      <a:srgbClr val="2A78D6"/>
+                    </a:solidFill>
+                  </a:tcPr>
+                </a:tc>
+                <a:tc>
+                  <a:txBody>
+                    <a:bodyPr/>
+                    <a:lstStyle/>
+                    <a:p>
+                      <a:r>
+                        <a:rPr sz="2000" b="1">
+                          <a:solidFill>
+                            <a:srgbClr val="FFFFFF"/>
+                          </a:solidFill>
+                        </a:rPr>
+                        <a:t>epochs</a:t>
+                      </a:r>
+                    </a:p>
+                  </a:txBody>
+                  <a:tcPr marT="36576" marB="36576">
+                    <a:solidFill>
+                      <a:srgbClr val="2A78D6"/>
+                    </a:solidFill>
+                  </a:tcPr>
+                </a:tc>
+                <a:tc>
+                  <a:txBody>
+                    <a:bodyPr/>
+                    <a:lstStyle/>
+                    <a:p>
+                      <a:r>
+                        <a:rPr sz="2000" b="1">
+                          <a:solidFill>
+                            <a:srgbClr val="FFFFFF"/>
+                          </a:solidFill>
+                        </a:rPr>
+                        <a:t>rms</a:t>
+                      </a:r>
+                    </a:p>
+                  </a:txBody>
+                  <a:tcPr marT="36576" marB="36576">
+                    <a:solidFill>
+                      <a:srgbClr val="2A78D6"/>
+                    </a:solidFill>
+                  </a:tcPr>
+                </a:tc>
+                <a:tc>
+                  <a:txBody>
+                    <a:bodyPr/>
+                    <a:lstStyle/>
+                    <a:p>
+                      <a:r>
+                        <a:rPr sz="2000" b="1">
+                          <a:solidFill>
+                            <a:srgbClr val="FFFFFF"/>
+                          </a:solidFill>
+                        </a:rPr>
+                        <a:t>K (m/s)</a:t>
+                      </a:r>
+                    </a:p>
+                  </a:txBody>
+                  <a:tcPr marT="36576" marB="36576">
+                    <a:solidFill>
+                      <a:srgbClr val="2A78D6"/>
+                    </a:solidFill>
+                  </a:tcPr>
+                </a:tc>
+              </a:tr>
+              <a:tr h="548640">
+                <a:tc>
+                  <a:txBody>
+                    <a:bodyPr/>
+                    <a:lstStyle/>
+                    <a:p>
+                      <a:r>
+                        <a:rPr sz="2000" b="0">
+                          <a:solidFill>
+                            <a:srgbClr val="0B0B0B"/>
+                          </a:solidFill>
+                        </a:rPr>
+                        <a:t>everything (the result)</a:t>
+                      </a:r>
+                    </a:p>
+                  </a:txBody>
+                  <a:tcPr marT="36576" marB="36576">
+                    <a:solidFill>
+                      <a:srgbClr val="F3F3F1"/>
+                    </a:solidFill>
+                  </a:tcPr>
+                </a:tc>
+                <a:tc>
+                  <a:txBody>
+                    <a:bodyPr/>
+                    <a:lstStyle/>
+                    <a:p>
+                      <a:r>
+                        <a:rPr sz="2000" b="0">
+                          <a:solidFill>
+                            <a:srgbClr val="0B0B0B"/>
+                          </a:solidFill>
+                        </a:rPr>
+                        <a:t>31</a:t>
+                      </a:r>
+                    </a:p>
+                  </a:txBody>
+                  <a:tcPr marT="36576" marB="36576">
+                    <a:solidFill>
+                      <a:srgbClr val="F3F3F1"/>
+                    </a:solidFill>
+                  </a:tcPr>
+                </a:tc>
+                <a:tc>
+                  <a:txBody>
+                    <a:bodyPr/>
+                    <a:lstStyle/>
+                    <a:p>
+                      <a:r>
+                        <a:rPr sz="2000" b="0">
+                          <a:solidFill>
+                            <a:srgbClr val="0B0B0B"/>
+                          </a:solidFill>
+                        </a:rPr>
+                        <a:t>25.8</a:t>
+                      </a:r>
+                    </a:p>
+                  </a:txBody>
+                  <a:tcPr marT="36576" marB="36576">
+                    <a:solidFill>
+                      <a:srgbClr val="F3F3F1"/>
+                    </a:solidFill>
+                  </a:tcPr>
+                </a:tc>
+                <a:tc>
+                  <a:txBody>
+                    <a:bodyPr/>
+                    <a:lstStyle/>
+                    <a:p>
+                      <a:r>
+                        <a:rPr sz="2000" b="0">
+                          <a:solidFill>
+                            <a:srgbClr val="0B0B0B"/>
+                          </a:solidFill>
+                        </a:rPr>
+                        <a:t>72.4 ± 7.1</a:t>
+                      </a:r>
+                    </a:p>
+                  </a:txBody>
+                  <a:tcPr marT="36576" marB="36576">
+                    <a:solidFill>
+                      <a:srgbClr val="F3F3F1"/>
+                    </a:solidFill>
+                  </a:tcPr>
+                </a:tc>
+              </a:tr>
+              <a:tr h="548640">
+                <a:tc>
+                  <a:txBody>
+                    <a:bodyPr/>
+                    <a:lstStyle/>
+                    <a:p>
+                      <a:r>
+                        <a:rPr sz="2000" b="0">
+                          <a:solidFill>
+                            <a:srgbClr val="0B0B0B"/>
+                          </a:solidFill>
+                        </a:rPr>
+                        <a:t>tellurics masked</a:t>
+                      </a:r>
+                    </a:p>
+                  </a:txBody>
+                  <a:tcPr marT="36576" marB="36576">
+                    <a:solidFill>
+                      <a:srgbClr val="FFFFFF"/>
+                    </a:solidFill>
+                  </a:tcPr>
+                </a:tc>
+                <a:tc>
+                  <a:txBody>
+                    <a:bodyPr/>
+                    <a:lstStyle/>
+                    <a:p>
+                      <a:r>
+                        <a:rPr sz="2000" b="0">
+                          <a:solidFill>
+                            <a:srgbClr val="0B0B0B"/>
+                          </a:solidFill>
+                        </a:rPr>
+                        <a:t>31</a:t>
+                      </a:r>
+                    </a:p>
+                  </a:txBody>
+                  <a:tcPr marT="36576" marB="36576">
+                    <a:solidFill>
+                      <a:srgbClr val="FFFFFF"/>
+                    </a:solidFill>
+                  </a:tcPr>
+                </a:tc>
+                <a:tc>
+                  <a:txBody>
+                    <a:bodyPr/>
+                    <a:lstStyle/>
+                    <a:p>
+                      <a:r>
+                        <a:rPr sz="2000" b="0">
+                          <a:solidFill>
+                            <a:srgbClr val="0B0B0B"/>
+                          </a:solidFill>
+                        </a:rPr>
+                        <a:t>24.2</a:t>
+                      </a:r>
+                    </a:p>
+                  </a:txBody>
+                  <a:tcPr marT="36576" marB="36576">
+                    <a:solidFill>
+                      <a:srgbClr val="FFFFFF"/>
+                    </a:solidFill>
+                  </a:tcPr>
+                </a:tc>
+                <a:tc>
+                  <a:txBody>
+                    <a:bodyPr/>
+                    <a:lstStyle/>
+                    <a:p>
+                      <a:r>
+                        <a:rPr sz="2000" b="0">
+                          <a:solidFill>
+                            <a:srgbClr val="0B0B0B"/>
+                          </a:solidFill>
+                        </a:rPr>
+                        <a:t>73.0 ± 6.7</a:t>
+                      </a:r>
+                    </a:p>
+                  </a:txBody>
+                  <a:tcPr marT="36576" marB="36576">
+                    <a:solidFill>
+                      <a:srgbClr val="FFFFFF"/>
+                    </a:solidFill>
+                  </a:tcPr>
+                </a:tc>
+              </a:tr>
+              <a:tr h="548640">
+                <a:tc>
+                  <a:txBody>
+                    <a:bodyPr/>
+                    <a:lstStyle/>
+                    <a:p>
+                      <a:r>
+                        <a:rPr sz="2000" b="0">
+                          <a:solidFill>
+                            <a:srgbClr val="0B0B0B"/>
+                          </a:solidFill>
+                        </a:rPr>
+                        <a:t>no epochs with ≤ 8 orders</a:t>
+                      </a:r>
+                    </a:p>
+                  </a:txBody>
+                  <a:tcPr marT="36576" marB="36576">
+                    <a:solidFill>
+                      <a:srgbClr val="F3F3F1"/>
+                    </a:solidFill>
+                  </a:tcPr>
+                </a:tc>
+                <a:tc>
+                  <a:txBody>
+                    <a:bodyPr/>
+                    <a:lstStyle/>
+                    <a:p>
+                      <a:r>
+                        <a:rPr sz="2000" b="0">
+                          <a:solidFill>
+                            <a:srgbClr val="0B0B0B"/>
+                          </a:solidFill>
+                        </a:rPr>
+                        <a:t>25</a:t>
+                      </a:r>
+                    </a:p>
+                  </a:txBody>
+                  <a:tcPr marT="36576" marB="36576">
+                    <a:solidFill>
+                      <a:srgbClr val="F3F3F1"/>
+                    </a:solidFill>
+                  </a:tcPr>
+                </a:tc>
+                <a:tc>
+                  <a:txBody>
+                    <a:bodyPr/>
+                    <a:lstStyle/>
+                    <a:p>
+                      <a:r>
+                        <a:rPr sz="2000" b="0">
+                          <a:solidFill>
+                            <a:srgbClr val="0B0B0B"/>
+                          </a:solidFill>
+                        </a:rPr>
+                        <a:t>18.2</a:t>
+                      </a:r>
+                    </a:p>
+                  </a:txBody>
+                  <a:tcPr marT="36576" marB="36576">
+                    <a:solidFill>
+                      <a:srgbClr val="F3F3F1"/>
+                    </a:solidFill>
+                  </a:tcPr>
+                </a:tc>
+                <a:tc>
+                  <a:txBody>
+                    <a:bodyPr/>
+                    <a:lstStyle/>
+                    <a:p>
+                      <a:r>
+                        <a:rPr sz="2000" b="0">
+                          <a:solidFill>
+                            <a:srgbClr val="0B0B0B"/>
+                          </a:solidFill>
+                        </a:rPr>
+                        <a:t>70.8 ± 5.6</a:t>
+                      </a:r>
+                    </a:p>
+                  </a:txBody>
+                  <a:tcPr marT="36576" marB="36576">
+                    <a:solidFill>
+                      <a:srgbClr val="F3F3F1"/>
+                    </a:solidFill>
+                  </a:tcPr>
+                </a:tc>
+              </a:tr>
+              <a:tr h="548640">
+                <a:tc>
+                  <a:txBody>
+                    <a:bodyPr/>
+                    <a:lstStyle/>
+                    <a:p>
+                      <a:r>
+                        <a:rPr sz="2000" b="0">
+                          <a:solidFill>
+                            <a:srgbClr val="0B0B0B"/>
+                          </a:solidFill>
+                        </a:rPr>
+                        <a:t>no red orders 58–61</a:t>
+                      </a:r>
+                    </a:p>
+                  </a:txBody>
+                  <a:tcPr marT="36576" marB="36576">
+                    <a:solidFill>
+                      <a:srgbClr val="FFFFFF"/>
+                    </a:solidFill>
+                  </a:tcPr>
+                </a:tc>
+                <a:tc>
+                  <a:txBody>
+                    <a:bodyPr/>
+                    <a:lstStyle/>
+                    <a:p>
+                      <a:r>
+                        <a:rPr sz="2000" b="0">
+                          <a:solidFill>
+                            <a:srgbClr val="0B0B0B"/>
+                          </a:solidFill>
+                        </a:rPr>
+                        <a:t>31</a:t>
+                      </a:r>
+                    </a:p>
+                  </a:txBody>
+                  <a:tcPr marT="36576" marB="36576">
+                    <a:solidFill>
+                      <a:srgbClr val="FFFFFF"/>
+                    </a:solidFill>
+                  </a:tcPr>
+                </a:tc>
+                <a:tc>
+                  <a:txBody>
+                    <a:bodyPr/>
+                    <a:lstStyle/>
+                    <a:p>
+                      <a:r>
+                        <a:rPr sz="2000" b="0">
+                          <a:solidFill>
+                            <a:srgbClr val="0B0B0B"/>
+                          </a:solidFill>
+                        </a:rPr>
+                        <a:t>17.2</a:t>
+                      </a:r>
+                    </a:p>
+                  </a:txBody>
+                  <a:tcPr marT="36576" marB="36576">
+                    <a:solidFill>
+                      <a:srgbClr val="FFFFFF"/>
+                    </a:solidFill>
+                  </a:tcPr>
+                </a:tc>
+                <a:tc>
+                  <a:txBody>
+                    <a:bodyPr/>
+                    <a:lstStyle/>
+                    <a:p>
+                      <a:r>
+                        <a:rPr sz="2000" b="0">
+                          <a:solidFill>
+                            <a:srgbClr val="0B0B0B"/>
+                          </a:solidFill>
+                        </a:rPr>
+                        <a:t>72.4 ± 4.7</a:t>
+                      </a:r>
+                    </a:p>
+                  </a:txBody>
+                  <a:tcPr marT="36576" marB="36576">
+                    <a:solidFill>
+                      <a:srgbClr val="FFFFFF"/>
+                    </a:solidFill>
+                  </a:tcPr>
+                </a:tc>
+              </a:tr>
+              <a:tr h="548640">
+                <a:tc>
+                  <a:txBody>
+                    <a:bodyPr/>
+                    <a:lstStyle/>
+                    <a:p>
+                      <a:r>
+                        <a:rPr sz="2000" b="0">
+                          <a:solidFill>
+                            <a:srgbClr val="0B0B0B"/>
+                          </a:solidFill>
+                        </a:rPr>
+                        <a:t>both</a:t>
+                      </a:r>
+                    </a:p>
+                  </a:txBody>
+                  <a:tcPr marT="36576" marB="36576">
+                    <a:solidFill>
+                      <a:srgbClr val="F3F3F1"/>
+                    </a:solidFill>
+                  </a:tcPr>
+                </a:tc>
+                <a:tc>
+                  <a:txBody>
+                    <a:bodyPr/>
+                    <a:lstStyle/>
+                    <a:p>
+                      <a:r>
+                        <a:rPr sz="2000" b="0">
+                          <a:solidFill>
+                            <a:srgbClr val="0B0B0B"/>
+                          </a:solidFill>
+                        </a:rPr>
+                        <a:t>25</a:t>
+                      </a:r>
+                    </a:p>
+                  </a:txBody>
+                  <a:tcPr marT="36576" marB="36576">
+                    <a:solidFill>
+                      <a:srgbClr val="F3F3F1"/>
+                    </a:solidFill>
+                  </a:tcPr>
+                </a:tc>
+                <a:tc>
+                  <a:txBody>
+                    <a:bodyPr/>
+                    <a:lstStyle/>
+                    <a:p>
+                      <a:r>
+                        <a:rPr sz="2000" b="0">
+                          <a:solidFill>
+                            <a:srgbClr val="0B0B0B"/>
+                          </a:solidFill>
+                        </a:rPr>
+                        <a:t>11.5</a:t>
+                      </a:r>
+                    </a:p>
+                  </a:txBody>
+                  <a:tcPr marT="36576" marB="36576">
+                    <a:solidFill>
+                      <a:srgbClr val="F3F3F1"/>
+                    </a:solidFill>
+                  </a:tcPr>
+                </a:tc>
+                <a:tc>
+                  <a:txBody>
+                    <a:bodyPr/>
+                    <a:lstStyle/>
+                    <a:p>
+                      <a:r>
+                        <a:rPr sz="2000" b="0">
+                          <a:solidFill>
+                            <a:srgbClr val="0B0B0B"/>
+                          </a:solidFill>
+                        </a:rPr>
+                        <a:t>71.8 ± 3.5</a:t>
+                      </a:r>
+                    </a:p>
+                  </a:txBody>
+                  <a:tcPr marT="36576" marB="36576">
+                    <a:solidFill>
+                      <a:srgbClr val="F3F3F1"/>
+                    </a:solidFill>
+                  </a:tcPr>
+                </a:tc>
+              </a:tr>
+            </a:tbl>
+          </a:graphicData>
+        </a:graphic>
+      </p:graphicFrame>
+      <p:sp>
+        <p:nvSpPr>
+          <p:cNvPr id="6" name="Rectangle 5"/>
           <p:cNvSpPr/>
           <p:nvPr/>
         </p:nvSpPr>
         <p:spPr>
           <a:xfrm>
-            <a:off x="457200" y="5760720"/>
-            <a:ext cx="11274552" cy="566928"/>
+            <a:off x="365760" y="5806440"/>
+            <a:ext cx="11457432" cy="914400"/>
           </a:xfrm>
           <a:prstGeom prst="rect">
             <a:avLst/>
@@ -8505,12 +7988,12 @@
           <a:p>
             <a:pPr algn="ctr"/>
             <a:r>
-              <a:rPr sz="1600" b="1">
+              <a:rPr sz="2000" b="1">
                 <a:solidFill>
                   <a:srgbClr val="0B0B0B"/>
                 </a:solidFill>
               </a:rPr>
-              <a:t>Photon budget 1.4 m/s; achieved 26 m/s. The gap is modelling, not photons.</a:t>
+              <a:t>K is stable (69.5–73.8). The 11.5 m/s variant was chosen after seeing residuals: reported, not claimed.</a:t>
             </a:r>
           </a:p>
         </p:txBody>
@@ -8584,8 +8067,8 @@
         </p:nvSpPr>
         <p:spPr>
           <a:xfrm>
-            <a:off x="502920" y="256032"/>
-            <a:ext cx="11155680" cy="822960"/>
+            <a:off x="502920" y="228600"/>
+            <a:ext cx="10607040" cy="822960"/>
           </a:xfrm>
           <a:prstGeom prst="rect">
             <a:avLst/>
@@ -8600,16 +8083,16 @@
           <a:p>
             <a:pPr>
               <a:spcAft>
-                <a:spcPts val="600"/>
+                <a:spcPts val="800"/>
               </a:spcAft>
             </a:pPr>
             <a:r>
-              <a:rPr sz="2800" b="1">
+              <a:rPr sz="3000" b="1">
                 <a:solidFill>
                   <a:srgbClr val="0B0B0B"/>
                 </a:solidFill>
               </a:rPr>
-              <a:t>Why 26 m/s and not 3</a:t>
+              <a:t>Where we stand</a:t>
             </a:r>
           </a:p>
         </p:txBody>
@@ -8622,8 +8105,8 @@
         </p:nvSpPr>
         <p:spPr>
           <a:xfrm>
-            <a:off x="502920" y="6419088"/>
-            <a:ext cx="9601200" cy="320040"/>
+            <a:off x="10972800" y="274320"/>
+            <a:ext cx="822960" cy="457200"/>
           </a:xfrm>
           <a:prstGeom prst="rect">
             <a:avLst/>
@@ -8636,168 +8119,56 @@
           </a:bodyPr>
           <a:lstStyle/>
           <a:p>
-            <a:pPr>
+            <a:pPr algn="r">
               <a:spcAft>
-                <a:spcPts val="600"/>
+                <a:spcPts val="800"/>
               </a:spcAft>
             </a:pPr>
             <a:r>
-              <a:rPr sz="1000" b="0">
+              <a:rPr sz="2000" b="0">
                 <a:solidFill>
                   <a:srgbClr val="52514E"/>
                 </a:solidFill>
               </a:rPr>
-              <a:t>Summary   ·   HD 187123 b from the 1998 HIRES frames — technical summary</a:t>
-            </a:r>
-          </a:p>
-        </p:txBody>
-      </p:sp>
-      <p:sp>
-        <p:nvSpPr>
-          <p:cNvPr id="5" name="TextBox 4"/>
-          <p:cNvSpPr txBox="1"/>
-          <p:nvPr/>
-        </p:nvSpPr>
-        <p:spPr>
-          <a:xfrm>
-            <a:off x="10972800" y="6419088"/>
-            <a:ext cx="731520" cy="320040"/>
-          </a:xfrm>
-          <a:prstGeom prst="rect">
-            <a:avLst/>
-          </a:prstGeom>
-          <a:noFill/>
-        </p:spPr>
-        <p:txBody>
-          <a:bodyPr wrap="square">
-            <a:spAutoFit/>
-          </a:bodyPr>
-          <a:lstStyle/>
-          <a:p>
-            <a:pPr algn="r">
-              <a:spcAft>
-                <a:spcPts val="600"/>
-              </a:spcAft>
-            </a:pPr>
-            <a:r>
-              <a:rPr sz="1000" b="0">
-                <a:solidFill>
-                  <a:srgbClr val="52514E"/>
-                </a:solidFill>
-              </a:rPr>
               <a:t>26</a:t>
             </a:r>
           </a:p>
         </p:txBody>
       </p:sp>
-      <p:sp>
-        <p:nvSpPr>
-          <p:cNvPr id="6" name="TextBox 5"/>
-          <p:cNvSpPr txBox="1"/>
-          <p:nvPr/>
-        </p:nvSpPr>
-        <p:spPr>
-          <a:xfrm>
-            <a:off x="640080" y="1234440"/>
-            <a:ext cx="10972800" cy="4572000"/>
-          </a:xfrm>
-          <a:prstGeom prst="rect">
-            <a:avLst/>
-          </a:prstGeom>
-          <a:noFill/>
-        </p:spPr>
-        <p:txBody>
-          <a:bodyPr wrap="square">
-            <a:spAutoFit/>
-          </a:bodyPr>
-          <a:lstStyle/>
-          <a:p>
-            <a:pPr>
-              <a:spcAft>
-                <a:spcPts val="600"/>
-              </a:spcAft>
-            </a:pPr>
-            <a:r>
-              <a:rPr sz="2000" b="0">
-                <a:solidFill>
-                  <a:srgbClr val="0B0B0B"/>
-                </a:solidFill>
-              </a:rPr>
-              <a:t>• The atlas is a different cell: per-chunk misfit χ²ν ≈ 20; the fixed part cancels, the rest does not</a:t>
-            </a:r>
-          </a:p>
-          <a:p>
-            <a:pPr>
-              <a:spcAft>
-                <a:spcPts val="600"/>
-              </a:spcAft>
-            </a:pPr>
-            <a:r>
-              <a:rPr sz="2000" b="0">
-                <a:solidFill>
-                  <a:srgbClr val="0B0B0B"/>
-                </a:solidFill>
-              </a:rPr>
-              <a:t>• Weak iodine in the red orders (58–61): errors coherent over whole orders; chunk weights cannot see it</a:t>
-            </a:r>
-          </a:p>
-          <a:p>
-            <a:pPr>
-              <a:spcAft>
-                <a:spcPts val="600"/>
-              </a:spcAft>
-            </a:pPr>
-            <a:r>
-              <a:rPr sz="2000" b="0">
-                <a:solidFill>
-                  <a:srgbClr val="0B0B0B"/>
-                </a:solidFill>
-              </a:rPr>
-              <a:t>• Six epochs with 2–8 usable orders (extraction quality at the ends of nights)</a:t>
-            </a:r>
-          </a:p>
-          <a:p>
-            <a:pPr>
-              <a:spcAft>
-                <a:spcPts val="600"/>
-              </a:spcAft>
-            </a:pPr>
-            <a:r>
-              <a:rPr sz="2000" b="0">
-                <a:solidFill>
-                  <a:srgbClr val="0B0B0B"/>
-                </a:solidFill>
-              </a:rPr>
-              <a:t>• A four-parameter super-Gaussian IP per chunk, against a decade-refined multi-Gaussian</a:t>
-            </a:r>
-          </a:p>
-          <a:p>
-            <a:pPr>
-              <a:spcAft>
-                <a:spcPts val="600"/>
-              </a:spcAft>
-            </a:pPr>
-            <a:r>
-              <a:rPr sz="2000" b="0">
-                <a:solidFill>
-                  <a:srgbClr val="0B0B0B"/>
-                </a:solidFill>
-              </a:rPr>
-              <a:t>• Tellurics unmodelled (small: 25.8 → 24.2 m/s); a marginal seasonal term (+0.75 ± 0.45 m/s per km/s)</a:t>
-            </a:r>
-          </a:p>
-        </p:txBody>
-      </p:sp>
-      <p:sp>
-        <p:nvSpPr>
-          <p:cNvPr id="7" name="Rectangle 6"/>
+      <p:pic>
+        <p:nvPicPr>
+          <p:cNvPr id="5" name="Picture 4" descr="fig8_precision.png"/>
+          <p:cNvPicPr>
+            <a:picLocks noChangeAspect="1"/>
+          </p:cNvPicPr>
+          <p:nvPr/>
+        </p:nvPicPr>
+        <p:blipFill>
+          <a:blip r:embed="rId2"/>
+          <a:stretch>
+            <a:fillRect/>
+          </a:stretch>
+        </p:blipFill>
+        <p:spPr>
+          <a:xfrm>
+            <a:off x="365760" y="1168225"/>
+            <a:ext cx="11457432" cy="4475829"/>
+          </a:xfrm>
+          <a:prstGeom prst="rect">
+            <a:avLst/>
+          </a:prstGeom>
+        </p:spPr>
+      </p:pic>
+      <p:sp>
+        <p:nvSpPr>
+          <p:cNvPr id="6" name="Rectangle 5"/>
           <p:cNvSpPr/>
           <p:nvPr/>
         </p:nvSpPr>
         <p:spPr>
           <a:xfrm>
-            <a:off x="457200" y="5760720"/>
-            <a:ext cx="11274552" cy="566928"/>
+            <a:off x="365760" y="5806440"/>
+            <a:ext cx="11457432" cy="914400"/>
           </a:xfrm>
           <a:prstGeom prst="rect">
             <a:avLst/>
@@ -8829,12 +8200,12 @@
           <a:p>
             <a:pPr algn="ctr"/>
             <a:r>
-              <a:rPr sz="1600" b="1">
+              <a:rPr sz="2000" b="1">
                 <a:solidFill>
                   <a:srgbClr val="0B0B0B"/>
                 </a:solidFill>
               </a:rPr>
-              <a:t>Largest single gain available: the HIRES cell’s own FTS spectrum, if it exists.</a:t>
+              <a:t>Photon budget 1.4 m/s; achieved 26 m/s. The gap is modelling, not photons.</a:t>
             </a:r>
           </a:p>
         </p:txBody>
@@ -8908,8 +8279,8 @@
         </p:nvSpPr>
         <p:spPr>
           <a:xfrm>
-            <a:off x="502920" y="256032"/>
-            <a:ext cx="11155680" cy="822960"/>
+            <a:off x="502920" y="228600"/>
+            <a:ext cx="10607040" cy="822960"/>
           </a:xfrm>
           <a:prstGeom prst="rect">
             <a:avLst/>
@@ -8924,16 +8295,16 @@
           <a:p>
             <a:pPr>
               <a:spcAft>
-                <a:spcPts val="600"/>
+                <a:spcPts val="800"/>
               </a:spcAft>
             </a:pPr>
             <a:r>
-              <a:rPr sz="2800" b="1">
+              <a:rPr sz="3000" b="1">
                 <a:solidFill>
                   <a:srgbClr val="0B0B0B"/>
                 </a:solidFill>
               </a:rPr>
-              <a:t>Upstream, and next</a:t>
+              <a:t>Why 26 m/s and not 3</a:t>
             </a:r>
           </a:p>
         </p:txBody>
@@ -8946,8 +8317,8 @@
         </p:nvSpPr>
         <p:spPr>
           <a:xfrm>
-            <a:off x="502920" y="6419088"/>
-            <a:ext cx="9601200" cy="320040"/>
+            <a:off x="10972800" y="274320"/>
+            <a:ext cx="822960" cy="457200"/>
           </a:xfrm>
           <a:prstGeom prst="rect">
             <a:avLst/>
@@ -8960,18 +8331,18 @@
           </a:bodyPr>
           <a:lstStyle/>
           <a:p>
-            <a:pPr>
+            <a:pPr algn="r">
               <a:spcAft>
-                <a:spcPts val="600"/>
+                <a:spcPts val="800"/>
               </a:spcAft>
             </a:pPr>
             <a:r>
-              <a:rPr sz="1000" b="0">
+              <a:rPr sz="2000" b="0">
                 <a:solidFill>
                   <a:srgbClr val="52514E"/>
                 </a:solidFill>
               </a:rPr>
-              <a:t>Summary   ·   HD 187123 b from the 1998 HIRES frames — technical summary</a:t>
+              <a:t>27</a:t>
             </a:r>
           </a:p>
         </p:txBody>
@@ -8984,8 +8355,8 @@
         </p:nvSpPr>
         <p:spPr>
           <a:xfrm>
-            <a:off x="10972800" y="6419088"/>
-            <a:ext cx="731520" cy="320040"/>
+            <a:off x="640080" y="1188720"/>
+            <a:ext cx="10972800" cy="4526280"/>
           </a:xfrm>
           <a:prstGeom prst="rect">
             <a:avLst/>
@@ -8998,131 +8369,129 @@
           </a:bodyPr>
           <a:lstStyle/>
           <a:p>
-            <a:pPr algn="r">
+            <a:pPr>
               <a:spcAft>
-                <a:spcPts val="600"/>
+                <a:spcPts val="800"/>
               </a:spcAft>
             </a:pPr>
             <a:r>
-              <a:rPr sz="1000" b="0">
-                <a:solidFill>
-                  <a:srgbClr val="52514E"/>
-                </a:solidFill>
-              </a:rPr>
-              <a:t>27</a:t>
-            </a:r>
-          </a:p>
-        </p:txBody>
-      </p:sp>
-      <p:sp>
-        <p:nvSpPr>
-          <p:cNvPr id="6" name="TextBox 5"/>
-          <p:cNvSpPr txBox="1"/>
-          <p:nvPr/>
-        </p:nvSpPr>
-        <p:spPr>
-          <a:xfrm>
-            <a:off x="640080" y="1234440"/>
-            <a:ext cx="10972800" cy="4572000"/>
-          </a:xfrm>
-          <a:prstGeom prst="rect">
-            <a:avLst/>
-          </a:prstGeom>
-          <a:noFill/>
-        </p:spPr>
-        <p:txBody>
-          <a:bodyPr wrap="square">
-            <a:spAutoFit/>
-          </a:bodyPr>
-          <a:lstStyle/>
+              <a:rPr sz="2200" b="0">
+                <a:solidFill>
+                  <a:srgbClr val="0B0B0B"/>
+                </a:solidFill>
+              </a:rPr>
+              <a:t>• The atlas is a different cell: part of its misfit does not cancel</a:t>
+            </a:r>
+          </a:p>
           <a:p>
             <a:pPr>
               <a:spcAft>
-                <a:spcPts val="600"/>
+                <a:spcPts val="800"/>
               </a:spcAft>
             </a:pPr>
             <a:r>
-              <a:rPr sz="2000" b="0">
+              <a:rPr sz="2200" b="0">
                 <a:solidFill>
                   <a:srgbClr val="0B0B0B"/>
                 </a:solidFill>
               </a:rPr>
-              <a:t>• PypeIt (to Ryan Cooke; email + GitHub issues + PR): 15 items</a:t>
-            </a:r>
-          </a:p>
-          <a:p>
-            <a:pPr lvl="1">
+              <a:t>• Weak iodine in the red orders: errors shared by whole orders</a:t>
+            </a:r>
+          </a:p>
+          <a:p>
+            <a:pPr>
               <a:spcAft>
-                <a:spcPts val="600"/>
+                <a:spcPts val="800"/>
               </a:spcAft>
             </a:pPr>
             <a:r>
-              <a:rPr sz="1800" b="0">
+              <a:rPr sz="2200" b="0">
                 <a:solidFill>
                   <a:srgbClr val="0B0B0B"/>
                 </a:solidFill>
               </a:rPr>
-              <a:t>– keck_hires_orig bugs (fixed on branch); run_pypeit exit 0 with no output; -o appends</a:t>
-            </a:r>
-          </a:p>
-          <a:p>
-            <a:pPr lvl="1">
+              <a:t>• Six epochs with only 2–8 usable orders</a:t>
+            </a:r>
+          </a:p>
+          <a:p>
+            <a:pPr>
               <a:spcAft>
-                <a:spcPts val="600"/>
+                <a:spcPts val="800"/>
               </a:spcAft>
             </a:pPr>
             <a:r>
-              <a:rPr sz="1800" b="0">
+              <a:rPr sz="2200" b="0">
                 <a:solidFill>
                   <a:srgbClr val="0B0B0B"/>
                 </a:solidFill>
               </a:rPr>
-              <a:t>– core/wave.py sign error and missing relativistic terms (still in develop)</a:t>
-            </a:r>
-          </a:p>
-          <a:p>
-            <a:pPr lvl="1">
+              <a:t>• A simple instrumental profile (4-parameter super-Gaussian)</a:t>
+            </a:r>
+          </a:p>
+          <a:p>
+            <a:pPr>
               <a:spcAft>
-                <a:spcPts val="600"/>
+                <a:spcPts val="800"/>
               </a:spcAft>
             </a:pPr>
             <a:r>
-              <a:rPr sz="1800" b="0">
+              <a:rPr sz="2200" b="0">
                 <a:solidFill>
                   <a:srgbClr val="0B0B0B"/>
                 </a:solidFill>
               </a:rPr>
-              <a:t>– ivar mis-scaled (2.35× OPT, 1.61× BOX); OPT_WAVE = 0 at masked pixels; biased boxcar at partial apertures; orders dropped silently</a:t>
-            </a:r>
-          </a:p>
-          <a:p>
-            <a:pPr>
-              <a:spcAft>
-                <a:spcPts val="600"/>
-              </a:spcAft>
-            </a:pPr>
-            <a:r>
-              <a:rPr sz="2000" b="0">
+              <a:t>• Tellurics unmodelled; a marginal seasonal term</a:t>
+            </a:r>
+          </a:p>
+        </p:txBody>
+      </p:sp>
+      <p:sp>
+        <p:nvSpPr>
+          <p:cNvPr id="6" name="Rectangle 5"/>
+          <p:cNvSpPr/>
+          <p:nvPr/>
+        </p:nvSpPr>
+        <p:spPr>
+          <a:xfrm>
+            <a:off x="365760" y="5806440"/>
+            <a:ext cx="11457432" cy="914400"/>
+          </a:xfrm>
+          <a:prstGeom prst="rect">
+            <a:avLst/>
+          </a:prstGeom>
+          <a:solidFill>
+            <a:srgbClr val="EEF4FC"/>
+          </a:solidFill>
+          <a:ln>
+            <a:noFill/>
+          </a:ln>
+        </p:spPr>
+        <p:style>
+          <a:lnRef idx="1">
+            <a:schemeClr val="accent1"/>
+          </a:lnRef>
+          <a:fillRef idx="3">
+            <a:schemeClr val="accent1"/>
+          </a:fillRef>
+          <a:effectRef idx="2">
+            <a:schemeClr val="accent1"/>
+          </a:effectRef>
+          <a:fontRef idx="minor">
+            <a:schemeClr val="lt1"/>
+          </a:fontRef>
+        </p:style>
+        <p:txBody>
+          <a:bodyPr rtlCol="0" anchor="ctr" wrap="square"/>
+          <a:lstStyle/>
+          <a:p>
+            <a:pPr algn="ctr"/>
+            <a:r>
+              <a:rPr sz="2000" b="1">
                 <a:solidFill>
                   <a:srgbClr val="0B0B0B"/>
                 </a:solidFill>
               </a:rPr>
-              <a:t>• pyodine (GitHub issues): 6 fork changes + 15 worked-around items (index/order traps, inverted Chauvenet, √χ² naming, jansson adjoint, spline, swallowed exceptions, …)</a:t>
-            </a:r>
-          </a:p>
-          <a:p>
-            <a:pPr>
-              <a:spcAft>
-                <a:spcPts val="600"/>
-              </a:spcAft>
-            </a:pPr>
-            <a:r>
-              <a:rPr sz="2000" b="0">
-                <a:solidFill>
-                  <a:srgbClr val="0B0B0B"/>
-                </a:solidFill>
-              </a:rPr>
-              <a:t>• Next: a HIRES-cell spectrum (FTS scan or empirical from B stars); order-level weighting; the PypeIt noise model</a:t>
+              <a:t>Largest single gain: the HIRES cell’s own FTS spectrum, if it exists.</a:t>
             </a:r>
           </a:p>
         </p:txBody>
@@ -9196,8 +8565,8 @@
         </p:nvSpPr>
         <p:spPr>
           <a:xfrm>
-            <a:off x="502920" y="256032"/>
-            <a:ext cx="11155680" cy="822960"/>
+            <a:off x="502920" y="228600"/>
+            <a:ext cx="10607040" cy="822960"/>
           </a:xfrm>
           <a:prstGeom prst="rect">
             <a:avLst/>
@@ -9212,16 +8581,16 @@
           <a:p>
             <a:pPr>
               <a:spcAft>
-                <a:spcPts val="600"/>
+                <a:spcPts val="800"/>
               </a:spcAft>
             </a:pPr>
             <a:r>
-              <a:rPr sz="2800" b="1">
+              <a:rPr sz="3000" b="1">
                 <a:solidFill>
                   <a:srgbClr val="0B0B0B"/>
                 </a:solidFill>
               </a:rPr>
-              <a:t>Reproducibility</a:t>
+              <a:t>Upstream reports</a:t>
             </a:r>
           </a:p>
         </p:txBody>
@@ -9234,8 +8603,8 @@
         </p:nvSpPr>
         <p:spPr>
           <a:xfrm>
-            <a:off x="502920" y="6419088"/>
-            <a:ext cx="9601200" cy="320040"/>
+            <a:off x="10972800" y="274320"/>
+            <a:ext cx="822960" cy="457200"/>
           </a:xfrm>
           <a:prstGeom prst="rect">
             <a:avLst/>
@@ -9248,18 +8617,18 @@
           </a:bodyPr>
           <a:lstStyle/>
           <a:p>
-            <a:pPr>
+            <a:pPr algn="r">
               <a:spcAft>
-                <a:spcPts val="600"/>
+                <a:spcPts val="800"/>
               </a:spcAft>
             </a:pPr>
             <a:r>
-              <a:rPr sz="1000" b="0">
+              <a:rPr sz="2000" b="0">
                 <a:solidFill>
                   <a:srgbClr val="52514E"/>
                 </a:solidFill>
               </a:rPr>
-              <a:t>Summary   ·   HD 187123 b from the 1998 HIRES frames — technical summary</a:t>
+              <a:t>28</a:t>
             </a:r>
           </a:p>
         </p:txBody>
@@ -9272,8 +8641,8 @@
         </p:nvSpPr>
         <p:spPr>
           <a:xfrm>
-            <a:off x="10972800" y="6419088"/>
-            <a:ext cx="731520" cy="320040"/>
+            <a:off x="640080" y="1188720"/>
+            <a:ext cx="10972800" cy="5303520"/>
           </a:xfrm>
           <a:prstGeom prst="rect">
             <a:avLst/>
@@ -9286,32 +8655,153 @@
           </a:bodyPr>
           <a:lstStyle/>
           <a:p>
-            <a:pPr algn="r">
+            <a:pPr>
               <a:spcAft>
-                <a:spcPts val="600"/>
+                <a:spcPts val="800"/>
               </a:spcAft>
             </a:pPr>
             <a:r>
-              <a:rPr sz="1000" b="0">
-                <a:solidFill>
-                  <a:srgbClr val="52514E"/>
-                </a:solidFill>
-              </a:rPr>
-              <a:t>28</a:t>
-            </a:r>
-          </a:p>
-        </p:txBody>
-      </p:sp>
-      <p:sp>
-        <p:nvSpPr>
-          <p:cNvPr id="6" name="TextBox 5"/>
+              <a:rPr sz="2200" b="0">
+                <a:solidFill>
+                  <a:srgbClr val="0B0B0B"/>
+                </a:solidFill>
+              </a:rPr>
+              <a:t>• PypeIt: 15 items (email to Ryan Cooke, issues, PR)</a:t>
+            </a:r>
+          </a:p>
+          <a:p>
+            <a:pPr lvl="1">
+              <a:spcAft>
+                <a:spcPts val="800"/>
+              </a:spcAft>
+            </a:pPr>
+            <a:r>
+              <a:rPr sz="2200" b="0">
+                <a:solidFill>
+                  <a:srgbClr val="0B0B0B"/>
+                </a:solidFill>
+              </a:rPr>
+              <a:t>– keck_hires_orig bugs; silent failures of run_pypeit</a:t>
+            </a:r>
+          </a:p>
+          <a:p>
+            <a:pPr lvl="1">
+              <a:spcAft>
+                <a:spcPts val="800"/>
+              </a:spcAft>
+            </a:pPr>
+            <a:r>
+              <a:rPr sz="2200" b="0">
+                <a:solidFill>
+                  <a:srgbClr val="0B0B0B"/>
+                </a:solidFill>
+              </a:rPr>
+              <a:t>– wave.py sign error; ivar mis-scaled; zero wavelengths</a:t>
+            </a:r>
+          </a:p>
+          <a:p>
+            <a:pPr>
+              <a:spcAft>
+                <a:spcPts val="800"/>
+              </a:spcAft>
+            </a:pPr>
+            <a:r>
+              <a:rPr sz="2200" b="0">
+                <a:solidFill>
+                  <a:srgbClr val="0B0B0B"/>
+                </a:solidFill>
+              </a:rPr>
+              <a:t>• pyodine: 21 items (GitHub issues)</a:t>
+            </a:r>
+          </a:p>
+          <a:p>
+            <a:pPr lvl="1">
+              <a:spcAft>
+                <a:spcPts val="800"/>
+              </a:spcAft>
+            </a:pPr>
+            <a:r>
+              <a:rPr sz="2200" b="0">
+                <a:solidFill>
+                  <a:srgbClr val="0B0B0B"/>
+                </a:solidFill>
+              </a:rPr>
+              <a:t>– 6 fork changes; index and order traps; swallowed errors</a:t>
+            </a:r>
+          </a:p>
+        </p:txBody>
+      </p:sp>
+    </p:spTree>
+  </p:cSld>
+  <p:clrMapOvr>
+    <a:masterClrMapping/>
+  </p:clrMapOvr>
+</p:sld>
+</file>
+
+<file path=ppt/slides/slide29.xml><?xml version="1.0" encoding="utf-8"?>
+<p:sld xmlns:a="http://schemas.openxmlformats.org/drawingml/2006/main" xmlns:p="http://schemas.openxmlformats.org/presentationml/2006/main" xmlns:r="http://schemas.openxmlformats.org/officeDocument/2006/relationships">
+  <p:cSld>
+    <p:spTree>
+      <p:nvGrpSpPr>
+        <p:cNvPr id="1" name=""/>
+        <p:cNvGrpSpPr/>
+        <p:nvPr/>
+      </p:nvGrpSpPr>
+      <p:grpSpPr/>
+      <p:sp>
+        <p:nvSpPr>
+          <p:cNvPr id="2" name="Rectangle 1"/>
+          <p:cNvSpPr/>
+          <p:nvPr/>
+        </p:nvSpPr>
+        <p:spPr>
+          <a:xfrm>
+            <a:off x="0" y="0"/>
+            <a:ext cx="12191695" cy="82296"/>
+          </a:xfrm>
+          <a:prstGeom prst="rect">
+            <a:avLst/>
+          </a:prstGeom>
+          <a:solidFill>
+            <a:srgbClr val="2A78D6"/>
+          </a:solidFill>
+          <a:ln>
+            <a:noFill/>
+          </a:ln>
+        </p:spPr>
+        <p:style>
+          <a:lnRef idx="1">
+            <a:schemeClr val="accent1"/>
+          </a:lnRef>
+          <a:fillRef idx="3">
+            <a:schemeClr val="accent1"/>
+          </a:fillRef>
+          <a:effectRef idx="2">
+            <a:schemeClr val="accent1"/>
+          </a:effectRef>
+          <a:fontRef idx="minor">
+            <a:schemeClr val="lt1"/>
+          </a:fontRef>
+        </p:style>
+        <p:txBody>
+          <a:bodyPr rtlCol="0" anchor="ctr"/>
+          <a:lstStyle/>
+          <a:p>
+            <a:pPr algn="ctr"/>
+          </a:p>
+        </p:txBody>
+      </p:sp>
+      <p:sp>
+        <p:nvSpPr>
+          <p:cNvPr id="3" name="TextBox 2"/>
           <p:cNvSpPr txBox="1"/>
           <p:nvPr/>
         </p:nvSpPr>
         <p:spPr>
           <a:xfrm>
-            <a:off x="640080" y="1234440"/>
-            <a:ext cx="10972800" cy="4572000"/>
+            <a:off x="502920" y="228600"/>
+            <a:ext cx="10607040" cy="822960"/>
           </a:xfrm>
           <a:prstGeom prst="rect">
             <a:avLst/>
@@ -9326,91 +8816,137 @@
           <a:p>
             <a:pPr>
               <a:spcAft>
-                <a:spcPts val="600"/>
+                <a:spcPts val="800"/>
               </a:spcAft>
             </a:pPr>
             <a:r>
+              <a:rPr sz="3000" b="1">
+                <a:solidFill>
+                  <a:srgbClr val="0B0B0B"/>
+                </a:solidFill>
+              </a:rPr>
+              <a:t>Next steps</a:t>
+            </a:r>
+          </a:p>
+        </p:txBody>
+      </p:sp>
+      <p:sp>
+        <p:nvSpPr>
+          <p:cNvPr id="4" name="TextBox 3"/>
+          <p:cNvSpPr txBox="1"/>
+          <p:nvPr/>
+        </p:nvSpPr>
+        <p:spPr>
+          <a:xfrm>
+            <a:off x="10972800" y="274320"/>
+            <a:ext cx="822960" cy="457200"/>
+          </a:xfrm>
+          <a:prstGeom prst="rect">
+            <a:avLst/>
+          </a:prstGeom>
+          <a:noFill/>
+        </p:spPr>
+        <p:txBody>
+          <a:bodyPr wrap="square">
+            <a:spAutoFit/>
+          </a:bodyPr>
+          <a:lstStyle/>
+          <a:p>
+            <a:pPr algn="r">
+              <a:spcAft>
+                <a:spcPts val="800"/>
+              </a:spcAft>
+            </a:pPr>
+            <a:r>
               <a:rPr sz="2000" b="0">
                 <a:solidFill>
-                  <a:srgbClr val="0B0B0B"/>
-                </a:solidFill>
-              </a:rPr>
-              <a:t>• Every number from a script on disk; every table in first_hires_exoplanet/data/</a:t>
-            </a:r>
-          </a:p>
+                  <a:srgbClr val="52514E"/>
+                </a:solidFill>
+              </a:rPr>
+              <a:t>29</a:t>
+            </a:r>
+          </a:p>
+        </p:txBody>
+      </p:sp>
+      <p:sp>
+        <p:nvSpPr>
+          <p:cNvPr id="5" name="TextBox 4"/>
+          <p:cNvSpPr txBox="1"/>
+          <p:nvPr/>
+        </p:nvSpPr>
+        <p:spPr>
+          <a:xfrm>
+            <a:off x="640080" y="1188720"/>
+            <a:ext cx="10972800" cy="5303520"/>
+          </a:xfrm>
+          <a:prstGeom prst="rect">
+            <a:avLst/>
+          </a:prstGeom>
+          <a:noFill/>
+        </p:spPr>
+        <p:txBody>
+          <a:bodyPr wrap="square">
+            <a:spAutoFit/>
+          </a:bodyPr>
+          <a:lstStyle/>
           <a:p>
             <a:pPr>
               <a:spcAft>
-                <a:spcPts val="600"/>
+                <a:spcPts val="800"/>
               </a:spcAft>
             </a:pPr>
             <a:r>
-              <a:rPr sz="2000" b="0">
+              <a:rPr sz="2200" b="0">
                 <a:solidFill>
                   <a:srgbClr val="0B0B0B"/>
                 </a:solidFill>
               </a:rPr>
-              <a:t>• PypeIt 2.0.2.dev1217+g017bece06 (orig-hires-fixes); pyodine 4488b09 + fork changes 0–5</a:t>
+              <a:t>• A HIRES-cell iodine spectrum: FTS scan, or empirical from B stars</a:t>
             </a:r>
           </a:p>
           <a:p>
             <a:pPr>
               <a:spcAft>
-                <a:spcPts val="600"/>
+                <a:spcPts val="800"/>
               </a:spcAft>
             </a:pPr>
             <a:r>
-              <a:rPr sz="2000" b="0">
+              <a:rPr sz="2200" b="0">
                 <a:solidFill>
                   <a:srgbClr val="0B0B0B"/>
                 </a:solidFill>
               </a:rPr>
-              <a:t>• Reduction: reduce_run.py; template: build_template.py, deconvolve_template.py</a:t>
+              <a:t>• Weight whole orders, not just chunks, in the combination</a:t>
             </a:r>
           </a:p>
           <a:p>
             <a:pPr>
               <a:spcAft>
-                <a:spcPts val="600"/>
+                <a:spcPts val="800"/>
               </a:spcAft>
             </a:pPr>
             <a:r>
-              <a:rPr sz="2000" b="0">
+              <a:rPr sz="2200" b="0">
                 <a:solidFill>
                   <a:srgbClr val="0B0B0B"/>
                 </a:solidFill>
               </a:rPr>
-              <a:t>• Velocities: fit_all_epochs.py; assessment: figs_phase3.py; diagnosis: diagnose_phase3.py</a:t>
+              <a:t>• Fix PypeIt’s noise model (optimal vs boxcar)</a:t>
             </a:r>
           </a:p>
           <a:p>
             <a:pPr>
               <a:spcAft>
-                <a:spcPts val="600"/>
+                <a:spcPts val="800"/>
               </a:spcAft>
             </a:pPr>
             <a:r>
-              <a:rPr sz="2000" b="0">
+              <a:rPr sz="2200" b="0">
                 <a:solidFill>
                   <a:srgbClr val="0B0B0B"/>
                 </a:solidFill>
               </a:rPr>
-              <a:t>• Reports and logs: claude_prompts/data_phase{1,2,3}_prompt.md; public write-up: docs/public_HD187123b.md</a:t>
-            </a:r>
-          </a:p>
-          <a:p>
-            <a:pPr>
-              <a:spcAft>
-                <a:spcPts val="600"/>
-              </a:spcAft>
-            </a:pPr>
-            <a:r>
-              <a:rPr sz="2000" b="0">
-                <a:solidFill>
-                  <a:srgbClr val="0B0B0B"/>
-                </a:solidFill>
-              </a:rPr>
-              <a:t>• This deck: make_slides.py</a:t>
+              <a:t>• Diagnose 1998-09-13’s arc</a:t>
             </a:r>
           </a:p>
         </p:txBody>
@@ -9484,8 +9020,8 @@
         </p:nvSpPr>
         <p:spPr>
           <a:xfrm>
-            <a:off x="502920" y="256032"/>
-            <a:ext cx="11155680" cy="822960"/>
+            <a:off x="502920" y="228600"/>
+            <a:ext cx="10607040" cy="822960"/>
           </a:xfrm>
           <a:prstGeom prst="rect">
             <a:avLst/>
@@ -9500,11 +9036,11 @@
           <a:p>
             <a:pPr>
               <a:spcAft>
-                <a:spcPts val="600"/>
+                <a:spcPts val="800"/>
               </a:spcAft>
             </a:pPr>
             <a:r>
-              <a:rPr sz="2800" b="1">
+              <a:rPr sz="3000" b="1">
                 <a:solidFill>
                   <a:srgbClr val="0B0B0B"/>
                 </a:solidFill>
@@ -9522,8 +9058,8 @@
         </p:nvSpPr>
         <p:spPr>
           <a:xfrm>
-            <a:off x="502920" y="6419088"/>
-            <a:ext cx="9601200" cy="320040"/>
+            <a:off x="10972800" y="274320"/>
+            <a:ext cx="822960" cy="457200"/>
           </a:xfrm>
           <a:prstGeom prst="rect">
             <a:avLst/>
@@ -9536,51 +9072,13 @@
           </a:bodyPr>
           <a:lstStyle/>
           <a:p>
-            <a:pPr>
+            <a:pPr algn="r">
               <a:spcAft>
-                <a:spcPts val="600"/>
+                <a:spcPts val="800"/>
               </a:spcAft>
             </a:pPr>
             <a:r>
-              <a:rPr sz="1000" b="0">
-                <a:solidFill>
-                  <a:srgbClr val="52514E"/>
-                </a:solidFill>
-              </a:rPr>
-              <a:t>HD 187123 b from the 1998 HIRES frames — technical summary</a:t>
-            </a:r>
-          </a:p>
-        </p:txBody>
-      </p:sp>
-      <p:sp>
-        <p:nvSpPr>
-          <p:cNvPr id="5" name="TextBox 4"/>
-          <p:cNvSpPr txBox="1"/>
-          <p:nvPr/>
-        </p:nvSpPr>
-        <p:spPr>
-          <a:xfrm>
-            <a:off x="10972800" y="6419088"/>
-            <a:ext cx="731520" cy="320040"/>
-          </a:xfrm>
-          <a:prstGeom prst="rect">
-            <a:avLst/>
-          </a:prstGeom>
-          <a:noFill/>
-        </p:spPr>
-        <p:txBody>
-          <a:bodyPr wrap="square">
-            <a:spAutoFit/>
-          </a:bodyPr>
-          <a:lstStyle/>
-          <a:p>
-            <a:pPr algn="r">
-              <a:spcAft>
-                <a:spcPts val="600"/>
-              </a:spcAft>
-            </a:pPr>
-            <a:r>
-              <a:rPr sz="1000" b="0">
+              <a:rPr sz="2000" b="0">
                 <a:solidFill>
                   <a:srgbClr val="52514E"/>
                 </a:solidFill>
@@ -9592,7 +9090,7 @@
       </p:sp>
       <p:pic>
         <p:nvPicPr>
-          <p:cNvPr id="6" name="Picture 5" descr="fig_slides_pipeline.png"/>
+          <p:cNvPr id="5" name="Picture 4" descr="fig_slides_pipeline.png"/>
           <p:cNvPicPr>
             <a:picLocks noChangeAspect="1"/>
           </p:cNvPicPr>
@@ -9606,8 +9104,8 @@
         </p:blipFill>
         <p:spPr>
           <a:xfrm>
-            <a:off x="457200" y="1523619"/>
-            <a:ext cx="11274552" cy="3765042"/>
+            <a:off x="365760" y="1493083"/>
+            <a:ext cx="11457432" cy="3826113"/>
           </a:xfrm>
           <a:prstGeom prst="rect">
             <a:avLst/>
@@ -9616,14 +9114,14 @@
       </p:pic>
       <p:sp>
         <p:nvSpPr>
-          <p:cNvPr id="7" name="Rectangle 6"/>
+          <p:cNvPr id="6" name="Rectangle 5"/>
           <p:cNvSpPr/>
           <p:nvPr/>
         </p:nvSpPr>
         <p:spPr>
           <a:xfrm>
-            <a:off x="457200" y="5760720"/>
-            <a:ext cx="11274552" cy="566928"/>
+            <a:off x="365760" y="5806440"/>
+            <a:ext cx="11457432" cy="914400"/>
           </a:xfrm>
           <a:prstGeom prst="rect">
             <a:avLst/>
@@ -9655,12 +9153,247 @@
           <a:p>
             <a:pPr algn="ctr"/>
             <a:r>
-              <a:rPr sz="1600" b="1">
+              <a:rPr sz="2000" b="1">
                 <a:solidFill>
                   <a:srgbClr val="0B0B0B"/>
                 </a:solidFill>
               </a:rPr>
               <a:t>Phase 2 measured why lamps fail; phase 3 replaced the lamp with the iodine cell.</a:t>
+            </a:r>
+          </a:p>
+        </p:txBody>
+      </p:sp>
+    </p:spTree>
+  </p:cSld>
+  <p:clrMapOvr>
+    <a:masterClrMapping/>
+  </p:clrMapOvr>
+</p:sld>
+</file>
+
+<file path=ppt/slides/slide30.xml><?xml version="1.0" encoding="utf-8"?>
+<p:sld xmlns:a="http://schemas.openxmlformats.org/drawingml/2006/main" xmlns:p="http://schemas.openxmlformats.org/presentationml/2006/main" xmlns:r="http://schemas.openxmlformats.org/officeDocument/2006/relationships">
+  <p:cSld>
+    <p:spTree>
+      <p:nvGrpSpPr>
+        <p:cNvPr id="1" name=""/>
+        <p:cNvGrpSpPr/>
+        <p:nvPr/>
+      </p:nvGrpSpPr>
+      <p:grpSpPr/>
+      <p:sp>
+        <p:nvSpPr>
+          <p:cNvPr id="2" name="Rectangle 1"/>
+          <p:cNvSpPr/>
+          <p:nvPr/>
+        </p:nvSpPr>
+        <p:spPr>
+          <a:xfrm>
+            <a:off x="0" y="0"/>
+            <a:ext cx="12191695" cy="82296"/>
+          </a:xfrm>
+          <a:prstGeom prst="rect">
+            <a:avLst/>
+          </a:prstGeom>
+          <a:solidFill>
+            <a:srgbClr val="2A78D6"/>
+          </a:solidFill>
+          <a:ln>
+            <a:noFill/>
+          </a:ln>
+        </p:spPr>
+        <p:style>
+          <a:lnRef idx="1">
+            <a:schemeClr val="accent1"/>
+          </a:lnRef>
+          <a:fillRef idx="3">
+            <a:schemeClr val="accent1"/>
+          </a:fillRef>
+          <a:effectRef idx="2">
+            <a:schemeClr val="accent1"/>
+          </a:effectRef>
+          <a:fontRef idx="minor">
+            <a:schemeClr val="lt1"/>
+          </a:fontRef>
+        </p:style>
+        <p:txBody>
+          <a:bodyPr rtlCol="0" anchor="ctr"/>
+          <a:lstStyle/>
+          <a:p>
+            <a:pPr algn="ctr"/>
+          </a:p>
+        </p:txBody>
+      </p:sp>
+      <p:sp>
+        <p:nvSpPr>
+          <p:cNvPr id="3" name="TextBox 2"/>
+          <p:cNvSpPr txBox="1"/>
+          <p:nvPr/>
+        </p:nvSpPr>
+        <p:spPr>
+          <a:xfrm>
+            <a:off x="502920" y="228600"/>
+            <a:ext cx="10607040" cy="822960"/>
+          </a:xfrm>
+          <a:prstGeom prst="rect">
+            <a:avLst/>
+          </a:prstGeom>
+          <a:noFill/>
+        </p:spPr>
+        <p:txBody>
+          <a:bodyPr wrap="square">
+            <a:spAutoFit/>
+          </a:bodyPr>
+          <a:lstStyle/>
+          <a:p>
+            <a:pPr>
+              <a:spcAft>
+                <a:spcPts val="800"/>
+              </a:spcAft>
+            </a:pPr>
+            <a:r>
+              <a:rPr sz="3000" b="1">
+                <a:solidFill>
+                  <a:srgbClr val="0B0B0B"/>
+                </a:solidFill>
+              </a:rPr>
+              <a:t>Reproducibility</a:t>
+            </a:r>
+          </a:p>
+        </p:txBody>
+      </p:sp>
+      <p:sp>
+        <p:nvSpPr>
+          <p:cNvPr id="4" name="TextBox 3"/>
+          <p:cNvSpPr txBox="1"/>
+          <p:nvPr/>
+        </p:nvSpPr>
+        <p:spPr>
+          <a:xfrm>
+            <a:off x="10972800" y="274320"/>
+            <a:ext cx="822960" cy="457200"/>
+          </a:xfrm>
+          <a:prstGeom prst="rect">
+            <a:avLst/>
+          </a:prstGeom>
+          <a:noFill/>
+        </p:spPr>
+        <p:txBody>
+          <a:bodyPr wrap="square">
+            <a:spAutoFit/>
+          </a:bodyPr>
+          <a:lstStyle/>
+          <a:p>
+            <a:pPr algn="r">
+              <a:spcAft>
+                <a:spcPts val="800"/>
+              </a:spcAft>
+            </a:pPr>
+            <a:r>
+              <a:rPr sz="2000" b="0">
+                <a:solidFill>
+                  <a:srgbClr val="52514E"/>
+                </a:solidFill>
+              </a:rPr>
+              <a:t>30</a:t>
+            </a:r>
+          </a:p>
+        </p:txBody>
+      </p:sp>
+      <p:sp>
+        <p:nvSpPr>
+          <p:cNvPr id="5" name="TextBox 4"/>
+          <p:cNvSpPr txBox="1"/>
+          <p:nvPr/>
+        </p:nvSpPr>
+        <p:spPr>
+          <a:xfrm>
+            <a:off x="640080" y="1188720"/>
+            <a:ext cx="10972800" cy="5303520"/>
+          </a:xfrm>
+          <a:prstGeom prst="rect">
+            <a:avLst/>
+          </a:prstGeom>
+          <a:noFill/>
+        </p:spPr>
+        <p:txBody>
+          <a:bodyPr wrap="square">
+            <a:spAutoFit/>
+          </a:bodyPr>
+          <a:lstStyle/>
+          <a:p>
+            <a:pPr>
+              <a:spcAft>
+                <a:spcPts val="800"/>
+              </a:spcAft>
+            </a:pPr>
+            <a:r>
+              <a:rPr sz="2200" b="0">
+                <a:solidFill>
+                  <a:srgbClr val="0B0B0B"/>
+                </a:solidFill>
+              </a:rPr>
+              <a:t>• Every number from a script; every table in first_hires_exoplanet/data/</a:t>
+            </a:r>
+          </a:p>
+          <a:p>
+            <a:pPr>
+              <a:spcAft>
+                <a:spcPts val="800"/>
+              </a:spcAft>
+            </a:pPr>
+            <a:r>
+              <a:rPr sz="2200" b="0">
+                <a:solidFill>
+                  <a:srgbClr val="0B0B0B"/>
+                </a:solidFill>
+              </a:rPr>
+              <a:t>• PypeIt 2.0.2.dev1217+g017bece06; pyodine 4488b09 + fork</a:t>
+            </a:r>
+          </a:p>
+          <a:p>
+            <a:pPr>
+              <a:spcAft>
+                <a:spcPts val="800"/>
+              </a:spcAft>
+            </a:pPr>
+            <a:r>
+              <a:rPr sz="2200" b="0">
+                <a:solidFill>
+                  <a:srgbClr val="0B0B0B"/>
+                </a:solidFill>
+              </a:rPr>
+              <a:t>• Velocities: fit_all_epochs.py; assessment: figs_phase3.py</a:t>
+            </a:r>
+          </a:p>
+          <a:p>
+            <a:pPr>
+              <a:spcAft>
+                <a:spcPts val="800"/>
+              </a:spcAft>
+            </a:pPr>
+            <a:r>
+              <a:rPr sz="2200" b="0">
+                <a:solidFill>
+                  <a:srgbClr val="0B0B0B"/>
+                </a:solidFill>
+              </a:rPr>
+              <a:t>• Reports: claude_prompts/data_phase{1,2,3}_prompt.md</a:t>
+            </a:r>
+          </a:p>
+          <a:p>
+            <a:pPr>
+              <a:spcAft>
+                <a:spcPts val="800"/>
+              </a:spcAft>
+            </a:pPr>
+            <a:r>
+              <a:rPr sz="2200" b="0">
+                <a:solidFill>
+                  <a:srgbClr val="0B0B0B"/>
+                </a:solidFill>
+              </a:rPr>
+              <a:t>• This deck: make_slides.py</a:t>
             </a:r>
           </a:p>
         </p:txBody>
@@ -9691,7 +9424,7 @@
         </p:nvSpPr>
         <p:spPr>
           <a:xfrm>
-            <a:off x="731520" y="2194560"/>
+            <a:off x="731520" y="2103120"/>
             <a:ext cx="10698480" cy="548640"/>
           </a:xfrm>
           <a:prstGeom prst="rect">
@@ -9707,11 +9440,11 @@
           <a:p>
             <a:pPr>
               <a:spcAft>
-                <a:spcPts val="600"/>
+                <a:spcPts val="800"/>
               </a:spcAft>
             </a:pPr>
             <a:r>
-              <a:rPr sz="1800" b="1">
+              <a:rPr sz="2200" b="1">
                 <a:solidFill>
                   <a:srgbClr val="1BAF7A"/>
                 </a:solidFill>
@@ -9729,7 +9462,7 @@
         </p:nvSpPr>
         <p:spPr>
           <a:xfrm>
-            <a:off x="731520" y="2743200"/>
+            <a:off x="731520" y="2651760"/>
             <a:ext cx="10698480" cy="1097280"/>
           </a:xfrm>
           <a:prstGeom prst="rect">
@@ -9745,11 +9478,11 @@
           <a:p>
             <a:pPr>
               <a:spcAft>
-                <a:spcPts val="600"/>
+                <a:spcPts val="800"/>
               </a:spcAft>
             </a:pPr>
             <a:r>
-              <a:rPr sz="3600" b="1">
+              <a:rPr sz="3800" b="1">
                 <a:solidFill>
                   <a:srgbClr val="0B0B0B"/>
                 </a:solidFill>
@@ -9768,7 +9501,7 @@
         <p:spPr>
           <a:xfrm>
             <a:off x="731520" y="3840480"/>
-            <a:ext cx="10515600" cy="1463040"/>
+            <a:ext cx="10515600" cy="1828800"/>
           </a:xfrm>
           <a:prstGeom prst="rect">
             <a:avLst/>
@@ -9783,11 +9516,11 @@
           <a:p>
             <a:pPr>
               <a:spcAft>
-                <a:spcPts val="600"/>
+                <a:spcPts val="800"/>
               </a:spcAft>
             </a:pPr>
             <a:r>
-              <a:rPr sz="2000" b="0">
+              <a:rPr sz="2200" b="0">
                 <a:solidFill>
                   <a:srgbClr val="52514E"/>
                 </a:solidFill>
@@ -9866,8 +9599,8 @@
         </p:nvSpPr>
         <p:spPr>
           <a:xfrm>
-            <a:off x="502920" y="256032"/>
-            <a:ext cx="11155680" cy="822960"/>
+            <a:off x="502920" y="228600"/>
+            <a:ext cx="10607040" cy="822960"/>
           </a:xfrm>
           <a:prstGeom prst="rect">
             <a:avLst/>
@@ -9882,16 +9615,16 @@
           <a:p>
             <a:pPr>
               <a:spcAft>
-                <a:spcPts val="600"/>
+                <a:spcPts val="800"/>
               </a:spcAft>
             </a:pPr>
             <a:r>
-              <a:rPr sz="2800" b="1">
+              <a:rPr sz="3000" b="1">
                 <a:solidFill>
                   <a:srgbClr val="0B0B0B"/>
                 </a:solidFill>
               </a:rPr>
-              <a:t>Six source fixes, three parameters, one calibration decision</a:t>
+              <a:t>Phase 1: what PypeIt needed</a:t>
             </a:r>
           </a:p>
         </p:txBody>
@@ -9904,8 +9637,8 @@
         </p:nvSpPr>
         <p:spPr>
           <a:xfrm>
-            <a:off x="502920" y="6419088"/>
-            <a:ext cx="9601200" cy="320040"/>
+            <a:off x="10972800" y="274320"/>
+            <a:ext cx="822960" cy="457200"/>
           </a:xfrm>
           <a:prstGeom prst="rect">
             <a:avLst/>
@@ -9918,51 +9651,13 @@
           </a:bodyPr>
           <a:lstStyle/>
           <a:p>
-            <a:pPr>
+            <a:pPr algn="r">
               <a:spcAft>
-                <a:spcPts val="600"/>
+                <a:spcPts val="800"/>
               </a:spcAft>
             </a:pPr>
             <a:r>
-              <a:rPr sz="1000" b="0">
-                <a:solidFill>
-                  <a:srgbClr val="52514E"/>
-                </a:solidFill>
-              </a:rPr>
-              <a:t>Phase 1   ·   HD 187123 b from the 1998 HIRES frames — technical summary</a:t>
-            </a:r>
-          </a:p>
-        </p:txBody>
-      </p:sp>
-      <p:sp>
-        <p:nvSpPr>
-          <p:cNvPr id="5" name="TextBox 4"/>
-          <p:cNvSpPr txBox="1"/>
-          <p:nvPr/>
-        </p:nvSpPr>
-        <p:spPr>
-          <a:xfrm>
-            <a:off x="10972800" y="6419088"/>
-            <a:ext cx="731520" cy="320040"/>
-          </a:xfrm>
-          <a:prstGeom prst="rect">
-            <a:avLst/>
-          </a:prstGeom>
-          <a:noFill/>
-        </p:spPr>
-        <p:txBody>
-          <a:bodyPr wrap="square">
-            <a:spAutoFit/>
-          </a:bodyPr>
-          <a:lstStyle/>
-          <a:p>
-            <a:pPr algn="r">
-              <a:spcAft>
-                <a:spcPts val="600"/>
-              </a:spcAft>
-            </a:pPr>
-            <a:r>
-              <a:rPr sz="1000" b="0">
+              <a:rPr sz="2000" b="0">
                 <a:solidFill>
                   <a:srgbClr val="52514E"/>
                 </a:solidFill>
@@ -9974,15 +9669,15 @@
       </p:sp>
       <p:graphicFrame>
         <p:nvGraphicFramePr>
-          <p:cNvPr id="6" name="Table 5"/>
+          <p:cNvPr id="5" name="Table 4"/>
           <p:cNvGraphicFramePr>
             <a:graphicFrameLocks noGrp="1"/>
           </p:cNvGraphicFramePr>
           <p:nvPr/>
         </p:nvGraphicFramePr>
         <p:xfrm>
-          <a:off x="548640" y="1280160"/>
-          <a:ext cx="11064240" cy="3364992"/>
+          <a:off x="457200" y="1234440"/>
+          <a:ext cx="11274551" cy="4096512"/>
         </p:xfrm>
         <a:graphic>
           <a:graphicData uri="http://schemas.openxmlformats.org/drawingml/2006/table">
@@ -9991,18 +9686,18 @@
                 <a:tableStyleId>{5C22544A-7EE6-4342-B048-85BDC9FD1C3A}</a:tableStyleId>
               </a:tblPr>
               <a:tblGrid>
-                <a:gridCol w="2194560"/>
-                <a:gridCol w="4480560"/>
-                <a:gridCol w="4389120"/>
+                <a:gridCol w="3017520"/>
+                <a:gridCol w="4206240"/>
+                <a:gridCol w="4050791"/>
               </a:tblGrid>
-              <a:tr h="420624">
+              <a:tr h="512064">
                 <a:tc>
                   <a:txBody>
                     <a:bodyPr/>
                     <a:lstStyle/>
                     <a:p>
                       <a:r>
-                        <a:rPr sz="1500" b="1">
+                        <a:rPr sz="2000" b="1">
                           <a:solidFill>
                             <a:srgbClr val="FFFFFF"/>
                           </a:solidFill>
@@ -10011,7 +9706,7 @@
                       </a:r>
                     </a:p>
                   </a:txBody>
-                  <a:tcPr>
+                  <a:tcPr marT="36576" marB="36576">
                     <a:solidFill>
                       <a:srgbClr val="2A78D6"/>
                     </a:solidFill>
@@ -10023,16 +9718,16 @@
                     <a:lstStyle/>
                     <a:p>
                       <a:r>
-                        <a:rPr sz="1500" b="1">
+                        <a:rPr sz="2000" b="1">
                           <a:solidFill>
                             <a:srgbClr val="FFFFFF"/>
                           </a:solidFill>
                         </a:rPr>
-                        <a:t>what</a:t>
+                        <a:t>fix</a:t>
                       </a:r>
                     </a:p>
                   </a:txBody>
-                  <a:tcPr>
+                  <a:tcPr marT="36576" marB="36576">
                     <a:solidFill>
                       <a:srgbClr val="2A78D6"/>
                     </a:solidFill>
@@ -10044,30 +9739,30 @@
                     <a:lstStyle/>
                     <a:p>
                       <a:r>
-                        <a:rPr sz="1500" b="1">
+                        <a:rPr sz="2000" b="1">
                           <a:solidFill>
                             <a:srgbClr val="FFFFFF"/>
                           </a:solidFill>
                         </a:rPr>
-                        <a:t>effect</a:t>
+                        <a:t>symptom</a:t>
                       </a:r>
                     </a:p>
                   </a:txBody>
-                  <a:tcPr>
+                  <a:tcPr marT="36576" marB="36576">
                     <a:solidFill>
                       <a:srgbClr val="2A78D6"/>
                     </a:solidFill>
                   </a:tcPr>
                 </a:tc>
               </a:tr>
-              <a:tr h="420624">
+              <a:tr h="512064">
                 <a:tc>
                   <a:txBody>
                     <a:bodyPr/>
                     <a:lstStyle/>
                     <a:p>
                       <a:r>
-                        <a:rPr sz="1500">
+                        <a:rPr sz="2000" b="0">
                           <a:solidFill>
                             <a:srgbClr val="0B0B0B"/>
                           </a:solidFill>
@@ -10076,7 +9771,7 @@
                       </a:r>
                     </a:p>
                   </a:txBody>
-                  <a:tcPr>
+                  <a:tcPr marT="36576" marB="36576">
                     <a:solidFill>
                       <a:srgbClr val="F3F3F1"/>
                     </a:solidFill>
@@ -10088,16 +9783,16 @@
                     <a:lstStyle/>
                     <a:p>
                       <a:r>
-                        <a:rPr sz="1500">
+                        <a:rPr sz="2000" b="0">
                           <a:solidFill>
                             <a:srgbClr val="0B0B0B"/>
                           </a:solidFill>
                         </a:rPr>
-                        <a:t>prepix × 2 → prepix × namp</a:t>
+                        <a:t>prepix × namp</a:t>
                       </a:r>
                     </a:p>
                   </a:txBody>
-                  <a:tcPr>
+                  <a:tcPr marT="36576" marB="36576">
                     <a:solidFill>
                       <a:srgbClr val="F3F3F1"/>
                     </a:solidFill>
@@ -10109,30 +9804,30 @@
                     <a:lstStyle/>
                     <a:p>
                       <a:r>
-                        <a:rPr sz="1500">
+                        <a:rPr sz="2000" b="0">
                           <a:solidFill>
                             <a:srgbClr val="0B0B0B"/>
                           </a:solidFill>
                         </a:rPr>
-                        <a:t>single-amp frames read 21 columns off</a:t>
+                        <a:t>image 21 columns off</a:t>
                       </a:r>
                     </a:p>
                   </a:txBody>
-                  <a:tcPr>
+                  <a:tcPr marT="36576" marB="36576">
                     <a:solidFill>
                       <a:srgbClr val="F3F3F1"/>
                     </a:solidFill>
                   </a:tcPr>
                 </a:tc>
               </a:tr>
-              <a:tr h="420624">
+              <a:tr h="512064">
                 <a:tc>
                   <a:txBody>
                     <a:bodyPr/>
                     <a:lstStyle/>
                     <a:p>
                       <a:r>
-                        <a:rPr sz="1500">
+                        <a:rPr sz="2000" b="0">
                           <a:solidFill>
                             <a:srgbClr val="0B0B0B"/>
                           </a:solidFill>
@@ -10141,7 +9836,7 @@
                       </a:r>
                     </a:p>
                   </a:txBody>
-                  <a:tcPr>
+                  <a:tcPr marT="36576" marB="36576">
                     <a:solidFill>
                       <a:srgbClr val="FFFFFF"/>
                     </a:solidFill>
@@ -10153,16 +9848,16 @@
                     <a:lstStyle/>
                     <a:p>
                       <a:r>
-                        <a:rPr sz="1500">
+                        <a:rPr sz="2000" b="0">
                           <a:solidFill>
                             <a:srgbClr val="0B0B0B"/>
                           </a:solidFill>
                         </a:rPr>
-                        <a:t>MAKEE column C → C − PREPIX</a:t>
+                        <a:t>column C − PREPIX</a:t>
                       </a:r>
                     </a:p>
                   </a:txBody>
-                  <a:tcPr>
+                  <a:tcPr marT="36576" marB="36576">
                     <a:solidFill>
                       <a:srgbClr val="FFFFFF"/>
                     </a:solidFill>
@@ -10174,30 +9869,30 @@
                     <a:lstStyle/>
                     <a:p>
                       <a:r>
-                        <a:rPr sz="1500">
+                        <a:rPr sz="2000" b="0">
                           <a:solidFill>
                             <a:srgbClr val="0B0B0B"/>
                           </a:solidFill>
                         </a:rPr>
-                        <a:t>mask landed ~20 px from the defects</a:t>
+                        <a:t>mask 20 px off</a:t>
                       </a:r>
                     </a:p>
                   </a:txBody>
-                  <a:tcPr>
+                  <a:tcPr marT="36576" marB="36576">
                     <a:solidFill>
                       <a:srgbClr val="FFFFFF"/>
                     </a:solidFill>
                   </a:tcPr>
                 </a:tc>
               </a:tr>
-              <a:tr h="420624">
+              <a:tr h="512064">
                 <a:tc>
                   <a:txBody>
                     <a:bodyPr/>
                     <a:lstStyle/>
                     <a:p>
                       <a:r>
-                        <a:rPr sz="1500">
+                        <a:rPr sz="2000" b="0">
                           <a:solidFill>
                             <a:srgbClr val="0B0B0B"/>
                           </a:solidFill>
@@ -10206,7 +9901,7 @@
                       </a:r>
                     </a:p>
                   </a:txBody>
-                  <a:tcPr>
+                  <a:tcPr marT="36576" marB="36576">
                     <a:solidFill>
                       <a:srgbClr val="F3F3F1"/>
                     </a:solidFill>
@@ -10218,16 +9913,16 @@
                     <a:lstStyle/>
                     <a:p>
                       <a:r>
-                        <a:rPr sz="1500">
+                        <a:rPr sz="2000" b="0">
                           <a:solidFill>
                             <a:srgbClr val="0B0B0B"/>
                           </a:solidFill>
                         </a:rPr>
-                        <a:t>'1,2' read as '2,1'</a:t>
+                        <a:t>'1,2' not '2,1'</a:t>
                       </a:r>
                     </a:p>
                   </a:txBody>
-                  <a:tcPr>
+                  <a:tcPr marT="36576" marB="36576">
                     <a:solidFill>
                       <a:srgbClr val="F3F3F1"/>
                     </a:solidFill>
@@ -10239,30 +9934,30 @@
                     <a:lstStyle/>
                     <a:p>
                       <a:r>
-                        <a:rPr sz="1500">
+                        <a:rPr sz="2000" b="0">
                           <a:solidFill>
                             <a:srgbClr val="0B0B0B"/>
                           </a:solidFill>
                         </a:rPr>
-                        <a:t>platescale 0.216 instead of 0.432″/px</a:t>
+                        <a:t>platescale halved</a:t>
                       </a:r>
                     </a:p>
                   </a:txBody>
-                  <a:tcPr>
+                  <a:tcPr marT="36576" marB="36576">
                     <a:solidFill>
                       <a:srgbClr val="F3F3F1"/>
                     </a:solidFill>
                   </a:tcPr>
                 </a:tc>
               </a:tr>
-              <a:tr h="420624">
+              <a:tr h="512064">
                 <a:tc>
                   <a:txBody>
                     <a:bodyPr/>
                     <a:lstStyle/>
                     <a:p>
                       <a:r>
-                        <a:rPr sz="1500">
+                        <a:rPr sz="2000" b="0">
                           <a:solidFill>
                             <a:srgbClr val="0B0B0B"/>
                           </a:solidFill>
@@ -10271,7 +9966,7 @@
                       </a:r>
                     </a:p>
                   </a:txBody>
-                  <a:tcPr>
+                  <a:tcPr marT="36576" marB="36576">
                     <a:solidFill>
                       <a:srgbClr val="FFFFFF"/>
                     </a:solidFill>
@@ -10283,16 +9978,16 @@
                     <a:lstStyle/>
                     <a:p>
                       <a:r>
-                        <a:rPr sz="1500">
+                        <a:rPr sz="2000" b="0">
                           <a:solidFill>
                             <a:srgbClr val="0B0B0B"/>
                           </a:solidFill>
                         </a:rPr>
-                        <a:t>PypeItError built, never raised</a:t>
+                        <a:t>raise the error</a:t>
                       </a:r>
                     </a:p>
                   </a:txBody>
-                  <a:tcPr>
+                  <a:tcPr marT="36576" marB="36576">
                     <a:solidFill>
                       <a:srgbClr val="FFFFFF"/>
                     </a:solidFill>
@@ -10304,30 +9999,30 @@
                     <a:lstStyle/>
                     <a:p>
                       <a:r>
-                        <a:rPr sz="1500">
+                        <a:rPr sz="2000" b="0">
                           <a:solidFill>
                             <a:srgbClr val="0B0B0B"/>
                           </a:solidFill>
                         </a:rPr>
-                        <a:t>wrong spectrograph accepted silently</a:t>
+                        <a:t>silently accepted</a:t>
                       </a:r>
                     </a:p>
                   </a:txBody>
-                  <a:tcPr>
+                  <a:tcPr marT="36576" marB="36576">
                     <a:solidFill>
                       <a:srgbClr val="FFFFFF"/>
                     </a:solidFill>
                   </a:tcPr>
                 </a:tc>
               </a:tr>
-              <a:tr h="420624">
+              <a:tr h="512064">
                 <a:tc>
                   <a:txBody>
                     <a:bodyPr/>
                     <a:lstStyle/>
                     <a:p>
                       <a:r>
-                        <a:rPr sz="1500">
+                        <a:rPr sz="2000" b="0">
                           <a:solidFill>
                             <a:srgbClr val="0B0B0B"/>
                           </a:solidFill>
@@ -10336,7 +10031,7 @@
                       </a:r>
                     </a:p>
                   </a:txBody>
-                  <a:tcPr>
+                  <a:tcPr marT="36576" marB="36576">
                     <a:solidFill>
                       <a:srgbClr val="F3F3F1"/>
                     </a:solidFill>
@@ -10348,16 +10043,16 @@
                     <a:lstStyle/>
                     <a:p>
                       <a:r>
-                        <a:rPr sz="1500">
+                        <a:rPr sz="2000" b="0">
                           <a:solidFill>
                             <a:srgbClr val="0B0B0B"/>
                           </a:solidFill>
                         </a:rPr>
-                        <a:t>[601, None] → [1, None] (Orig only)</a:t>
+                        <a:t>[1, None] for Orig</a:t>
                       </a:r>
                     </a:p>
                   </a:txBody>
-                  <a:tcPr>
+                  <a:tcPr marT="36576" marB="36576">
                     <a:solidFill>
                       <a:srgbClr val="F3F3F1"/>
                     </a:solidFill>
@@ -10369,39 +10064,39 @@
                     <a:lstStyle/>
                     <a:p>
                       <a:r>
-                        <a:rPr sz="1500">
+                        <a:rPr sz="2000" b="0">
                           <a:solidFill>
                             <a:srgbClr val="0B0B0B"/>
                           </a:solidFill>
                         </a:rPr>
-                        <a:t>bright-star science frames were excluded</a:t>
+                        <a:t>science excluded</a:t>
                       </a:r>
                     </a:p>
                   </a:txBody>
-                  <a:tcPr>
+                  <a:tcPr marT="36576" marB="36576">
                     <a:solidFill>
                       <a:srgbClr val="F3F3F1"/>
                     </a:solidFill>
                   </a:tcPr>
                 </a:tc>
               </a:tr>
-              <a:tr h="420624">
+              <a:tr h="512064">
                 <a:tc>
                   <a:txBody>
                     <a:bodyPr/>
                     <a:lstStyle/>
                     <a:p>
                       <a:r>
-                        <a:rPr sz="1500">
+                        <a:rPr sz="2000" b="0">
                           <a:solidFill>
                             <a:srgbClr val="0B0B0B"/>
                           </a:solidFill>
                         </a:rPr>
-                        <a:t>find_trim_edge / sky</a:t>
+                        <a:t>find_trim_edge, sky</a:t>
                       </a:r>
                     </a:p>
                   </a:txBody>
-                  <a:tcPr>
+                  <a:tcPr marT="36576" marB="36576">
                     <a:solidFill>
                       <a:srgbClr val="FFFFFF"/>
                     </a:solidFill>
@@ -10413,16 +10108,16 @@
                     <a:lstStyle/>
                     <a:p>
                       <a:r>
-                        <a:rPr sz="1500">
+                        <a:rPr sz="2000" b="0">
                           <a:solidFill>
                             <a:srgbClr val="0B0B0B"/>
                           </a:solidFill>
                         </a:rPr>
-                        <a:t>1,1; skip_skysub; no_local_sky</a:t>
+                        <a:t>1,1; no sky fit</a:t>
                       </a:r>
                     </a:p>
                   </a:txBody>
-                  <a:tcPr>
+                  <a:tcPr marT="36576" marB="36576">
                     <a:solidFill>
                       <a:srgbClr val="FFFFFF"/>
                     </a:solidFill>
@@ -10434,30 +10129,30 @@
                     <a:lstStyle/>
                     <a:p>
                       <a:r>
-                        <a:rPr sz="1500">
+                        <a:rPr sz="2000" b="0">
                           <a:solidFill>
                             <a:srgbClr val="0B0B0B"/>
                           </a:solidFill>
                         </a:rPr>
-                        <a:t>a V = 7.9 star fills the 3.5″ slit</a:t>
+                        <a:t>star fills the slit</a:t>
                       </a:r>
                     </a:p>
                   </a:txBody>
-                  <a:tcPr>
+                  <a:tcPr marT="36576" marB="36576">
                     <a:solidFill>
                       <a:srgbClr val="FFFFFF"/>
                     </a:solidFill>
                   </a:tcPr>
                 </a:tc>
               </a:tr>
-              <a:tr h="420624">
+              <a:tr h="512064">
                 <a:tc>
                   <a:txBody>
                     <a:bodyPr/>
                     <a:lstStyle/>
                     <a:p>
                       <a:r>
-                        <a:rPr sz="1500">
+                        <a:rPr sz="2000" b="0">
                           <a:solidFill>
                             <a:srgbClr val="0B0B0B"/>
                           </a:solidFill>
@@ -10466,7 +10161,7 @@
                       </a:r>
                     </a:p>
                   </a:txBody>
-                  <a:tcPr>
+                  <a:tcPr marT="36576" marB="36576">
                     <a:solidFill>
                       <a:srgbClr val="F3F3F1"/>
                     </a:solidFill>
@@ -10478,16 +10173,16 @@
                     <a:lstStyle/>
                     <a:p>
                       <a:r>
-                        <a:rPr sz="1500">
+                        <a:rPr sz="2000" b="0">
                           <a:solidFill>
                             <a:srgbClr val="0B0B0B"/>
                           </a:solidFill>
                         </a:rPr>
-                        <a:t>borrow 1998-07-14 (then 08-12) B1 flats</a:t>
+                        <a:t>borrow clean B1 flats</a:t>
                       </a:r>
                     </a:p>
                   </a:txBody>
-                  <a:tcPr>
+                  <a:tcPr marT="36576" marB="36576">
                     <a:solidFill>
                       <a:srgbClr val="F3F3F1"/>
                     </a:solidFill>
@@ -10499,16 +10194,16 @@
                     <a:lstStyle/>
                     <a:p>
                       <a:r>
-                        <a:rPr sz="1500">
+                        <a:rPr sz="2000" b="0">
                           <a:solidFill>
                             <a:srgbClr val="0B0B0B"/>
                           </a:solidFill>
                         </a:rPr>
-                        <a:t>only clean hatch-closed B1 flats in the run</a:t>
+                        <a:t>none on most nights</a:t>
                       </a:r>
                     </a:p>
                   </a:txBody>
-                  <a:tcPr>
+                  <a:tcPr marT="36576" marB="36576">
                     <a:solidFill>
                       <a:srgbClr val="F3F3F1"/>
                     </a:solidFill>
@@ -10521,14 +10216,14 @@
       </p:graphicFrame>
       <p:sp>
         <p:nvSpPr>
-          <p:cNvPr id="7" name="Rectangle 6"/>
+          <p:cNvPr id="6" name="Rectangle 5"/>
           <p:cNvSpPr/>
           <p:nvPr/>
         </p:nvSpPr>
         <p:spPr>
           <a:xfrm>
-            <a:off x="457200" y="5760720"/>
-            <a:ext cx="11274552" cy="566928"/>
+            <a:off x="365760" y="5806440"/>
+            <a:ext cx="11457432" cy="914400"/>
           </a:xfrm>
           <a:prstGeom prst="rect">
             <a:avLst/>
@@ -10560,12 +10255,12 @@
           <a:p>
             <a:pPr algn="ctr"/>
             <a:r>
-              <a:rPr sz="1600" b="1">
+              <a:rPr sz="2000" b="1">
                 <a:solidFill>
                   <a:srgbClr val="0B0B0B"/>
                 </a:solidFill>
               </a:rPr>
-              <a:t>Fixes on PypeIt branch orig-hires-fixes (017bece06); verify_orig_fixes.py reproduces them.</a:t>
+              <a:t>Fixes on branch orig-hires-fixes (017bece06); verify_orig_fixes.py reproduces them.</a:t>
             </a:r>
           </a:p>
         </p:txBody>
@@ -10639,8 +10334,8 @@
         </p:nvSpPr>
         <p:spPr>
           <a:xfrm>
-            <a:off x="502920" y="256032"/>
-            <a:ext cx="11155680" cy="822960"/>
+            <a:off x="502920" y="228600"/>
+            <a:ext cx="10607040" cy="822960"/>
           </a:xfrm>
           <a:prstGeom prst="rect">
             <a:avLst/>
@@ -10655,16 +10350,16 @@
           <a:p>
             <a:pPr>
               <a:spcAft>
-                <a:spcPts val="600"/>
+                <a:spcPts val="800"/>
               </a:spcAft>
             </a:pPr>
             <a:r>
-              <a:rPr sz="2800" b="1">
+              <a:rPr sz="3000" b="1">
                 <a:solidFill>
                   <a:srgbClr val="0B0B0B"/>
                 </a:solidFill>
               </a:rPr>
-              <a:t>37 orders traced; every order wavelength-solved below 0.2 px</a:t>
+              <a:t>37 orders, every one solved below 0.2 px</a:t>
             </a:r>
           </a:p>
         </p:txBody>
@@ -10677,8 +10372,8 @@
         </p:nvSpPr>
         <p:spPr>
           <a:xfrm>
-            <a:off x="502920" y="6419088"/>
-            <a:ext cx="9601200" cy="320040"/>
+            <a:off x="10972800" y="274320"/>
+            <a:ext cx="822960" cy="457200"/>
           </a:xfrm>
           <a:prstGeom prst="rect">
             <a:avLst/>
@@ -10691,51 +10386,13 @@
           </a:bodyPr>
           <a:lstStyle/>
           <a:p>
-            <a:pPr>
+            <a:pPr algn="r">
               <a:spcAft>
-                <a:spcPts val="600"/>
+                <a:spcPts val="800"/>
               </a:spcAft>
             </a:pPr>
             <a:r>
-              <a:rPr sz="1000" b="0">
-                <a:solidFill>
-                  <a:srgbClr val="52514E"/>
-                </a:solidFill>
-              </a:rPr>
-              <a:t>Phase 1   ·   HD 187123 b from the 1998 HIRES frames — technical summary</a:t>
-            </a:r>
-          </a:p>
-        </p:txBody>
-      </p:sp>
-      <p:sp>
-        <p:nvSpPr>
-          <p:cNvPr id="5" name="TextBox 4"/>
-          <p:cNvSpPr txBox="1"/>
-          <p:nvPr/>
-        </p:nvSpPr>
-        <p:spPr>
-          <a:xfrm>
-            <a:off x="10972800" y="6419088"/>
-            <a:ext cx="731520" cy="320040"/>
-          </a:xfrm>
-          <a:prstGeom prst="rect">
-            <a:avLst/>
-          </a:prstGeom>
-          <a:noFill/>
-        </p:spPr>
-        <p:txBody>
-          <a:bodyPr wrap="square">
-            <a:spAutoFit/>
-          </a:bodyPr>
-          <a:lstStyle/>
-          <a:p>
-            <a:pPr algn="r">
-              <a:spcAft>
-                <a:spcPts val="600"/>
-              </a:spcAft>
-            </a:pPr>
-            <a:r>
-              <a:rPr sz="1000" b="0">
+              <a:rPr sz="2000" b="0">
                 <a:solidFill>
                   <a:srgbClr val="52514E"/>
                 </a:solidFill>
@@ -10747,7 +10404,7 @@
       </p:sp>
       <p:pic>
         <p:nvPicPr>
-          <p:cNvPr id="6" name="Picture 5" descr="fig_p1_wavecal.png"/>
+          <p:cNvPr id="5" name="Picture 4" descr="fig_p1_wavecal.png"/>
           <p:cNvPicPr>
             <a:picLocks noChangeAspect="1"/>
           </p:cNvPicPr>
@@ -10761,8 +10418,8 @@
         </p:blipFill>
         <p:spPr>
           <a:xfrm>
-            <a:off x="457200" y="1394066"/>
-            <a:ext cx="11274552" cy="4024147"/>
+            <a:off x="365760" y="1361429"/>
+            <a:ext cx="11457432" cy="4089421"/>
           </a:xfrm>
           <a:prstGeom prst="rect">
             <a:avLst/>
@@ -10771,14 +10428,14 @@
       </p:pic>
       <p:sp>
         <p:nvSpPr>
-          <p:cNvPr id="7" name="Rectangle 6"/>
+          <p:cNvPr id="6" name="Rectangle 5"/>
           <p:cNvSpPr/>
           <p:nvPr/>
         </p:nvSpPr>
         <p:spPr>
           <a:xfrm>
-            <a:off x="457200" y="5760720"/>
-            <a:ext cx="11274552" cy="566928"/>
+            <a:off x="365760" y="5806440"/>
+            <a:ext cx="11457432" cy="914400"/>
           </a:xfrm>
           <a:prstGeom prst="rect">
             <a:avLst/>
@@ -10810,12 +10467,12 @@
           <a:p>
             <a:pPr algn="ctr"/>
             <a:r>
-              <a:rPr sz="1600" b="1">
+              <a:rPr sz="2000" b="1">
                 <a:solidFill>
                   <a:srgbClr val="0B0B0B"/>
                 </a:solidFill>
               </a:rPr>
-              <a:t>July 1998: 10 of 10 frames, 37 orders each, wavecal RMS medians 0.115–0.127 px.</a:t>
+              <a:t>July 1998: 10 of 10 frames, 37 orders each; wavecal RMS medians 0.115–0.127 px.</a:t>
             </a:r>
           </a:p>
         </p:txBody>
@@ -10889,8 +10546,8 @@
         </p:nvSpPr>
         <p:spPr>
           <a:xfrm>
-            <a:off x="502920" y="256032"/>
-            <a:ext cx="11155680" cy="822960"/>
+            <a:off x="502920" y="228600"/>
+            <a:ext cx="10607040" cy="822960"/>
           </a:xfrm>
           <a:prstGeom prst="rect">
             <a:avLst/>
@@ -10905,11 +10562,11 @@
           <a:p>
             <a:pPr>
               <a:spcAft>
-                <a:spcPts val="600"/>
+                <a:spcPts val="800"/>
               </a:spcAft>
             </a:pPr>
             <a:r>
-              <a:rPr sz="2800" b="1">
+              <a:rPr sz="3000" b="1">
                 <a:solidFill>
                   <a:srgbClr val="0B0B0B"/>
                 </a:solidFill>
@@ -10927,8 +10584,8 @@
         </p:nvSpPr>
         <p:spPr>
           <a:xfrm>
-            <a:off x="502920" y="6419088"/>
-            <a:ext cx="9601200" cy="320040"/>
+            <a:off x="10972800" y="274320"/>
+            <a:ext cx="822960" cy="457200"/>
           </a:xfrm>
           <a:prstGeom prst="rect">
             <a:avLst/>
@@ -10941,51 +10598,13 @@
           </a:bodyPr>
           <a:lstStyle/>
           <a:p>
-            <a:pPr>
+            <a:pPr algn="r">
               <a:spcAft>
-                <a:spcPts val="600"/>
+                <a:spcPts val="800"/>
               </a:spcAft>
             </a:pPr>
             <a:r>
-              <a:rPr sz="1000" b="0">
-                <a:solidFill>
-                  <a:srgbClr val="52514E"/>
-                </a:solidFill>
-              </a:rPr>
-              <a:t>Phase 1   ·   HD 187123 b from the 1998 HIRES frames — technical summary</a:t>
-            </a:r>
-          </a:p>
-        </p:txBody>
-      </p:sp>
-      <p:sp>
-        <p:nvSpPr>
-          <p:cNvPr id="5" name="TextBox 4"/>
-          <p:cNvSpPr txBox="1"/>
-          <p:nvPr/>
-        </p:nvSpPr>
-        <p:spPr>
-          <a:xfrm>
-            <a:off x="10972800" y="6419088"/>
-            <a:ext cx="731520" cy="320040"/>
-          </a:xfrm>
-          <a:prstGeom prst="rect">
-            <a:avLst/>
-          </a:prstGeom>
-          <a:noFill/>
-        </p:spPr>
-        <p:txBody>
-          <a:bodyPr wrap="square">
-            <a:spAutoFit/>
-          </a:bodyPr>
-          <a:lstStyle/>
-          <a:p>
-            <a:pPr algn="r">
-              <a:spcAft>
-                <a:spcPts val="600"/>
-              </a:spcAft>
-            </a:pPr>
-            <a:r>
-              <a:rPr sz="1000" b="0">
+              <a:rPr sz="2000" b="0">
                 <a:solidFill>
                   <a:srgbClr val="52514E"/>
                 </a:solidFill>
@@ -10997,7 +10616,7 @@
       </p:sp>
       <p:pic>
         <p:nvPicPr>
-          <p:cNvPr id="6" name="Picture 5" descr="fig_p1_orders.png"/>
+          <p:cNvPr id="5" name="Picture 4" descr="fig_p1_orders.png"/>
           <p:cNvPicPr>
             <a:picLocks noChangeAspect="1"/>
           </p:cNvPicPr>
@@ -11011,8 +10630,8 @@
         </p:blipFill>
         <p:spPr>
           <a:xfrm>
-            <a:off x="457200" y="1399007"/>
-            <a:ext cx="11274552" cy="4014266"/>
+            <a:off x="365760" y="1366450"/>
+            <a:ext cx="11457432" cy="4079380"/>
           </a:xfrm>
           <a:prstGeom prst="rect">
             <a:avLst/>
@@ -11021,14 +10640,14 @@
       </p:pic>
       <p:sp>
         <p:nvSpPr>
-          <p:cNvPr id="7" name="Rectangle 6"/>
+          <p:cNvPr id="6" name="Rectangle 5"/>
           <p:cNvSpPr/>
           <p:nvPr/>
         </p:nvSpPr>
         <p:spPr>
           <a:xfrm>
-            <a:off x="457200" y="5760720"/>
-            <a:ext cx="11274552" cy="566928"/>
+            <a:off x="365760" y="5806440"/>
+            <a:ext cx="11457432" cy="914400"/>
           </a:xfrm>
           <a:prstGeom prst="rect">
             <a:avLst/>
@@ -11060,12 +10679,12 @@
           <a:p>
             <a:pPr algn="ctr"/>
             <a:r>
-              <a:rPr sz="1600" b="1">
+              <a:rPr sz="2000" b="1">
                 <a:solidFill>
                   <a:srgbClr val="0B0B0B"/>
                 </a:solidFill>
               </a:rPr>
-              <a:t>The inherited find_trim_edge = 3,3 would mask 6 of ~10 spatial pixels per order.</a:t>
+              <a:t>The inherited find_trim_edge = 3,3 would mask 6 of ~10 pixels per order.</a:t>
             </a:r>
           </a:p>
         </p:txBody>
@@ -11096,7 +10715,7 @@
         </p:nvSpPr>
         <p:spPr>
           <a:xfrm>
-            <a:off x="731520" y="2194560"/>
+            <a:off x="731520" y="2103120"/>
             <a:ext cx="10698480" cy="548640"/>
           </a:xfrm>
           <a:prstGeom prst="rect">
@@ -11112,11 +10731,11 @@
           <a:p>
             <a:pPr>
               <a:spcAft>
-                <a:spcPts val="600"/>
+                <a:spcPts val="800"/>
               </a:spcAft>
             </a:pPr>
             <a:r>
-              <a:rPr sz="1800" b="1">
+              <a:rPr sz="2200" b="1">
                 <a:solidFill>
                   <a:srgbClr val="8A8A86"/>
                 </a:solidFill>
@@ -11134,7 +10753,7 @@
         </p:nvSpPr>
         <p:spPr>
           <a:xfrm>
-            <a:off x="731520" y="2743200"/>
+            <a:off x="731520" y="2651760"/>
             <a:ext cx="10698480" cy="1097280"/>
           </a:xfrm>
           <a:prstGeom prst="rect">
@@ -11150,11 +10769,11 @@
           <a:p>
             <a:pPr>
               <a:spcAft>
-                <a:spcPts val="600"/>
+                <a:spcPts val="800"/>
               </a:spcAft>
             </a:pPr>
             <a:r>
-              <a:rPr sz="3600" b="1">
+              <a:rPr sz="3800" b="1">
                 <a:solidFill>
                   <a:srgbClr val="0B0B0B"/>
                 </a:solidFill>
@@ -11173,7 +10792,7 @@
         <p:spPr>
           <a:xfrm>
             <a:off x="731520" y="3840480"/>
-            <a:ext cx="10515600" cy="1463040"/>
+            <a:ext cx="10515600" cy="1828800"/>
           </a:xfrm>
           <a:prstGeom prst="rect">
             <a:avLst/>
@@ -11188,16 +10807,16 @@
           <a:p>
             <a:pPr>
               <a:spcAft>
-                <a:spcPts val="600"/>
+                <a:spcPts val="800"/>
               </a:spcAft>
             </a:pPr>
             <a:r>
-              <a:rPr sz="2000" b="0">
+              <a:rPr sz="2200" b="0">
                 <a:solidFill>
                   <a:srgbClr val="52514E"/>
                 </a:solidFill>
               </a:rPr>
-              <a:t>Extend the reduction to the whole discovery era; measure relative velocities by cross-correlation; build the inputs phase 3 needs.</a:t>
+              <a:t>The whole discovery era reduced; velocities by cross-correlation; the inputs phase 3 needs.</a:t>
             </a:r>
           </a:p>
         </p:txBody>
@@ -11271,8 +10890,8 @@
         </p:nvSpPr>
         <p:spPr>
           <a:xfrm>
-            <a:off x="502920" y="256032"/>
-            <a:ext cx="11155680" cy="822960"/>
+            <a:off x="502920" y="228600"/>
+            <a:ext cx="10607040" cy="822960"/>
           </a:xfrm>
           <a:prstGeom prst="rect">
             <a:avLst/>
@@ -11287,11 +10906,11 @@
           <a:p>
             <a:pPr>
               <a:spcAft>
-                <a:spcPts val="600"/>
+                <a:spcPts val="800"/>
               </a:spcAft>
             </a:pPr>
             <a:r>
-              <a:rPr sz="2800" b="1">
+              <a:rPr sz="3000" b="1">
                 <a:solidFill>
                   <a:srgbClr val="0B0B0B"/>
                 </a:solidFill>
@@ -11309,8 +10928,8 @@
         </p:nvSpPr>
         <p:spPr>
           <a:xfrm>
-            <a:off x="502920" y="6419088"/>
-            <a:ext cx="9601200" cy="320040"/>
+            <a:off x="10972800" y="274320"/>
+            <a:ext cx="822960" cy="457200"/>
           </a:xfrm>
           <a:prstGeom prst="rect">
             <a:avLst/>
@@ -11323,18 +10942,18 @@
           </a:bodyPr>
           <a:lstStyle/>
           <a:p>
-            <a:pPr>
+            <a:pPr algn="r">
               <a:spcAft>
-                <a:spcPts val="600"/>
+                <a:spcPts val="800"/>
               </a:spcAft>
             </a:pPr>
             <a:r>
-              <a:rPr sz="1000" b="0">
+              <a:rPr sz="2000" b="0">
                 <a:solidFill>
                   <a:srgbClr val="52514E"/>
                 </a:solidFill>
               </a:rPr>
-              <a:t>Phase 2   ·   HD 187123 b from the 1998 HIRES frames — technical summary</a:t>
+              <a:t>9</a:t>
             </a:r>
           </a:p>
         </p:txBody>
@@ -11347,8 +10966,8 @@
         </p:nvSpPr>
         <p:spPr>
           <a:xfrm>
-            <a:off x="10972800" y="6419088"/>
-            <a:ext cx="731520" cy="320040"/>
+            <a:off x="640080" y="1188720"/>
+            <a:ext cx="10972800" cy="4526280"/>
           </a:xfrm>
           <a:prstGeom prst="rect">
             <a:avLst/>
@@ -11361,145 +10980,92 @@
           </a:bodyPr>
           <a:lstStyle/>
           <a:p>
-            <a:pPr algn="r">
+            <a:pPr>
               <a:spcAft>
-                <a:spcPts val="600"/>
+                <a:spcPts val="800"/>
               </a:spcAft>
             </a:pPr>
             <a:r>
-              <a:rPr sz="1000" b="0">
-                <a:solidFill>
-                  <a:srgbClr val="52514E"/>
-                </a:solidFill>
-              </a:rPr>
-              <a:t>9</a:t>
-            </a:r>
-          </a:p>
-        </p:txBody>
-      </p:sp>
-      <p:sp>
-        <p:nvSpPr>
-          <p:cNvPr id="6" name="TextBox 5"/>
-          <p:cNvSpPr txBox="1"/>
-          <p:nvPr/>
-        </p:nvSpPr>
-        <p:spPr>
-          <a:xfrm>
-            <a:off x="640080" y="1234440"/>
-            <a:ext cx="10972800" cy="4572000"/>
-          </a:xfrm>
-          <a:prstGeom prst="rect">
-            <a:avLst/>
-          </a:prstGeom>
-          <a:noFill/>
-        </p:spPr>
-        <p:txBody>
-          <a:bodyPr wrap="square">
-            <a:spAutoFit/>
-          </a:bodyPr>
-          <a:lstStyle/>
+              <a:rPr sz="2200" b="0">
+                <a:solidFill>
+                  <a:srgbClr val="0B0B0B"/>
+                </a:solidFill>
+              </a:rPr>
+              <a:t>• 20 nights, 36 frames, 37 orders; wavecal RMS 0.11–0.15 px</a:t>
+            </a:r>
+          </a:p>
           <a:p>
             <a:pPr>
               <a:spcAft>
-                <a:spcPts val="600"/>
+                <a:spcPts val="800"/>
               </a:spcAft>
             </a:pPr>
             <a:r>
-              <a:rPr sz="2000" b="0">
+              <a:rPr sz="2200" b="0">
                 <a:solidFill>
                   <a:srgbClr val="0B0B0B"/>
                 </a:solidFill>
               </a:rPr>
-              <a:t>• 20 nights, 36 science frames, 37 orders each (09-13: 34); nightly wavecal RMS 0.108–0.146 px</a:t>
+              <a:t>• Quality filter: 1329 order-spectra, 11.3% rejected</a:t>
             </a:r>
           </a:p>
           <a:p>
             <a:pPr>
               <a:spcAft>
-                <a:spcPts val="600"/>
+                <a:spcPts val="800"/>
               </a:spcAft>
             </a:pPr>
             <a:r>
-              <a:rPr sz="2000" b="0">
+              <a:rPr sz="2200" b="0">
                 <a:solidFill>
                   <a:srgbClr val="0B0B0B"/>
                 </a:solidFill>
               </a:rPr>
-              <a:t>• Quality filter: 1329 order-spectra, 11.3% rejected (data/order_quality.csv)</a:t>
+              <a:t>• Template: three cell-out exposures, S/N ~790 per pixel</a:t>
             </a:r>
           </a:p>
           <a:p>
             <a:pPr>
               <a:spcAft>
-                <a:spcPts val="600"/>
+                <a:spcPts val="800"/>
               </a:spcAft>
             </a:pPr>
             <a:r>
-              <a:rPr sz="2000" b="0">
+              <a:rPr sz="2200" b="0">
                 <a:solidFill>
                   <a:srgbClr val="0B0B0B"/>
                 </a:solidFill>
               </a:rPr>
-              <a:t>• Template: three 1998-08-26 cell-out exposures co-added (S/N ~790 per pixel against the true noise)</a:t>
+              <a:t>• Atlas: Fischer 2022 FTS; positions match (r = 0.928), depths need α = 2.59</a:t>
             </a:r>
           </a:p>
           <a:p>
             <a:pPr>
               <a:spcAft>
-                <a:spcPts val="600"/>
+                <a:spcPts val="800"/>
               </a:spcAft>
             </a:pPr>
             <a:r>
-              <a:rPr sz="2000" b="0">
+              <a:rPr sz="2200" b="0">
                 <a:solidFill>
                   <a:srgbClr val="0B0B0B"/>
                 </a:solidFill>
               </a:rPr>
-              <a:t>• Iodine atlas: Fischer May 2022 FTS; line positions match the HIRES cell (r = 0.928), depths do not: α = 2.59 Beer–Lambert</a:t>
-            </a:r>
-          </a:p>
-          <a:p>
-            <a:pPr>
-              <a:spcAft>
-                <a:spcPts val="600"/>
-              </a:spcAft>
-            </a:pPr>
-            <a:r>
-              <a:rPr sz="2000" b="0">
-                <a:solidFill>
-                  <a:srgbClr val="0B0B0B"/>
-                </a:solidFill>
-              </a:rPr>
-              <a:t>• Adapter utilities_hires/: observed frame, VEL_CORR divided out, JD(UTC) mid-exposure, BVC in m/s</a:t>
-            </a:r>
-          </a:p>
-          <a:p>
-            <a:pPr>
-              <a:spcAft>
-                <a:spcPts val="600"/>
-              </a:spcAft>
-            </a:pPr>
-            <a:r>
-              <a:rPr sz="2000" b="0">
-                <a:solidFill>
-                  <a:srgbClr val="0B0B0B"/>
-                </a:solidFill>
-              </a:rPr>
-              <a:t>• refframe_audit.py: PypeIt’s heliocentric correction has a solar-term sign error (+9 to +14 m/s, drifting 5.2 m/s) and omits relativistic terms (−4.6 m/s)</a:t>
-            </a:r>
-          </a:p>
-        </p:txBody>
-      </p:sp>
-      <p:sp>
-        <p:nvSpPr>
-          <p:cNvPr id="7" name="Rectangle 6"/>
+              <a:t>• Adapter: observed frame, JD(UTC) mid-exposure, BVC in m/s</a:t>
+            </a:r>
+          </a:p>
+        </p:txBody>
+      </p:sp>
+      <p:sp>
+        <p:nvSpPr>
+          <p:cNvPr id="6" name="Rectangle 5"/>
           <p:cNvSpPr/>
           <p:nvPr/>
         </p:nvSpPr>
         <p:spPr>
           <a:xfrm>
-            <a:off x="457200" y="5760720"/>
-            <a:ext cx="11274552" cy="566928"/>
+            <a:off x="365760" y="5806440"/>
+            <a:ext cx="11457432" cy="914400"/>
           </a:xfrm>
           <a:prstGeom prst="rect">
             <a:avLst/>
@@ -11531,12 +11097,12 @@
           <a:p>
             <a:pPr algn="ctr"/>
             <a:r>
-              <a:rPr sz="1600" b="1">
+              <a:rPr sz="2000" b="1">
                 <a:solidFill>
                   <a:srgbClr val="0B0B0B"/>
                 </a:solidFill>
               </a:rPr>
-              <a:t>Two core/wave.py bugs affect every PypeIt user who takes the default refframe.</a:t>
+              <a:t>Plus refframe_audit.py: two PypeIt core/wave.py bugs (next slide).</a:t>
             </a:r>
           </a:p>
         </p:txBody>

--- a/docs/slides/technical_summary.pptx
+++ b/docs/slides/technical_summary.pptx
@@ -35,6 +35,7 @@
     <p:sldId id="283" r:id="rId34"/>
     <p:sldId id="284" r:id="rId35"/>
     <p:sldId id="285" r:id="rId36"/>
+    <p:sldId id="286" r:id="rId37"/>
   </p:sldIdLst>
   <p:sldSz cx="12191695" cy="6858000" type="screen4x3"/>
   <p:notesSz cx="6858000" cy="9144000"/>
@@ -3368,7 +3369,7 @@
                   <a:srgbClr val="0B0B0B"/>
                 </a:solidFill>
               </a:rPr>
-              <a:t>PypeIt’s velocity correction (refframe_audit.py)</a:t>
+              <a:t>What phase 2 built</a:t>
             </a:r>
           </a:p>
         </p:txBody>
@@ -3444,37 +3445,7 @@
                   <a:srgbClr val="0B0B0B"/>
                 </a:solidFill>
               </a:rPr>
-              <a:t>• Solar-term sign error in geomotion_velocity (wave.py:128)</a:t>
-            </a:r>
-          </a:p>
-          <a:p>
-            <a:pPr lvl="1">
-              <a:spcAft>
-                <a:spcPts val="800"/>
-              </a:spcAft>
-            </a:pPr>
-            <a:r>
-              <a:rPr sz="2200" b="0">
-                <a:solidFill>
-                  <a:srgbClr val="0B0B0B"/>
-                </a:solidFill>
-              </a:rPr>
-              <a:t>– +9 to +14 m/s off astropy; drifts 5.2 m/s over nine months</a:t>
-            </a:r>
-          </a:p>
-          <a:p>
-            <a:pPr lvl="1">
-              <a:spcAft>
-                <a:spcPts val="800"/>
-              </a:spcAft>
-            </a:pPr>
-            <a:r>
-              <a:rPr sz="2200" b="0">
-                <a:solidFill>
-                  <a:srgbClr val="0B0B0B"/>
-                </a:solidFill>
-              </a:rPr>
-              <a:t>– heliocentric is the default: every user is affected</a:t>
+              <a:t>• 20 nights, 36 frames, 37 orders; wavecal RMS 0.11–0.15 px</a:t>
             </a:r>
           </a:p>
           <a:p>
@@ -3489,11 +3460,11 @@
                   <a:srgbClr val="0B0B0B"/>
                 </a:solidFill>
               </a:rPr>
-              <a:t>• Relativistic terms omitted in geomotion_correct</a:t>
-            </a:r>
-          </a:p>
-          <a:p>
-            <a:pPr lvl="1">
+              <a:t>• Quality filter: 1329 order-spectra, 11.3% rejected</a:t>
+            </a:r>
+          </a:p>
+          <a:p>
+            <a:pPr>
               <a:spcAft>
                 <a:spcPts val="800"/>
               </a:spcAft>
@@ -3504,7 +3475,37 @@
                   <a:srgbClr val="0B0B0B"/>
                 </a:solidFill>
               </a:rPr>
-              <a:t>– −4.6 m/s, nearly constant</a:t>
+              <a:t>• Template: three cell-out exposures, S/N ~790 per pixel</a:t>
+            </a:r>
+          </a:p>
+          <a:p>
+            <a:pPr>
+              <a:spcAft>
+                <a:spcPts val="800"/>
+              </a:spcAft>
+            </a:pPr>
+            <a:r>
+              <a:rPr sz="2200" b="0">
+                <a:solidFill>
+                  <a:srgbClr val="0B0B0B"/>
+                </a:solidFill>
+              </a:rPr>
+              <a:t>• Atlas: Fischer 2022 FTS; positions match (r = 0.928), depths need α = 2.59</a:t>
+            </a:r>
+          </a:p>
+          <a:p>
+            <a:pPr>
+              <a:spcAft>
+                <a:spcPts val="800"/>
+              </a:spcAft>
+            </a:pPr>
+            <a:r>
+              <a:rPr sz="2200" b="0">
+                <a:solidFill>
+                  <a:srgbClr val="0B0B0B"/>
+                </a:solidFill>
+              </a:rPr>
+              <a:t>• Adapter: observed frame, JD(UTC) mid-exposure, BVC in m/s</a:t>
             </a:r>
           </a:p>
         </p:txBody>
@@ -3555,7 +3556,7 @@
                   <a:srgbClr val="0B0B0B"/>
                 </a:solidFill>
               </a:rPr>
-              <a:t>Both still in develop; reported upstream.</a:t>
+              <a:t>Plus refframe_audit.py: two PypeIt core/wave.py bugs (next slide).</a:t>
             </a:r>
           </a:p>
         </p:txBody>
@@ -3654,7 +3655,7 @@
                   <a:srgbClr val="0B0B0B"/>
                 </a:solidFill>
               </a:rPr>
-              <a:t>The atlas: positions transfer, depths need α ≈ 2.6</a:t>
+              <a:t>PypeIt’s velocity correction (refframe_audit.py)</a:t>
             </a:r>
           </a:p>
         </p:txBody>
@@ -3697,30 +3698,104 @@
           </a:p>
         </p:txBody>
       </p:sp>
-      <p:pic>
-        <p:nvPicPr>
-          <p:cNvPr id="5" name="Picture 4" descr="fig_p2_atlas.png"/>
-          <p:cNvPicPr>
-            <a:picLocks noChangeAspect="1"/>
-          </p:cNvPicPr>
-          <p:nvPr/>
-        </p:nvPicPr>
-        <p:blipFill>
-          <a:blip r:embed="rId2"/>
-          <a:stretch>
-            <a:fillRect/>
-          </a:stretch>
-        </p:blipFill>
-        <p:spPr>
-          <a:xfrm>
-            <a:off x="1817838" y="1097280"/>
-            <a:ext cx="8553276" cy="4617720"/>
-          </a:xfrm>
-          <a:prstGeom prst="rect">
-            <a:avLst/>
-          </a:prstGeom>
-        </p:spPr>
-      </p:pic>
+      <p:sp>
+        <p:nvSpPr>
+          <p:cNvPr id="5" name="TextBox 4"/>
+          <p:cNvSpPr txBox="1"/>
+          <p:nvPr/>
+        </p:nvSpPr>
+        <p:spPr>
+          <a:xfrm>
+            <a:off x="640080" y="1188720"/>
+            <a:ext cx="10972800" cy="4526280"/>
+          </a:xfrm>
+          <a:prstGeom prst="rect">
+            <a:avLst/>
+          </a:prstGeom>
+          <a:noFill/>
+        </p:spPr>
+        <p:txBody>
+          <a:bodyPr wrap="square">
+            <a:spAutoFit/>
+          </a:bodyPr>
+          <a:lstStyle/>
+          <a:p>
+            <a:pPr>
+              <a:spcAft>
+                <a:spcPts val="800"/>
+              </a:spcAft>
+            </a:pPr>
+            <a:r>
+              <a:rPr sz="2200" b="0">
+                <a:solidFill>
+                  <a:srgbClr val="0B0B0B"/>
+                </a:solidFill>
+              </a:rPr>
+              <a:t>• Solar-term sign error in geomotion_velocity (wave.py:128)</a:t>
+            </a:r>
+          </a:p>
+          <a:p>
+            <a:pPr lvl="1">
+              <a:spcAft>
+                <a:spcPts val="800"/>
+              </a:spcAft>
+            </a:pPr>
+            <a:r>
+              <a:rPr sz="2200" b="0">
+                <a:solidFill>
+                  <a:srgbClr val="0B0B0B"/>
+                </a:solidFill>
+              </a:rPr>
+              <a:t>– +9 to +14 m/s off astropy; drifts 5.2 m/s over nine months</a:t>
+            </a:r>
+          </a:p>
+          <a:p>
+            <a:pPr lvl="1">
+              <a:spcAft>
+                <a:spcPts val="800"/>
+              </a:spcAft>
+            </a:pPr>
+            <a:r>
+              <a:rPr sz="2200" b="0">
+                <a:solidFill>
+                  <a:srgbClr val="0B0B0B"/>
+                </a:solidFill>
+              </a:rPr>
+              <a:t>– heliocentric is the default: every user is affected</a:t>
+            </a:r>
+          </a:p>
+          <a:p>
+            <a:pPr>
+              <a:spcAft>
+                <a:spcPts val="800"/>
+              </a:spcAft>
+            </a:pPr>
+            <a:r>
+              <a:rPr sz="2200" b="0">
+                <a:solidFill>
+                  <a:srgbClr val="0B0B0B"/>
+                </a:solidFill>
+              </a:rPr>
+              <a:t>• Relativistic terms omitted in geomotion_correct</a:t>
+            </a:r>
+          </a:p>
+          <a:p>
+            <a:pPr lvl="1">
+              <a:spcAft>
+                <a:spcPts val="800"/>
+              </a:spcAft>
+            </a:pPr>
+            <a:r>
+              <a:rPr sz="2200" b="0">
+                <a:solidFill>
+                  <a:srgbClr val="0B0B0B"/>
+                </a:solidFill>
+              </a:rPr>
+              <a:t>– −4.6 m/s, nearly constant</a:t>
+            </a:r>
+          </a:p>
+        </p:txBody>
+      </p:sp>
       <p:sp>
         <p:nvSpPr>
           <p:cNvPr id="6" name="Rectangle 5"/>
@@ -3767,7 +3842,7 @@
                   <a:srgbClr val="0B0B0B"/>
                 </a:solidFill>
               </a:rPr>
-              <a:t>Beer–Lambert, not pyodine’s linear scaling (negative at α = 2.6).</a:t>
+              <a:t>Both still in develop; reported upstream.</a:t>
             </a:r>
           </a:p>
         </p:txBody>
@@ -3866,7 +3941,7 @@
                   <a:srgbClr val="0B0B0B"/>
                 </a:solidFill>
               </a:rPr>
-              <a:t>Cross-correlation: the planet is not there</a:t>
+              <a:t>The atlas: positions transfer, depths need α ≈ 2.6</a:t>
             </a:r>
           </a:p>
         </p:txBody>
@@ -3911,7 +3986,7 @@
       </p:sp>
       <p:pic>
         <p:nvPicPr>
-          <p:cNvPr id="5" name="Picture 4" descr="fig_p2_phasefold.png"/>
+          <p:cNvPr id="5" name="Picture 4" descr="fig_p2_atlas.png"/>
           <p:cNvPicPr>
             <a:picLocks noChangeAspect="1"/>
           </p:cNvPicPr>
@@ -3925,8 +4000,8 @@
         </p:blipFill>
         <p:spPr>
           <a:xfrm>
-            <a:off x="365760" y="1144897"/>
-            <a:ext cx="11457432" cy="4522485"/>
+            <a:off x="1817838" y="1097280"/>
+            <a:ext cx="8553276" cy="4617720"/>
           </a:xfrm>
           <a:prstGeom prst="rect">
             <a:avLst/>
@@ -3979,7 +4054,7 @@
                   <a:srgbClr val="0B0B0B"/>
                 </a:solidFill>
               </a:rPr>
-              <a:t>36 epochs, rms 702 m/s; K = 408 ± 188 m/s — not a detection.</a:t>
+              <a:t>Beer–Lambert, not pyodine’s linear scaling (negative at α = 2.6).</a:t>
             </a:r>
           </a:p>
         </p:txBody>
@@ -4078,7 +4153,7 @@
                   <a:srgbClr val="0B0B0B"/>
                 </a:solidFill>
               </a:rPr>
-              <a:t>Why the lamp fails</a:t>
+              <a:t>Cross-correlation: the planet is not there</a:t>
             </a:r>
           </a:p>
         </p:txBody>
@@ -4121,104 +4196,30 @@
           </a:p>
         </p:txBody>
       </p:sp>
-      <p:sp>
-        <p:nvSpPr>
-          <p:cNvPr id="5" name="TextBox 4"/>
-          <p:cNvSpPr txBox="1"/>
-          <p:nvPr/>
-        </p:nvSpPr>
-        <p:spPr>
-          <a:xfrm>
-            <a:off x="640080" y="1188720"/>
-            <a:ext cx="10972800" cy="4526280"/>
-          </a:xfrm>
-          <a:prstGeom prst="rect">
-            <a:avLst/>
-          </a:prstGeom>
-          <a:noFill/>
-        </p:spPr>
-        <p:txBody>
-          <a:bodyPr wrap="square">
-            <a:spAutoFit/>
-          </a:bodyPr>
-          <a:lstStyle/>
-          <a:p>
-            <a:pPr>
-              <a:spcAft>
-                <a:spcPts val="800"/>
-              </a:spcAft>
-            </a:pPr>
-            <a:r>
-              <a:rPr sz="2200" b="0">
-                <a:solidFill>
-                  <a:srgbClr val="0B0B0B"/>
-                </a:solidFill>
-              </a:rPr>
-              <a:t>• Orders within one exposure agree to 47 m/s</a:t>
-            </a:r>
-          </a:p>
-          <a:p>
-            <a:pPr>
-              <a:spcAft>
-                <a:spcPts val="800"/>
-              </a:spcAft>
-            </a:pPr>
-            <a:r>
-              <a:rPr sz="2200" b="0">
-                <a:solidFill>
-                  <a:srgbClr val="0B0B0B"/>
-                </a:solidFill>
-              </a:rPr>
-              <a:t>• Exposures disagree by ~700 m/s</a:t>
-            </a:r>
-          </a:p>
-          <a:p>
-            <a:pPr>
-              <a:spcAft>
-                <a:spcPts val="800"/>
-              </a:spcAft>
-            </a:pPr>
-            <a:r>
-              <a:rPr sz="2200" b="0">
-                <a:solidFill>
-                  <a:srgbClr val="0B0B0B"/>
-                </a:solidFill>
-              </a:rPr>
-              <a:t>• So the limit is the wavelength zero point</a:t>
-            </a:r>
-          </a:p>
-          <a:p>
-            <a:pPr>
-              <a:spcAft>
-                <a:spcPts val="800"/>
-              </a:spcAft>
-            </a:pPr>
-            <a:r>
-              <a:rPr sz="2200" b="0">
-                <a:solidFill>
-                  <a:srgbClr val="0B0B0B"/>
-                </a:solidFill>
-              </a:rPr>
-              <a:t>• Borrowed-arc night: +1.5 to +2.4 km/s off</a:t>
-            </a:r>
-          </a:p>
-          <a:p>
-            <a:pPr>
-              <a:spcAft>
-                <a:spcPts val="800"/>
-              </a:spcAft>
-            </a:pPr>
-            <a:r>
-              <a:rPr sz="2200" b="0">
-                <a:solidFill>
-                  <a:srgbClr val="0B0B0B"/>
-                </a:solidFill>
-              </a:rPr>
-              <a:t>• 08-25: drifts 1.6 km/s in 6.7 hours</a:t>
-            </a:r>
-          </a:p>
-        </p:txBody>
-      </p:sp>
+      <p:pic>
+        <p:nvPicPr>
+          <p:cNvPr id="5" name="Picture 4" descr="fig_p2_phasefold.png"/>
+          <p:cNvPicPr>
+            <a:picLocks noChangeAspect="1"/>
+          </p:cNvPicPr>
+          <p:nvPr/>
+        </p:nvPicPr>
+        <p:blipFill>
+          <a:blip r:embed="rId2"/>
+          <a:stretch>
+            <a:fillRect/>
+          </a:stretch>
+        </p:blipFill>
+        <p:spPr>
+          <a:xfrm>
+            <a:off x="365760" y="1144897"/>
+            <a:ext cx="11457432" cy="4522485"/>
+          </a:xfrm>
+          <a:prstGeom prst="rect">
+            <a:avLst/>
+          </a:prstGeom>
+        </p:spPr>
+      </p:pic>
       <p:sp>
         <p:nvSpPr>
           <p:cNvPr id="6" name="Rectangle 5"/>
@@ -4265,7 +4266,7 @@
                   <a:srgbClr val="0B0B0B"/>
                 </a:solidFill>
               </a:rPr>
-              <a:t>The iodine cell fixes exactly this: its ruler rides on the same photons.</a:t>
+              <a:t>36 epochs, rms 702 m/s; K = 408 ± 188 m/s — not a detection.</a:t>
             </a:r>
           </a:p>
         </p:txBody>
@@ -4290,14 +4291,57 @@
       <p:grpSpPr/>
       <p:sp>
         <p:nvSpPr>
-          <p:cNvPr id="2" name="TextBox 1"/>
+          <p:cNvPr id="2" name="Rectangle 1"/>
+          <p:cNvSpPr/>
+          <p:nvPr/>
+        </p:nvSpPr>
+        <p:spPr>
+          <a:xfrm>
+            <a:off x="0" y="0"/>
+            <a:ext cx="12191695" cy="82296"/>
+          </a:xfrm>
+          <a:prstGeom prst="rect">
+            <a:avLst/>
+          </a:prstGeom>
+          <a:solidFill>
+            <a:srgbClr val="2A78D6"/>
+          </a:solidFill>
+          <a:ln>
+            <a:noFill/>
+          </a:ln>
+        </p:spPr>
+        <p:style>
+          <a:lnRef idx="1">
+            <a:schemeClr val="accent1"/>
+          </a:lnRef>
+          <a:fillRef idx="3">
+            <a:schemeClr val="accent1"/>
+          </a:fillRef>
+          <a:effectRef idx="2">
+            <a:schemeClr val="accent1"/>
+          </a:effectRef>
+          <a:fontRef idx="minor">
+            <a:schemeClr val="lt1"/>
+          </a:fontRef>
+        </p:style>
+        <p:txBody>
+          <a:bodyPr rtlCol="0" anchor="ctr"/>
+          <a:lstStyle/>
+          <a:p>
+            <a:pPr algn="ctr"/>
+          </a:p>
+        </p:txBody>
+      </p:sp>
+      <p:sp>
+        <p:nvSpPr>
+          <p:cNvPr id="3" name="TextBox 2"/>
           <p:cNvSpPr txBox="1"/>
           <p:nvPr/>
         </p:nvSpPr>
         <p:spPr>
           <a:xfrm>
-            <a:off x="731520" y="2103120"/>
-            <a:ext cx="10698480" cy="548640"/>
+            <a:off x="502920" y="228600"/>
+            <a:ext cx="10607040" cy="822960"/>
           </a:xfrm>
           <a:prstGeom prst="rect">
             <a:avLst/>
@@ -4316,26 +4360,64 @@
               </a:spcAft>
             </a:pPr>
             <a:r>
-              <a:rPr sz="2200" b="1">
-                <a:solidFill>
-                  <a:srgbClr val="2A78D6"/>
-                </a:solidFill>
-              </a:rPr>
-              <a:t>Phase 3</a:t>
-            </a:r>
-          </a:p>
-        </p:txBody>
-      </p:sp>
-      <p:sp>
-        <p:nvSpPr>
-          <p:cNvPr id="3" name="TextBox 2"/>
+              <a:rPr sz="3000" b="1">
+                <a:solidFill>
+                  <a:srgbClr val="0B0B0B"/>
+                </a:solidFill>
+              </a:rPr>
+              <a:t>Why the lamp fails</a:t>
+            </a:r>
+          </a:p>
+        </p:txBody>
+      </p:sp>
+      <p:sp>
+        <p:nvSpPr>
+          <p:cNvPr id="4" name="TextBox 3"/>
           <p:cNvSpPr txBox="1"/>
           <p:nvPr/>
         </p:nvSpPr>
         <p:spPr>
           <a:xfrm>
-            <a:off x="731520" y="2651760"/>
-            <a:ext cx="10698480" cy="1097280"/>
+            <a:off x="10972800" y="274320"/>
+            <a:ext cx="822960" cy="457200"/>
+          </a:xfrm>
+          <a:prstGeom prst="rect">
+            <a:avLst/>
+          </a:prstGeom>
+          <a:noFill/>
+        </p:spPr>
+        <p:txBody>
+          <a:bodyPr wrap="square">
+            <a:spAutoFit/>
+          </a:bodyPr>
+          <a:lstStyle/>
+          <a:p>
+            <a:pPr algn="r">
+              <a:spcAft>
+                <a:spcPts val="800"/>
+              </a:spcAft>
+            </a:pPr>
+            <a:r>
+              <a:rPr sz="2000" b="0">
+                <a:solidFill>
+                  <a:srgbClr val="52514E"/>
+                </a:solidFill>
+              </a:rPr>
+              <a:t>14</a:t>
+            </a:r>
+          </a:p>
+        </p:txBody>
+      </p:sp>
+      <p:sp>
+        <p:nvSpPr>
+          <p:cNvPr id="5" name="TextBox 4"/>
+          <p:cNvSpPr txBox="1"/>
+          <p:nvPr/>
+        </p:nvSpPr>
+        <p:spPr>
+          <a:xfrm>
+            <a:off x="640080" y="1188720"/>
+            <a:ext cx="10972800" cy="4526280"/>
           </a:xfrm>
           <a:prstGeom prst="rect">
             <a:avLst/>
@@ -4354,37 +4436,14 @@
               </a:spcAft>
             </a:pPr>
             <a:r>
-              <a:rPr sz="3800" b="1">
+              <a:rPr sz="2200" b="0">
                 <a:solidFill>
                   <a:srgbClr val="0B0B0B"/>
                 </a:solidFill>
               </a:rPr>
-              <a:t>The iodine forward model</a:t>
-            </a:r>
-          </a:p>
-        </p:txBody>
-      </p:sp>
-      <p:sp>
-        <p:nvSpPr>
-          <p:cNvPr id="4" name="TextBox 3"/>
-          <p:cNvSpPr txBox="1"/>
-          <p:nvPr/>
-        </p:nvSpPr>
-        <p:spPr>
-          <a:xfrm>
-            <a:off x="731520" y="3840480"/>
-            <a:ext cx="10515600" cy="1828800"/>
-          </a:xfrm>
-          <a:prstGeom prst="rect">
-            <a:avLst/>
-          </a:prstGeom>
-          <a:noFill/>
-        </p:spPr>
-        <p:txBody>
-          <a:bodyPr wrap="square">
-            <a:spAutoFit/>
-          </a:bodyPr>
-          <a:lstStyle/>
+              <a:t>• Orders within one exposure agree to 47 m/s</a:t>
+            </a:r>
+          </a:p>
           <a:p>
             <a:pPr>
               <a:spcAft>
@@ -4394,10 +4453,106 @@
             <a:r>
               <a:rPr sz="2200" b="0">
                 <a:solidFill>
-                  <a:srgbClr val="52514E"/>
-                </a:solidFill>
-              </a:rPr>
-              <a:t>Fork pyodine, adapt it to HIRES, fit every cell-in epoch, and assess exactly as phase 2 did.</a:t>
+                  <a:srgbClr val="0B0B0B"/>
+                </a:solidFill>
+              </a:rPr>
+              <a:t>• Exposures disagree by ~700 m/s</a:t>
+            </a:r>
+          </a:p>
+          <a:p>
+            <a:pPr>
+              <a:spcAft>
+                <a:spcPts val="800"/>
+              </a:spcAft>
+            </a:pPr>
+            <a:r>
+              <a:rPr sz="2200" b="0">
+                <a:solidFill>
+                  <a:srgbClr val="0B0B0B"/>
+                </a:solidFill>
+              </a:rPr>
+              <a:t>• So the limit is the wavelength zero point</a:t>
+            </a:r>
+          </a:p>
+          <a:p>
+            <a:pPr>
+              <a:spcAft>
+                <a:spcPts val="800"/>
+              </a:spcAft>
+            </a:pPr>
+            <a:r>
+              <a:rPr sz="2200" b="0">
+                <a:solidFill>
+                  <a:srgbClr val="0B0B0B"/>
+                </a:solidFill>
+              </a:rPr>
+              <a:t>• Borrowed-arc night: +1.5 to +2.4 km/s off</a:t>
+            </a:r>
+          </a:p>
+          <a:p>
+            <a:pPr>
+              <a:spcAft>
+                <a:spcPts val="800"/>
+              </a:spcAft>
+            </a:pPr>
+            <a:r>
+              <a:rPr sz="2200" b="0">
+                <a:solidFill>
+                  <a:srgbClr val="0B0B0B"/>
+                </a:solidFill>
+              </a:rPr>
+              <a:t>• 08-25: drifts 1.6 km/s in 6.7 hours</a:t>
+            </a:r>
+          </a:p>
+        </p:txBody>
+      </p:sp>
+      <p:sp>
+        <p:nvSpPr>
+          <p:cNvPr id="6" name="Rectangle 5"/>
+          <p:cNvSpPr/>
+          <p:nvPr/>
+        </p:nvSpPr>
+        <p:spPr>
+          <a:xfrm>
+            <a:off x="365760" y="5806440"/>
+            <a:ext cx="11457432" cy="914400"/>
+          </a:xfrm>
+          <a:prstGeom prst="rect">
+            <a:avLst/>
+          </a:prstGeom>
+          <a:solidFill>
+            <a:srgbClr val="EEF4FC"/>
+          </a:solidFill>
+          <a:ln>
+            <a:noFill/>
+          </a:ln>
+        </p:spPr>
+        <p:style>
+          <a:lnRef idx="1">
+            <a:schemeClr val="accent1"/>
+          </a:lnRef>
+          <a:fillRef idx="3">
+            <a:schemeClr val="accent1"/>
+          </a:fillRef>
+          <a:effectRef idx="2">
+            <a:schemeClr val="accent1"/>
+          </a:effectRef>
+          <a:fontRef idx="minor">
+            <a:schemeClr val="lt1"/>
+          </a:fontRef>
+        </p:style>
+        <p:txBody>
+          <a:bodyPr rtlCol="0" anchor="ctr" wrap="square"/>
+          <a:lstStyle/>
+          <a:p>
+            <a:pPr algn="ctr"/>
+            <a:r>
+              <a:rPr sz="2000" b="1">
+                <a:solidFill>
+                  <a:srgbClr val="0B0B0B"/>
+                </a:solidFill>
+              </a:rPr>
+              <a:t>The iodine cell fixes exactly this: its ruler rides on the same photons.</a:t>
             </a:r>
           </a:p>
         </p:txBody>
@@ -4422,6 +4577,138 @@
       <p:grpSpPr/>
       <p:sp>
         <p:nvSpPr>
+          <p:cNvPr id="2" name="TextBox 1"/>
+          <p:cNvSpPr txBox="1"/>
+          <p:nvPr/>
+        </p:nvSpPr>
+        <p:spPr>
+          <a:xfrm>
+            <a:off x="731520" y="2103120"/>
+            <a:ext cx="10698480" cy="548640"/>
+          </a:xfrm>
+          <a:prstGeom prst="rect">
+            <a:avLst/>
+          </a:prstGeom>
+          <a:noFill/>
+        </p:spPr>
+        <p:txBody>
+          <a:bodyPr wrap="square">
+            <a:spAutoFit/>
+          </a:bodyPr>
+          <a:lstStyle/>
+          <a:p>
+            <a:pPr>
+              <a:spcAft>
+                <a:spcPts val="800"/>
+              </a:spcAft>
+            </a:pPr>
+            <a:r>
+              <a:rPr sz="2200" b="1">
+                <a:solidFill>
+                  <a:srgbClr val="2A78D6"/>
+                </a:solidFill>
+              </a:rPr>
+              <a:t>Phase 3</a:t>
+            </a:r>
+          </a:p>
+        </p:txBody>
+      </p:sp>
+      <p:sp>
+        <p:nvSpPr>
+          <p:cNvPr id="3" name="TextBox 2"/>
+          <p:cNvSpPr txBox="1"/>
+          <p:nvPr/>
+        </p:nvSpPr>
+        <p:spPr>
+          <a:xfrm>
+            <a:off x="731520" y="2651760"/>
+            <a:ext cx="10698480" cy="1097280"/>
+          </a:xfrm>
+          <a:prstGeom prst="rect">
+            <a:avLst/>
+          </a:prstGeom>
+          <a:noFill/>
+        </p:spPr>
+        <p:txBody>
+          <a:bodyPr wrap="square">
+            <a:spAutoFit/>
+          </a:bodyPr>
+          <a:lstStyle/>
+          <a:p>
+            <a:pPr>
+              <a:spcAft>
+                <a:spcPts val="800"/>
+              </a:spcAft>
+            </a:pPr>
+            <a:r>
+              <a:rPr sz="3800" b="1">
+                <a:solidFill>
+                  <a:srgbClr val="0B0B0B"/>
+                </a:solidFill>
+              </a:rPr>
+              <a:t>The iodine forward model</a:t>
+            </a:r>
+          </a:p>
+        </p:txBody>
+      </p:sp>
+      <p:sp>
+        <p:nvSpPr>
+          <p:cNvPr id="4" name="TextBox 3"/>
+          <p:cNvSpPr txBox="1"/>
+          <p:nvPr/>
+        </p:nvSpPr>
+        <p:spPr>
+          <a:xfrm>
+            <a:off x="731520" y="3840480"/>
+            <a:ext cx="10515600" cy="1828800"/>
+          </a:xfrm>
+          <a:prstGeom prst="rect">
+            <a:avLst/>
+          </a:prstGeom>
+          <a:noFill/>
+        </p:spPr>
+        <p:txBody>
+          <a:bodyPr wrap="square">
+            <a:spAutoFit/>
+          </a:bodyPr>
+          <a:lstStyle/>
+          <a:p>
+            <a:pPr>
+              <a:spcAft>
+                <a:spcPts val="800"/>
+              </a:spcAft>
+            </a:pPr>
+            <a:r>
+              <a:rPr sz="2200" b="0">
+                <a:solidFill>
+                  <a:srgbClr val="52514E"/>
+                </a:solidFill>
+              </a:rPr>
+              <a:t>Fork pyodine, adapt it to HIRES, fit every cell-in epoch, and assess exactly as phase 2 did.</a:t>
+            </a:r>
+          </a:p>
+        </p:txBody>
+      </p:sp>
+    </p:spTree>
+  </p:cSld>
+  <p:clrMapOvr>
+    <a:masterClrMapping/>
+  </p:clrMapOvr>
+</p:sld>
+</file>
+
+<file path=ppt/slides/slide16.xml><?xml version="1.0" encoding="utf-8"?>
+<p:sld xmlns:a="http://schemas.openxmlformats.org/drawingml/2006/main" xmlns:p="http://schemas.openxmlformats.org/presentationml/2006/main" xmlns:r="http://schemas.openxmlformats.org/officeDocument/2006/relationships">
+  <p:cSld>
+    <p:spTree>
+      <p:nvGrpSpPr>
+        <p:cNvPr id="1" name=""/>
+        <p:cNvGrpSpPr/>
+        <p:nvPr/>
+      </p:nvGrpSpPr>
+      <p:grpSpPr/>
+      <p:sp>
+        <p:nvSpPr>
           <p:cNvPr id="2" name="Rectangle 1"/>
           <p:cNvSpPr/>
           <p:nvPr/>
@@ -4534,7 +4821,7 @@
                   <a:srgbClr val="52514E"/>
                 </a:solidFill>
               </a:rPr>
-              <a:t>15</a:t>
+              <a:t>16</a:t>
             </a:r>
           </a:p>
         </p:txBody>
@@ -5080,218 +5367,6 @@
 </p:sld>
 </file>
 
-<file path=ppt/slides/slide16.xml><?xml version="1.0" encoding="utf-8"?>
-<p:sld xmlns:a="http://schemas.openxmlformats.org/drawingml/2006/main" xmlns:p="http://schemas.openxmlformats.org/presentationml/2006/main" xmlns:r="http://schemas.openxmlformats.org/officeDocument/2006/relationships">
-  <p:cSld>
-    <p:spTree>
-      <p:nvGrpSpPr>
-        <p:cNvPr id="1" name=""/>
-        <p:cNvGrpSpPr/>
-        <p:nvPr/>
-      </p:nvGrpSpPr>
-      <p:grpSpPr/>
-      <p:sp>
-        <p:nvSpPr>
-          <p:cNvPr id="2" name="Rectangle 1"/>
-          <p:cNvSpPr/>
-          <p:nvPr/>
-        </p:nvSpPr>
-        <p:spPr>
-          <a:xfrm>
-            <a:off x="0" y="0"/>
-            <a:ext cx="12191695" cy="82296"/>
-          </a:xfrm>
-          <a:prstGeom prst="rect">
-            <a:avLst/>
-          </a:prstGeom>
-          <a:solidFill>
-            <a:srgbClr val="2A78D6"/>
-          </a:solidFill>
-          <a:ln>
-            <a:noFill/>
-          </a:ln>
-        </p:spPr>
-        <p:style>
-          <a:lnRef idx="1">
-            <a:schemeClr val="accent1"/>
-          </a:lnRef>
-          <a:fillRef idx="3">
-            <a:schemeClr val="accent1"/>
-          </a:fillRef>
-          <a:effectRef idx="2">
-            <a:schemeClr val="accent1"/>
-          </a:effectRef>
-          <a:fontRef idx="minor">
-            <a:schemeClr val="lt1"/>
-          </a:fontRef>
-        </p:style>
-        <p:txBody>
-          <a:bodyPr rtlCol="0" anchor="ctr"/>
-          <a:lstStyle/>
-          <a:p>
-            <a:pPr algn="ctr"/>
-          </a:p>
-        </p:txBody>
-      </p:sp>
-      <p:sp>
-        <p:nvSpPr>
-          <p:cNvPr id="3" name="TextBox 2"/>
-          <p:cNvSpPr txBox="1"/>
-          <p:nvPr/>
-        </p:nvSpPr>
-        <p:spPr>
-          <a:xfrm>
-            <a:off x="502920" y="228600"/>
-            <a:ext cx="10607040" cy="822960"/>
-          </a:xfrm>
-          <a:prstGeom prst="rect">
-            <a:avLst/>
-          </a:prstGeom>
-          <a:noFill/>
-        </p:spPr>
-        <p:txBody>
-          <a:bodyPr wrap="square">
-            <a:spAutoFit/>
-          </a:bodyPr>
-          <a:lstStyle/>
-          <a:p>
-            <a:pPr>
-              <a:spcAft>
-                <a:spcPts val="800"/>
-              </a:spcAft>
-            </a:pPr>
-            <a:r>
-              <a:rPr sz="3000" b="1">
-                <a:solidFill>
-                  <a:srgbClr val="0B0B0B"/>
-                </a:solidFill>
-              </a:rPr>
-              <a:t>Deconvolution: pyodine’s spline fails at HIRES sampling</a:t>
-            </a:r>
-          </a:p>
-        </p:txBody>
-      </p:sp>
-      <p:sp>
-        <p:nvSpPr>
-          <p:cNvPr id="4" name="TextBox 3"/>
-          <p:cNvSpPr txBox="1"/>
-          <p:nvPr/>
-        </p:nvSpPr>
-        <p:spPr>
-          <a:xfrm>
-            <a:off x="10972800" y="274320"/>
-            <a:ext cx="822960" cy="457200"/>
-          </a:xfrm>
-          <a:prstGeom prst="rect">
-            <a:avLst/>
-          </a:prstGeom>
-          <a:noFill/>
-        </p:spPr>
-        <p:txBody>
-          <a:bodyPr wrap="square">
-            <a:spAutoFit/>
-          </a:bodyPr>
-          <a:lstStyle/>
-          <a:p>
-            <a:pPr algn="r">
-              <a:spcAft>
-                <a:spcPts val="800"/>
-              </a:spcAft>
-            </a:pPr>
-            <a:r>
-              <a:rPr sz="2000" b="0">
-                <a:solidFill>
-                  <a:srgbClr val="52514E"/>
-                </a:solidFill>
-              </a:rPr>
-              <a:t>16</a:t>
-            </a:r>
-          </a:p>
-        </p:txBody>
-      </p:sp>
-      <p:pic>
-        <p:nvPicPr>
-          <p:cNvPr id="5" name="Picture 4" descr="fig_p3_deconv.png"/>
-          <p:cNvPicPr>
-            <a:picLocks noChangeAspect="1"/>
-          </p:cNvPicPr>
-          <p:nvPr/>
-        </p:nvPicPr>
-        <p:blipFill>
-          <a:blip r:embed="rId2"/>
-          <a:stretch>
-            <a:fillRect/>
-          </a:stretch>
-        </p:blipFill>
-        <p:spPr>
-          <a:xfrm>
-            <a:off x="1989836" y="1097280"/>
-            <a:ext cx="8209280" cy="4617720"/>
-          </a:xfrm>
-          <a:prstGeom prst="rect">
-            <a:avLst/>
-          </a:prstGeom>
-        </p:spPr>
-      </p:pic>
-      <p:sp>
-        <p:nvSpPr>
-          <p:cNvPr id="6" name="Rectangle 5"/>
-          <p:cNvSpPr/>
-          <p:nvPr/>
-        </p:nvSpPr>
-        <p:spPr>
-          <a:xfrm>
-            <a:off x="365760" y="5806440"/>
-            <a:ext cx="11457432" cy="914400"/>
-          </a:xfrm>
-          <a:prstGeom prst="rect">
-            <a:avLst/>
-          </a:prstGeom>
-          <a:solidFill>
-            <a:srgbClr val="EEF4FC"/>
-          </a:solidFill>
-          <a:ln>
-            <a:noFill/>
-          </a:ln>
-        </p:spPr>
-        <p:style>
-          <a:lnRef idx="1">
-            <a:schemeClr val="accent1"/>
-          </a:lnRef>
-          <a:fillRef idx="3">
-            <a:schemeClr val="accent1"/>
-          </a:fillRef>
-          <a:effectRef idx="2">
-            <a:schemeClr val="accent1"/>
-          </a:effectRef>
-          <a:fontRef idx="minor">
-            <a:schemeClr val="lt1"/>
-          </a:fontRef>
-        </p:style>
-        <p:txBody>
-          <a:bodyPr rtlCol="0" anchor="ctr" wrap="square"/>
-          <a:lstStyle/>
-          <a:p>
-            <a:pPr algn="ctr"/>
-            <a:r>
-              <a:rPr sz="2000" b="1">
-                <a:solidFill>
-                  <a:srgbClr val="0B0B0B"/>
-                </a:solidFill>
-              </a:rPr>
-              <a:t>misc.rebin overshoots 2.2-px lines; oversampling 1 re-convolves at χ² 1.1.</a:t>
-            </a:r>
-          </a:p>
-        </p:txBody>
-      </p:sp>
-    </p:spTree>
-  </p:cSld>
-  <p:clrMapOvr>
-    <a:masterClrMapping/>
-  </p:clrMapOvr>
-</p:sld>
-</file>
-
 <file path=ppt/slides/slide17.xml><?xml version="1.0" encoding="utf-8"?>
 <p:sld xmlns:a="http://schemas.openxmlformats.org/drawingml/2006/main" xmlns:p="http://schemas.openxmlformats.org/presentationml/2006/main" xmlns:r="http://schemas.openxmlformats.org/officeDocument/2006/relationships">
   <p:cSld>
@@ -5378,7 +5453,7 @@
                   <a:srgbClr val="0B0B0B"/>
                 </a:solidFill>
               </a:rPr>
-              <a:t>One epoch: right velocity, wrong iodine</a:t>
+              <a:t>Deconvolution: pyodine’s spline fails at HIRES sampling</a:t>
             </a:r>
           </a:p>
         </p:txBody>
@@ -5423,7 +5498,7 @@
       </p:sp>
       <p:pic>
         <p:nvPicPr>
-          <p:cNvPr id="5" name="Picture 4" descr="fig_p5_one_epoch.png"/>
+          <p:cNvPr id="5" name="Picture 4" descr="fig_p3_deconv.png"/>
           <p:cNvPicPr>
             <a:picLocks noChangeAspect="1"/>
           </p:cNvPicPr>
@@ -5437,8 +5512,8 @@
         </p:blipFill>
         <p:spPr>
           <a:xfrm>
-            <a:off x="1962832" y="1097280"/>
-            <a:ext cx="8263288" cy="4617720"/>
+            <a:off x="1989836" y="1097280"/>
+            <a:ext cx="8209280" cy="4617720"/>
           </a:xfrm>
           <a:prstGeom prst="rect">
             <a:avLst/>
@@ -5491,7 +5566,7 @@
                   <a:srgbClr val="0B0B0B"/>
                 </a:solidFill>
               </a:rPr>
-              <a:t>Within 12–18 m/s of prediction; the misfit tracks iodine contrast (ρ ≈ +0.7).</a:t>
+              <a:t>misc.rebin overshoots 2.2-px lines; oversampling 1 re-convolves at χ² 1.1.</a:t>
             </a:r>
           </a:p>
         </p:txBody>
@@ -5590,7 +5665,7 @@
                   <a:srgbClr val="0B0B0B"/>
                 </a:solidFill>
               </a:rPr>
-              <a:t>The instrumental profile is not the lever</a:t>
+              <a:t>One epoch: right velocity, wrong iodine</a:t>
             </a:r>
           </a:p>
         </p:txBody>
@@ -5635,7 +5710,7 @@
       </p:sp>
       <p:pic>
         <p:nvPicPr>
-          <p:cNvPr id="5" name="Picture 4" descr="fig_p6_lsf_models.png"/>
+          <p:cNvPr id="5" name="Picture 4" descr="fig_p5_one_epoch.png"/>
           <p:cNvPicPr>
             <a:picLocks noChangeAspect="1"/>
           </p:cNvPicPr>
@@ -5649,8 +5724,8 @@
         </p:blipFill>
         <p:spPr>
           <a:xfrm>
-            <a:off x="365760" y="1721224"/>
-            <a:ext cx="11457432" cy="3369832"/>
+            <a:off x="1962832" y="1097280"/>
+            <a:ext cx="8263288" cy="4617720"/>
           </a:xfrm>
           <a:prstGeom prst="rect">
             <a:avLst/>
@@ -5703,7 +5778,7 @@
                   <a:srgbClr val="0B0B0B"/>
                 </a:solidFill>
               </a:rPr>
-              <a:t>Four LSF models tie to ±5%; super-Gaussian chosen.</a:t>
+              <a:t>Within 12–18 m/s of prediction; the misfit tracks iodine contrast (ρ ≈ +0.7).</a:t>
             </a:r>
           </a:p>
         </p:txBody>
@@ -5802,7 +5877,7 @@
                   <a:srgbClr val="0B0B0B"/>
                 </a:solidFill>
               </a:rPr>
-              <a:t>B stars: the atlas’s line pattern is the limit</a:t>
+              <a:t>The instrumental profile is not the lever</a:t>
             </a:r>
           </a:p>
         </p:txBody>
@@ -5847,7 +5922,7 @@
       </p:sp>
       <p:pic>
         <p:nvPicPr>
-          <p:cNvPr id="5" name="Picture 4" descr="fig_p6b_bstars.png"/>
+          <p:cNvPr id="5" name="Picture 4" descr="fig_p6_lsf_models.png"/>
           <p:cNvPicPr>
             <a:picLocks noChangeAspect="1"/>
           </p:cNvPicPr>
@@ -5861,8 +5936,8 @@
         </p:blipFill>
         <p:spPr>
           <a:xfrm>
-            <a:off x="1962832" y="1097280"/>
-            <a:ext cx="8263288" cy="4617720"/>
+            <a:off x="365760" y="1721224"/>
+            <a:ext cx="11457432" cy="3369832"/>
           </a:xfrm>
           <a:prstGeom prst="rect">
             <a:avLst/>
@@ -5915,7 +5990,7 @@
                   <a:srgbClr val="0B0B0B"/>
                 </a:solidFill>
               </a:rPr>
-              <a:t>HIRES cell α ≈ 3.33; fixing α per chunk buys nothing.</a:t>
+              <a:t>Four LSF models tie to ±5%; super-Gaussian chosen.</a:t>
             </a:r>
           </a:p>
         </p:txBody>
@@ -6014,7 +6089,7 @@
                   <a:srgbClr val="0B0B0B"/>
                 </a:solidFill>
               </a:rPr>
-              <a:t>The bottom line</a:t>
+              <a:t>The 1998 discovery: Butler et al., PASP 110, 1389</a:t>
             </a:r>
           </a:p>
         </p:txBody>
@@ -6057,16 +6132,40 @@
           </a:p>
         </p:txBody>
       </p:sp>
-      <p:sp>
-        <p:nvSpPr>
-          <p:cNvPr id="5" name="TextBox 4"/>
+      <p:pic>
+        <p:nvPicPr>
+          <p:cNvPr id="5" name="Picture 4" descr="butler1998_fig1_july.png"/>
+          <p:cNvPicPr>
+            <a:picLocks noChangeAspect="1"/>
+          </p:cNvPicPr>
+          <p:nvPr/>
+        </p:nvPicPr>
+        <p:blipFill>
+          <a:blip r:embed="rId2"/>
+          <a:stretch>
+            <a:fillRect/>
+          </a:stretch>
+        </p:blipFill>
+        <p:spPr>
+          <a:xfrm>
+            <a:off x="838131" y="1097280"/>
+            <a:ext cx="4633098" cy="3246120"/>
+          </a:xfrm>
+          <a:prstGeom prst="rect">
+            <a:avLst/>
+          </a:prstGeom>
+        </p:spPr>
+      </p:pic>
+      <p:sp>
+        <p:nvSpPr>
+          <p:cNvPr id="6" name="TextBox 5"/>
           <p:cNvSpPr txBox="1"/>
           <p:nvPr/>
         </p:nvSpPr>
         <p:spPr>
           <a:xfrm>
-            <a:off x="640080" y="1188720"/>
-            <a:ext cx="10972800" cy="4526280"/>
+            <a:off x="365760" y="4343400"/>
+            <a:ext cx="5577840" cy="411480"/>
           </a:xfrm>
           <a:prstGeom prst="rect">
             <a:avLst/>
@@ -6078,6 +6177,121 @@
             <a:spAutoFit/>
           </a:bodyPr>
           <a:lstStyle/>
+          <a:p>
+            <a:pPr algn="ctr">
+              <a:spcAft>
+                <a:spcPts val="800"/>
+              </a:spcAft>
+            </a:pPr>
+            <a:r>
+              <a:rPr sz="2000" b="0">
+                <a:solidFill>
+                  <a:srgbClr val="52514E"/>
+                </a:solidFill>
+              </a:rPr>
+              <a:t>Fig. 1: the 1998 July 15–19 run</a:t>
+            </a:r>
+          </a:p>
+        </p:txBody>
+      </p:sp>
+      <p:pic>
+        <p:nvPicPr>
+          <p:cNvPr id="7" name="Picture 6" descr="butler1998_fig2_phased.png"/>
+          <p:cNvPicPr>
+            <a:picLocks noChangeAspect="1"/>
+          </p:cNvPicPr>
+          <p:nvPr/>
+        </p:nvPicPr>
+        <p:blipFill>
+          <a:blip r:embed="rId3"/>
+          <a:stretch>
+            <a:fillRect/>
+          </a:stretch>
+        </p:blipFill>
+        <p:spPr>
+          <a:xfrm>
+            <a:off x="6667519" y="1097280"/>
+            <a:ext cx="4733506" cy="3246120"/>
+          </a:xfrm>
+          <a:prstGeom prst="rect">
+            <a:avLst/>
+          </a:prstGeom>
+        </p:spPr>
+      </p:pic>
+      <p:sp>
+        <p:nvSpPr>
+          <p:cNvPr id="8" name="TextBox 7"/>
+          <p:cNvSpPr txBox="1"/>
+          <p:nvPr/>
+        </p:nvSpPr>
+        <p:spPr>
+          <a:xfrm>
+            <a:off x="6245352" y="4343400"/>
+            <a:ext cx="5577840" cy="411480"/>
+          </a:xfrm>
+          <a:prstGeom prst="rect">
+            <a:avLst/>
+          </a:prstGeom>
+          <a:noFill/>
+        </p:spPr>
+        <p:txBody>
+          <a:bodyPr wrap="square">
+            <a:spAutoFit/>
+          </a:bodyPr>
+          <a:lstStyle/>
+          <a:p>
+            <a:pPr algn="ctr">
+              <a:spcAft>
+                <a:spcPts val="800"/>
+              </a:spcAft>
+            </a:pPr>
+            <a:r>
+              <a:rPr sz="2000" b="0">
+                <a:solidFill>
+                  <a:srgbClr val="52514E"/>
+                </a:solidFill>
+              </a:rPr>
+              <a:t>Fig. 2: all 20 velocities, phased</a:t>
+            </a:r>
+          </a:p>
+        </p:txBody>
+      </p:sp>
+      <p:sp>
+        <p:nvSpPr>
+          <p:cNvPr id="9" name="TextBox 8"/>
+          <p:cNvSpPr txBox="1"/>
+          <p:nvPr/>
+        </p:nvSpPr>
+        <p:spPr>
+          <a:xfrm>
+            <a:off x="502920" y="4800600"/>
+            <a:ext cx="11155680" cy="914400"/>
+          </a:xfrm>
+          <a:prstGeom prst="rect">
+            <a:avLst/>
+          </a:prstGeom>
+          <a:noFill/>
+        </p:spPr>
+        <p:txBody>
+          <a:bodyPr wrap="square">
+            <a:spAutoFit/>
+          </a:bodyPr>
+          <a:lstStyle/>
+          <a:p>
+            <a:pPr>
+              <a:spcAft>
+                <a:spcPts val="400"/>
+              </a:spcAft>
+            </a:pPr>
+            <a:r>
+              <a:rPr sz="2000" b="1">
+                <a:solidFill>
+                  <a:srgbClr val="0B0B0B"/>
+                </a:solidFill>
+              </a:rPr>
+              <a:t>P = 3.097 ± 0.003 d   ·   K = 72.0 ± 2.0 m/s   ·   e = 0.03 ± 0.03   ·   M sin i = 0.52 Jupiter masses</a:t>
+            </a:r>
+          </a:p>
           <a:p>
             <a:pPr>
               <a:spcAft>
@@ -6085,79 +6299,19 @@
               </a:spcAft>
             </a:pPr>
             <a:r>
-              <a:rPr sz="2200" b="0">
-                <a:solidFill>
-                  <a:srgbClr val="0B0B0B"/>
-                </a:solidFill>
-              </a:rPr>
-              <a:t>• Planet recovered: K = 72.4 ± 7.1 m/s (10.2σ); published 72, modern catalogue 69.2</a:t>
-            </a:r>
-          </a:p>
-          <a:p>
-            <a:pPr>
-              <a:spcAft>
-                <a:spcPts val="800"/>
-              </a:spcAft>
-            </a:pPr>
-            <a:r>
-              <a:rPr sz="2200" b="0">
-                <a:solidFill>
-                  <a:srgbClr val="0B0B0B"/>
-                </a:solidFill>
-              </a:rPr>
-              <a:t>• Period found blind: 3.0954 d (true 3.0966 d), false-alarm probability 2 × 10⁻¹¹</a:t>
-            </a:r>
-          </a:p>
-          <a:p>
-            <a:pPr>
-              <a:spcAft>
-                <a:spcPts val="800"/>
-              </a:spcAft>
-            </a:pPr>
-            <a:r>
-              <a:rPr sz="2200" b="0">
-                <a:solidFill>
-                  <a:srgbClr val="0B0B0B"/>
-                </a:solidFill>
-              </a:rPr>
-              <a:t>• 25.8 m/s per epoch about the orbit; 31 cell-in epochs, 19 nights</a:t>
-            </a:r>
-          </a:p>
-          <a:p>
-            <a:pPr>
-              <a:spcAft>
-                <a:spcPts val="800"/>
-              </a:spcAft>
-            </a:pPr>
-            <a:r>
-              <a:rPr sz="2200" b="0">
-                <a:solidFill>
-                  <a:srgbClr val="0B0B0B"/>
-                </a:solidFill>
-              </a:rPr>
-              <a:t>• 28× better than lamp-calibrated velocities; ~9× short of Butler’s 3 m/s; ~12× short of the modern pipeline (2.2 m/s)</a:t>
-            </a:r>
-          </a:p>
-          <a:p>
-            <a:pPr>
-              <a:spcAft>
-                <a:spcPts val="800"/>
-              </a:spcAft>
-            </a:pPr>
-            <a:r>
-              <a:rPr sz="2200" b="0">
-                <a:solidFill>
-                  <a:srgbClr val="0B0B0B"/>
-                </a:solidFill>
-              </a:rPr>
-              <a:t>• All open: PypeIt + a tested pyodine fork; nothing from the discovery pipeline</a:t>
-            </a:r>
-          </a:p>
-        </p:txBody>
-      </p:sp>
-      <p:sp>
-        <p:nvSpPr>
-          <p:cNvPr id="6" name="Rectangle 5"/>
+              <a:rPr sz="2000" b="0">
+                <a:solidFill>
+                  <a:srgbClr val="52514E"/>
+                </a:solidFill>
+              </a:rPr>
+              <a:t>Table 1. 20 velocities, 1997 Dec – 1998 Aug; errors ~6 m/s; rms 7.5 m/s about the orbit</a:t>
+            </a:r>
+          </a:p>
+        </p:txBody>
+      </p:sp>
+      <p:sp>
+        <p:nvSpPr>
+          <p:cNvPr id="10" name="Rectangle 9"/>
           <p:cNvSpPr/>
           <p:nvPr/>
         </p:nvSpPr>
@@ -6201,7 +6355,7 @@
                   <a:srgbClr val="0B0B0B"/>
                 </a:solidFill>
               </a:rPr>
-              <a:t>Success criterion (50 m/s per epoch, an independent detection): met.</a:t>
+              <a:t>Our target. This work: K = 72.4 ± 7.1 m/s at 25.8 m/s rms, from 31 cell-in epochs.</a:t>
             </a:r>
           </a:p>
         </p:txBody>
@@ -6300,7 +6454,7 @@
                   <a:srgbClr val="0B0B0B"/>
                 </a:solidFill>
               </a:rPr>
-              <a:t>All 31 epochs: the misfit is common, and cancels</a:t>
+              <a:t>B stars: the atlas’s line pattern is the limit</a:t>
             </a:r>
           </a:p>
         </p:txBody>
@@ -6345,7 +6499,7 @@
       </p:sp>
       <p:pic>
         <p:nvPicPr>
-          <p:cNvPr id="5" name="Picture 4" descr="fig_p7_epochs.png"/>
+          <p:cNvPr id="5" name="Picture 4" descr="fig_p6b_bstars.png"/>
           <p:cNvPicPr>
             <a:picLocks noChangeAspect="1"/>
           </p:cNvPicPr>
@@ -6359,8 +6513,8 @@
         </p:blipFill>
         <p:spPr>
           <a:xfrm>
-            <a:off x="2691945" y="1097280"/>
-            <a:ext cx="6805061" cy="4617720"/>
+            <a:off x="1962832" y="1097280"/>
+            <a:ext cx="8263288" cy="4617720"/>
           </a:xfrm>
           <a:prstGeom prst="rect">
             <a:avLst/>
@@ -6413,7 +6567,7 @@
                   <a:srgbClr val="0B0B0B"/>
                 </a:solidFill>
               </a:rPr>
-              <a:t>pyodine’s chunk offsets remove it: 290 → 230 m/s per chunk; ~19 m/s per epoch.</a:t>
+              <a:t>HIRES cell α ≈ 3.33; fixing α per chunk buys nothing.</a:t>
             </a:r>
           </a:p>
         </p:txBody>
@@ -6512,7 +6666,7 @@
                   <a:srgbClr val="0B0B0B"/>
                 </a:solidFill>
               </a:rPr>
-              <a:t>The detection</a:t>
+              <a:t>All 31 epochs: the misfit is common, and cancels</a:t>
             </a:r>
           </a:p>
         </p:txBody>
@@ -6557,7 +6711,7 @@
       </p:sp>
       <p:pic>
         <p:nvPicPr>
-          <p:cNvPr id="5" name="Picture 4" descr="fig_ph3_phasefold.png"/>
+          <p:cNvPr id="5" name="Picture 4" descr="fig_p7_epochs.png"/>
           <p:cNvPicPr>
             <a:picLocks noChangeAspect="1"/>
           </p:cNvPicPr>
@@ -6571,8 +6725,8 @@
         </p:blipFill>
         <p:spPr>
           <a:xfrm>
-            <a:off x="2028386" y="1097280"/>
-            <a:ext cx="8132179" cy="4617720"/>
+            <a:off x="2691945" y="1097280"/>
+            <a:ext cx="6805061" cy="4617720"/>
           </a:xfrm>
           <a:prstGeom prst="rect">
             <a:avLst/>
@@ -6625,7 +6779,7 @@
                   <a:srgbClr val="0B0B0B"/>
                 </a:solidFill>
               </a:rPr>
-              <a:t>K = 72.4 ± 7.1 m/s (10.2σ); residual 25.8 m/s, χ²/dof 1.05.</a:t>
+              <a:t>pyodine’s chunk offsets remove it: 290 → 230 m/s per chunk; ~19 m/s per epoch.</a:t>
             </a:r>
           </a:p>
         </p:txBody>
@@ -6724,7 +6878,7 @@
                   <a:srgbClr val="0B0B0B"/>
                 </a:solidFill>
               </a:rPr>
-              <a:t>Epoch by epoch against the modern catalogue</a:t>
+              <a:t>The detection</a:t>
             </a:r>
           </a:p>
         </p:txBody>
@@ -6769,7 +6923,7 @@
       </p:sp>
       <p:pic>
         <p:nvPicPr>
-          <p:cNvPr id="5" name="Picture 4" descr="fig_ph3_compare.png"/>
+          <p:cNvPr id="5" name="Picture 4" descr="fig_ph3_phasefold.png"/>
           <p:cNvPicPr>
             <a:picLocks noChangeAspect="1"/>
           </p:cNvPicPr>
@@ -6783,8 +6937,8 @@
         </p:blipFill>
         <p:spPr>
           <a:xfrm>
-            <a:off x="3756755" y="1097280"/>
-            <a:ext cx="4675441" cy="4617720"/>
+            <a:off x="2028386" y="1097280"/>
+            <a:ext cx="8132179" cy="4617720"/>
           </a:xfrm>
           <a:prstGeom prst="rect">
             <a:avLst/>
@@ -6837,7 +6991,7 @@
                   <a:srgbClr val="0B0B0B"/>
                 </a:solidFill>
               </a:rPr>
-              <a:t>r = +0.89 (phase 2: +0.38); the errors are honest (χ²/dof 1.03).</a:t>
+              <a:t>K = 72.4 ± 7.1 m/s (10.2σ); residual 25.8 m/s, χ²/dof 1.05.</a:t>
             </a:r>
           </a:p>
         </p:txBody>
@@ -6936,7 +7090,7 @@
                   <a:srgbClr val="0B0B0B"/>
                 </a:solidFill>
               </a:rPr>
-              <a:t>Residuals and the blind period search</a:t>
+              <a:t>Epoch by epoch against the modern catalogue</a:t>
             </a:r>
           </a:p>
         </p:txBody>
@@ -6981,7 +7135,7 @@
       </p:sp>
       <p:pic>
         <p:nvPicPr>
-          <p:cNvPr id="5" name="Picture 4" descr="fig_ph3_residuals.png"/>
+          <p:cNvPr id="5" name="Picture 4" descr="fig_ph3_compare.png"/>
           <p:cNvPicPr>
             <a:picLocks noChangeAspect="1"/>
           </p:cNvPicPr>
@@ -6995,8 +7149,8 @@
         </p:blipFill>
         <p:spPr>
           <a:xfrm>
-            <a:off x="2709420" y="1097280"/>
-            <a:ext cx="6770111" cy="4617720"/>
+            <a:off x="3756755" y="1097280"/>
+            <a:ext cx="4675441" cy="4617720"/>
           </a:xfrm>
           <a:prstGeom prst="rect">
             <a:avLst/>
@@ -7049,7 +7203,7 @@
                   <a:srgbClr val="0B0B0B"/>
                 </a:solidFill>
               </a:rPr>
-              <a:t>No ThAr, misfit or order-count dependence; residual periodogram flat.</a:t>
+              <a:t>r = +0.89 (phase 2: +0.38); the errors are honest (χ²/dof 1.03).</a:t>
             </a:r>
           </a:p>
         </p:txBody>
@@ -7148,7 +7302,7 @@
                   <a:srgbClr val="0B0B0B"/>
                 </a:solidFill>
               </a:rPr>
-              <a:t>Every named calibration defect is fixed</a:t>
+              <a:t>Residuals and the blind period search</a:t>
             </a:r>
           </a:p>
         </p:txBody>
@@ -7193,7 +7347,7 @@
       </p:sp>
       <p:pic>
         <p:nvPicPr>
-          <p:cNvPr id="5" name="Picture 4" descr="fig_p9_diagnosis.png"/>
+          <p:cNvPr id="5" name="Picture 4" descr="fig_ph3_residuals.png"/>
           <p:cNvPicPr>
             <a:picLocks noChangeAspect="1"/>
           </p:cNvPicPr>
@@ -7207,8 +7361,8 @@
         </p:blipFill>
         <p:spPr>
           <a:xfrm>
-            <a:off x="2901372" y="1097280"/>
-            <a:ext cx="6386208" cy="4617720"/>
+            <a:off x="2709420" y="1097280"/>
+            <a:ext cx="6770111" cy="4617720"/>
           </a:xfrm>
           <a:prstGeom prst="rect">
             <a:avLst/>
@@ -7261,7 +7415,7 @@
                   <a:srgbClr val="0B0B0B"/>
                 </a:solidFill>
               </a:rPr>
-              <a:t>Borrowed arcs, intra-night drift, the no-flat night, 09-13’s bad arc.</a:t>
+              <a:t>No ThAr, misfit or order-count dependence; residual periodogram flat.</a:t>
             </a:r>
           </a:p>
         </p:txBody>
@@ -7360,7 +7514,7 @@
                   <a:srgbClr val="0B0B0B"/>
                 </a:solidFill>
               </a:rPr>
-              <a:t>What is left: re-combining without the weakest data</a:t>
+              <a:t>Every named calibration defect is fixed</a:t>
             </a:r>
           </a:p>
         </p:txBody>
@@ -7399,6 +7553,218 @@
                 </a:solidFill>
               </a:rPr>
               <a:t>25</a:t>
+            </a:r>
+          </a:p>
+        </p:txBody>
+      </p:sp>
+      <p:pic>
+        <p:nvPicPr>
+          <p:cNvPr id="5" name="Picture 4" descr="fig_p9_diagnosis.png"/>
+          <p:cNvPicPr>
+            <a:picLocks noChangeAspect="1"/>
+          </p:cNvPicPr>
+          <p:nvPr/>
+        </p:nvPicPr>
+        <p:blipFill>
+          <a:blip r:embed="rId2"/>
+          <a:stretch>
+            <a:fillRect/>
+          </a:stretch>
+        </p:blipFill>
+        <p:spPr>
+          <a:xfrm>
+            <a:off x="2901372" y="1097280"/>
+            <a:ext cx="6386208" cy="4617720"/>
+          </a:xfrm>
+          <a:prstGeom prst="rect">
+            <a:avLst/>
+          </a:prstGeom>
+        </p:spPr>
+      </p:pic>
+      <p:sp>
+        <p:nvSpPr>
+          <p:cNvPr id="6" name="Rectangle 5"/>
+          <p:cNvSpPr/>
+          <p:nvPr/>
+        </p:nvSpPr>
+        <p:spPr>
+          <a:xfrm>
+            <a:off x="365760" y="5806440"/>
+            <a:ext cx="11457432" cy="914400"/>
+          </a:xfrm>
+          <a:prstGeom prst="rect">
+            <a:avLst/>
+          </a:prstGeom>
+          <a:solidFill>
+            <a:srgbClr val="EEF4FC"/>
+          </a:solidFill>
+          <a:ln>
+            <a:noFill/>
+          </a:ln>
+        </p:spPr>
+        <p:style>
+          <a:lnRef idx="1">
+            <a:schemeClr val="accent1"/>
+          </a:lnRef>
+          <a:fillRef idx="3">
+            <a:schemeClr val="accent1"/>
+          </a:fillRef>
+          <a:effectRef idx="2">
+            <a:schemeClr val="accent1"/>
+          </a:effectRef>
+          <a:fontRef idx="minor">
+            <a:schemeClr val="lt1"/>
+          </a:fontRef>
+        </p:style>
+        <p:txBody>
+          <a:bodyPr rtlCol="0" anchor="ctr" wrap="square"/>
+          <a:lstStyle/>
+          <a:p>
+            <a:pPr algn="ctr"/>
+            <a:r>
+              <a:rPr sz="2000" b="1">
+                <a:solidFill>
+                  <a:srgbClr val="0B0B0B"/>
+                </a:solidFill>
+              </a:rPr>
+              <a:t>Borrowed arcs, intra-night drift, the no-flat night, 09-13’s bad arc.</a:t>
+            </a:r>
+          </a:p>
+        </p:txBody>
+      </p:sp>
+    </p:spTree>
+  </p:cSld>
+  <p:clrMapOvr>
+    <a:masterClrMapping/>
+  </p:clrMapOvr>
+</p:sld>
+</file>
+
+<file path=ppt/slides/slide26.xml><?xml version="1.0" encoding="utf-8"?>
+<p:sld xmlns:a="http://schemas.openxmlformats.org/drawingml/2006/main" xmlns:p="http://schemas.openxmlformats.org/presentationml/2006/main" xmlns:r="http://schemas.openxmlformats.org/officeDocument/2006/relationships">
+  <p:cSld>
+    <p:spTree>
+      <p:nvGrpSpPr>
+        <p:cNvPr id="1" name=""/>
+        <p:cNvGrpSpPr/>
+        <p:nvPr/>
+      </p:nvGrpSpPr>
+      <p:grpSpPr/>
+      <p:sp>
+        <p:nvSpPr>
+          <p:cNvPr id="2" name="Rectangle 1"/>
+          <p:cNvSpPr/>
+          <p:nvPr/>
+        </p:nvSpPr>
+        <p:spPr>
+          <a:xfrm>
+            <a:off x="0" y="0"/>
+            <a:ext cx="12191695" cy="82296"/>
+          </a:xfrm>
+          <a:prstGeom prst="rect">
+            <a:avLst/>
+          </a:prstGeom>
+          <a:solidFill>
+            <a:srgbClr val="2A78D6"/>
+          </a:solidFill>
+          <a:ln>
+            <a:noFill/>
+          </a:ln>
+        </p:spPr>
+        <p:style>
+          <a:lnRef idx="1">
+            <a:schemeClr val="accent1"/>
+          </a:lnRef>
+          <a:fillRef idx="3">
+            <a:schemeClr val="accent1"/>
+          </a:fillRef>
+          <a:effectRef idx="2">
+            <a:schemeClr val="accent1"/>
+          </a:effectRef>
+          <a:fontRef idx="minor">
+            <a:schemeClr val="lt1"/>
+          </a:fontRef>
+        </p:style>
+        <p:txBody>
+          <a:bodyPr rtlCol="0" anchor="ctr"/>
+          <a:lstStyle/>
+          <a:p>
+            <a:pPr algn="ctr"/>
+          </a:p>
+        </p:txBody>
+      </p:sp>
+      <p:sp>
+        <p:nvSpPr>
+          <p:cNvPr id="3" name="TextBox 2"/>
+          <p:cNvSpPr txBox="1"/>
+          <p:nvPr/>
+        </p:nvSpPr>
+        <p:spPr>
+          <a:xfrm>
+            <a:off x="502920" y="228600"/>
+            <a:ext cx="10607040" cy="822960"/>
+          </a:xfrm>
+          <a:prstGeom prst="rect">
+            <a:avLst/>
+          </a:prstGeom>
+          <a:noFill/>
+        </p:spPr>
+        <p:txBody>
+          <a:bodyPr wrap="square">
+            <a:spAutoFit/>
+          </a:bodyPr>
+          <a:lstStyle/>
+          <a:p>
+            <a:pPr>
+              <a:spcAft>
+                <a:spcPts val="800"/>
+              </a:spcAft>
+            </a:pPr>
+            <a:r>
+              <a:rPr sz="3000" b="1">
+                <a:solidFill>
+                  <a:srgbClr val="0B0B0B"/>
+                </a:solidFill>
+              </a:rPr>
+              <a:t>What is left: re-combining without the weakest data</a:t>
+            </a:r>
+          </a:p>
+        </p:txBody>
+      </p:sp>
+      <p:sp>
+        <p:nvSpPr>
+          <p:cNvPr id="4" name="TextBox 3"/>
+          <p:cNvSpPr txBox="1"/>
+          <p:nvPr/>
+        </p:nvSpPr>
+        <p:spPr>
+          <a:xfrm>
+            <a:off x="10972800" y="274320"/>
+            <a:ext cx="822960" cy="457200"/>
+          </a:xfrm>
+          <a:prstGeom prst="rect">
+            <a:avLst/>
+          </a:prstGeom>
+          <a:noFill/>
+        </p:spPr>
+        <p:txBody>
+          <a:bodyPr wrap="square">
+            <a:spAutoFit/>
+          </a:bodyPr>
+          <a:lstStyle/>
+          <a:p>
+            <a:pPr algn="r">
+              <a:spcAft>
+                <a:spcPts val="800"/>
+              </a:spcAft>
+            </a:pPr>
+            <a:r>
+              <a:rPr sz="2000" b="0">
+                <a:solidFill>
+                  <a:srgbClr val="52514E"/>
+                </a:solidFill>
+              </a:rPr>
+              <a:t>26</a:t>
             </a:r>
           </a:p>
         </p:txBody>
@@ -8006,218 +8372,6 @@
 </p:sld>
 </file>
 
-<file path=ppt/slides/slide26.xml><?xml version="1.0" encoding="utf-8"?>
-<p:sld xmlns:a="http://schemas.openxmlformats.org/drawingml/2006/main" xmlns:p="http://schemas.openxmlformats.org/presentationml/2006/main" xmlns:r="http://schemas.openxmlformats.org/officeDocument/2006/relationships">
-  <p:cSld>
-    <p:spTree>
-      <p:nvGrpSpPr>
-        <p:cNvPr id="1" name=""/>
-        <p:cNvGrpSpPr/>
-        <p:nvPr/>
-      </p:nvGrpSpPr>
-      <p:grpSpPr/>
-      <p:sp>
-        <p:nvSpPr>
-          <p:cNvPr id="2" name="Rectangle 1"/>
-          <p:cNvSpPr/>
-          <p:nvPr/>
-        </p:nvSpPr>
-        <p:spPr>
-          <a:xfrm>
-            <a:off x="0" y="0"/>
-            <a:ext cx="12191695" cy="82296"/>
-          </a:xfrm>
-          <a:prstGeom prst="rect">
-            <a:avLst/>
-          </a:prstGeom>
-          <a:solidFill>
-            <a:srgbClr val="2A78D6"/>
-          </a:solidFill>
-          <a:ln>
-            <a:noFill/>
-          </a:ln>
-        </p:spPr>
-        <p:style>
-          <a:lnRef idx="1">
-            <a:schemeClr val="accent1"/>
-          </a:lnRef>
-          <a:fillRef idx="3">
-            <a:schemeClr val="accent1"/>
-          </a:fillRef>
-          <a:effectRef idx="2">
-            <a:schemeClr val="accent1"/>
-          </a:effectRef>
-          <a:fontRef idx="minor">
-            <a:schemeClr val="lt1"/>
-          </a:fontRef>
-        </p:style>
-        <p:txBody>
-          <a:bodyPr rtlCol="0" anchor="ctr"/>
-          <a:lstStyle/>
-          <a:p>
-            <a:pPr algn="ctr"/>
-          </a:p>
-        </p:txBody>
-      </p:sp>
-      <p:sp>
-        <p:nvSpPr>
-          <p:cNvPr id="3" name="TextBox 2"/>
-          <p:cNvSpPr txBox="1"/>
-          <p:nvPr/>
-        </p:nvSpPr>
-        <p:spPr>
-          <a:xfrm>
-            <a:off x="502920" y="228600"/>
-            <a:ext cx="10607040" cy="822960"/>
-          </a:xfrm>
-          <a:prstGeom prst="rect">
-            <a:avLst/>
-          </a:prstGeom>
-          <a:noFill/>
-        </p:spPr>
-        <p:txBody>
-          <a:bodyPr wrap="square">
-            <a:spAutoFit/>
-          </a:bodyPr>
-          <a:lstStyle/>
-          <a:p>
-            <a:pPr>
-              <a:spcAft>
-                <a:spcPts val="800"/>
-              </a:spcAft>
-            </a:pPr>
-            <a:r>
-              <a:rPr sz="3000" b="1">
-                <a:solidFill>
-                  <a:srgbClr val="0B0B0B"/>
-                </a:solidFill>
-              </a:rPr>
-              <a:t>Where we stand</a:t>
-            </a:r>
-          </a:p>
-        </p:txBody>
-      </p:sp>
-      <p:sp>
-        <p:nvSpPr>
-          <p:cNvPr id="4" name="TextBox 3"/>
-          <p:cNvSpPr txBox="1"/>
-          <p:nvPr/>
-        </p:nvSpPr>
-        <p:spPr>
-          <a:xfrm>
-            <a:off x="10972800" y="274320"/>
-            <a:ext cx="822960" cy="457200"/>
-          </a:xfrm>
-          <a:prstGeom prst="rect">
-            <a:avLst/>
-          </a:prstGeom>
-          <a:noFill/>
-        </p:spPr>
-        <p:txBody>
-          <a:bodyPr wrap="square">
-            <a:spAutoFit/>
-          </a:bodyPr>
-          <a:lstStyle/>
-          <a:p>
-            <a:pPr algn="r">
-              <a:spcAft>
-                <a:spcPts val="800"/>
-              </a:spcAft>
-            </a:pPr>
-            <a:r>
-              <a:rPr sz="2000" b="0">
-                <a:solidFill>
-                  <a:srgbClr val="52514E"/>
-                </a:solidFill>
-              </a:rPr>
-              <a:t>26</a:t>
-            </a:r>
-          </a:p>
-        </p:txBody>
-      </p:sp>
-      <p:pic>
-        <p:nvPicPr>
-          <p:cNvPr id="5" name="Picture 4" descr="fig8_precision.png"/>
-          <p:cNvPicPr>
-            <a:picLocks noChangeAspect="1"/>
-          </p:cNvPicPr>
-          <p:nvPr/>
-        </p:nvPicPr>
-        <p:blipFill>
-          <a:blip r:embed="rId2"/>
-          <a:stretch>
-            <a:fillRect/>
-          </a:stretch>
-        </p:blipFill>
-        <p:spPr>
-          <a:xfrm>
-            <a:off x="365760" y="1168225"/>
-            <a:ext cx="11457432" cy="4475829"/>
-          </a:xfrm>
-          <a:prstGeom prst="rect">
-            <a:avLst/>
-          </a:prstGeom>
-        </p:spPr>
-      </p:pic>
-      <p:sp>
-        <p:nvSpPr>
-          <p:cNvPr id="6" name="Rectangle 5"/>
-          <p:cNvSpPr/>
-          <p:nvPr/>
-        </p:nvSpPr>
-        <p:spPr>
-          <a:xfrm>
-            <a:off x="365760" y="5806440"/>
-            <a:ext cx="11457432" cy="914400"/>
-          </a:xfrm>
-          <a:prstGeom prst="rect">
-            <a:avLst/>
-          </a:prstGeom>
-          <a:solidFill>
-            <a:srgbClr val="EEF4FC"/>
-          </a:solidFill>
-          <a:ln>
-            <a:noFill/>
-          </a:ln>
-        </p:spPr>
-        <p:style>
-          <a:lnRef idx="1">
-            <a:schemeClr val="accent1"/>
-          </a:lnRef>
-          <a:fillRef idx="3">
-            <a:schemeClr val="accent1"/>
-          </a:fillRef>
-          <a:effectRef idx="2">
-            <a:schemeClr val="accent1"/>
-          </a:effectRef>
-          <a:fontRef idx="minor">
-            <a:schemeClr val="lt1"/>
-          </a:fontRef>
-        </p:style>
-        <p:txBody>
-          <a:bodyPr rtlCol="0" anchor="ctr" wrap="square"/>
-          <a:lstStyle/>
-          <a:p>
-            <a:pPr algn="ctr"/>
-            <a:r>
-              <a:rPr sz="2000" b="1">
-                <a:solidFill>
-                  <a:srgbClr val="0B0B0B"/>
-                </a:solidFill>
-              </a:rPr>
-              <a:t>Photon budget 1.4 m/s; achieved 26 m/s. The gap is modelling, not photons.</a:t>
-            </a:r>
-          </a:p>
-        </p:txBody>
-      </p:sp>
-    </p:spTree>
-  </p:cSld>
-  <p:clrMapOvr>
-    <a:masterClrMapping/>
-  </p:clrMapOvr>
-</p:sld>
-</file>
-
 <file path=ppt/slides/slide27.xml><?xml version="1.0" encoding="utf-8"?>
 <p:sld xmlns:a="http://schemas.openxmlformats.org/drawingml/2006/main" xmlns:p="http://schemas.openxmlformats.org/presentationml/2006/main" xmlns:r="http://schemas.openxmlformats.org/officeDocument/2006/relationships">
   <p:cSld>
@@ -8304,7 +8458,7 @@
                   <a:srgbClr val="0B0B0B"/>
                 </a:solidFill>
               </a:rPr>
-              <a:t>Why 26 m/s and not 3</a:t>
+              <a:t>Where we stand</a:t>
             </a:r>
           </a:p>
         </p:txBody>
@@ -8347,104 +8501,30 @@
           </a:p>
         </p:txBody>
       </p:sp>
-      <p:sp>
-        <p:nvSpPr>
-          <p:cNvPr id="5" name="TextBox 4"/>
-          <p:cNvSpPr txBox="1"/>
-          <p:nvPr/>
-        </p:nvSpPr>
-        <p:spPr>
-          <a:xfrm>
-            <a:off x="640080" y="1188720"/>
-            <a:ext cx="10972800" cy="4526280"/>
-          </a:xfrm>
-          <a:prstGeom prst="rect">
-            <a:avLst/>
-          </a:prstGeom>
-          <a:noFill/>
-        </p:spPr>
-        <p:txBody>
-          <a:bodyPr wrap="square">
-            <a:spAutoFit/>
-          </a:bodyPr>
-          <a:lstStyle/>
-          <a:p>
-            <a:pPr>
-              <a:spcAft>
-                <a:spcPts val="800"/>
-              </a:spcAft>
-            </a:pPr>
-            <a:r>
-              <a:rPr sz="2200" b="0">
-                <a:solidFill>
-                  <a:srgbClr val="0B0B0B"/>
-                </a:solidFill>
-              </a:rPr>
-              <a:t>• The atlas is a different cell: part of its misfit does not cancel</a:t>
-            </a:r>
-          </a:p>
-          <a:p>
-            <a:pPr>
-              <a:spcAft>
-                <a:spcPts val="800"/>
-              </a:spcAft>
-            </a:pPr>
-            <a:r>
-              <a:rPr sz="2200" b="0">
-                <a:solidFill>
-                  <a:srgbClr val="0B0B0B"/>
-                </a:solidFill>
-              </a:rPr>
-              <a:t>• Weak iodine in the red orders: errors shared by whole orders</a:t>
-            </a:r>
-          </a:p>
-          <a:p>
-            <a:pPr>
-              <a:spcAft>
-                <a:spcPts val="800"/>
-              </a:spcAft>
-            </a:pPr>
-            <a:r>
-              <a:rPr sz="2200" b="0">
-                <a:solidFill>
-                  <a:srgbClr val="0B0B0B"/>
-                </a:solidFill>
-              </a:rPr>
-              <a:t>• Six epochs with only 2–8 usable orders</a:t>
-            </a:r>
-          </a:p>
-          <a:p>
-            <a:pPr>
-              <a:spcAft>
-                <a:spcPts val="800"/>
-              </a:spcAft>
-            </a:pPr>
-            <a:r>
-              <a:rPr sz="2200" b="0">
-                <a:solidFill>
-                  <a:srgbClr val="0B0B0B"/>
-                </a:solidFill>
-              </a:rPr>
-              <a:t>• A simple instrumental profile (4-parameter super-Gaussian)</a:t>
-            </a:r>
-          </a:p>
-          <a:p>
-            <a:pPr>
-              <a:spcAft>
-                <a:spcPts val="800"/>
-              </a:spcAft>
-            </a:pPr>
-            <a:r>
-              <a:rPr sz="2200" b="0">
-                <a:solidFill>
-                  <a:srgbClr val="0B0B0B"/>
-                </a:solidFill>
-              </a:rPr>
-              <a:t>• Tellurics unmodelled; a marginal seasonal term</a:t>
-            </a:r>
-          </a:p>
-        </p:txBody>
-      </p:sp>
+      <p:pic>
+        <p:nvPicPr>
+          <p:cNvPr id="5" name="Picture 4" descr="fig8_precision.png"/>
+          <p:cNvPicPr>
+            <a:picLocks noChangeAspect="1"/>
+          </p:cNvPicPr>
+          <p:nvPr/>
+        </p:nvPicPr>
+        <p:blipFill>
+          <a:blip r:embed="rId2"/>
+          <a:stretch>
+            <a:fillRect/>
+          </a:stretch>
+        </p:blipFill>
+        <p:spPr>
+          <a:xfrm>
+            <a:off x="365760" y="1168225"/>
+            <a:ext cx="11457432" cy="4475829"/>
+          </a:xfrm>
+          <a:prstGeom prst="rect">
+            <a:avLst/>
+          </a:prstGeom>
+        </p:spPr>
+      </p:pic>
       <p:sp>
         <p:nvSpPr>
           <p:cNvPr id="6" name="Rectangle 5"/>
@@ -8491,7 +8571,7 @@
                   <a:srgbClr val="0B0B0B"/>
                 </a:solidFill>
               </a:rPr>
-              <a:t>Largest single gain: the HIRES cell’s own FTS spectrum, if it exists.</a:t>
+              <a:t>Photon budget 1.4 m/s; achieved 26 m/s. The gap is modelling, not photons.</a:t>
             </a:r>
           </a:p>
         </p:txBody>
@@ -8590,7 +8670,7 @@
                   <a:srgbClr val="0B0B0B"/>
                 </a:solidFill>
               </a:rPr>
-              <a:t>Upstream reports</a:t>
+              <a:t>Why 26 m/s and not 3</a:t>
             </a:r>
           </a:p>
         </p:txBody>
@@ -8642,7 +8722,7 @@
         <p:spPr>
           <a:xfrm>
             <a:off x="640080" y="1188720"/>
-            <a:ext cx="10972800" cy="5303520"/>
+            <a:ext cx="10972800" cy="4526280"/>
           </a:xfrm>
           <a:prstGeom prst="rect">
             <a:avLst/>
@@ -8666,37 +8746,7 @@
                   <a:srgbClr val="0B0B0B"/>
                 </a:solidFill>
               </a:rPr>
-              <a:t>• PypeIt: 15 items (email to Ryan Cooke, issues, PR)</a:t>
-            </a:r>
-          </a:p>
-          <a:p>
-            <a:pPr lvl="1">
-              <a:spcAft>
-                <a:spcPts val="800"/>
-              </a:spcAft>
-            </a:pPr>
-            <a:r>
-              <a:rPr sz="2200" b="0">
-                <a:solidFill>
-                  <a:srgbClr val="0B0B0B"/>
-                </a:solidFill>
-              </a:rPr>
-              <a:t>– keck_hires_orig bugs; silent failures of run_pypeit</a:t>
-            </a:r>
-          </a:p>
-          <a:p>
-            <a:pPr lvl="1">
-              <a:spcAft>
-                <a:spcPts val="800"/>
-              </a:spcAft>
-            </a:pPr>
-            <a:r>
-              <a:rPr sz="2200" b="0">
-                <a:solidFill>
-                  <a:srgbClr val="0B0B0B"/>
-                </a:solidFill>
-              </a:rPr>
-              <a:t>– wave.py sign error; ivar mis-scaled; zero wavelengths</a:t>
+              <a:t>• The atlas is a different cell: part of its misfit does not cancel</a:t>
             </a:r>
           </a:p>
           <a:p>
@@ -8711,11 +8761,11 @@
                   <a:srgbClr val="0B0B0B"/>
                 </a:solidFill>
               </a:rPr>
-              <a:t>• pyodine: 21 items (GitHub issues)</a:t>
-            </a:r>
-          </a:p>
-          <a:p>
-            <a:pPr lvl="1">
+              <a:t>• Weak iodine in the red orders: errors shared by whole orders</a:t>
+            </a:r>
+          </a:p>
+          <a:p>
+            <a:pPr>
               <a:spcAft>
                 <a:spcPts val="800"/>
               </a:spcAft>
@@ -8726,7 +8776,88 @@
                   <a:srgbClr val="0B0B0B"/>
                 </a:solidFill>
               </a:rPr>
-              <a:t>– 6 fork changes; index and order traps; swallowed errors</a:t>
+              <a:t>• Six epochs with only 2–8 usable orders</a:t>
+            </a:r>
+          </a:p>
+          <a:p>
+            <a:pPr>
+              <a:spcAft>
+                <a:spcPts val="800"/>
+              </a:spcAft>
+            </a:pPr>
+            <a:r>
+              <a:rPr sz="2200" b="0">
+                <a:solidFill>
+                  <a:srgbClr val="0B0B0B"/>
+                </a:solidFill>
+              </a:rPr>
+              <a:t>• A simple instrumental profile (4-parameter super-Gaussian)</a:t>
+            </a:r>
+          </a:p>
+          <a:p>
+            <a:pPr>
+              <a:spcAft>
+                <a:spcPts val="800"/>
+              </a:spcAft>
+            </a:pPr>
+            <a:r>
+              <a:rPr sz="2200" b="0">
+                <a:solidFill>
+                  <a:srgbClr val="0B0B0B"/>
+                </a:solidFill>
+              </a:rPr>
+              <a:t>• Tellurics unmodelled; a marginal seasonal term</a:t>
+            </a:r>
+          </a:p>
+        </p:txBody>
+      </p:sp>
+      <p:sp>
+        <p:nvSpPr>
+          <p:cNvPr id="6" name="Rectangle 5"/>
+          <p:cNvSpPr/>
+          <p:nvPr/>
+        </p:nvSpPr>
+        <p:spPr>
+          <a:xfrm>
+            <a:off x="365760" y="5806440"/>
+            <a:ext cx="11457432" cy="914400"/>
+          </a:xfrm>
+          <a:prstGeom prst="rect">
+            <a:avLst/>
+          </a:prstGeom>
+          <a:solidFill>
+            <a:srgbClr val="EEF4FC"/>
+          </a:solidFill>
+          <a:ln>
+            <a:noFill/>
+          </a:ln>
+        </p:spPr>
+        <p:style>
+          <a:lnRef idx="1">
+            <a:schemeClr val="accent1"/>
+          </a:lnRef>
+          <a:fillRef idx="3">
+            <a:schemeClr val="accent1"/>
+          </a:fillRef>
+          <a:effectRef idx="2">
+            <a:schemeClr val="accent1"/>
+          </a:effectRef>
+          <a:fontRef idx="minor">
+            <a:schemeClr val="lt1"/>
+          </a:fontRef>
+        </p:style>
+        <p:txBody>
+          <a:bodyPr rtlCol="0" anchor="ctr" wrap="square"/>
+          <a:lstStyle/>
+          <a:p>
+            <a:pPr algn="ctr"/>
+            <a:r>
+              <a:rPr sz="2000" b="1">
+                <a:solidFill>
+                  <a:srgbClr val="0B0B0B"/>
+                </a:solidFill>
+              </a:rPr>
+              <a:t>Largest single gain: the HIRES cell’s own FTS spectrum, if it exists.</a:t>
             </a:r>
           </a:p>
         </p:txBody>
@@ -8825,7 +8956,7 @@
                   <a:srgbClr val="0B0B0B"/>
                 </a:solidFill>
               </a:rPr>
-              <a:t>Next steps</a:t>
+              <a:t>Upstream reports</a:t>
             </a:r>
           </a:p>
         </p:txBody>
@@ -8901,7 +9032,37 @@
                   <a:srgbClr val="0B0B0B"/>
                 </a:solidFill>
               </a:rPr>
-              <a:t>• A HIRES-cell iodine spectrum: FTS scan, or empirical from B stars</a:t>
+              <a:t>• PypeIt: 15 items (email to Ryan Cooke, issues, PR)</a:t>
+            </a:r>
+          </a:p>
+          <a:p>
+            <a:pPr lvl="1">
+              <a:spcAft>
+                <a:spcPts val="800"/>
+              </a:spcAft>
+            </a:pPr>
+            <a:r>
+              <a:rPr sz="2200" b="0">
+                <a:solidFill>
+                  <a:srgbClr val="0B0B0B"/>
+                </a:solidFill>
+              </a:rPr>
+              <a:t>– keck_hires_orig bugs; silent failures of run_pypeit</a:t>
+            </a:r>
+          </a:p>
+          <a:p>
+            <a:pPr lvl="1">
+              <a:spcAft>
+                <a:spcPts val="800"/>
+              </a:spcAft>
+            </a:pPr>
+            <a:r>
+              <a:rPr sz="2200" b="0">
+                <a:solidFill>
+                  <a:srgbClr val="0B0B0B"/>
+                </a:solidFill>
+              </a:rPr>
+              <a:t>– wave.py sign error; ivar mis-scaled; zero wavelengths</a:t>
             </a:r>
           </a:p>
           <a:p>
@@ -8916,11 +9077,11 @@
                   <a:srgbClr val="0B0B0B"/>
                 </a:solidFill>
               </a:rPr>
-              <a:t>• Weight whole orders, not just chunks, in the combination</a:t>
-            </a:r>
-          </a:p>
-          <a:p>
-            <a:pPr>
+              <a:t>• pyodine: 21 items (GitHub issues)</a:t>
+            </a:r>
+          </a:p>
+          <a:p>
+            <a:pPr lvl="1">
               <a:spcAft>
                 <a:spcPts val="800"/>
               </a:spcAft>
@@ -8931,22 +9092,7 @@
                   <a:srgbClr val="0B0B0B"/>
                 </a:solidFill>
               </a:rPr>
-              <a:t>• Fix PypeIt’s noise model (optimal vs boxcar)</a:t>
-            </a:r>
-          </a:p>
-          <a:p>
-            <a:pPr>
-              <a:spcAft>
-                <a:spcPts val="800"/>
-              </a:spcAft>
-            </a:pPr>
-            <a:r>
-              <a:rPr sz="2200" b="0">
-                <a:solidFill>
-                  <a:srgbClr val="0B0B0B"/>
-                </a:solidFill>
-              </a:rPr>
-              <a:t>• Diagnose 1998-09-13’s arc</a:t>
+              <a:t>– 6 fork changes; index and order traps; swallowed errors</a:t>
             </a:r>
           </a:p>
         </p:txBody>
@@ -9045,7 +9191,7 @@
                   <a:srgbClr val="0B0B0B"/>
                 </a:solidFill>
               </a:rPr>
-              <a:t>Three phases, one chain</a:t>
+              <a:t>The bottom line</a:t>
             </a:r>
           </a:p>
         </p:txBody>
@@ -9088,30 +9234,104 @@
           </a:p>
         </p:txBody>
       </p:sp>
-      <p:pic>
-        <p:nvPicPr>
-          <p:cNvPr id="5" name="Picture 4" descr="fig_slides_pipeline.png"/>
-          <p:cNvPicPr>
-            <a:picLocks noChangeAspect="1"/>
-          </p:cNvPicPr>
-          <p:nvPr/>
-        </p:nvPicPr>
-        <p:blipFill>
-          <a:blip r:embed="rId2"/>
-          <a:stretch>
-            <a:fillRect/>
-          </a:stretch>
-        </p:blipFill>
-        <p:spPr>
-          <a:xfrm>
-            <a:off x="365760" y="1493083"/>
-            <a:ext cx="11457432" cy="3826113"/>
-          </a:xfrm>
-          <a:prstGeom prst="rect">
-            <a:avLst/>
-          </a:prstGeom>
-        </p:spPr>
-      </p:pic>
+      <p:sp>
+        <p:nvSpPr>
+          <p:cNvPr id="5" name="TextBox 4"/>
+          <p:cNvSpPr txBox="1"/>
+          <p:nvPr/>
+        </p:nvSpPr>
+        <p:spPr>
+          <a:xfrm>
+            <a:off x="640080" y="1188720"/>
+            <a:ext cx="10972800" cy="4526280"/>
+          </a:xfrm>
+          <a:prstGeom prst="rect">
+            <a:avLst/>
+          </a:prstGeom>
+          <a:noFill/>
+        </p:spPr>
+        <p:txBody>
+          <a:bodyPr wrap="square">
+            <a:spAutoFit/>
+          </a:bodyPr>
+          <a:lstStyle/>
+          <a:p>
+            <a:pPr>
+              <a:spcAft>
+                <a:spcPts val="800"/>
+              </a:spcAft>
+            </a:pPr>
+            <a:r>
+              <a:rPr sz="2200" b="0">
+                <a:solidFill>
+                  <a:srgbClr val="0B0B0B"/>
+                </a:solidFill>
+              </a:rPr>
+              <a:t>• Planet recovered: K = 72.4 ± 7.1 m/s (10.2σ); published 72, modern catalogue 69.2</a:t>
+            </a:r>
+          </a:p>
+          <a:p>
+            <a:pPr>
+              <a:spcAft>
+                <a:spcPts val="800"/>
+              </a:spcAft>
+            </a:pPr>
+            <a:r>
+              <a:rPr sz="2200" b="0">
+                <a:solidFill>
+                  <a:srgbClr val="0B0B0B"/>
+                </a:solidFill>
+              </a:rPr>
+              <a:t>• Period found blind: 3.0954 d (true 3.0966 d), false-alarm probability 2 × 10⁻¹¹</a:t>
+            </a:r>
+          </a:p>
+          <a:p>
+            <a:pPr>
+              <a:spcAft>
+                <a:spcPts val="800"/>
+              </a:spcAft>
+            </a:pPr>
+            <a:r>
+              <a:rPr sz="2200" b="0">
+                <a:solidFill>
+                  <a:srgbClr val="0B0B0B"/>
+                </a:solidFill>
+              </a:rPr>
+              <a:t>• 25.8 m/s per epoch about the orbit; 31 cell-in epochs, 19 nights</a:t>
+            </a:r>
+          </a:p>
+          <a:p>
+            <a:pPr>
+              <a:spcAft>
+                <a:spcPts val="800"/>
+              </a:spcAft>
+            </a:pPr>
+            <a:r>
+              <a:rPr sz="2200" b="0">
+                <a:solidFill>
+                  <a:srgbClr val="0B0B0B"/>
+                </a:solidFill>
+              </a:rPr>
+              <a:t>• 28× better than lamp-calibrated velocities; ~9× short of Butler’s 3 m/s; ~12× short of the modern pipeline (2.2 m/s)</a:t>
+            </a:r>
+          </a:p>
+          <a:p>
+            <a:pPr>
+              <a:spcAft>
+                <a:spcPts val="800"/>
+              </a:spcAft>
+            </a:pPr>
+            <a:r>
+              <a:rPr sz="2200" b="0">
+                <a:solidFill>
+                  <a:srgbClr val="0B0B0B"/>
+                </a:solidFill>
+              </a:rPr>
+              <a:t>• All open: PypeIt + a tested pyodine fork; nothing from the discovery pipeline</a:t>
+            </a:r>
+          </a:p>
+        </p:txBody>
+      </p:sp>
       <p:sp>
         <p:nvSpPr>
           <p:cNvPr id="6" name="Rectangle 5"/>
@@ -9158,7 +9378,7 @@
                   <a:srgbClr val="0B0B0B"/>
                 </a:solidFill>
               </a:rPr>
-              <a:t>Phase 2 measured why lamps fail; phase 3 replaced the lamp with the iodine cell.</a:t>
+              <a:t>Success criterion (50 m/s per epoch, an independent detection): met.</a:t>
             </a:r>
           </a:p>
         </p:txBody>
@@ -9257,7 +9477,7 @@
                   <a:srgbClr val="0B0B0B"/>
                 </a:solidFill>
               </a:rPr>
-              <a:t>Reproducibility</a:t>
+              <a:t>Next steps</a:t>
             </a:r>
           </a:p>
         </p:txBody>
@@ -9296,6 +9516,226 @@
                 </a:solidFill>
               </a:rPr>
               <a:t>30</a:t>
+            </a:r>
+          </a:p>
+        </p:txBody>
+      </p:sp>
+      <p:sp>
+        <p:nvSpPr>
+          <p:cNvPr id="5" name="TextBox 4"/>
+          <p:cNvSpPr txBox="1"/>
+          <p:nvPr/>
+        </p:nvSpPr>
+        <p:spPr>
+          <a:xfrm>
+            <a:off x="640080" y="1188720"/>
+            <a:ext cx="10972800" cy="5303520"/>
+          </a:xfrm>
+          <a:prstGeom prst="rect">
+            <a:avLst/>
+          </a:prstGeom>
+          <a:noFill/>
+        </p:spPr>
+        <p:txBody>
+          <a:bodyPr wrap="square">
+            <a:spAutoFit/>
+          </a:bodyPr>
+          <a:lstStyle/>
+          <a:p>
+            <a:pPr>
+              <a:spcAft>
+                <a:spcPts val="800"/>
+              </a:spcAft>
+            </a:pPr>
+            <a:r>
+              <a:rPr sz="2200" b="0">
+                <a:solidFill>
+                  <a:srgbClr val="0B0B0B"/>
+                </a:solidFill>
+              </a:rPr>
+              <a:t>• A HIRES-cell iodine spectrum: FTS scan, or empirical from B stars</a:t>
+            </a:r>
+          </a:p>
+          <a:p>
+            <a:pPr>
+              <a:spcAft>
+                <a:spcPts val="800"/>
+              </a:spcAft>
+            </a:pPr>
+            <a:r>
+              <a:rPr sz="2200" b="0">
+                <a:solidFill>
+                  <a:srgbClr val="0B0B0B"/>
+                </a:solidFill>
+              </a:rPr>
+              <a:t>• Weight whole orders, not just chunks, in the combination</a:t>
+            </a:r>
+          </a:p>
+          <a:p>
+            <a:pPr>
+              <a:spcAft>
+                <a:spcPts val="800"/>
+              </a:spcAft>
+            </a:pPr>
+            <a:r>
+              <a:rPr sz="2200" b="0">
+                <a:solidFill>
+                  <a:srgbClr val="0B0B0B"/>
+                </a:solidFill>
+              </a:rPr>
+              <a:t>• Fix PypeIt’s noise model (optimal vs boxcar)</a:t>
+            </a:r>
+          </a:p>
+          <a:p>
+            <a:pPr>
+              <a:spcAft>
+                <a:spcPts val="800"/>
+              </a:spcAft>
+            </a:pPr>
+            <a:r>
+              <a:rPr sz="2200" b="0">
+                <a:solidFill>
+                  <a:srgbClr val="0B0B0B"/>
+                </a:solidFill>
+              </a:rPr>
+              <a:t>• Diagnose 1998-09-13’s arc</a:t>
+            </a:r>
+          </a:p>
+        </p:txBody>
+      </p:sp>
+    </p:spTree>
+  </p:cSld>
+  <p:clrMapOvr>
+    <a:masterClrMapping/>
+  </p:clrMapOvr>
+</p:sld>
+</file>
+
+<file path=ppt/slides/slide31.xml><?xml version="1.0" encoding="utf-8"?>
+<p:sld xmlns:a="http://schemas.openxmlformats.org/drawingml/2006/main" xmlns:p="http://schemas.openxmlformats.org/presentationml/2006/main" xmlns:r="http://schemas.openxmlformats.org/officeDocument/2006/relationships">
+  <p:cSld>
+    <p:spTree>
+      <p:nvGrpSpPr>
+        <p:cNvPr id="1" name=""/>
+        <p:cNvGrpSpPr/>
+        <p:nvPr/>
+      </p:nvGrpSpPr>
+      <p:grpSpPr/>
+      <p:sp>
+        <p:nvSpPr>
+          <p:cNvPr id="2" name="Rectangle 1"/>
+          <p:cNvSpPr/>
+          <p:nvPr/>
+        </p:nvSpPr>
+        <p:spPr>
+          <a:xfrm>
+            <a:off x="0" y="0"/>
+            <a:ext cx="12191695" cy="82296"/>
+          </a:xfrm>
+          <a:prstGeom prst="rect">
+            <a:avLst/>
+          </a:prstGeom>
+          <a:solidFill>
+            <a:srgbClr val="2A78D6"/>
+          </a:solidFill>
+          <a:ln>
+            <a:noFill/>
+          </a:ln>
+        </p:spPr>
+        <p:style>
+          <a:lnRef idx="1">
+            <a:schemeClr val="accent1"/>
+          </a:lnRef>
+          <a:fillRef idx="3">
+            <a:schemeClr val="accent1"/>
+          </a:fillRef>
+          <a:effectRef idx="2">
+            <a:schemeClr val="accent1"/>
+          </a:effectRef>
+          <a:fontRef idx="minor">
+            <a:schemeClr val="lt1"/>
+          </a:fontRef>
+        </p:style>
+        <p:txBody>
+          <a:bodyPr rtlCol="0" anchor="ctr"/>
+          <a:lstStyle/>
+          <a:p>
+            <a:pPr algn="ctr"/>
+          </a:p>
+        </p:txBody>
+      </p:sp>
+      <p:sp>
+        <p:nvSpPr>
+          <p:cNvPr id="3" name="TextBox 2"/>
+          <p:cNvSpPr txBox="1"/>
+          <p:nvPr/>
+        </p:nvSpPr>
+        <p:spPr>
+          <a:xfrm>
+            <a:off x="502920" y="228600"/>
+            <a:ext cx="10607040" cy="822960"/>
+          </a:xfrm>
+          <a:prstGeom prst="rect">
+            <a:avLst/>
+          </a:prstGeom>
+          <a:noFill/>
+        </p:spPr>
+        <p:txBody>
+          <a:bodyPr wrap="square">
+            <a:spAutoFit/>
+          </a:bodyPr>
+          <a:lstStyle/>
+          <a:p>
+            <a:pPr>
+              <a:spcAft>
+                <a:spcPts val="800"/>
+              </a:spcAft>
+            </a:pPr>
+            <a:r>
+              <a:rPr sz="3000" b="1">
+                <a:solidFill>
+                  <a:srgbClr val="0B0B0B"/>
+                </a:solidFill>
+              </a:rPr>
+              <a:t>Reproducibility</a:t>
+            </a:r>
+          </a:p>
+        </p:txBody>
+      </p:sp>
+      <p:sp>
+        <p:nvSpPr>
+          <p:cNvPr id="4" name="TextBox 3"/>
+          <p:cNvSpPr txBox="1"/>
+          <p:nvPr/>
+        </p:nvSpPr>
+        <p:spPr>
+          <a:xfrm>
+            <a:off x="10972800" y="274320"/>
+            <a:ext cx="822960" cy="457200"/>
+          </a:xfrm>
+          <a:prstGeom prst="rect">
+            <a:avLst/>
+          </a:prstGeom>
+          <a:noFill/>
+        </p:spPr>
+        <p:txBody>
+          <a:bodyPr wrap="square">
+            <a:spAutoFit/>
+          </a:bodyPr>
+          <a:lstStyle/>
+          <a:p>
+            <a:pPr algn="r">
+              <a:spcAft>
+                <a:spcPts val="800"/>
+              </a:spcAft>
+            </a:pPr>
+            <a:r>
+              <a:rPr sz="2000" b="0">
+                <a:solidFill>
+                  <a:srgbClr val="52514E"/>
+                </a:solidFill>
+              </a:rPr>
+              <a:t>31</a:t>
             </a:r>
           </a:p>
         </p:txBody>
@@ -9418,14 +9858,57 @@
       <p:grpSpPr/>
       <p:sp>
         <p:nvSpPr>
-          <p:cNvPr id="2" name="TextBox 1"/>
+          <p:cNvPr id="2" name="Rectangle 1"/>
+          <p:cNvSpPr/>
+          <p:nvPr/>
+        </p:nvSpPr>
+        <p:spPr>
+          <a:xfrm>
+            <a:off x="0" y="0"/>
+            <a:ext cx="12191695" cy="82296"/>
+          </a:xfrm>
+          <a:prstGeom prst="rect">
+            <a:avLst/>
+          </a:prstGeom>
+          <a:solidFill>
+            <a:srgbClr val="2A78D6"/>
+          </a:solidFill>
+          <a:ln>
+            <a:noFill/>
+          </a:ln>
+        </p:spPr>
+        <p:style>
+          <a:lnRef idx="1">
+            <a:schemeClr val="accent1"/>
+          </a:lnRef>
+          <a:fillRef idx="3">
+            <a:schemeClr val="accent1"/>
+          </a:fillRef>
+          <a:effectRef idx="2">
+            <a:schemeClr val="accent1"/>
+          </a:effectRef>
+          <a:fontRef idx="minor">
+            <a:schemeClr val="lt1"/>
+          </a:fontRef>
+        </p:style>
+        <p:txBody>
+          <a:bodyPr rtlCol="0" anchor="ctr"/>
+          <a:lstStyle/>
+          <a:p>
+            <a:pPr algn="ctr"/>
+          </a:p>
+        </p:txBody>
+      </p:sp>
+      <p:sp>
+        <p:nvSpPr>
+          <p:cNvPr id="3" name="TextBox 2"/>
           <p:cNvSpPr txBox="1"/>
           <p:nvPr/>
         </p:nvSpPr>
         <p:spPr>
           <a:xfrm>
-            <a:off x="731520" y="2103120"/>
-            <a:ext cx="10698480" cy="548640"/>
+            <a:off x="502920" y="228600"/>
+            <a:ext cx="10607040" cy="822960"/>
           </a:xfrm>
           <a:prstGeom prst="rect">
             <a:avLst/>
@@ -9444,26 +9927,26 @@
               </a:spcAft>
             </a:pPr>
             <a:r>
-              <a:rPr sz="2200" b="1">
-                <a:solidFill>
-                  <a:srgbClr val="1BAF7A"/>
-                </a:solidFill>
-              </a:rPr>
-              <a:t>Phase 1</a:t>
-            </a:r>
-          </a:p>
-        </p:txBody>
-      </p:sp>
-      <p:sp>
-        <p:nvSpPr>
-          <p:cNvPr id="3" name="TextBox 2"/>
+              <a:rPr sz="3000" b="1">
+                <a:solidFill>
+                  <a:srgbClr val="0B0B0B"/>
+                </a:solidFill>
+              </a:rPr>
+              <a:t>Three phases, one chain</a:t>
+            </a:r>
+          </a:p>
+        </p:txBody>
+      </p:sp>
+      <p:sp>
+        <p:nvSpPr>
+          <p:cNvPr id="4" name="TextBox 3"/>
           <p:cNvSpPr txBox="1"/>
           <p:nvPr/>
         </p:nvSpPr>
         <p:spPr>
           <a:xfrm>
-            <a:off x="731520" y="2651760"/>
-            <a:ext cx="10698480" cy="1097280"/>
+            <a:off x="10972800" y="274320"/>
+            <a:ext cx="822960" cy="457200"/>
           </a:xfrm>
           <a:prstGeom prst="rect">
             <a:avLst/>
@@ -9476,56 +9959,93 @@
           </a:bodyPr>
           <a:lstStyle/>
           <a:p>
-            <a:pPr>
+            <a:pPr algn="r">
               <a:spcAft>
                 <a:spcPts val="800"/>
               </a:spcAft>
             </a:pPr>
             <a:r>
-              <a:rPr sz="3800" b="1">
+              <a:rPr sz="2000" b="0">
+                <a:solidFill>
+                  <a:srgbClr val="52514E"/>
+                </a:solidFill>
+              </a:rPr>
+              <a:t>4</a:t>
+            </a:r>
+          </a:p>
+        </p:txBody>
+      </p:sp>
+      <p:pic>
+        <p:nvPicPr>
+          <p:cNvPr id="5" name="Picture 4" descr="fig_slides_pipeline.png"/>
+          <p:cNvPicPr>
+            <a:picLocks noChangeAspect="1"/>
+          </p:cNvPicPr>
+          <p:nvPr/>
+        </p:nvPicPr>
+        <p:blipFill>
+          <a:blip r:embed="rId2"/>
+          <a:stretch>
+            <a:fillRect/>
+          </a:stretch>
+        </p:blipFill>
+        <p:spPr>
+          <a:xfrm>
+            <a:off x="365760" y="1493083"/>
+            <a:ext cx="11457432" cy="3826113"/>
+          </a:xfrm>
+          <a:prstGeom prst="rect">
+            <a:avLst/>
+          </a:prstGeom>
+        </p:spPr>
+      </p:pic>
+      <p:sp>
+        <p:nvSpPr>
+          <p:cNvPr id="6" name="Rectangle 5"/>
+          <p:cNvSpPr/>
+          <p:nvPr/>
+        </p:nvSpPr>
+        <p:spPr>
+          <a:xfrm>
+            <a:off x="365760" y="5806440"/>
+            <a:ext cx="11457432" cy="914400"/>
+          </a:xfrm>
+          <a:prstGeom prst="rect">
+            <a:avLst/>
+          </a:prstGeom>
+          <a:solidFill>
+            <a:srgbClr val="EEF4FC"/>
+          </a:solidFill>
+          <a:ln>
+            <a:noFill/>
+          </a:ln>
+        </p:spPr>
+        <p:style>
+          <a:lnRef idx="1">
+            <a:schemeClr val="accent1"/>
+          </a:lnRef>
+          <a:fillRef idx="3">
+            <a:schemeClr val="accent1"/>
+          </a:fillRef>
+          <a:effectRef idx="2">
+            <a:schemeClr val="accent1"/>
+          </a:effectRef>
+          <a:fontRef idx="minor">
+            <a:schemeClr val="lt1"/>
+          </a:fontRef>
+        </p:style>
+        <p:txBody>
+          <a:bodyPr rtlCol="0" anchor="ctr" wrap="square"/>
+          <a:lstStyle/>
+          <a:p>
+            <a:pPr algn="ctr"/>
+            <a:r>
+              <a:rPr sz="2000" b="1">
                 <a:solidFill>
                   <a:srgbClr val="0B0B0B"/>
                 </a:solidFill>
               </a:rPr>
-              <a:t>PypeIt on the pre-2004 HIRES CCD</a:t>
-            </a:r>
-          </a:p>
-        </p:txBody>
-      </p:sp>
-      <p:sp>
-        <p:nvSpPr>
-          <p:cNvPr id="4" name="TextBox 3"/>
-          <p:cNvSpPr txBox="1"/>
-          <p:nvPr/>
-        </p:nvSpPr>
-        <p:spPr>
-          <a:xfrm>
-            <a:off x="731520" y="3840480"/>
-            <a:ext cx="10515600" cy="1828800"/>
-          </a:xfrm>
-          <a:prstGeom prst="rect">
-            <a:avLst/>
-          </a:prstGeom>
-          <a:noFill/>
-        </p:spPr>
-        <p:txBody>
-          <a:bodyPr wrap="square">
-            <a:spAutoFit/>
-          </a:bodyPr>
-          <a:lstStyle/>
-          <a:p>
-            <a:pPr>
-              <a:spcAft>
-                <a:spcPts val="800"/>
-              </a:spcAft>
-            </a:pPr>
-            <a:r>
-              <a:rPr sz="2200" b="0">
-                <a:solidFill>
-                  <a:srgbClr val="52514E"/>
-                </a:solidFill>
-              </a:rPr>
-              <a:t>Can a modern open pipeline reduce the original Tektronix-detector frames at all?</a:t>
+              <a:t>Phase 2 measured why lamps fail; phase 3 replaced the lamp with the iodine cell.</a:t>
             </a:r>
           </a:p>
         </p:txBody>
@@ -9550,6 +10070,138 @@
       <p:grpSpPr/>
       <p:sp>
         <p:nvSpPr>
+          <p:cNvPr id="2" name="TextBox 1"/>
+          <p:cNvSpPr txBox="1"/>
+          <p:nvPr/>
+        </p:nvSpPr>
+        <p:spPr>
+          <a:xfrm>
+            <a:off x="731520" y="2103120"/>
+            <a:ext cx="10698480" cy="548640"/>
+          </a:xfrm>
+          <a:prstGeom prst="rect">
+            <a:avLst/>
+          </a:prstGeom>
+          <a:noFill/>
+        </p:spPr>
+        <p:txBody>
+          <a:bodyPr wrap="square">
+            <a:spAutoFit/>
+          </a:bodyPr>
+          <a:lstStyle/>
+          <a:p>
+            <a:pPr>
+              <a:spcAft>
+                <a:spcPts val="800"/>
+              </a:spcAft>
+            </a:pPr>
+            <a:r>
+              <a:rPr sz="2200" b="1">
+                <a:solidFill>
+                  <a:srgbClr val="1BAF7A"/>
+                </a:solidFill>
+              </a:rPr>
+              <a:t>Phase 1</a:t>
+            </a:r>
+          </a:p>
+        </p:txBody>
+      </p:sp>
+      <p:sp>
+        <p:nvSpPr>
+          <p:cNvPr id="3" name="TextBox 2"/>
+          <p:cNvSpPr txBox="1"/>
+          <p:nvPr/>
+        </p:nvSpPr>
+        <p:spPr>
+          <a:xfrm>
+            <a:off x="731520" y="2651760"/>
+            <a:ext cx="10698480" cy="1097280"/>
+          </a:xfrm>
+          <a:prstGeom prst="rect">
+            <a:avLst/>
+          </a:prstGeom>
+          <a:noFill/>
+        </p:spPr>
+        <p:txBody>
+          <a:bodyPr wrap="square">
+            <a:spAutoFit/>
+          </a:bodyPr>
+          <a:lstStyle/>
+          <a:p>
+            <a:pPr>
+              <a:spcAft>
+                <a:spcPts val="800"/>
+              </a:spcAft>
+            </a:pPr>
+            <a:r>
+              <a:rPr sz="3800" b="1">
+                <a:solidFill>
+                  <a:srgbClr val="0B0B0B"/>
+                </a:solidFill>
+              </a:rPr>
+              <a:t>PypeIt on the pre-2004 HIRES CCD</a:t>
+            </a:r>
+          </a:p>
+        </p:txBody>
+      </p:sp>
+      <p:sp>
+        <p:nvSpPr>
+          <p:cNvPr id="4" name="TextBox 3"/>
+          <p:cNvSpPr txBox="1"/>
+          <p:nvPr/>
+        </p:nvSpPr>
+        <p:spPr>
+          <a:xfrm>
+            <a:off x="731520" y="3840480"/>
+            <a:ext cx="10515600" cy="1828800"/>
+          </a:xfrm>
+          <a:prstGeom prst="rect">
+            <a:avLst/>
+          </a:prstGeom>
+          <a:noFill/>
+        </p:spPr>
+        <p:txBody>
+          <a:bodyPr wrap="square">
+            <a:spAutoFit/>
+          </a:bodyPr>
+          <a:lstStyle/>
+          <a:p>
+            <a:pPr>
+              <a:spcAft>
+                <a:spcPts val="800"/>
+              </a:spcAft>
+            </a:pPr>
+            <a:r>
+              <a:rPr sz="2200" b="0">
+                <a:solidFill>
+                  <a:srgbClr val="52514E"/>
+                </a:solidFill>
+              </a:rPr>
+              <a:t>Can a modern open pipeline reduce the original Tektronix-detector frames at all?</a:t>
+            </a:r>
+          </a:p>
+        </p:txBody>
+      </p:sp>
+    </p:spTree>
+  </p:cSld>
+  <p:clrMapOvr>
+    <a:masterClrMapping/>
+  </p:clrMapOvr>
+</p:sld>
+</file>
+
+<file path=ppt/slides/slide6.xml><?xml version="1.0" encoding="utf-8"?>
+<p:sld xmlns:a="http://schemas.openxmlformats.org/drawingml/2006/main" xmlns:p="http://schemas.openxmlformats.org/presentationml/2006/main" xmlns:r="http://schemas.openxmlformats.org/officeDocument/2006/relationships">
+  <p:cSld>
+    <p:spTree>
+      <p:nvGrpSpPr>
+        <p:cNvPr id="1" name=""/>
+        <p:cNvGrpSpPr/>
+        <p:nvPr/>
+      </p:nvGrpSpPr>
+      <p:grpSpPr/>
+      <p:sp>
+        <p:nvSpPr>
           <p:cNvPr id="2" name="Rectangle 1"/>
           <p:cNvSpPr/>
           <p:nvPr/>
@@ -9662,7 +10314,7 @@
                   <a:srgbClr val="52514E"/>
                 </a:solidFill>
               </a:rPr>
-              <a:t>5</a:t>
+              <a:t>6</a:t>
             </a:r>
           </a:p>
         </p:txBody>
@@ -10273,218 +10925,6 @@
 </p:sld>
 </file>
 
-<file path=ppt/slides/slide6.xml><?xml version="1.0" encoding="utf-8"?>
-<p:sld xmlns:a="http://schemas.openxmlformats.org/drawingml/2006/main" xmlns:p="http://schemas.openxmlformats.org/presentationml/2006/main" xmlns:r="http://schemas.openxmlformats.org/officeDocument/2006/relationships">
-  <p:cSld>
-    <p:spTree>
-      <p:nvGrpSpPr>
-        <p:cNvPr id="1" name=""/>
-        <p:cNvGrpSpPr/>
-        <p:nvPr/>
-      </p:nvGrpSpPr>
-      <p:grpSpPr/>
-      <p:sp>
-        <p:nvSpPr>
-          <p:cNvPr id="2" name="Rectangle 1"/>
-          <p:cNvSpPr/>
-          <p:nvPr/>
-        </p:nvSpPr>
-        <p:spPr>
-          <a:xfrm>
-            <a:off x="0" y="0"/>
-            <a:ext cx="12191695" cy="82296"/>
-          </a:xfrm>
-          <a:prstGeom prst="rect">
-            <a:avLst/>
-          </a:prstGeom>
-          <a:solidFill>
-            <a:srgbClr val="2A78D6"/>
-          </a:solidFill>
-          <a:ln>
-            <a:noFill/>
-          </a:ln>
-        </p:spPr>
-        <p:style>
-          <a:lnRef idx="1">
-            <a:schemeClr val="accent1"/>
-          </a:lnRef>
-          <a:fillRef idx="3">
-            <a:schemeClr val="accent1"/>
-          </a:fillRef>
-          <a:effectRef idx="2">
-            <a:schemeClr val="accent1"/>
-          </a:effectRef>
-          <a:fontRef idx="minor">
-            <a:schemeClr val="lt1"/>
-          </a:fontRef>
-        </p:style>
-        <p:txBody>
-          <a:bodyPr rtlCol="0" anchor="ctr"/>
-          <a:lstStyle/>
-          <a:p>
-            <a:pPr algn="ctr"/>
-          </a:p>
-        </p:txBody>
-      </p:sp>
-      <p:sp>
-        <p:nvSpPr>
-          <p:cNvPr id="3" name="TextBox 2"/>
-          <p:cNvSpPr txBox="1"/>
-          <p:nvPr/>
-        </p:nvSpPr>
-        <p:spPr>
-          <a:xfrm>
-            <a:off x="502920" y="228600"/>
-            <a:ext cx="10607040" cy="822960"/>
-          </a:xfrm>
-          <a:prstGeom prst="rect">
-            <a:avLst/>
-          </a:prstGeom>
-          <a:noFill/>
-        </p:spPr>
-        <p:txBody>
-          <a:bodyPr wrap="square">
-            <a:spAutoFit/>
-          </a:bodyPr>
-          <a:lstStyle/>
-          <a:p>
-            <a:pPr>
-              <a:spcAft>
-                <a:spcPts val="800"/>
-              </a:spcAft>
-            </a:pPr>
-            <a:r>
-              <a:rPr sz="3000" b="1">
-                <a:solidFill>
-                  <a:srgbClr val="0B0B0B"/>
-                </a:solidFill>
-              </a:rPr>
-              <a:t>37 orders, every one solved below 0.2 px</a:t>
-            </a:r>
-          </a:p>
-        </p:txBody>
-      </p:sp>
-      <p:sp>
-        <p:nvSpPr>
-          <p:cNvPr id="4" name="TextBox 3"/>
-          <p:cNvSpPr txBox="1"/>
-          <p:nvPr/>
-        </p:nvSpPr>
-        <p:spPr>
-          <a:xfrm>
-            <a:off x="10972800" y="274320"/>
-            <a:ext cx="822960" cy="457200"/>
-          </a:xfrm>
-          <a:prstGeom prst="rect">
-            <a:avLst/>
-          </a:prstGeom>
-          <a:noFill/>
-        </p:spPr>
-        <p:txBody>
-          <a:bodyPr wrap="square">
-            <a:spAutoFit/>
-          </a:bodyPr>
-          <a:lstStyle/>
-          <a:p>
-            <a:pPr algn="r">
-              <a:spcAft>
-                <a:spcPts val="800"/>
-              </a:spcAft>
-            </a:pPr>
-            <a:r>
-              <a:rPr sz="2000" b="0">
-                <a:solidFill>
-                  <a:srgbClr val="52514E"/>
-                </a:solidFill>
-              </a:rPr>
-              <a:t>6</a:t>
-            </a:r>
-          </a:p>
-        </p:txBody>
-      </p:sp>
-      <p:pic>
-        <p:nvPicPr>
-          <p:cNvPr id="5" name="Picture 4" descr="fig_p1_wavecal.png"/>
-          <p:cNvPicPr>
-            <a:picLocks noChangeAspect="1"/>
-          </p:cNvPicPr>
-          <p:nvPr/>
-        </p:nvPicPr>
-        <p:blipFill>
-          <a:blip r:embed="rId2"/>
-          <a:stretch>
-            <a:fillRect/>
-          </a:stretch>
-        </p:blipFill>
-        <p:spPr>
-          <a:xfrm>
-            <a:off x="365760" y="1361429"/>
-            <a:ext cx="11457432" cy="4089421"/>
-          </a:xfrm>
-          <a:prstGeom prst="rect">
-            <a:avLst/>
-          </a:prstGeom>
-        </p:spPr>
-      </p:pic>
-      <p:sp>
-        <p:nvSpPr>
-          <p:cNvPr id="6" name="Rectangle 5"/>
-          <p:cNvSpPr/>
-          <p:nvPr/>
-        </p:nvSpPr>
-        <p:spPr>
-          <a:xfrm>
-            <a:off x="365760" y="5806440"/>
-            <a:ext cx="11457432" cy="914400"/>
-          </a:xfrm>
-          <a:prstGeom prst="rect">
-            <a:avLst/>
-          </a:prstGeom>
-          <a:solidFill>
-            <a:srgbClr val="EEF4FC"/>
-          </a:solidFill>
-          <a:ln>
-            <a:noFill/>
-          </a:ln>
-        </p:spPr>
-        <p:style>
-          <a:lnRef idx="1">
-            <a:schemeClr val="accent1"/>
-          </a:lnRef>
-          <a:fillRef idx="3">
-            <a:schemeClr val="accent1"/>
-          </a:fillRef>
-          <a:effectRef idx="2">
-            <a:schemeClr val="accent1"/>
-          </a:effectRef>
-          <a:fontRef idx="minor">
-            <a:schemeClr val="lt1"/>
-          </a:fontRef>
-        </p:style>
-        <p:txBody>
-          <a:bodyPr rtlCol="0" anchor="ctr" wrap="square"/>
-          <a:lstStyle/>
-          <a:p>
-            <a:pPr algn="ctr"/>
-            <a:r>
-              <a:rPr sz="2000" b="1">
-                <a:solidFill>
-                  <a:srgbClr val="0B0B0B"/>
-                </a:solidFill>
-              </a:rPr>
-              <a:t>July 1998: 10 of 10 frames, 37 orders each; wavecal RMS medians 0.115–0.127 px.</a:t>
-            </a:r>
-          </a:p>
-        </p:txBody>
-      </p:sp>
-    </p:spTree>
-  </p:cSld>
-  <p:clrMapOvr>
-    <a:masterClrMapping/>
-  </p:clrMapOvr>
-</p:sld>
-</file>
-
 <file path=ppt/slides/slide7.xml><?xml version="1.0" encoding="utf-8"?>
 <p:sld xmlns:a="http://schemas.openxmlformats.org/drawingml/2006/main" xmlns:p="http://schemas.openxmlformats.org/presentationml/2006/main" xmlns:r="http://schemas.openxmlformats.org/officeDocument/2006/relationships">
   <p:cSld>
@@ -10571,7 +11011,7 @@
                   <a:srgbClr val="0B0B0B"/>
                 </a:solidFill>
               </a:rPr>
-              <a:t>The traced orders and the flat</a:t>
+              <a:t>37 orders, every one solved below 0.2 px</a:t>
             </a:r>
           </a:p>
         </p:txBody>
@@ -10616,7 +11056,7 @@
       </p:sp>
       <p:pic>
         <p:nvPicPr>
-          <p:cNvPr id="5" name="Picture 4" descr="fig_p1_orders.png"/>
+          <p:cNvPr id="5" name="Picture 4" descr="fig_p1_wavecal.png"/>
           <p:cNvPicPr>
             <a:picLocks noChangeAspect="1"/>
           </p:cNvPicPr>
@@ -10630,8 +11070,8 @@
         </p:blipFill>
         <p:spPr>
           <a:xfrm>
-            <a:off x="365760" y="1366450"/>
-            <a:ext cx="11457432" cy="4079380"/>
+            <a:off x="365760" y="1361429"/>
+            <a:ext cx="11457432" cy="4089421"/>
           </a:xfrm>
           <a:prstGeom prst="rect">
             <a:avLst/>
@@ -10684,7 +11124,7 @@
                   <a:srgbClr val="0B0B0B"/>
                 </a:solidFill>
               </a:rPr>
-              <a:t>The inherited find_trim_edge = 3,3 would mask 6 of ~10 pixels per order.</a:t>
+              <a:t>July 1998: 10 of 10 frames, 37 orders each; wavecal RMS medians 0.115–0.127 px.</a:t>
             </a:r>
           </a:p>
         </p:txBody>
@@ -10709,14 +11149,57 @@
       <p:grpSpPr/>
       <p:sp>
         <p:nvSpPr>
-          <p:cNvPr id="2" name="TextBox 1"/>
+          <p:cNvPr id="2" name="Rectangle 1"/>
+          <p:cNvSpPr/>
+          <p:nvPr/>
+        </p:nvSpPr>
+        <p:spPr>
+          <a:xfrm>
+            <a:off x="0" y="0"/>
+            <a:ext cx="12191695" cy="82296"/>
+          </a:xfrm>
+          <a:prstGeom prst="rect">
+            <a:avLst/>
+          </a:prstGeom>
+          <a:solidFill>
+            <a:srgbClr val="2A78D6"/>
+          </a:solidFill>
+          <a:ln>
+            <a:noFill/>
+          </a:ln>
+        </p:spPr>
+        <p:style>
+          <a:lnRef idx="1">
+            <a:schemeClr val="accent1"/>
+          </a:lnRef>
+          <a:fillRef idx="3">
+            <a:schemeClr val="accent1"/>
+          </a:fillRef>
+          <a:effectRef idx="2">
+            <a:schemeClr val="accent1"/>
+          </a:effectRef>
+          <a:fontRef idx="minor">
+            <a:schemeClr val="lt1"/>
+          </a:fontRef>
+        </p:style>
+        <p:txBody>
+          <a:bodyPr rtlCol="0" anchor="ctr"/>
+          <a:lstStyle/>
+          <a:p>
+            <a:pPr algn="ctr"/>
+          </a:p>
+        </p:txBody>
+      </p:sp>
+      <p:sp>
+        <p:nvSpPr>
+          <p:cNvPr id="3" name="TextBox 2"/>
           <p:cNvSpPr txBox="1"/>
           <p:nvPr/>
         </p:nvSpPr>
         <p:spPr>
           <a:xfrm>
-            <a:off x="731520" y="2103120"/>
-            <a:ext cx="10698480" cy="548640"/>
+            <a:off x="502920" y="228600"/>
+            <a:ext cx="10607040" cy="822960"/>
           </a:xfrm>
           <a:prstGeom prst="rect">
             <a:avLst/>
@@ -10735,26 +11218,26 @@
               </a:spcAft>
             </a:pPr>
             <a:r>
-              <a:rPr sz="2200" b="1">
-                <a:solidFill>
-                  <a:srgbClr val="8A8A86"/>
-                </a:solidFill>
-              </a:rPr>
-              <a:t>Phase 2</a:t>
-            </a:r>
-          </a:p>
-        </p:txBody>
-      </p:sp>
-      <p:sp>
-        <p:nvSpPr>
-          <p:cNvPr id="3" name="TextBox 2"/>
+              <a:rPr sz="3000" b="1">
+                <a:solidFill>
+                  <a:srgbClr val="0B0B0B"/>
+                </a:solidFill>
+              </a:rPr>
+              <a:t>The traced orders and the flat</a:t>
+            </a:r>
+          </a:p>
+        </p:txBody>
+      </p:sp>
+      <p:sp>
+        <p:nvSpPr>
+          <p:cNvPr id="4" name="TextBox 3"/>
           <p:cNvSpPr txBox="1"/>
           <p:nvPr/>
         </p:nvSpPr>
         <p:spPr>
           <a:xfrm>
-            <a:off x="731520" y="2651760"/>
-            <a:ext cx="10698480" cy="1097280"/>
+            <a:off x="10972800" y="274320"/>
+            <a:ext cx="822960" cy="457200"/>
           </a:xfrm>
           <a:prstGeom prst="rect">
             <a:avLst/>
@@ -10767,56 +11250,93 @@
           </a:bodyPr>
           <a:lstStyle/>
           <a:p>
-            <a:pPr>
+            <a:pPr algn="r">
               <a:spcAft>
                 <a:spcPts val="800"/>
               </a:spcAft>
             </a:pPr>
             <a:r>
-              <a:rPr sz="3800" b="1">
+              <a:rPr sz="2000" b="0">
+                <a:solidFill>
+                  <a:srgbClr val="52514E"/>
+                </a:solidFill>
+              </a:rPr>
+              <a:t>8</a:t>
+            </a:r>
+          </a:p>
+        </p:txBody>
+      </p:sp>
+      <p:pic>
+        <p:nvPicPr>
+          <p:cNvPr id="5" name="Picture 4" descr="fig_p1_orders.png"/>
+          <p:cNvPicPr>
+            <a:picLocks noChangeAspect="1"/>
+          </p:cNvPicPr>
+          <p:nvPr/>
+        </p:nvPicPr>
+        <p:blipFill>
+          <a:blip r:embed="rId2"/>
+          <a:stretch>
+            <a:fillRect/>
+          </a:stretch>
+        </p:blipFill>
+        <p:spPr>
+          <a:xfrm>
+            <a:off x="365760" y="1366450"/>
+            <a:ext cx="11457432" cy="4079380"/>
+          </a:xfrm>
+          <a:prstGeom prst="rect">
+            <a:avLst/>
+          </a:prstGeom>
+        </p:spPr>
+      </p:pic>
+      <p:sp>
+        <p:nvSpPr>
+          <p:cNvPr id="6" name="Rectangle 5"/>
+          <p:cNvSpPr/>
+          <p:nvPr/>
+        </p:nvSpPr>
+        <p:spPr>
+          <a:xfrm>
+            <a:off x="365760" y="5806440"/>
+            <a:ext cx="11457432" cy="914400"/>
+          </a:xfrm>
+          <a:prstGeom prst="rect">
+            <a:avLst/>
+          </a:prstGeom>
+          <a:solidFill>
+            <a:srgbClr val="EEF4FC"/>
+          </a:solidFill>
+          <a:ln>
+            <a:noFill/>
+          </a:ln>
+        </p:spPr>
+        <p:style>
+          <a:lnRef idx="1">
+            <a:schemeClr val="accent1"/>
+          </a:lnRef>
+          <a:fillRef idx="3">
+            <a:schemeClr val="accent1"/>
+          </a:fillRef>
+          <a:effectRef idx="2">
+            <a:schemeClr val="accent1"/>
+          </a:effectRef>
+          <a:fontRef idx="minor">
+            <a:schemeClr val="lt1"/>
+          </a:fontRef>
+        </p:style>
+        <p:txBody>
+          <a:bodyPr rtlCol="0" anchor="ctr" wrap="square"/>
+          <a:lstStyle/>
+          <a:p>
+            <a:pPr algn="ctr"/>
+            <a:r>
+              <a:rPr sz="2000" b="1">
                 <a:solidFill>
                   <a:srgbClr val="0B0B0B"/>
                 </a:solidFill>
               </a:rPr>
-              <a:t>Twenty nights, and velocities from a lamp</a:t>
-            </a:r>
-          </a:p>
-        </p:txBody>
-      </p:sp>
-      <p:sp>
-        <p:nvSpPr>
-          <p:cNvPr id="4" name="TextBox 3"/>
-          <p:cNvSpPr txBox="1"/>
-          <p:nvPr/>
-        </p:nvSpPr>
-        <p:spPr>
-          <a:xfrm>
-            <a:off x="731520" y="3840480"/>
-            <a:ext cx="10515600" cy="1828800"/>
-          </a:xfrm>
-          <a:prstGeom prst="rect">
-            <a:avLst/>
-          </a:prstGeom>
-          <a:noFill/>
-        </p:spPr>
-        <p:txBody>
-          <a:bodyPr wrap="square">
-            <a:spAutoFit/>
-          </a:bodyPr>
-          <a:lstStyle/>
-          <a:p>
-            <a:pPr>
-              <a:spcAft>
-                <a:spcPts val="800"/>
-              </a:spcAft>
-            </a:pPr>
-            <a:r>
-              <a:rPr sz="2200" b="0">
-                <a:solidFill>
-                  <a:srgbClr val="52514E"/>
-                </a:solidFill>
-              </a:rPr>
-              <a:t>The whole discovery era reduced; velocities by cross-correlation; the inputs phase 3 needs.</a:t>
+              <a:t>The inherited find_trim_edge = 3,3 would mask 6 of ~10 pixels per order.</a:t>
             </a:r>
           </a:p>
         </p:txBody>
@@ -10841,57 +11361,14 @@
       <p:grpSpPr/>
       <p:sp>
         <p:nvSpPr>
-          <p:cNvPr id="2" name="Rectangle 1"/>
-          <p:cNvSpPr/>
-          <p:nvPr/>
-        </p:nvSpPr>
-        <p:spPr>
-          <a:xfrm>
-            <a:off x="0" y="0"/>
-            <a:ext cx="12191695" cy="82296"/>
-          </a:xfrm>
-          <a:prstGeom prst="rect">
-            <a:avLst/>
-          </a:prstGeom>
-          <a:solidFill>
-            <a:srgbClr val="2A78D6"/>
-          </a:solidFill>
-          <a:ln>
-            <a:noFill/>
-          </a:ln>
-        </p:spPr>
-        <p:style>
-          <a:lnRef idx="1">
-            <a:schemeClr val="accent1"/>
-          </a:lnRef>
-          <a:fillRef idx="3">
-            <a:schemeClr val="accent1"/>
-          </a:fillRef>
-          <a:effectRef idx="2">
-            <a:schemeClr val="accent1"/>
-          </a:effectRef>
-          <a:fontRef idx="minor">
-            <a:schemeClr val="lt1"/>
-          </a:fontRef>
-        </p:style>
-        <p:txBody>
-          <a:bodyPr rtlCol="0" anchor="ctr"/>
-          <a:lstStyle/>
-          <a:p>
-            <a:pPr algn="ctr"/>
-          </a:p>
-        </p:txBody>
-      </p:sp>
-      <p:sp>
-        <p:nvSpPr>
-          <p:cNvPr id="3" name="TextBox 2"/>
+          <p:cNvPr id="2" name="TextBox 1"/>
           <p:cNvSpPr txBox="1"/>
           <p:nvPr/>
         </p:nvSpPr>
         <p:spPr>
           <a:xfrm>
-            <a:off x="502920" y="228600"/>
-            <a:ext cx="10607040" cy="822960"/>
+            <a:off x="731520" y="2103120"/>
+            <a:ext cx="10698480" cy="548640"/>
           </a:xfrm>
           <a:prstGeom prst="rect">
             <a:avLst/>
@@ -10910,64 +11387,26 @@
               </a:spcAft>
             </a:pPr>
             <a:r>
-              <a:rPr sz="3000" b="1">
-                <a:solidFill>
-                  <a:srgbClr val="0B0B0B"/>
-                </a:solidFill>
-              </a:rPr>
-              <a:t>What phase 2 built</a:t>
-            </a:r>
-          </a:p>
-        </p:txBody>
-      </p:sp>
-      <p:sp>
-        <p:nvSpPr>
-          <p:cNvPr id="4" name="TextBox 3"/>
+              <a:rPr sz="2200" b="1">
+                <a:solidFill>
+                  <a:srgbClr val="8A8A86"/>
+                </a:solidFill>
+              </a:rPr>
+              <a:t>Phase 2</a:t>
+            </a:r>
+          </a:p>
+        </p:txBody>
+      </p:sp>
+      <p:sp>
+        <p:nvSpPr>
+          <p:cNvPr id="3" name="TextBox 2"/>
           <p:cNvSpPr txBox="1"/>
           <p:nvPr/>
         </p:nvSpPr>
         <p:spPr>
           <a:xfrm>
-            <a:off x="10972800" y="274320"/>
-            <a:ext cx="822960" cy="457200"/>
-          </a:xfrm>
-          <a:prstGeom prst="rect">
-            <a:avLst/>
-          </a:prstGeom>
-          <a:noFill/>
-        </p:spPr>
-        <p:txBody>
-          <a:bodyPr wrap="square">
-            <a:spAutoFit/>
-          </a:bodyPr>
-          <a:lstStyle/>
-          <a:p>
-            <a:pPr algn="r">
-              <a:spcAft>
-                <a:spcPts val="800"/>
-              </a:spcAft>
-            </a:pPr>
-            <a:r>
-              <a:rPr sz="2000" b="0">
-                <a:solidFill>
-                  <a:srgbClr val="52514E"/>
-                </a:solidFill>
-              </a:rPr>
-              <a:t>9</a:t>
-            </a:r>
-          </a:p>
-        </p:txBody>
-      </p:sp>
-      <p:sp>
-        <p:nvSpPr>
-          <p:cNvPr id="5" name="TextBox 4"/>
-          <p:cNvSpPr txBox="1"/>
-          <p:nvPr/>
-        </p:nvSpPr>
-        <p:spPr>
-          <a:xfrm>
-            <a:off x="640080" y="1188720"/>
-            <a:ext cx="10972800" cy="4526280"/>
+            <a:off x="731520" y="2651760"/>
+            <a:ext cx="10698480" cy="1097280"/>
           </a:xfrm>
           <a:prstGeom prst="rect">
             <a:avLst/>
@@ -10986,14 +11425,37 @@
               </a:spcAft>
             </a:pPr>
             <a:r>
-              <a:rPr sz="2200" b="0">
+              <a:rPr sz="3800" b="1">
                 <a:solidFill>
                   <a:srgbClr val="0B0B0B"/>
                 </a:solidFill>
               </a:rPr>
-              <a:t>• 20 nights, 36 frames, 37 orders; wavecal RMS 0.11–0.15 px</a:t>
-            </a:r>
-          </a:p>
+              <a:t>Twenty nights, and velocities from a lamp</a:t>
+            </a:r>
+          </a:p>
+        </p:txBody>
+      </p:sp>
+      <p:sp>
+        <p:nvSpPr>
+          <p:cNvPr id="4" name="TextBox 3"/>
+          <p:cNvSpPr txBox="1"/>
+          <p:nvPr/>
+        </p:nvSpPr>
+        <p:spPr>
+          <a:xfrm>
+            <a:off x="731520" y="3840480"/>
+            <a:ext cx="10515600" cy="1828800"/>
+          </a:xfrm>
+          <a:prstGeom prst="rect">
+            <a:avLst/>
+          </a:prstGeom>
+          <a:noFill/>
+        </p:spPr>
+        <p:txBody>
+          <a:bodyPr wrap="square">
+            <a:spAutoFit/>
+          </a:bodyPr>
+          <a:lstStyle/>
           <a:p>
             <a:pPr>
               <a:spcAft>
@@ -11003,106 +11465,10 @@
             <a:r>
               <a:rPr sz="2200" b="0">
                 <a:solidFill>
-                  <a:srgbClr val="0B0B0B"/>
-                </a:solidFill>
-              </a:rPr>
-              <a:t>• Quality filter: 1329 order-spectra, 11.3% rejected</a:t>
-            </a:r>
-          </a:p>
-          <a:p>
-            <a:pPr>
-              <a:spcAft>
-                <a:spcPts val="800"/>
-              </a:spcAft>
-            </a:pPr>
-            <a:r>
-              <a:rPr sz="2200" b="0">
-                <a:solidFill>
-                  <a:srgbClr val="0B0B0B"/>
-                </a:solidFill>
-              </a:rPr>
-              <a:t>• Template: three cell-out exposures, S/N ~790 per pixel</a:t>
-            </a:r>
-          </a:p>
-          <a:p>
-            <a:pPr>
-              <a:spcAft>
-                <a:spcPts val="800"/>
-              </a:spcAft>
-            </a:pPr>
-            <a:r>
-              <a:rPr sz="2200" b="0">
-                <a:solidFill>
-                  <a:srgbClr val="0B0B0B"/>
-                </a:solidFill>
-              </a:rPr>
-              <a:t>• Atlas: Fischer 2022 FTS; positions match (r = 0.928), depths need α = 2.59</a:t>
-            </a:r>
-          </a:p>
-          <a:p>
-            <a:pPr>
-              <a:spcAft>
-                <a:spcPts val="800"/>
-              </a:spcAft>
-            </a:pPr>
-            <a:r>
-              <a:rPr sz="2200" b="0">
-                <a:solidFill>
-                  <a:srgbClr val="0B0B0B"/>
-                </a:solidFill>
-              </a:rPr>
-              <a:t>• Adapter: observed frame, JD(UTC) mid-exposure, BVC in m/s</a:t>
-            </a:r>
-          </a:p>
-        </p:txBody>
-      </p:sp>
-      <p:sp>
-        <p:nvSpPr>
-          <p:cNvPr id="6" name="Rectangle 5"/>
-          <p:cNvSpPr/>
-          <p:nvPr/>
-        </p:nvSpPr>
-        <p:spPr>
-          <a:xfrm>
-            <a:off x="365760" y="5806440"/>
-            <a:ext cx="11457432" cy="914400"/>
-          </a:xfrm>
-          <a:prstGeom prst="rect">
-            <a:avLst/>
-          </a:prstGeom>
-          <a:solidFill>
-            <a:srgbClr val="EEF4FC"/>
-          </a:solidFill>
-          <a:ln>
-            <a:noFill/>
-          </a:ln>
-        </p:spPr>
-        <p:style>
-          <a:lnRef idx="1">
-            <a:schemeClr val="accent1"/>
-          </a:lnRef>
-          <a:fillRef idx="3">
-            <a:schemeClr val="accent1"/>
-          </a:fillRef>
-          <a:effectRef idx="2">
-            <a:schemeClr val="accent1"/>
-          </a:effectRef>
-          <a:fontRef idx="minor">
-            <a:schemeClr val="lt1"/>
-          </a:fontRef>
-        </p:style>
-        <p:txBody>
-          <a:bodyPr rtlCol="0" anchor="ctr" wrap="square"/>
-          <a:lstStyle/>
-          <a:p>
-            <a:pPr algn="ctr"/>
-            <a:r>
-              <a:rPr sz="2000" b="1">
-                <a:solidFill>
-                  <a:srgbClr val="0B0B0B"/>
-                </a:solidFill>
-              </a:rPr>
-              <a:t>Plus refframe_audit.py: two PypeIt core/wave.py bugs (next slide).</a:t>
+                  <a:srgbClr val="52514E"/>
+                </a:solidFill>
+              </a:rPr>
+              <a:t>The whole discovery era reduced; velocities by cross-correlation; the inputs phase 3 needs.</a:t>
             </a:r>
           </a:p>
         </p:txBody>
